--- a/assets/slides/po1/big-m.pptx
+++ b/assets/slides/po1/big-m.pptx
@@ -5,11 +5,11 @@
     <p:sldMasterId id="2147483648" r:id="rId1"/>
   </p:sldMasterIdLst>
   <p:notesMasterIdLst>
-    <p:notesMasterId r:id="rId19"/>
+    <p:notesMasterId r:id="rId14"/>
   </p:notesMasterIdLst>
   <p:sldIdLst>
-    <p:sldId id="258" r:id="rId2"/>
-    <p:sldId id="263" r:id="rId3"/>
+    <p:sldId id="260" r:id="rId2"/>
+    <p:sldId id="262" r:id="rId3"/>
     <p:sldId id="264" r:id="rId4"/>
     <p:sldId id="265" r:id="rId5"/>
     <p:sldId id="266" r:id="rId6"/>
@@ -19,12 +19,7 @@
     <p:sldId id="270" r:id="rId10"/>
     <p:sldId id="271" r:id="rId11"/>
     <p:sldId id="272" r:id="rId12"/>
-    <p:sldId id="279" r:id="rId13"/>
-    <p:sldId id="274" r:id="rId14"/>
-    <p:sldId id="275" r:id="rId15"/>
-    <p:sldId id="276" r:id="rId16"/>
-    <p:sldId id="277" r:id="rId17"/>
-    <p:sldId id="278" r:id="rId18"/>
+    <p:sldId id="273" r:id="rId13"/>
   </p:sldIdLst>
   <p:sldSz cx="12192000" cy="6858000"/>
   <p:notesSz cx="6858000" cy="9144000"/>
@@ -123,6 +118,11 @@
       </a:defRPr>
     </a:lvl9pPr>
   </p:defaultTextStyle>
+  <p:extLst>
+    <p:ext uri="{EFAFB233-063F-42B5-8137-9DF3F51BA10A}">
+      <p15:sldGuideLst xmlns:p15="http://schemas.microsoft.com/office/powerpoint/2012/main" xmlns=""/>
+    </p:ext>
+  </p:extLst>
 </p:presentation>
 </file>
 
@@ -132,601 +132,6 @@
     <p1510:client id="{8F42B15A-BFF1-49CB-B80A-61E7BA1D2F3C}" v="60" dt="2025-11-11T11:49:15.795"/>
   </p1510:revLst>
 </p1510:revInfo>
-</file>
-
-<file path=ppt/changesInfos/changesInfo1.xml><?xml version="1.0" encoding="utf-8"?>
-<pc:chgInfo xmlns:a="http://schemas.openxmlformats.org/drawingml/2006/main" xmlns:r="http://schemas.openxmlformats.org/officeDocument/2006/relationships" xmlns:ac="http://schemas.microsoft.com/office/drawing/2013/main/command" xmlns:pc="http://schemas.microsoft.com/office/powerpoint/2013/main/command">
-  <pc:docChgLst>
-    <pc:chgData name="Ana Carolina Nel" userId="e2dd38cb2819479d" providerId="LiveId" clId="{55AF0FD5-A84B-4077-AF3F-BF4C4552CF6F}"/>
-    <pc:docChg chg="undo redo custSel addSld delSld modSld">
-      <pc:chgData name="Ana Carolina Nel" userId="e2dd38cb2819479d" providerId="LiveId" clId="{55AF0FD5-A84B-4077-AF3F-BF4C4552CF6F}" dt="2025-11-11T11:49:38.901" v="434" actId="1076"/>
-      <pc:docMkLst>
-        <pc:docMk/>
-      </pc:docMkLst>
-      <pc:sldChg chg="modSp mod">
-        <pc:chgData name="Ana Carolina Nel" userId="e2dd38cb2819479d" providerId="LiveId" clId="{55AF0FD5-A84B-4077-AF3F-BF4C4552CF6F}" dt="2025-11-11T11:24:14.661" v="28" actId="20577"/>
-        <pc:sldMkLst>
-          <pc:docMk/>
-          <pc:sldMk cId="0" sldId="258"/>
-        </pc:sldMkLst>
-        <pc:spChg chg="mod">
-          <ac:chgData name="Ana Carolina Nel" userId="e2dd38cb2819479d" providerId="LiveId" clId="{55AF0FD5-A84B-4077-AF3F-BF4C4552CF6F}" dt="2025-11-11T11:23:07.761" v="11" actId="20577"/>
-          <ac:spMkLst>
-            <pc:docMk/>
-            <pc:sldMk cId="0" sldId="258"/>
-            <ac:spMk id="5" creationId="{00000000-0000-0000-0000-000000000000}"/>
-          </ac:spMkLst>
-        </pc:spChg>
-        <pc:spChg chg="mod">
-          <ac:chgData name="Ana Carolina Nel" userId="e2dd38cb2819479d" providerId="LiveId" clId="{55AF0FD5-A84B-4077-AF3F-BF4C4552CF6F}" dt="2025-11-11T11:24:14.661" v="28" actId="20577"/>
-          <ac:spMkLst>
-            <pc:docMk/>
-            <pc:sldMk cId="0" sldId="258"/>
-            <ac:spMk id="7" creationId="{00000000-0000-0000-0000-000000000000}"/>
-          </ac:spMkLst>
-        </pc:spChg>
-      </pc:sldChg>
-      <pc:sldChg chg="modSp mod">
-        <pc:chgData name="Ana Carolina Nel" userId="e2dd38cb2819479d" providerId="LiveId" clId="{55AF0FD5-A84B-4077-AF3F-BF4C4552CF6F}" dt="2025-11-11T11:27:29.211" v="51" actId="20577"/>
-        <pc:sldMkLst>
-          <pc:docMk/>
-          <pc:sldMk cId="1127859694" sldId="263"/>
-        </pc:sldMkLst>
-        <pc:spChg chg="mod">
-          <ac:chgData name="Ana Carolina Nel" userId="e2dd38cb2819479d" providerId="LiveId" clId="{55AF0FD5-A84B-4077-AF3F-BF4C4552CF6F}" dt="2025-11-11T11:24:31.630" v="31"/>
-          <ac:spMkLst>
-            <pc:docMk/>
-            <pc:sldMk cId="1127859694" sldId="263"/>
-            <ac:spMk id="5" creationId="{065B48BF-ACFD-0ED2-63E9-41F0E8528360}"/>
-          </ac:spMkLst>
-        </pc:spChg>
-        <pc:spChg chg="mod">
-          <ac:chgData name="Ana Carolina Nel" userId="e2dd38cb2819479d" providerId="LiveId" clId="{55AF0FD5-A84B-4077-AF3F-BF4C4552CF6F}" dt="2025-11-11T11:27:29.211" v="51" actId="20577"/>
-          <ac:spMkLst>
-            <pc:docMk/>
-            <pc:sldMk cId="1127859694" sldId="263"/>
-            <ac:spMk id="6" creationId="{65E6C220-6360-CBD2-1DA8-ECC999380D85}"/>
-          </ac:spMkLst>
-        </pc:spChg>
-        <pc:picChg chg="mod modCrop">
-          <ac:chgData name="Ana Carolina Nel" userId="e2dd38cb2819479d" providerId="LiveId" clId="{55AF0FD5-A84B-4077-AF3F-BF4C4552CF6F}" dt="2025-11-11T11:25:47.331" v="43" actId="34135"/>
-          <ac:picMkLst>
-            <pc:docMk/>
-            <pc:sldMk cId="1127859694" sldId="263"/>
-            <ac:picMk id="10" creationId="{C81D0A23-83F4-88EC-272D-0208AC03835F}"/>
-          </ac:picMkLst>
-        </pc:picChg>
-      </pc:sldChg>
-      <pc:sldChg chg="modSp add mod">
-        <pc:chgData name="Ana Carolina Nel" userId="e2dd38cb2819479d" providerId="LiveId" clId="{55AF0FD5-A84B-4077-AF3F-BF4C4552CF6F}" dt="2025-11-11T11:30:01.496" v="73" actId="12"/>
-        <pc:sldMkLst>
-          <pc:docMk/>
-          <pc:sldMk cId="1489193259" sldId="264"/>
-        </pc:sldMkLst>
-        <pc:spChg chg="mod">
-          <ac:chgData name="Ana Carolina Nel" userId="e2dd38cb2819479d" providerId="LiveId" clId="{55AF0FD5-A84B-4077-AF3F-BF4C4552CF6F}" dt="2025-11-11T11:30:01.496" v="73" actId="12"/>
-          <ac:spMkLst>
-            <pc:docMk/>
-            <pc:sldMk cId="1489193259" sldId="264"/>
-            <ac:spMk id="6" creationId="{FF6E22C4-3F07-0482-1222-38840905F00D}"/>
-          </ac:spMkLst>
-        </pc:spChg>
-      </pc:sldChg>
-      <pc:sldChg chg="addSp delSp modSp add mod">
-        <pc:chgData name="Ana Carolina Nel" userId="e2dd38cb2819479d" providerId="LiveId" clId="{55AF0FD5-A84B-4077-AF3F-BF4C4552CF6F}" dt="2025-11-11T11:29:53.601" v="72" actId="12"/>
-        <pc:sldMkLst>
-          <pc:docMk/>
-          <pc:sldMk cId="2097736016" sldId="265"/>
-        </pc:sldMkLst>
-        <pc:spChg chg="add del">
-          <ac:chgData name="Ana Carolina Nel" userId="e2dd38cb2819479d" providerId="LiveId" clId="{55AF0FD5-A84B-4077-AF3F-BF4C4552CF6F}" dt="2025-11-11T11:29:21.266" v="67" actId="22"/>
-          <ac:spMkLst>
-            <pc:docMk/>
-            <pc:sldMk cId="2097736016" sldId="265"/>
-            <ac:spMk id="3" creationId="{238E6734-BAFC-D6B3-FC54-46E90E9B9E62}"/>
-          </ac:spMkLst>
-        </pc:spChg>
-        <pc:spChg chg="mod">
-          <ac:chgData name="Ana Carolina Nel" userId="e2dd38cb2819479d" providerId="LiveId" clId="{55AF0FD5-A84B-4077-AF3F-BF4C4552CF6F}" dt="2025-11-11T11:28:46.001" v="62"/>
-          <ac:spMkLst>
-            <pc:docMk/>
-            <pc:sldMk cId="2097736016" sldId="265"/>
-            <ac:spMk id="5" creationId="{BE30FEA0-BD92-6D62-74E2-53632CD5400F}"/>
-          </ac:spMkLst>
-        </pc:spChg>
-        <pc:spChg chg="mod">
-          <ac:chgData name="Ana Carolina Nel" userId="e2dd38cb2819479d" providerId="LiveId" clId="{55AF0FD5-A84B-4077-AF3F-BF4C4552CF6F}" dt="2025-11-11T11:29:53.601" v="72" actId="12"/>
-          <ac:spMkLst>
-            <pc:docMk/>
-            <pc:sldMk cId="2097736016" sldId="265"/>
-            <ac:spMk id="6" creationId="{557A1E96-9C4C-6143-5601-71D2CC54CD79}"/>
-          </ac:spMkLst>
-        </pc:spChg>
-      </pc:sldChg>
-      <pc:sldChg chg="modSp add mod">
-        <pc:chgData name="Ana Carolina Nel" userId="e2dd38cb2819479d" providerId="LiveId" clId="{55AF0FD5-A84B-4077-AF3F-BF4C4552CF6F}" dt="2025-11-11T11:29:47.001" v="70" actId="1076"/>
-        <pc:sldMkLst>
-          <pc:docMk/>
-          <pc:sldMk cId="4111582774" sldId="266"/>
-        </pc:sldMkLst>
-        <pc:spChg chg="mod">
-          <ac:chgData name="Ana Carolina Nel" userId="e2dd38cb2819479d" providerId="LiveId" clId="{55AF0FD5-A84B-4077-AF3F-BF4C4552CF6F}" dt="2025-11-11T11:29:47.001" v="70" actId="1076"/>
-          <ac:spMkLst>
-            <pc:docMk/>
-            <pc:sldMk cId="4111582774" sldId="266"/>
-            <ac:spMk id="6" creationId="{DEA55B8C-A207-A9A7-A926-0F4EE2F4CAB0}"/>
-          </ac:spMkLst>
-        </pc:spChg>
-      </pc:sldChg>
-      <pc:sldChg chg="addSp delSp modSp add mod">
-        <pc:chgData name="Ana Carolina Nel" userId="e2dd38cb2819479d" providerId="LiveId" clId="{55AF0FD5-A84B-4077-AF3F-BF4C4552CF6F}" dt="2025-11-11T11:32:15.471" v="114" actId="1076"/>
-        <pc:sldMkLst>
-          <pc:docMk/>
-          <pc:sldMk cId="1891485882" sldId="267"/>
-        </pc:sldMkLst>
-        <pc:spChg chg="add del">
-          <ac:chgData name="Ana Carolina Nel" userId="e2dd38cb2819479d" providerId="LiveId" clId="{55AF0FD5-A84B-4077-AF3F-BF4C4552CF6F}" dt="2025-11-11T11:31:40.991" v="109" actId="478"/>
-          <ac:spMkLst>
-            <pc:docMk/>
-            <pc:sldMk cId="1891485882" sldId="267"/>
-            <ac:spMk id="2" creationId="{A54D42BD-8549-1A08-5F3C-7A08AB83504C}"/>
-          </ac:spMkLst>
-        </pc:spChg>
-        <pc:spChg chg="add mod">
-          <ac:chgData name="Ana Carolina Nel" userId="e2dd38cb2819479d" providerId="LiveId" clId="{55AF0FD5-A84B-4077-AF3F-BF4C4552CF6F}" dt="2025-11-11T11:32:15.471" v="114" actId="1076"/>
-          <ac:spMkLst>
-            <pc:docMk/>
-            <pc:sldMk cId="1891485882" sldId="267"/>
-            <ac:spMk id="3" creationId="{DD12F0D3-D299-16A0-A1E4-612BFF9A740E}"/>
-          </ac:spMkLst>
-        </pc:spChg>
-        <pc:spChg chg="mod">
-          <ac:chgData name="Ana Carolina Nel" userId="e2dd38cb2819479d" providerId="LiveId" clId="{55AF0FD5-A84B-4077-AF3F-BF4C4552CF6F}" dt="2025-11-11T11:30:52.410" v="105" actId="20577"/>
-          <ac:spMkLst>
-            <pc:docMk/>
-            <pc:sldMk cId="1891485882" sldId="267"/>
-            <ac:spMk id="5" creationId="{82C2CB9B-E2F1-A919-4486-1C0AF323C841}"/>
-          </ac:spMkLst>
-        </pc:spChg>
-        <pc:spChg chg="mod">
-          <ac:chgData name="Ana Carolina Nel" userId="e2dd38cb2819479d" providerId="LiveId" clId="{55AF0FD5-A84B-4077-AF3F-BF4C4552CF6F}" dt="2025-11-11T11:31:04.901" v="107" actId="1076"/>
-          <ac:spMkLst>
-            <pc:docMk/>
-            <pc:sldMk cId="1891485882" sldId="267"/>
-            <ac:spMk id="6" creationId="{FF88C779-33F1-7D3D-6B18-6A1C5B725B2E}"/>
-          </ac:spMkLst>
-        </pc:spChg>
-      </pc:sldChg>
-      <pc:sldChg chg="addSp delSp modSp add mod">
-        <pc:chgData name="Ana Carolina Nel" userId="e2dd38cb2819479d" providerId="LiveId" clId="{55AF0FD5-A84B-4077-AF3F-BF4C4552CF6F}" dt="2025-11-11T11:47:09.320" v="418" actId="113"/>
-        <pc:sldMkLst>
-          <pc:docMk/>
-          <pc:sldMk cId="1325374803" sldId="268"/>
-        </pc:sldMkLst>
-        <pc:spChg chg="add mod">
-          <ac:chgData name="Ana Carolina Nel" userId="e2dd38cb2819479d" providerId="LiveId" clId="{55AF0FD5-A84B-4077-AF3F-BF4C4552CF6F}" dt="2025-11-11T11:34:22.161" v="170" actId="122"/>
-          <ac:spMkLst>
-            <pc:docMk/>
-            <pc:sldMk cId="1325374803" sldId="268"/>
-            <ac:spMk id="2" creationId="{B344D13D-BE0D-9C72-0C87-F63C1A68CD77}"/>
-          </ac:spMkLst>
-        </pc:spChg>
-        <pc:spChg chg="del">
-          <ac:chgData name="Ana Carolina Nel" userId="e2dd38cb2819479d" providerId="LiveId" clId="{55AF0FD5-A84B-4077-AF3F-BF4C4552CF6F}" dt="2025-11-11T11:33:08.391" v="127" actId="478"/>
-          <ac:spMkLst>
-            <pc:docMk/>
-            <pc:sldMk cId="1325374803" sldId="268"/>
-            <ac:spMk id="3" creationId="{FC406654-C210-84B2-9C50-4F5BD5AF8300}"/>
-          </ac:spMkLst>
-        </pc:spChg>
-        <pc:spChg chg="add mod">
-          <ac:chgData name="Ana Carolina Nel" userId="e2dd38cb2819479d" providerId="LiveId" clId="{55AF0FD5-A84B-4077-AF3F-BF4C4552CF6F}" dt="2025-11-11T11:34:41.681" v="172"/>
-          <ac:spMkLst>
-            <pc:docMk/>
-            <pc:sldMk cId="1325374803" sldId="268"/>
-            <ac:spMk id="4" creationId="{21D8A088-E67D-C82E-6BDC-DEA4BCB48E39}"/>
-          </ac:spMkLst>
-        </pc:spChg>
-        <pc:spChg chg="mod">
-          <ac:chgData name="Ana Carolina Nel" userId="e2dd38cb2819479d" providerId="LiveId" clId="{55AF0FD5-A84B-4077-AF3F-BF4C4552CF6F}" dt="2025-11-11T11:32:38.641" v="122" actId="20577"/>
-          <ac:spMkLst>
-            <pc:docMk/>
-            <pc:sldMk cId="1325374803" sldId="268"/>
-            <ac:spMk id="5" creationId="{A1120B44-31B5-2F07-6728-755C54D70113}"/>
-          </ac:spMkLst>
-        </pc:spChg>
-        <pc:spChg chg="mod">
-          <ac:chgData name="Ana Carolina Nel" userId="e2dd38cb2819479d" providerId="LiveId" clId="{55AF0FD5-A84B-4077-AF3F-BF4C4552CF6F}" dt="2025-11-11T11:47:09.320" v="418" actId="113"/>
-          <ac:spMkLst>
-            <pc:docMk/>
-            <pc:sldMk cId="1325374803" sldId="268"/>
-            <ac:spMk id="6" creationId="{51184DCB-0F04-BCFF-8D8F-6C70C2CA0130}"/>
-          </ac:spMkLst>
-        </pc:spChg>
-      </pc:sldChg>
-      <pc:sldChg chg="add del">
-        <pc:chgData name="Ana Carolina Nel" userId="e2dd38cb2819479d" providerId="LiveId" clId="{55AF0FD5-A84B-4077-AF3F-BF4C4552CF6F}" dt="2025-11-11T11:33:04.181" v="126" actId="47"/>
-        <pc:sldMkLst>
-          <pc:docMk/>
-          <pc:sldMk cId="568197465" sldId="269"/>
-        </pc:sldMkLst>
-      </pc:sldChg>
-      <pc:sldChg chg="addSp modSp add mod">
-        <pc:chgData name="Ana Carolina Nel" userId="e2dd38cb2819479d" providerId="LiveId" clId="{55AF0FD5-A84B-4077-AF3F-BF4C4552CF6F}" dt="2025-11-11T11:47:05.661" v="417" actId="113"/>
-        <pc:sldMkLst>
-          <pc:docMk/>
-          <pc:sldMk cId="3823989042" sldId="269"/>
-        </pc:sldMkLst>
-        <pc:spChg chg="mod">
-          <ac:chgData name="Ana Carolina Nel" userId="e2dd38cb2819479d" providerId="LiveId" clId="{55AF0FD5-A84B-4077-AF3F-BF4C4552CF6F}" dt="2025-11-11T11:36:08.251" v="181" actId="1076"/>
-          <ac:spMkLst>
-            <pc:docMk/>
-            <pc:sldMk cId="3823989042" sldId="269"/>
-            <ac:spMk id="2" creationId="{0D3C0425-44F8-FA13-BDAD-DC9455E19B65}"/>
-          </ac:spMkLst>
-        </pc:spChg>
-        <pc:spChg chg="add mod">
-          <ac:chgData name="Ana Carolina Nel" userId="e2dd38cb2819479d" providerId="LiveId" clId="{55AF0FD5-A84B-4077-AF3F-BF4C4552CF6F}" dt="2025-11-11T11:47:05.661" v="417" actId="113"/>
-          <ac:spMkLst>
-            <pc:docMk/>
-            <pc:sldMk cId="3823989042" sldId="269"/>
-            <ac:spMk id="3" creationId="{A65BFB2C-D845-201C-955C-0A9B33BDDAFA}"/>
-          </ac:spMkLst>
-        </pc:spChg>
-        <pc:spChg chg="add mod">
-          <ac:chgData name="Ana Carolina Nel" userId="e2dd38cb2819479d" providerId="LiveId" clId="{55AF0FD5-A84B-4077-AF3F-BF4C4552CF6F}" dt="2025-11-11T11:36:21.031" v="183" actId="14100"/>
-          <ac:spMkLst>
-            <pc:docMk/>
-            <pc:sldMk cId="3823989042" sldId="269"/>
-            <ac:spMk id="4" creationId="{BEBE6C14-49EB-63CF-D0E5-23DB147D55D7}"/>
-          </ac:spMkLst>
-        </pc:spChg>
-        <pc:spChg chg="mod">
-          <ac:chgData name="Ana Carolina Nel" userId="e2dd38cb2819479d" providerId="LiveId" clId="{55AF0FD5-A84B-4077-AF3F-BF4C4552CF6F}" dt="2025-11-11T11:47:03.441" v="416" actId="113"/>
-          <ac:spMkLst>
-            <pc:docMk/>
-            <pc:sldMk cId="3823989042" sldId="269"/>
-            <ac:spMk id="6" creationId="{CB4CB2AF-4BE7-968B-FFD6-F4B8CE3A0D86}"/>
-          </ac:spMkLst>
-        </pc:spChg>
-      </pc:sldChg>
-      <pc:sldChg chg="addSp delSp modSp add mod">
-        <pc:chgData name="Ana Carolina Nel" userId="e2dd38cb2819479d" providerId="LiveId" clId="{55AF0FD5-A84B-4077-AF3F-BF4C4552CF6F}" dt="2025-11-11T11:46:59.421" v="415" actId="113"/>
-        <pc:sldMkLst>
-          <pc:docMk/>
-          <pc:sldMk cId="3144661463" sldId="270"/>
-        </pc:sldMkLst>
-        <pc:spChg chg="del">
-          <ac:chgData name="Ana Carolina Nel" userId="e2dd38cb2819479d" providerId="LiveId" clId="{55AF0FD5-A84B-4077-AF3F-BF4C4552CF6F}" dt="2025-11-11T11:37:21.901" v="221" actId="478"/>
-          <ac:spMkLst>
-            <pc:docMk/>
-            <pc:sldMk cId="3144661463" sldId="270"/>
-            <ac:spMk id="2" creationId="{0EDD0978-6710-643D-E53C-764CCBA3054F}"/>
-          </ac:spMkLst>
-        </pc:spChg>
-        <pc:spChg chg="mod">
-          <ac:chgData name="Ana Carolina Nel" userId="e2dd38cb2819479d" providerId="LiveId" clId="{55AF0FD5-A84B-4077-AF3F-BF4C4552CF6F}" dt="2025-11-11T11:46:59.421" v="415" actId="113"/>
-          <ac:spMkLst>
-            <pc:docMk/>
-            <pc:sldMk cId="3144661463" sldId="270"/>
-            <ac:spMk id="3" creationId="{ABEB9EE9-F3D2-1228-7434-DBCAEDFC756B}"/>
-          </ac:spMkLst>
-        </pc:spChg>
-        <pc:spChg chg="mod">
-          <ac:chgData name="Ana Carolina Nel" userId="e2dd38cb2819479d" providerId="LiveId" clId="{55AF0FD5-A84B-4077-AF3F-BF4C4552CF6F}" dt="2025-11-11T11:37:31.971" v="222" actId="1076"/>
-          <ac:spMkLst>
-            <pc:docMk/>
-            <pc:sldMk cId="3144661463" sldId="270"/>
-            <ac:spMk id="4" creationId="{8610F2F2-987A-F2D7-A499-8C0841479831}"/>
-          </ac:spMkLst>
-        </pc:spChg>
-        <pc:spChg chg="mod">
-          <ac:chgData name="Ana Carolina Nel" userId="e2dd38cb2819479d" providerId="LiveId" clId="{55AF0FD5-A84B-4077-AF3F-BF4C4552CF6F}" dt="2025-11-11T11:46:56.691" v="414" actId="113"/>
-          <ac:spMkLst>
-            <pc:docMk/>
-            <pc:sldMk cId="3144661463" sldId="270"/>
-            <ac:spMk id="6" creationId="{754A28DD-8682-3536-6DC5-360BABB80E46}"/>
-          </ac:spMkLst>
-        </pc:spChg>
-        <pc:spChg chg="add mod">
-          <ac:chgData name="Ana Carolina Nel" userId="e2dd38cb2819479d" providerId="LiveId" clId="{55AF0FD5-A84B-4077-AF3F-BF4C4552CF6F}" dt="2025-11-11T11:38:14.073" v="231" actId="122"/>
-          <ac:spMkLst>
-            <pc:docMk/>
-            <pc:sldMk cId="3144661463" sldId="270"/>
-            <ac:spMk id="7" creationId="{F95FA275-C7B6-2875-6507-5E41F7E04288}"/>
-          </ac:spMkLst>
-        </pc:spChg>
-      </pc:sldChg>
-      <pc:sldChg chg="addSp delSp modSp add mod">
-        <pc:chgData name="Ana Carolina Nel" userId="e2dd38cb2819479d" providerId="LiveId" clId="{55AF0FD5-A84B-4077-AF3F-BF4C4552CF6F}" dt="2025-11-11T11:46:52.241" v="413" actId="113"/>
-        <pc:sldMkLst>
-          <pc:docMk/>
-          <pc:sldMk cId="722533223" sldId="271"/>
-        </pc:sldMkLst>
-        <pc:spChg chg="add mod">
-          <ac:chgData name="Ana Carolina Nel" userId="e2dd38cb2819479d" providerId="LiveId" clId="{55AF0FD5-A84B-4077-AF3F-BF4C4552CF6F}" dt="2025-11-11T11:39:53.931" v="272" actId="122"/>
-          <ac:spMkLst>
-            <pc:docMk/>
-            <pc:sldMk cId="722533223" sldId="271"/>
-            <ac:spMk id="2" creationId="{2985C3D6-1104-C8E9-8B49-DD943BCBC4D5}"/>
-          </ac:spMkLst>
-        </pc:spChg>
-        <pc:spChg chg="mod">
-          <ac:chgData name="Ana Carolina Nel" userId="e2dd38cb2819479d" providerId="LiveId" clId="{55AF0FD5-A84B-4077-AF3F-BF4C4552CF6F}" dt="2025-11-11T11:46:52.241" v="413" actId="113"/>
-          <ac:spMkLst>
-            <pc:docMk/>
-            <pc:sldMk cId="722533223" sldId="271"/>
-            <ac:spMk id="3" creationId="{23E2A6C2-2808-3036-823C-8BF5237B4667}"/>
-          </ac:spMkLst>
-        </pc:spChg>
-        <pc:spChg chg="del">
-          <ac:chgData name="Ana Carolina Nel" userId="e2dd38cb2819479d" providerId="LiveId" clId="{55AF0FD5-A84B-4077-AF3F-BF4C4552CF6F}" dt="2025-11-11T11:38:45.210" v="250" actId="478"/>
-          <ac:spMkLst>
-            <pc:docMk/>
-            <pc:sldMk cId="722533223" sldId="271"/>
-            <ac:spMk id="4" creationId="{04DDA5ED-291B-3E1C-8842-BD3DCB794B01}"/>
-          </ac:spMkLst>
-        </pc:spChg>
-        <pc:spChg chg="mod">
-          <ac:chgData name="Ana Carolina Nel" userId="e2dd38cb2819479d" providerId="LiveId" clId="{55AF0FD5-A84B-4077-AF3F-BF4C4552CF6F}" dt="2025-11-11T11:46:50.471" v="412" actId="113"/>
-          <ac:spMkLst>
-            <pc:docMk/>
-            <pc:sldMk cId="722533223" sldId="271"/>
-            <ac:spMk id="6" creationId="{A0737E92-B83E-D67A-F764-45D9EA846EDA}"/>
-          </ac:spMkLst>
-        </pc:spChg>
-        <pc:spChg chg="mod">
-          <ac:chgData name="Ana Carolina Nel" userId="e2dd38cb2819479d" providerId="LiveId" clId="{55AF0FD5-A84B-4077-AF3F-BF4C4552CF6F}" dt="2025-11-11T11:39:13.051" v="265" actId="14100"/>
-          <ac:spMkLst>
-            <pc:docMk/>
-            <pc:sldMk cId="722533223" sldId="271"/>
-            <ac:spMk id="7" creationId="{8ACC9CC0-BAEC-C439-11F0-3957E47AFB79}"/>
-          </ac:spMkLst>
-        </pc:spChg>
-      </pc:sldChg>
-      <pc:sldChg chg="addSp delSp modSp add mod">
-        <pc:chgData name="Ana Carolina Nel" userId="e2dd38cb2819479d" providerId="LiveId" clId="{55AF0FD5-A84B-4077-AF3F-BF4C4552CF6F}" dt="2025-11-11T11:43:09.241" v="326" actId="207"/>
-        <pc:sldMkLst>
-          <pc:docMk/>
-          <pc:sldMk cId="2803674190" sldId="272"/>
-        </pc:sldMkLst>
-        <pc:spChg chg="del">
-          <ac:chgData name="Ana Carolina Nel" userId="e2dd38cb2819479d" providerId="LiveId" clId="{55AF0FD5-A84B-4077-AF3F-BF4C4552CF6F}" dt="2025-11-11T11:40:40.871" v="307" actId="478"/>
-          <ac:spMkLst>
-            <pc:docMk/>
-            <pc:sldMk cId="2803674190" sldId="272"/>
-            <ac:spMk id="2" creationId="{4B4F7F9C-B465-4260-D145-6A18F649710F}"/>
-          </ac:spMkLst>
-        </pc:spChg>
-        <pc:spChg chg="del">
-          <ac:chgData name="Ana Carolina Nel" userId="e2dd38cb2819479d" providerId="LiveId" clId="{55AF0FD5-A84B-4077-AF3F-BF4C4552CF6F}" dt="2025-11-11T11:40:46.801" v="308" actId="478"/>
-          <ac:spMkLst>
-            <pc:docMk/>
-            <pc:sldMk cId="2803674190" sldId="272"/>
-            <ac:spMk id="3" creationId="{9D89B651-052A-119A-5B5C-23E62FD5CB98}"/>
-          </ac:spMkLst>
-        </pc:spChg>
-        <pc:spChg chg="mod">
-          <ac:chgData name="Ana Carolina Nel" userId="e2dd38cb2819479d" providerId="LiveId" clId="{55AF0FD5-A84B-4077-AF3F-BF4C4552CF6F}" dt="2025-11-11T11:40:29.961" v="304" actId="20577"/>
-          <ac:spMkLst>
-            <pc:docMk/>
-            <pc:sldMk cId="2803674190" sldId="272"/>
-            <ac:spMk id="5" creationId="{11D7A5C1-F90B-C26F-2283-E8B48751D61F}"/>
-          </ac:spMkLst>
-        </pc:spChg>
-        <pc:spChg chg="del">
-          <ac:chgData name="Ana Carolina Nel" userId="e2dd38cb2819479d" providerId="LiveId" clId="{55AF0FD5-A84B-4077-AF3F-BF4C4552CF6F}" dt="2025-11-11T11:40:52.291" v="311" actId="478"/>
-          <ac:spMkLst>
-            <pc:docMk/>
-            <pc:sldMk cId="2803674190" sldId="272"/>
-            <ac:spMk id="6" creationId="{593D9168-9D5C-E463-F94A-A2ED637CE980}"/>
-          </ac:spMkLst>
-        </pc:spChg>
-        <pc:spChg chg="del mod">
-          <ac:chgData name="Ana Carolina Nel" userId="e2dd38cb2819479d" providerId="LiveId" clId="{55AF0FD5-A84B-4077-AF3F-BF4C4552CF6F}" dt="2025-11-11T11:40:37.271" v="306" actId="478"/>
-          <ac:spMkLst>
-            <pc:docMk/>
-            <pc:sldMk cId="2803674190" sldId="272"/>
-            <ac:spMk id="7" creationId="{464D7446-19AC-57BC-B6E7-4321C87DE1A6}"/>
-          </ac:spMkLst>
-        </pc:spChg>
-        <pc:graphicFrameChg chg="add mod ord modGraphic">
-          <ac:chgData name="Ana Carolina Nel" userId="e2dd38cb2819479d" providerId="LiveId" clId="{55AF0FD5-A84B-4077-AF3F-BF4C4552CF6F}" dt="2025-11-11T11:43:09.241" v="326" actId="207"/>
-          <ac:graphicFrameMkLst>
-            <pc:docMk/>
-            <pc:sldMk cId="2803674190" sldId="272"/>
-            <ac:graphicFrameMk id="4" creationId="{2D217515-1ED1-3CAD-19E2-FAE3F31349D0}"/>
-          </ac:graphicFrameMkLst>
-        </pc:graphicFrameChg>
-        <pc:picChg chg="add del">
-          <ac:chgData name="Ana Carolina Nel" userId="e2dd38cb2819479d" providerId="LiveId" clId="{55AF0FD5-A84B-4077-AF3F-BF4C4552CF6F}" dt="2025-11-11T11:40:49.761" v="310" actId="478"/>
-          <ac:picMkLst>
-            <pc:docMk/>
-            <pc:sldMk cId="2803674190" sldId="272"/>
-            <ac:picMk id="10" creationId="{B372BAE3-CB09-D6CB-A87A-3462222237C5}"/>
-          </ac:picMkLst>
-        </pc:picChg>
-      </pc:sldChg>
-      <pc:sldChg chg="modSp add mod">
-        <pc:chgData name="Ana Carolina Nel" userId="e2dd38cb2819479d" providerId="LiveId" clId="{55AF0FD5-A84B-4077-AF3F-BF4C4552CF6F}" dt="2025-11-11T11:43:53.111" v="345" actId="20577"/>
-        <pc:sldMkLst>
-          <pc:docMk/>
-          <pc:sldMk cId="3392426254" sldId="273"/>
-        </pc:sldMkLst>
-        <pc:spChg chg="mod">
-          <ac:chgData name="Ana Carolina Nel" userId="e2dd38cb2819479d" providerId="LiveId" clId="{55AF0FD5-A84B-4077-AF3F-BF4C4552CF6F}" dt="2025-11-11T11:43:34.241" v="343" actId="20577"/>
-          <ac:spMkLst>
-            <pc:docMk/>
-            <pc:sldMk cId="3392426254" sldId="273"/>
-            <ac:spMk id="5" creationId="{652880B8-D42E-E827-74AE-6B4F0B4CE326}"/>
-          </ac:spMkLst>
-        </pc:spChg>
-        <pc:spChg chg="mod">
-          <ac:chgData name="Ana Carolina Nel" userId="e2dd38cb2819479d" providerId="LiveId" clId="{55AF0FD5-A84B-4077-AF3F-BF4C4552CF6F}" dt="2025-11-11T11:43:53.111" v="345" actId="20577"/>
-          <ac:spMkLst>
-            <pc:docMk/>
-            <pc:sldMk cId="3392426254" sldId="273"/>
-            <ac:spMk id="6" creationId="{C35DB645-24CF-151B-FDC7-AC3D98DE6568}"/>
-          </ac:spMkLst>
-        </pc:spChg>
-      </pc:sldChg>
-      <pc:sldChg chg="modSp add">
-        <pc:chgData name="Ana Carolina Nel" userId="e2dd38cb2819479d" providerId="LiveId" clId="{55AF0FD5-A84B-4077-AF3F-BF4C4552CF6F}" dt="2025-11-11T11:44:03.296" v="347"/>
-        <pc:sldMkLst>
-          <pc:docMk/>
-          <pc:sldMk cId="2540054745" sldId="274"/>
-        </pc:sldMkLst>
-        <pc:spChg chg="mod">
-          <ac:chgData name="Ana Carolina Nel" userId="e2dd38cb2819479d" providerId="LiveId" clId="{55AF0FD5-A84B-4077-AF3F-BF4C4552CF6F}" dt="2025-11-11T11:44:03.296" v="347"/>
-          <ac:spMkLst>
-            <pc:docMk/>
-            <pc:sldMk cId="2540054745" sldId="274"/>
-            <ac:spMk id="6" creationId="{A87D3614-0271-7685-3F67-42033586158D}"/>
-          </ac:spMkLst>
-        </pc:spChg>
-      </pc:sldChg>
-      <pc:sldChg chg="modSp add mod">
-        <pc:chgData name="Ana Carolina Nel" userId="e2dd38cb2819479d" providerId="LiveId" clId="{55AF0FD5-A84B-4077-AF3F-BF4C4552CF6F}" dt="2025-11-11T11:44:57.941" v="365"/>
-        <pc:sldMkLst>
-          <pc:docMk/>
-          <pc:sldMk cId="1976601031" sldId="275"/>
-        </pc:sldMkLst>
-        <pc:spChg chg="mod">
-          <ac:chgData name="Ana Carolina Nel" userId="e2dd38cb2819479d" providerId="LiveId" clId="{55AF0FD5-A84B-4077-AF3F-BF4C4552CF6F}" dt="2025-11-11T11:44:50.511" v="364" actId="14100"/>
-          <ac:spMkLst>
-            <pc:docMk/>
-            <pc:sldMk cId="1976601031" sldId="275"/>
-            <ac:spMk id="5" creationId="{D8E48D38-9C9B-187C-89DC-F8FC43D6C9F3}"/>
-          </ac:spMkLst>
-        </pc:spChg>
-        <pc:spChg chg="mod">
-          <ac:chgData name="Ana Carolina Nel" userId="e2dd38cb2819479d" providerId="LiveId" clId="{55AF0FD5-A84B-4077-AF3F-BF4C4552CF6F}" dt="2025-11-11T11:44:57.941" v="365"/>
-          <ac:spMkLst>
-            <pc:docMk/>
-            <pc:sldMk cId="1976601031" sldId="275"/>
-            <ac:spMk id="6" creationId="{9F23468E-FFC2-B0DA-2C7B-B07620A76A72}"/>
-          </ac:spMkLst>
-        </pc:spChg>
-      </pc:sldChg>
-      <pc:sldChg chg="modSp add mod">
-        <pc:chgData name="Ana Carolina Nel" userId="e2dd38cb2819479d" providerId="LiveId" clId="{55AF0FD5-A84B-4077-AF3F-BF4C4552CF6F}" dt="2025-11-11T11:45:39.441" v="373" actId="113"/>
-        <pc:sldMkLst>
-          <pc:docMk/>
-          <pc:sldMk cId="1973092745" sldId="276"/>
-        </pc:sldMkLst>
-        <pc:spChg chg="mod">
-          <ac:chgData name="Ana Carolina Nel" userId="e2dd38cb2819479d" providerId="LiveId" clId="{55AF0FD5-A84B-4077-AF3F-BF4C4552CF6F}" dt="2025-11-11T11:45:39.441" v="373" actId="113"/>
-          <ac:spMkLst>
-            <pc:docMk/>
-            <pc:sldMk cId="1973092745" sldId="276"/>
-            <ac:spMk id="6" creationId="{8CDC9C99-D895-5D36-B3BF-EDD659293FE3}"/>
-          </ac:spMkLst>
-        </pc:spChg>
-      </pc:sldChg>
-      <pc:sldChg chg="addSp delSp modSp add mod">
-        <pc:chgData name="Ana Carolina Nel" userId="e2dd38cb2819479d" providerId="LiveId" clId="{55AF0FD5-A84B-4077-AF3F-BF4C4552CF6F}" dt="2025-11-11T11:46:46.631" v="411" actId="113"/>
-        <pc:sldMkLst>
-          <pc:docMk/>
-          <pc:sldMk cId="1161616990" sldId="277"/>
-        </pc:sldMkLst>
-        <pc:spChg chg="del mod">
-          <ac:chgData name="Ana Carolina Nel" userId="e2dd38cb2819479d" providerId="LiveId" clId="{55AF0FD5-A84B-4077-AF3F-BF4C4552CF6F}" dt="2025-11-11T11:46:15.551" v="399" actId="478"/>
-          <ac:spMkLst>
-            <pc:docMk/>
-            <pc:sldMk cId="1161616990" sldId="277"/>
-            <ac:spMk id="2" creationId="{43D95A0C-0E25-B963-A935-2BD22D13508B}"/>
-          </ac:spMkLst>
-        </pc:spChg>
-        <pc:spChg chg="del">
-          <ac:chgData name="Ana Carolina Nel" userId="e2dd38cb2819479d" providerId="LiveId" clId="{55AF0FD5-A84B-4077-AF3F-BF4C4552CF6F}" dt="2025-11-11T11:46:18.611" v="400" actId="478"/>
-          <ac:spMkLst>
-            <pc:docMk/>
-            <pc:sldMk cId="1161616990" sldId="277"/>
-            <ac:spMk id="3" creationId="{B2363E1A-1B25-D483-C7F9-F480DA918FC8}"/>
-          </ac:spMkLst>
-        </pc:spChg>
-        <pc:spChg chg="add mod">
-          <ac:chgData name="Ana Carolina Nel" userId="e2dd38cb2819479d" providerId="LiveId" clId="{55AF0FD5-A84B-4077-AF3F-BF4C4552CF6F}" dt="2025-11-11T11:46:38.031" v="404" actId="1076"/>
-          <ac:spMkLst>
-            <pc:docMk/>
-            <pc:sldMk cId="1161616990" sldId="277"/>
-            <ac:spMk id="4" creationId="{41D614E5-5473-7B5F-C7D6-580C2D9A59BB}"/>
-          </ac:spMkLst>
-        </pc:spChg>
-        <pc:spChg chg="mod">
-          <ac:chgData name="Ana Carolina Nel" userId="e2dd38cb2819479d" providerId="LiveId" clId="{55AF0FD5-A84B-4077-AF3F-BF4C4552CF6F}" dt="2025-11-11T11:46:11.116" v="397" actId="20577"/>
-          <ac:spMkLst>
-            <pc:docMk/>
-            <pc:sldMk cId="1161616990" sldId="277"/>
-            <ac:spMk id="5" creationId="{215CA055-5CD2-7B40-F5E2-CE53C24162D7}"/>
-          </ac:spMkLst>
-        </pc:spChg>
-        <pc:spChg chg="mod">
-          <ac:chgData name="Ana Carolina Nel" userId="e2dd38cb2819479d" providerId="LiveId" clId="{55AF0FD5-A84B-4077-AF3F-BF4C4552CF6F}" dt="2025-11-11T11:46:46.631" v="411" actId="113"/>
-          <ac:spMkLst>
-            <pc:docMk/>
-            <pc:sldMk cId="1161616990" sldId="277"/>
-            <ac:spMk id="6" creationId="{D78F98D6-BF6B-F62D-F8EF-26C85EF6F500}"/>
-          </ac:spMkLst>
-        </pc:spChg>
-        <pc:spChg chg="del mod">
-          <ac:chgData name="Ana Carolina Nel" userId="e2dd38cb2819479d" providerId="LiveId" clId="{55AF0FD5-A84B-4077-AF3F-BF4C4552CF6F}" dt="2025-11-11T11:46:23.271" v="402" actId="478"/>
-          <ac:spMkLst>
-            <pc:docMk/>
-            <pc:sldMk cId="1161616990" sldId="277"/>
-            <ac:spMk id="7" creationId="{F4955C6D-3024-CA71-E287-917D7301A5FD}"/>
-          </ac:spMkLst>
-        </pc:spChg>
-      </pc:sldChg>
-      <pc:sldChg chg="addSp modSp add mod">
-        <pc:chgData name="Ana Carolina Nel" userId="e2dd38cb2819479d" providerId="LiveId" clId="{55AF0FD5-A84B-4077-AF3F-BF4C4552CF6F}" dt="2025-11-11T11:49:38.901" v="434" actId="1076"/>
-        <pc:sldMkLst>
-          <pc:docMk/>
-          <pc:sldMk cId="2919734156" sldId="278"/>
-        </pc:sldMkLst>
-        <pc:spChg chg="add mod">
-          <ac:chgData name="Ana Carolina Nel" userId="e2dd38cb2819479d" providerId="LiveId" clId="{55AF0FD5-A84B-4077-AF3F-BF4C4552CF6F}" dt="2025-11-11T11:49:38.901" v="434" actId="1076"/>
-          <ac:spMkLst>
-            <pc:docMk/>
-            <pc:sldMk cId="2919734156" sldId="278"/>
-            <ac:spMk id="2" creationId="{0E36A709-18CC-D2B6-4660-1D928E13114D}"/>
-          </ac:spMkLst>
-        </pc:spChg>
-        <pc:spChg chg="add mod">
-          <ac:chgData name="Ana Carolina Nel" userId="e2dd38cb2819479d" providerId="LiveId" clId="{55AF0FD5-A84B-4077-AF3F-BF4C4552CF6F}" dt="2025-11-11T11:49:38.901" v="434" actId="1076"/>
-          <ac:spMkLst>
-            <pc:docMk/>
-            <pc:sldMk cId="2919734156" sldId="278"/>
-            <ac:spMk id="3" creationId="{B3B82331-5D06-F8E9-20BA-760A0A86340B}"/>
-          </ac:spMkLst>
-        </pc:spChg>
-        <pc:spChg chg="mod">
-          <ac:chgData name="Ana Carolina Nel" userId="e2dd38cb2819479d" providerId="LiveId" clId="{55AF0FD5-A84B-4077-AF3F-BF4C4552CF6F}" dt="2025-11-11T11:49:38.901" v="434" actId="1076"/>
-          <ac:spMkLst>
-            <pc:docMk/>
-            <pc:sldMk cId="2919734156" sldId="278"/>
-            <ac:spMk id="4" creationId="{A4689797-B0A2-837F-5561-865DC8EFF115}"/>
-          </ac:spMkLst>
-        </pc:spChg>
-        <pc:spChg chg="mod">
-          <ac:chgData name="Ana Carolina Nel" userId="e2dd38cb2819479d" providerId="LiveId" clId="{55AF0FD5-A84B-4077-AF3F-BF4C4552CF6F}" dt="2025-11-11T11:49:38.901" v="434" actId="1076"/>
-          <ac:spMkLst>
-            <pc:docMk/>
-            <pc:sldMk cId="2919734156" sldId="278"/>
-            <ac:spMk id="6" creationId="{655A35A7-3578-AB11-8E66-4D9A44A36D5E}"/>
-          </ac:spMkLst>
-        </pc:spChg>
-      </pc:sldChg>
-      <pc:sldChg chg="add del">
-        <pc:chgData name="Ana Carolina Nel" userId="e2dd38cb2819479d" providerId="LiveId" clId="{55AF0FD5-A84B-4077-AF3F-BF4C4552CF6F}" dt="2025-11-11T11:47:48.501" v="421"/>
-        <pc:sldMkLst>
-          <pc:docMk/>
-          <pc:sldMk cId="4245806152" sldId="279"/>
-        </pc:sldMkLst>
-      </pc:sldChg>
-    </pc:docChg>
-  </pc:docChgLst>
-</pc:chgInfo>
 </file>
 
 <file path=ppt/notesMasters/notesMaster1.xml><?xml version="1.0" encoding="utf-8"?>
@@ -811,7 +216,7 @@
           <a:p>
             <a:fld id="{B2F3681D-9899-4F2D-B954-7498EB5051B2}" type="datetimeFigureOut">
               <a:rPr lang="pt-BR" smtClean="0"/>
-              <a:t>19/11/2025</a:t>
+              <a:t>19/05/2026</a:t>
             </a:fld>
             <a:endParaRPr lang="pt-BR"/>
           </a:p>
@@ -1079,306 +484,6 @@
 </p:notesMaster>
 </file>
 
-<file path=ppt/notesSlides/notesSlide1.xml><?xml version="1.0" encoding="utf-8"?>
-<p:notes xmlns:a="http://schemas.openxmlformats.org/drawingml/2006/main" xmlns:r="http://schemas.openxmlformats.org/officeDocument/2006/relationships" xmlns:p="http://schemas.openxmlformats.org/presentationml/2006/main">
-  <p:cSld>
-    <p:spTree>
-      <p:nvGrpSpPr>
-        <p:cNvPr id="1" name=""/>
-        <p:cNvGrpSpPr/>
-        <p:nvPr/>
-      </p:nvGrpSpPr>
-      <p:grpSpPr>
-        <a:xfrm>
-          <a:off x="0" y="0"/>
-          <a:ext cx="0" cy="0"/>
-          <a:chOff x="0" y="0"/>
-          <a:chExt cx="0" cy="0"/>
-        </a:xfrm>
-      </p:grpSpPr>
-      <p:sp>
-        <p:nvSpPr>
-          <p:cNvPr id="2" name="Slide Image Placeholder 1"/>
-          <p:cNvSpPr>
-            <a:spLocks noGrp="1" noRot="1" noChangeAspect="1"/>
-          </p:cNvSpPr>
-          <p:nvPr>
-            <p:ph type="sldImg"/>
-          </p:nvPr>
-        </p:nvSpPr>
-        <p:spPr/>
-      </p:sp>
-      <p:sp>
-        <p:nvSpPr>
-          <p:cNvPr id="3" name="Notes Placeholder 2"/>
-          <p:cNvSpPr>
-            <a:spLocks noGrp="1"/>
-          </p:cNvSpPr>
-          <p:nvPr>
-            <p:ph type="body" idx="1"/>
-          </p:nvPr>
-        </p:nvSpPr>
-        <p:spPr/>
-        <p:txBody>
-          <a:bodyPr/>
-          <a:lstStyle/>
-          <a:p>
-            <a:endParaRPr lang="pt-BR" dirty="0"/>
-          </a:p>
-        </p:txBody>
-      </p:sp>
-      <p:sp>
-        <p:nvSpPr>
-          <p:cNvPr id="4" name="Slide Number Placeholder 3"/>
-          <p:cNvSpPr>
-            <a:spLocks noGrp="1"/>
-          </p:cNvSpPr>
-          <p:nvPr>
-            <p:ph type="sldNum" sz="quarter" idx="5"/>
-          </p:nvPr>
-        </p:nvSpPr>
-        <p:spPr/>
-        <p:txBody>
-          <a:bodyPr/>
-          <a:lstStyle/>
-          <a:p>
-            <a:fld id="{52B6F824-8703-49D2-9D87-1D6145B4F4B7}" type="slidenum">
-              <a:rPr lang="pt-BR" smtClean="0"/>
-              <a:t>13</a:t>
-            </a:fld>
-            <a:endParaRPr lang="pt-BR"/>
-          </a:p>
-        </p:txBody>
-      </p:sp>
-    </p:spTree>
-    <p:extLst>
-      <p:ext uri="{BB962C8B-B14F-4D97-AF65-F5344CB8AC3E}">
-        <p14:creationId xmlns:p14="http://schemas.microsoft.com/office/powerpoint/2010/main" val="1538511824"/>
-      </p:ext>
-    </p:extLst>
-  </p:cSld>
-  <p:clrMapOvr>
-    <a:masterClrMapping/>
-  </p:clrMapOvr>
-</p:notes>
-</file>
-
-<file path=ppt/notesSlides/notesSlide2.xml><?xml version="1.0" encoding="utf-8"?>
-<p:notes xmlns:a="http://schemas.openxmlformats.org/drawingml/2006/main" xmlns:r="http://schemas.openxmlformats.org/officeDocument/2006/relationships" xmlns:p="http://schemas.openxmlformats.org/presentationml/2006/main">
-  <p:cSld>
-    <p:spTree>
-      <p:nvGrpSpPr>
-        <p:cNvPr id="1" name="">
-          <a:extLst>
-            <a:ext uri="{FF2B5EF4-FFF2-40B4-BE49-F238E27FC236}">
-              <a16:creationId xmlns:a16="http://schemas.microsoft.com/office/drawing/2014/main" xmlns="" id="{B0E39E78-6A39-7C5F-111A-F936224BD00E}"/>
-            </a:ext>
-          </a:extLst>
-        </p:cNvPr>
-        <p:cNvGrpSpPr/>
-        <p:nvPr/>
-      </p:nvGrpSpPr>
-      <p:grpSpPr>
-        <a:xfrm>
-          <a:off x="0" y="0"/>
-          <a:ext cx="0" cy="0"/>
-          <a:chOff x="0" y="0"/>
-          <a:chExt cx="0" cy="0"/>
-        </a:xfrm>
-      </p:grpSpPr>
-      <p:sp>
-        <p:nvSpPr>
-          <p:cNvPr id="2" name="Slide Image Placeholder 1">
-            <a:extLst>
-              <a:ext uri="{FF2B5EF4-FFF2-40B4-BE49-F238E27FC236}">
-                <a16:creationId xmlns:a16="http://schemas.microsoft.com/office/drawing/2014/main" xmlns="" id="{DE11DD70-1D24-F208-D48D-62A3950B6E93}"/>
-              </a:ext>
-            </a:extLst>
-          </p:cNvPr>
-          <p:cNvSpPr>
-            <a:spLocks noGrp="1" noRot="1" noChangeAspect="1"/>
-          </p:cNvSpPr>
-          <p:nvPr>
-            <p:ph type="sldImg"/>
-          </p:nvPr>
-        </p:nvSpPr>
-        <p:spPr/>
-      </p:sp>
-      <p:sp>
-        <p:nvSpPr>
-          <p:cNvPr id="3" name="Notes Placeholder 2">
-            <a:extLst>
-              <a:ext uri="{FF2B5EF4-FFF2-40B4-BE49-F238E27FC236}">
-                <a16:creationId xmlns:a16="http://schemas.microsoft.com/office/drawing/2014/main" xmlns="" id="{186E543A-8712-F7B2-6D6F-5D2EBAB2FBB4}"/>
-              </a:ext>
-            </a:extLst>
-          </p:cNvPr>
-          <p:cNvSpPr>
-            <a:spLocks noGrp="1"/>
-          </p:cNvSpPr>
-          <p:nvPr>
-            <p:ph type="body" idx="1"/>
-          </p:nvPr>
-        </p:nvSpPr>
-        <p:spPr/>
-        <p:txBody>
-          <a:bodyPr/>
-          <a:lstStyle/>
-          <a:p>
-            <a:endParaRPr lang="pt-BR" dirty="0"/>
-          </a:p>
-        </p:txBody>
-      </p:sp>
-      <p:sp>
-        <p:nvSpPr>
-          <p:cNvPr id="4" name="Slide Number Placeholder 3">
-            <a:extLst>
-              <a:ext uri="{FF2B5EF4-FFF2-40B4-BE49-F238E27FC236}">
-                <a16:creationId xmlns:a16="http://schemas.microsoft.com/office/drawing/2014/main" xmlns="" id="{BD60ADED-B321-E72E-AC6D-480779FDACA2}"/>
-              </a:ext>
-            </a:extLst>
-          </p:cNvPr>
-          <p:cNvSpPr>
-            <a:spLocks noGrp="1"/>
-          </p:cNvSpPr>
-          <p:nvPr>
-            <p:ph type="sldNum" sz="quarter" idx="5"/>
-          </p:nvPr>
-        </p:nvSpPr>
-        <p:spPr/>
-        <p:txBody>
-          <a:bodyPr/>
-          <a:lstStyle/>
-          <a:p>
-            <a:fld id="{52B6F824-8703-49D2-9D87-1D6145B4F4B7}" type="slidenum">
-              <a:rPr lang="pt-BR" smtClean="0"/>
-              <a:t>14</a:t>
-            </a:fld>
-            <a:endParaRPr lang="pt-BR"/>
-          </a:p>
-        </p:txBody>
-      </p:sp>
-    </p:spTree>
-    <p:extLst>
-      <p:ext uri="{BB962C8B-B14F-4D97-AF65-F5344CB8AC3E}">
-        <p14:creationId xmlns:p14="http://schemas.microsoft.com/office/powerpoint/2010/main" val="4145442902"/>
-      </p:ext>
-    </p:extLst>
-  </p:cSld>
-  <p:clrMapOvr>
-    <a:masterClrMapping/>
-  </p:clrMapOvr>
-</p:notes>
-</file>
-
-<file path=ppt/notesSlides/notesSlide3.xml><?xml version="1.0" encoding="utf-8"?>
-<p:notes xmlns:a="http://schemas.openxmlformats.org/drawingml/2006/main" xmlns:r="http://schemas.openxmlformats.org/officeDocument/2006/relationships" xmlns:p="http://schemas.openxmlformats.org/presentationml/2006/main">
-  <p:cSld>
-    <p:spTree>
-      <p:nvGrpSpPr>
-        <p:cNvPr id="1" name="">
-          <a:extLst>
-            <a:ext uri="{FF2B5EF4-FFF2-40B4-BE49-F238E27FC236}">
-              <a16:creationId xmlns:a16="http://schemas.microsoft.com/office/drawing/2014/main" xmlns="" id="{185C6018-5061-A3DC-EDCB-116885776DAA}"/>
-            </a:ext>
-          </a:extLst>
-        </p:cNvPr>
-        <p:cNvGrpSpPr/>
-        <p:nvPr/>
-      </p:nvGrpSpPr>
-      <p:grpSpPr>
-        <a:xfrm>
-          <a:off x="0" y="0"/>
-          <a:ext cx="0" cy="0"/>
-          <a:chOff x="0" y="0"/>
-          <a:chExt cx="0" cy="0"/>
-        </a:xfrm>
-      </p:grpSpPr>
-      <p:sp>
-        <p:nvSpPr>
-          <p:cNvPr id="2" name="Slide Image Placeholder 1">
-            <a:extLst>
-              <a:ext uri="{FF2B5EF4-FFF2-40B4-BE49-F238E27FC236}">
-                <a16:creationId xmlns:a16="http://schemas.microsoft.com/office/drawing/2014/main" xmlns="" id="{299D8E4E-23F6-A893-BB49-8A6FC506CB9B}"/>
-              </a:ext>
-            </a:extLst>
-          </p:cNvPr>
-          <p:cNvSpPr>
-            <a:spLocks noGrp="1" noRot="1" noChangeAspect="1"/>
-          </p:cNvSpPr>
-          <p:nvPr>
-            <p:ph type="sldImg"/>
-          </p:nvPr>
-        </p:nvSpPr>
-        <p:spPr/>
-      </p:sp>
-      <p:sp>
-        <p:nvSpPr>
-          <p:cNvPr id="3" name="Notes Placeholder 2">
-            <a:extLst>
-              <a:ext uri="{FF2B5EF4-FFF2-40B4-BE49-F238E27FC236}">
-                <a16:creationId xmlns:a16="http://schemas.microsoft.com/office/drawing/2014/main" xmlns="" id="{142504A8-D4F5-5D2B-7CAE-CDB4BF8C739E}"/>
-              </a:ext>
-            </a:extLst>
-          </p:cNvPr>
-          <p:cNvSpPr>
-            <a:spLocks noGrp="1"/>
-          </p:cNvSpPr>
-          <p:nvPr>
-            <p:ph type="body" idx="1"/>
-          </p:nvPr>
-        </p:nvSpPr>
-        <p:spPr/>
-        <p:txBody>
-          <a:bodyPr/>
-          <a:lstStyle/>
-          <a:p>
-            <a:endParaRPr lang="pt-BR" dirty="0"/>
-          </a:p>
-        </p:txBody>
-      </p:sp>
-      <p:sp>
-        <p:nvSpPr>
-          <p:cNvPr id="4" name="Slide Number Placeholder 3">
-            <a:extLst>
-              <a:ext uri="{FF2B5EF4-FFF2-40B4-BE49-F238E27FC236}">
-                <a16:creationId xmlns:a16="http://schemas.microsoft.com/office/drawing/2014/main" xmlns="" id="{BDC767B8-4CD3-47A2-9F4B-9A27FA4DBB67}"/>
-              </a:ext>
-            </a:extLst>
-          </p:cNvPr>
-          <p:cNvSpPr>
-            <a:spLocks noGrp="1"/>
-          </p:cNvSpPr>
-          <p:nvPr>
-            <p:ph type="sldNum" sz="quarter" idx="5"/>
-          </p:nvPr>
-        </p:nvSpPr>
-        <p:spPr/>
-        <p:txBody>
-          <a:bodyPr/>
-          <a:lstStyle/>
-          <a:p>
-            <a:fld id="{52B6F824-8703-49D2-9D87-1D6145B4F4B7}" type="slidenum">
-              <a:rPr lang="pt-BR" smtClean="0"/>
-              <a:t>15</a:t>
-            </a:fld>
-            <a:endParaRPr lang="pt-BR"/>
-          </a:p>
-        </p:txBody>
-      </p:sp>
-    </p:spTree>
-    <p:extLst>
-      <p:ext uri="{BB962C8B-B14F-4D97-AF65-F5344CB8AC3E}">
-        <p14:creationId xmlns:p14="http://schemas.microsoft.com/office/powerpoint/2010/main" val="2858193996"/>
-      </p:ext>
-    </p:extLst>
-  </p:cSld>
-  <p:clrMapOvr>
-    <a:masterClrMapping/>
-  </p:clrMapOvr>
-</p:notes>
-</file>
-
 <file path=ppt/slideLayouts/slideLayout1.xml><?xml version="1.0" encoding="utf-8"?>
 <p:sldLayout xmlns:a="http://schemas.openxmlformats.org/drawingml/2006/main" xmlns:r="http://schemas.openxmlformats.org/officeDocument/2006/relationships" xmlns:p="http://schemas.openxmlformats.org/presentationml/2006/main" type="title" preserve="1">
   <p:cSld name="Title Slide">
@@ -1528,7 +633,7 @@
           <a:p>
             <a:fld id="{79FF6BB4-DF49-4A43-A315-50B42AE724FC}" type="datetimeFigureOut">
               <a:rPr lang="pt-BR" smtClean="0"/>
-              <a:t>19/11/2025</a:t>
+              <a:t>19/05/2026</a:t>
             </a:fld>
             <a:endParaRPr lang="pt-BR"/>
           </a:p>
@@ -1728,7 +833,7 @@
           <a:p>
             <a:fld id="{79FF6BB4-DF49-4A43-A315-50B42AE724FC}" type="datetimeFigureOut">
               <a:rPr lang="pt-BR" smtClean="0"/>
-              <a:t>19/11/2025</a:t>
+              <a:t>19/05/2026</a:t>
             </a:fld>
             <a:endParaRPr lang="pt-BR"/>
           </a:p>
@@ -1938,7 +1043,7 @@
           <a:p>
             <a:fld id="{79FF6BB4-DF49-4A43-A315-50B42AE724FC}" type="datetimeFigureOut">
               <a:rPr lang="pt-BR" smtClean="0"/>
-              <a:t>19/11/2025</a:t>
+              <a:t>19/05/2026</a:t>
             </a:fld>
             <a:endParaRPr lang="pt-BR"/>
           </a:p>
@@ -2138,7 +1243,7 @@
           <a:p>
             <a:fld id="{79FF6BB4-DF49-4A43-A315-50B42AE724FC}" type="datetimeFigureOut">
               <a:rPr lang="pt-BR" smtClean="0"/>
-              <a:t>19/11/2025</a:t>
+              <a:t>19/05/2026</a:t>
             </a:fld>
             <a:endParaRPr lang="pt-BR"/>
           </a:p>
@@ -2414,7 +1519,7 @@
           <a:p>
             <a:fld id="{79FF6BB4-DF49-4A43-A315-50B42AE724FC}" type="datetimeFigureOut">
               <a:rPr lang="pt-BR" smtClean="0"/>
-              <a:t>19/11/2025</a:t>
+              <a:t>19/05/2026</a:t>
             </a:fld>
             <a:endParaRPr lang="pt-BR"/>
           </a:p>
@@ -2682,7 +1787,7 @@
           <a:p>
             <a:fld id="{79FF6BB4-DF49-4A43-A315-50B42AE724FC}" type="datetimeFigureOut">
               <a:rPr lang="pt-BR" smtClean="0"/>
-              <a:t>19/11/2025</a:t>
+              <a:t>19/05/2026</a:t>
             </a:fld>
             <a:endParaRPr lang="pt-BR"/>
           </a:p>
@@ -3097,7 +2202,7 @@
           <a:p>
             <a:fld id="{79FF6BB4-DF49-4A43-A315-50B42AE724FC}" type="datetimeFigureOut">
               <a:rPr lang="pt-BR" smtClean="0"/>
-              <a:t>19/11/2025</a:t>
+              <a:t>19/05/2026</a:t>
             </a:fld>
             <a:endParaRPr lang="pt-BR"/>
           </a:p>
@@ -3239,7 +2344,7 @@
           <a:p>
             <a:fld id="{79FF6BB4-DF49-4A43-A315-50B42AE724FC}" type="datetimeFigureOut">
               <a:rPr lang="pt-BR" smtClean="0"/>
-              <a:t>19/11/2025</a:t>
+              <a:t>19/05/2026</a:t>
             </a:fld>
             <a:endParaRPr lang="pt-BR"/>
           </a:p>
@@ -3352,7 +2457,7 @@
           <a:p>
             <a:fld id="{79FF6BB4-DF49-4A43-A315-50B42AE724FC}" type="datetimeFigureOut">
               <a:rPr lang="pt-BR" smtClean="0"/>
-              <a:t>19/11/2025</a:t>
+              <a:t>19/05/2026</a:t>
             </a:fld>
             <a:endParaRPr lang="pt-BR"/>
           </a:p>
@@ -3665,7 +2770,7 @@
           <a:p>
             <a:fld id="{79FF6BB4-DF49-4A43-A315-50B42AE724FC}" type="datetimeFigureOut">
               <a:rPr lang="pt-BR" smtClean="0"/>
-              <a:t>19/11/2025</a:t>
+              <a:t>19/05/2026</a:t>
             </a:fld>
             <a:endParaRPr lang="pt-BR"/>
           </a:p>
@@ -3954,7 +3059,7 @@
           <a:p>
             <a:fld id="{79FF6BB4-DF49-4A43-A315-50B42AE724FC}" type="datetimeFigureOut">
               <a:rPr lang="pt-BR" smtClean="0"/>
-              <a:t>19/11/2025</a:t>
+              <a:t>19/05/2026</a:t>
             </a:fld>
             <a:endParaRPr lang="pt-BR"/>
           </a:p>
@@ -4197,7 +3302,7 @@
           <a:p>
             <a:fld id="{79FF6BB4-DF49-4A43-A315-50B42AE724FC}" type="datetimeFigureOut">
               <a:rPr lang="pt-BR" smtClean="0"/>
-              <a:t>19/11/2025</a:t>
+              <a:t>19/05/2026</a:t>
             </a:fld>
             <a:endParaRPr lang="pt-BR"/>
           </a:p>
@@ -4602,7 +3707,13 @@
   <p:cSld>
     <p:spTree>
       <p:nvGrpSpPr>
-        <p:cNvPr id="1" name=""/>
+        <p:cNvPr id="1" name="">
+          <a:extLst>
+            <a:ext uri="{FF2B5EF4-FFF2-40B4-BE49-F238E27FC236}">
+              <a16:creationId xmlns:a16="http://schemas.microsoft.com/office/drawing/2014/main" xmlns="" id="{990134A1-ABB8-8B90-52AC-B65932D52255}"/>
+            </a:ext>
+          </a:extLst>
+        </p:cNvPr>
         <p:cNvGrpSpPr/>
         <p:nvPr/>
       </p:nvGrpSpPr>
@@ -4614,12 +3725,172 @@
           <a:chExt cx="0" cy="0"/>
         </a:xfrm>
       </p:grpSpPr>
+      <p:sp>
+        <p:nvSpPr>
+          <p:cNvPr id="2" name="Título 1">
+            <a:extLst>
+              <a:ext uri="{FF2B5EF4-FFF2-40B4-BE49-F238E27FC236}">
+                <a16:creationId xmlns:a16="http://schemas.microsoft.com/office/drawing/2014/main" xmlns="" id="{BBD36869-7C53-B4EC-0C49-E12A38CDCBB3}"/>
+              </a:ext>
+            </a:extLst>
+          </p:cNvPr>
+          <p:cNvSpPr>
+            <a:spLocks noGrp="1"/>
+          </p:cNvSpPr>
+          <p:nvPr>
+            <p:ph type="ctrTitle"/>
+          </p:nvPr>
+        </p:nvSpPr>
+        <p:spPr>
+          <a:xfrm>
+            <a:off x="640080" y="320040"/>
+            <a:ext cx="6692827" cy="4311121"/>
+          </a:xfrm>
+        </p:spPr>
+        <p:txBody>
+          <a:bodyPr>
+            <a:normAutofit fontScale="90000"/>
+          </a:bodyPr>
+          <a:lstStyle/>
+          <a:p>
+            <a:pPr algn="l"/>
+            <a:r>
+              <a:rPr lang="pt-BR" sz="6600" dirty="0">
+                <a:solidFill>
+                  <a:schemeClr val="tx2">
+                    <a:lumMod val="90000"/>
+                    <a:lumOff val="10000"/>
+                  </a:schemeClr>
+                </a:solidFill>
+                <a:latin typeface="Aharoni" panose="02010803020104030203" pitchFamily="2" charset="-79"/>
+                <a:cs typeface="Aharoni" panose="02010803020104030203" pitchFamily="2" charset="-79"/>
+              </a:rPr>
+              <a:t>Pesquisa Operacional I</a:t>
+            </a:r>
+            <a:br>
+              <a:rPr lang="pt-BR" sz="6600" dirty="0">
+                <a:solidFill>
+                  <a:schemeClr val="tx2">
+                    <a:lumMod val="90000"/>
+                    <a:lumOff val="10000"/>
+                  </a:schemeClr>
+                </a:solidFill>
+                <a:latin typeface="Aharoni" panose="02010803020104030203" pitchFamily="2" charset="-79"/>
+                <a:cs typeface="Aharoni" panose="02010803020104030203" pitchFamily="2" charset="-79"/>
+              </a:rPr>
+            </a:br>
+            <a:r>
+              <a:rPr lang="pt-BR" sz="6600" dirty="0">
+                <a:solidFill>
+                  <a:schemeClr val="tx2">
+                    <a:lumMod val="90000"/>
+                    <a:lumOff val="10000"/>
+                  </a:schemeClr>
+                </a:solidFill>
+                <a:latin typeface="Aharoni" panose="02010803020104030203" pitchFamily="2" charset="-79"/>
+                <a:cs typeface="Aharoni" panose="02010803020104030203" pitchFamily="2" charset="-79"/>
+              </a:rPr>
+              <a:t>Adaptando outras formas de PPL</a:t>
+            </a:r>
+            <a:br>
+              <a:rPr lang="pt-BR" sz="6600" dirty="0">
+                <a:solidFill>
+                  <a:schemeClr val="tx2">
+                    <a:lumMod val="90000"/>
+                    <a:lumOff val="10000"/>
+                  </a:schemeClr>
+                </a:solidFill>
+                <a:latin typeface="Aharoni" panose="02010803020104030203" pitchFamily="2" charset="-79"/>
+                <a:cs typeface="Aharoni" panose="02010803020104030203" pitchFamily="2" charset="-79"/>
+              </a:rPr>
+            </a:br>
+            <a:endParaRPr lang="pt-BR" sz="6600" dirty="0">
+              <a:solidFill>
+                <a:schemeClr val="tx2">
+                  <a:lumMod val="90000"/>
+                  <a:lumOff val="10000"/>
+                </a:schemeClr>
+              </a:solidFill>
+              <a:latin typeface="Aharoni" panose="02010803020104030203" pitchFamily="2" charset="-79"/>
+              <a:cs typeface="Aharoni" panose="02010803020104030203" pitchFamily="2" charset="-79"/>
+            </a:endParaRPr>
+          </a:p>
+        </p:txBody>
+      </p:sp>
+      <p:sp>
+        <p:nvSpPr>
+          <p:cNvPr id="3" name="Subtítulo 2">
+            <a:extLst>
+              <a:ext uri="{FF2B5EF4-FFF2-40B4-BE49-F238E27FC236}">
+                <a16:creationId xmlns:a16="http://schemas.microsoft.com/office/drawing/2014/main" xmlns="" id="{C9DC04F7-2A1B-C9D0-40E7-D7F0EB2A55C4}"/>
+              </a:ext>
+            </a:extLst>
+          </p:cNvPr>
+          <p:cNvSpPr>
+            <a:spLocks noGrp="1"/>
+          </p:cNvSpPr>
+          <p:nvPr>
+            <p:ph type="subTitle" idx="1"/>
+          </p:nvPr>
+        </p:nvSpPr>
+        <p:spPr>
+          <a:xfrm>
+            <a:off x="640080" y="4631161"/>
+            <a:ext cx="6692827" cy="1569486"/>
+          </a:xfrm>
+        </p:spPr>
+        <p:txBody>
+          <a:bodyPr>
+            <a:normAutofit/>
+          </a:bodyPr>
+          <a:lstStyle/>
+          <a:p>
+            <a:pPr algn="l"/>
+            <a:r>
+              <a:rPr lang="en-US" dirty="0">
+                <a:ea typeface="Hagrid Text"/>
+                <a:cs typeface="Hagrid Text"/>
+                <a:sym typeface="Hagrid Text"/>
+              </a:rPr>
+              <a:t>Profª Andréa </a:t>
+            </a:r>
+            <a:r>
+              <a:rPr lang="en-US" dirty="0" err="1">
+                <a:ea typeface="Hagrid Text"/>
+                <a:cs typeface="Hagrid Text"/>
+                <a:sym typeface="Hagrid Text"/>
+              </a:rPr>
+              <a:t>Bonifácio</a:t>
+            </a:r>
+            <a:endParaRPr lang="en-US" dirty="0">
+              <a:ea typeface="Hagrid Text"/>
+              <a:cs typeface="Hagrid Text"/>
+              <a:sym typeface="Hagrid Text"/>
+            </a:endParaRPr>
+          </a:p>
+          <a:p>
+            <a:pPr algn="l"/>
+            <a:r>
+              <a:rPr lang="en-US" dirty="0">
+                <a:ea typeface="Hagrid Text"/>
+                <a:cs typeface="Hagrid Text"/>
+                <a:sym typeface="Hagrid Text"/>
+              </a:rPr>
+              <a:t>Email: andreabonifacio@uniriotec.br</a:t>
+            </a:r>
+          </a:p>
+          <a:p>
+            <a:pPr algn="l"/>
+            <a:endParaRPr lang="pt-BR" dirty="0"/>
+          </a:p>
+        </p:txBody>
+      </p:sp>
       <p:pic>
         <p:nvPicPr>
-          <p:cNvPr id="10" name="Imagem 9" descr="Uma imagem contendo Desenho técnico&#10;&#10;O conteúdo gerado por IA pode estar incorreto.">
+          <p:cNvPr id="6" name="Imagem 5" descr="Ícone&#10;&#10;O conteúdo gerado por IA pode estar incorreto.">
             <a:extLst>
               <a:ext uri="{FF2B5EF4-FFF2-40B4-BE49-F238E27FC236}">
-                <a16:creationId xmlns:a16="http://schemas.microsoft.com/office/drawing/2014/main" xmlns="" id="{4E96931A-2190-E0C7-8666-B1722C3B7E42}"/>
+                <a16:creationId xmlns:a16="http://schemas.microsoft.com/office/drawing/2014/main" xmlns="" id="{57C191F7-C2F2-185D-FD24-D2DBBBFA4DB4}"/>
               </a:ext>
             </a:extLst>
           </p:cNvPr>
@@ -4630,8 +3901,16 @@
         </p:nvPicPr>
         <p:blipFill>
           <a:blip r:embed="rId2">
-            <a:alphaModFix amt="20000"/>
             <a:extLst>
+              <a:ext uri="{BEBA8EAE-BF5A-486C-A8C5-ECC9F3942E4B}">
+                <a14:imgProps xmlns:a14="http://schemas.microsoft.com/office/drawing/2010/main">
+                  <a14:imgLayer r:embed="rId3">
+                    <a14:imgEffect>
+                      <a14:artisticPhotocopy/>
+                    </a14:imgEffect>
+                  </a14:imgLayer>
+                </a14:imgProps>
+              </a:ext>
               <a:ext uri="{28A0092B-C50C-407E-A947-70E740481C1C}">
                 <a14:useLocalDpi xmlns:a14="http://schemas.microsoft.com/office/drawing/2010/main" val="0"/>
               </a:ext>
@@ -4643,252 +3922,20 @@
         </p:blipFill>
         <p:spPr>
           <a:xfrm>
-            <a:off x="0" y="-2404533"/>
-            <a:ext cx="9262533" cy="9262533"/>
+            <a:off x="7781544" y="1417747"/>
+            <a:ext cx="4087368" cy="3786031"/>
           </a:xfrm>
           <a:prstGeom prst="rect">
             <a:avLst/>
           </a:prstGeom>
         </p:spPr>
       </p:pic>
-      <p:sp>
-        <p:nvSpPr>
-          <p:cNvPr id="5" name="TextBox 5"/>
-          <p:cNvSpPr txBox="1"/>
-          <p:nvPr/>
-        </p:nvSpPr>
-        <p:spPr>
-          <a:xfrm>
-            <a:off x="1000430" y="2825657"/>
-            <a:ext cx="10191141" cy="580993"/>
-          </a:xfrm>
-          <a:prstGeom prst="rect">
-            <a:avLst/>
-          </a:prstGeom>
-        </p:spPr>
-        <p:txBody>
-          <a:bodyPr lIns="0" tIns="0" rIns="0" bIns="0" rtlCol="0" anchor="t">
-            <a:spAutoFit/>
-          </a:bodyPr>
-          <a:lstStyle/>
-          <a:p>
-            <a:pPr algn="ctr">
-              <a:lnSpc>
-                <a:spcPts val="4184"/>
-              </a:lnSpc>
-            </a:pPr>
-            <a:r>
-              <a:rPr lang="pt-BR" sz="5230" b="1" spc="-219" dirty="0">
-                <a:solidFill>
-                  <a:schemeClr val="tx2">
-                    <a:lumMod val="75000"/>
-                  </a:schemeClr>
-                </a:solidFill>
-                <a:latin typeface="Hagrid Text Bold"/>
-                <a:ea typeface="Hagrid Text Bold"/>
-                <a:cs typeface="Hagrid Text Bold"/>
-                <a:sym typeface="Hagrid Text Bold"/>
-              </a:rPr>
-              <a:t>Adaptando outras formas de PPL</a:t>
-            </a:r>
-            <a:endParaRPr lang="en-US" sz="5230" b="1" spc="-219" dirty="0">
-              <a:solidFill>
-                <a:schemeClr val="tx2">
-                  <a:lumMod val="75000"/>
-                </a:schemeClr>
-              </a:solidFill>
-              <a:latin typeface="Hagrid Text Bold"/>
-              <a:ea typeface="Hagrid Text Bold"/>
-              <a:cs typeface="Hagrid Text Bold"/>
-              <a:sym typeface="Hagrid Text Bold"/>
-            </a:endParaRPr>
-          </a:p>
-        </p:txBody>
-      </p:sp>
-      <p:sp>
-        <p:nvSpPr>
-          <p:cNvPr id="6" name="TextBox 6"/>
-          <p:cNvSpPr txBox="1"/>
-          <p:nvPr/>
-        </p:nvSpPr>
-        <p:spPr>
-          <a:xfrm>
-            <a:off x="2445748" y="5671755"/>
-            <a:ext cx="7300505" cy="371897"/>
-          </a:xfrm>
-          <a:prstGeom prst="rect">
-            <a:avLst/>
-          </a:prstGeom>
-        </p:spPr>
-        <p:txBody>
-          <a:bodyPr lIns="0" tIns="0" rIns="0" bIns="0" rtlCol="0" anchor="t">
-            <a:spAutoFit/>
-          </a:bodyPr>
-          <a:lstStyle/>
-          <a:p>
-            <a:pPr algn="ctr">
-              <a:lnSpc>
-                <a:spcPts val="2876"/>
-              </a:lnSpc>
-            </a:pPr>
-            <a:r>
-              <a:rPr lang="en-US" sz="2876" dirty="0">
-                <a:solidFill>
-                  <a:srgbClr val="515254"/>
-                </a:solidFill>
-                <a:latin typeface="Hagrid Text"/>
-                <a:ea typeface="Hagrid Text"/>
-                <a:cs typeface="Hagrid Text"/>
-                <a:sym typeface="Hagrid Text"/>
-              </a:rPr>
-              <a:t>Email: andreabonifacio@uniriotec.br</a:t>
-            </a:r>
-          </a:p>
-        </p:txBody>
-      </p:sp>
-      <p:sp>
-        <p:nvSpPr>
-          <p:cNvPr id="7" name="TextBox 7"/>
-          <p:cNvSpPr txBox="1"/>
-          <p:nvPr/>
-        </p:nvSpPr>
-        <p:spPr>
-          <a:xfrm>
-            <a:off x="2445748" y="730251"/>
-            <a:ext cx="7300505" cy="748218"/>
-          </a:xfrm>
-          <a:prstGeom prst="rect">
-            <a:avLst/>
-          </a:prstGeom>
-        </p:spPr>
-        <p:txBody>
-          <a:bodyPr lIns="0" tIns="0" rIns="0" bIns="0" rtlCol="0" anchor="t">
-            <a:spAutoFit/>
-          </a:bodyPr>
-          <a:lstStyle/>
-          <a:p>
-            <a:pPr algn="ctr">
-              <a:lnSpc>
-                <a:spcPts val="2876"/>
-              </a:lnSpc>
-            </a:pPr>
-            <a:r>
-              <a:rPr lang="en-US" sz="2876" dirty="0">
-                <a:solidFill>
-                  <a:srgbClr val="515254"/>
-                </a:solidFill>
-                <a:latin typeface="Hagrid Text"/>
-                <a:ea typeface="Hagrid Text"/>
-                <a:cs typeface="Hagrid Text"/>
-                <a:sym typeface="Hagrid Text"/>
-              </a:rPr>
-              <a:t>Profª </a:t>
-            </a:r>
-            <a:r>
-              <a:rPr lang="en-US" sz="2876" dirty="0" smtClean="0">
-                <a:solidFill>
-                  <a:srgbClr val="515254"/>
-                </a:solidFill>
-                <a:latin typeface="Hagrid Text"/>
-                <a:ea typeface="Hagrid Text"/>
-                <a:cs typeface="Hagrid Text"/>
-                <a:sym typeface="Hagrid Text"/>
-              </a:rPr>
-              <a:t>Dra. Andréa </a:t>
-            </a:r>
-            <a:r>
-              <a:rPr lang="en-US" sz="2876" dirty="0">
-                <a:solidFill>
-                  <a:srgbClr val="515254"/>
-                </a:solidFill>
-                <a:latin typeface="Hagrid Text"/>
-                <a:ea typeface="Hagrid Text"/>
-                <a:cs typeface="Hagrid Text"/>
-                <a:sym typeface="Hagrid Text"/>
-              </a:rPr>
-              <a:t>Bonifácio</a:t>
-            </a:r>
-          </a:p>
-          <a:p>
-            <a:pPr algn="ctr">
-              <a:lnSpc>
-                <a:spcPts val="2876"/>
-              </a:lnSpc>
-            </a:pPr>
-            <a:r>
-              <a:rPr lang="en-US" sz="2876" dirty="0" err="1">
-                <a:solidFill>
-                  <a:srgbClr val="515254"/>
-                </a:solidFill>
-                <a:latin typeface="Hagrid Text"/>
-                <a:ea typeface="Hagrid Text"/>
-                <a:cs typeface="Hagrid Text"/>
-                <a:sym typeface="Hagrid Text"/>
-              </a:rPr>
-              <a:t>Disciplina</a:t>
-            </a:r>
-            <a:r>
-              <a:rPr lang="en-US" sz="2876" dirty="0">
-                <a:solidFill>
-                  <a:srgbClr val="515254"/>
-                </a:solidFill>
-                <a:latin typeface="Hagrid Text"/>
-                <a:ea typeface="Hagrid Text"/>
-                <a:cs typeface="Hagrid Text"/>
-                <a:sym typeface="Hagrid Text"/>
-              </a:rPr>
-              <a:t>: PO I</a:t>
-            </a:r>
-          </a:p>
-        </p:txBody>
-      </p:sp>
-      <p:sp>
-        <p:nvSpPr>
-          <p:cNvPr id="8" name="TextBox 8"/>
-          <p:cNvSpPr txBox="1"/>
-          <p:nvPr/>
-        </p:nvSpPr>
-        <p:spPr>
-          <a:xfrm>
-            <a:off x="4397994" y="6298718"/>
-            <a:ext cx="3396012" cy="218008"/>
-          </a:xfrm>
-          <a:prstGeom prst="rect">
-            <a:avLst/>
-          </a:prstGeom>
-        </p:spPr>
-        <p:txBody>
-          <a:bodyPr lIns="0" tIns="0" rIns="0" bIns="0" rtlCol="0" anchor="t">
-            <a:spAutoFit/>
-          </a:bodyPr>
-          <a:lstStyle/>
-          <a:p>
-            <a:pPr algn="ctr">
-              <a:lnSpc>
-                <a:spcPts val="1666"/>
-              </a:lnSpc>
-            </a:pPr>
-            <a:r>
-              <a:rPr lang="en-US" sz="1666">
-                <a:solidFill>
-                  <a:srgbClr val="515254"/>
-                </a:solidFill>
-                <a:latin typeface="Hagrid Text"/>
-                <a:ea typeface="Hagrid Text"/>
-                <a:cs typeface="Hagrid Text"/>
-                <a:sym typeface="Hagrid Text"/>
-              </a:rPr>
-              <a:t>UNIRIO</a:t>
-            </a:r>
-          </a:p>
-        </p:txBody>
-      </p:sp>
       <p:pic>
         <p:nvPicPr>
-          <p:cNvPr id="12" name="Imagem 11" descr="Ícone&#10;&#10;O conteúdo gerado por IA pode estar incorreto.">
+          <p:cNvPr id="7" name="Imagem 6" descr="Ícone&#10;&#10;O conteúdo gerado por IA pode estar incorreto.">
             <a:extLst>
               <a:ext uri="{FF2B5EF4-FFF2-40B4-BE49-F238E27FC236}">
-                <a16:creationId xmlns:a16="http://schemas.microsoft.com/office/drawing/2014/main" xmlns="" id="{5F6F6DCF-AFAD-727E-A406-11A5630F9387}"/>
+                <a16:creationId xmlns:a16="http://schemas.microsoft.com/office/drawing/2014/main" xmlns="" id="{0A43AA01-1C09-2157-D549-C8E1484F53C3}"/>
               </a:ext>
             </a:extLst>
           </p:cNvPr>
@@ -4898,7 +3945,7 @@
           <p:nvPr/>
         </p:nvPicPr>
         <p:blipFill>
-          <a:blip r:embed="rId3" cstate="print">
+          <a:blip r:embed="rId4" cstate="print">
             <a:extLst>
               <a:ext uri="{28A0092B-C50C-407E-A947-70E740481C1C}">
                 <a14:useLocalDpi xmlns:a14="http://schemas.microsoft.com/office/drawing/2010/main" val="0"/>
@@ -4920,10 +3967,22 @@
         </p:spPr>
       </p:pic>
     </p:spTree>
+    <p:extLst>
+      <p:ext uri="{BB962C8B-B14F-4D97-AF65-F5344CB8AC3E}">
+        <p14:creationId xmlns:p14="http://schemas.microsoft.com/office/powerpoint/2010/main" val="1293772484"/>
+      </p:ext>
+    </p:extLst>
   </p:cSld>
   <p:clrMapOvr>
     <a:masterClrMapping/>
   </p:clrMapOvr>
+  <p:timing>
+    <p:tnLst>
+      <p:par>
+        <p:cTn id="1" dur="indefinite" restart="never" nodeType="tmRoot"/>
+      </p:par>
+    </p:tnLst>
+  </p:timing>
 </p:sld>
 </file>
 
@@ -4952,36 +4011,43 @@
       </p:grpSpPr>
       <p:pic>
         <p:nvPicPr>
-          <p:cNvPr id="10" name="Imagem 9" descr="Uma imagem contendo Desenho técnico&#10;&#10;O conteúdo gerado por IA pode estar incorreto.">
+          <p:cNvPr id="9" name="Imagem 8" descr="Ícone&#10;&#10;O conteúdo gerado por IA pode estar incorreto.">
             <a:extLst>
               <a:ext uri="{FF2B5EF4-FFF2-40B4-BE49-F238E27FC236}">
-                <a16:creationId xmlns:a16="http://schemas.microsoft.com/office/drawing/2014/main" xmlns="" id="{E0A377FE-BE8D-1A94-66E9-DD0DC326E95C}"/>
+                <a16:creationId xmlns:a16="http://schemas.microsoft.com/office/drawing/2014/main" xmlns="" id="{E6E2F532-DC2F-4D92-B700-154813EC3C3D}"/>
               </a:ext>
             </a:extLst>
           </p:cNvPr>
           <p:cNvPicPr>
-            <a:picLocks noGrp="1" noRot="1" noChangeAspect="1" noMove="1" noResize="1" noEditPoints="1" noAdjustHandles="1" noChangeArrowheads="1" noChangeShapeType="1" noCrop="1"/>
+            <a:picLocks noChangeAspect="1"/>
           </p:cNvPicPr>
           <p:nvPr/>
         </p:nvPicPr>
         <p:blipFill>
           <a:blip r:embed="rId2">
-            <a:alphaModFix amt="20000"/>
             <a:extLst>
+              <a:ext uri="{BEBA8EAE-BF5A-486C-A8C5-ECC9F3942E4B}">
+                <a14:imgProps xmlns:a14="http://schemas.microsoft.com/office/drawing/2010/main">
+                  <a14:imgLayer r:embed="rId3">
+                    <a14:imgEffect>
+                      <a14:artisticPhotocopy/>
+                    </a14:imgEffect>
+                  </a14:imgLayer>
+                </a14:imgProps>
+              </a:ext>
               <a:ext uri="{28A0092B-C50C-407E-A947-70E740481C1C}">
                 <a14:useLocalDpi xmlns:a14="http://schemas.microsoft.com/office/drawing/2010/main" val="0"/>
               </a:ext>
             </a:extLst>
           </a:blip>
-          <a:srcRect t="26080"/>
           <a:stretch>
             <a:fillRect/>
           </a:stretch>
         </p:blipFill>
         <p:spPr>
           <a:xfrm>
-            <a:off x="0" y="11128"/>
-            <a:ext cx="9262533" cy="6846872"/>
+            <a:off x="9697652" y="4436988"/>
+            <a:ext cx="2430765" cy="2251559"/>
           </a:xfrm>
           <a:prstGeom prst="rect">
             <a:avLst/>
@@ -5003,7 +4069,7 @@
         <p:spPr>
           <a:xfrm>
             <a:off x="1000429" y="847992"/>
-            <a:ext cx="10191141" cy="580993"/>
+            <a:ext cx="10191141" cy="630942"/>
           </a:xfrm>
           <a:prstGeom prst="rect">
             <a:avLst/>
@@ -5015,34 +4081,36 @@
           </a:bodyPr>
           <a:lstStyle/>
           <a:p>
-            <a:pPr algn="ctr">
+            <a:pPr>
               <a:lnSpc>
                 <a:spcPts val="4184"/>
               </a:lnSpc>
             </a:pPr>
             <a:r>
-              <a:rPr lang="pt-BR" sz="5230" b="1" dirty="0">
+              <a:rPr lang="pt-BR" sz="5400" dirty="0">
                 <a:solidFill>
                   <a:schemeClr val="tx2">
-                    <a:lumMod val="75000"/>
+                    <a:lumMod val="90000"/>
+                    <a:lumOff val="10000"/>
                   </a:schemeClr>
                 </a:solidFill>
-                <a:latin typeface="Hagrid Text Bold"/>
-                <a:ea typeface="Hagrid Text Bold"/>
-                <a:cs typeface="Hagrid Text Bold"/>
+                <a:latin typeface="Aharoni" panose="02010803020104030203" pitchFamily="2" charset="-79"/>
+                <a:ea typeface="+mj-ea"/>
+                <a:cs typeface="Aharoni" panose="02010803020104030203" pitchFamily="2" charset="-79"/>
                 <a:sym typeface="Hagrid Text Bold"/>
               </a:rPr>
               <a:t>Exemplo</a:t>
             </a:r>
-            <a:endParaRPr lang="en-US" sz="5230" b="1" spc="-219" dirty="0">
+            <a:endParaRPr lang="en-US" sz="5400" dirty="0">
               <a:solidFill>
                 <a:schemeClr val="tx2">
-                  <a:lumMod val="75000"/>
+                  <a:lumMod val="90000"/>
+                  <a:lumOff val="10000"/>
                 </a:schemeClr>
               </a:solidFill>
-              <a:latin typeface="Hagrid Text Bold"/>
-              <a:ea typeface="Hagrid Text Bold"/>
-              <a:cs typeface="Hagrid Text Bold"/>
+              <a:latin typeface="Aharoni" panose="02010803020104030203" pitchFamily="2" charset="-79"/>
+              <a:ea typeface="+mj-ea"/>
+              <a:cs typeface="Aharoni" panose="02010803020104030203" pitchFamily="2" charset="-79"/>
               <a:sym typeface="Hagrid Text Bold"/>
             </a:endParaRPr>
           </a:p>
@@ -5062,8 +4130,8 @@
         </p:nvSpPr>
         <p:spPr>
           <a:xfrm>
-            <a:off x="754455" y="2366937"/>
-            <a:ext cx="5341546" cy="1477328"/>
+            <a:off x="515014" y="1682349"/>
+            <a:ext cx="5341546" cy="1523494"/>
           </a:xfrm>
           <a:prstGeom prst="rect">
             <a:avLst/>
@@ -5075,8 +4143,23 @@
           </a:bodyPr>
           <a:lstStyle/>
           <a:p>
+            <a:pPr>
+              <a:lnSpc>
+                <a:spcPts val="4184"/>
+              </a:lnSpc>
+            </a:pPr>
             <a:r>
-              <a:rPr lang="pt-BR" sz="3200" b="1" dirty="0"/>
+              <a:rPr lang="pt-BR" sz="3200" dirty="0">
+                <a:solidFill>
+                  <a:schemeClr val="tx2">
+                    <a:lumMod val="90000"/>
+                    <a:lumOff val="10000"/>
+                  </a:schemeClr>
+                </a:solidFill>
+                <a:latin typeface="Aharoni" panose="02010803020104030203" pitchFamily="2" charset="-79"/>
+                <a:ea typeface="+mj-ea"/>
+                <a:cs typeface="Aharoni" panose="02010803020104030203" pitchFamily="2" charset="-79"/>
+              </a:rPr>
               <a:t>PPL artificial:</a:t>
             </a:r>
           </a:p>
@@ -5103,7 +4186,7 @@
           <p:nvPr/>
         </p:nvPicPr>
         <p:blipFill>
-          <a:blip r:embed="rId3" cstate="print">
+          <a:blip r:embed="rId4" cstate="print">
             <a:extLst>
               <a:ext uri="{28A0092B-C50C-407E-A947-70E740481C1C}">
                 <a14:useLocalDpi xmlns:a14="http://schemas.microsoft.com/office/drawing/2010/main" val="0"/>
@@ -5138,8 +4221,8 @@
         </p:nvSpPr>
         <p:spPr>
           <a:xfrm>
-            <a:off x="6246565" y="1863478"/>
-            <a:ext cx="6386110" cy="1969770"/>
+            <a:off x="6095999" y="1682349"/>
+            <a:ext cx="5341546" cy="1569660"/>
           </a:xfrm>
           <a:prstGeom prst="rect">
             <a:avLst/>
@@ -5151,13 +4234,43 @@
           </a:bodyPr>
           <a:lstStyle/>
           <a:p>
+            <a:pPr>
+              <a:lnSpc>
+                <a:spcPts val="4184"/>
+              </a:lnSpc>
+            </a:pPr>
             <a:r>
-              <a:rPr lang="pt-BR" sz="3200" b="1" dirty="0"/>
+              <a:rPr lang="pt-BR" sz="3200" dirty="0">
+                <a:solidFill>
+                  <a:schemeClr val="tx2">
+                    <a:lumMod val="90000"/>
+                    <a:lumOff val="10000"/>
+                  </a:schemeClr>
+                </a:solidFill>
+                <a:latin typeface="Aharoni" panose="02010803020104030203" pitchFamily="2" charset="-79"/>
+                <a:ea typeface="+mj-ea"/>
+                <a:cs typeface="Aharoni" panose="02010803020104030203" pitchFamily="2" charset="-79"/>
+              </a:rPr>
               <a:t>PPL artificial equivalente:</a:t>
             </a:r>
           </a:p>
           <a:p>
-            <a:endParaRPr lang="pt-BR" sz="3200" dirty="0"/>
+            <a:pPr>
+              <a:lnSpc>
+                <a:spcPts val="4184"/>
+              </a:lnSpc>
+            </a:pPr>
+            <a:endParaRPr lang="pt-BR" sz="3200" dirty="0">
+              <a:solidFill>
+                <a:schemeClr val="tx2">
+                  <a:lumMod val="90000"/>
+                  <a:lumOff val="10000"/>
+                </a:schemeClr>
+              </a:solidFill>
+              <a:latin typeface="Aharoni" panose="02010803020104030203" pitchFamily="2" charset="-79"/>
+              <a:ea typeface="+mj-ea"/>
+              <a:cs typeface="Aharoni" panose="02010803020104030203" pitchFamily="2" charset="-79"/>
+            </a:endParaRPr>
           </a:p>
           <a:p>
             <a:endParaRPr lang="pt-BR" sz="3200" dirty="0"/>
@@ -5182,7 +4295,7 @@
             </p:nvSpPr>
             <p:spPr>
               <a:xfrm>
-                <a:off x="515014" y="3105600"/>
+                <a:off x="515014" y="2421012"/>
                 <a:ext cx="4907886" cy="2904408"/>
               </a:xfrm>
               <a:prstGeom prst="rect">
@@ -5573,9 +4686,7 @@
                   <a:buNone/>
                 </a:pPr>
                 <a:r>
-                  <a:rPr lang="pt-BR" i="1" dirty="0">
-                    <a:latin typeface="Cambria Math"/>
-                  </a:rPr>
+                  <a:rPr lang="pt-BR" i="1" dirty="0"/>
                   <a:t>Sujeito a </a:t>
                 </a:r>
               </a:p>
@@ -6270,16 +5381,16 @@
             </p:nvSpPr>
             <p:spPr>
               <a:xfrm>
-                <a:off x="515014" y="3105600"/>
+                <a:off x="515014" y="2421012"/>
                 <a:ext cx="4907886" cy="2904408"/>
               </a:xfrm>
               <a:prstGeom prst="rect">
                 <a:avLst/>
               </a:prstGeom>
               <a:blipFill>
-                <a:blip r:embed="rId4"/>
+                <a:blip r:embed="rId5"/>
                 <a:stretch>
-                  <a:fillRect l="-496" r="-496"/>
+                  <a:fillRect l="-496" r="-372"/>
                 </a:stretch>
               </a:blipFill>
             </p:spPr>
@@ -6316,7 +5427,7 @@
             </p:nvSpPr>
             <p:spPr>
               <a:xfrm>
-                <a:off x="6095999" y="3105600"/>
+                <a:off x="6095999" y="2421012"/>
                 <a:ext cx="5341546" cy="2904408"/>
               </a:xfrm>
               <a:prstGeom prst="rect">
@@ -6522,7 +5633,7 @@
                           </m:r>
                           <m:r>
                             <a:rPr lang="pt-BR" i="1">
-                              <a:latin typeface="Cambria Math" panose="02040503050406030204" pitchFamily="18" charset="0"/>
+                              <a:latin typeface="Cambria Math"/>
                             </a:rPr>
                             <m:t>𝑎𝑥</m:t>
                           </m:r>
@@ -6530,7 +5641,7 @@
                         <m:e>
                           <m:r>
                             <a:rPr lang="pt-BR" i="1">
-                              <a:latin typeface="Cambria Math" panose="02040503050406030204" pitchFamily="18" charset="0"/>
+                              <a:latin typeface="Cambria Math"/>
                             </a:rPr>
                             <m:t>−</m:t>
                           </m:r>
@@ -6579,7 +5690,7 @@
                           </m:sSub>
                           <m:r>
                             <a:rPr lang="pt-BR" i="1">
-                              <a:latin typeface="Cambria Math" panose="02040503050406030204" pitchFamily="18" charset="0"/>
+                              <a:latin typeface="Cambria Math"/>
                             </a:rPr>
                             <m:t>−</m:t>
                           </m:r>
@@ -6610,7 +5721,7 @@
                           </m:sSub>
                           <m:r>
                             <a:rPr lang="pt-BR" i="1">
-                              <a:latin typeface="Cambria Math" panose="02040503050406030204" pitchFamily="18" charset="0"/>
+                              <a:latin typeface="Cambria Math"/>
                             </a:rPr>
                             <m:t>− </m:t>
                           </m:r>
@@ -6659,7 +5770,7 @@
                           </m:acc>
                           <m:r>
                             <a:rPr lang="pt-BR" i="1">
-                              <a:latin typeface="Cambria Math" panose="02040503050406030204" pitchFamily="18" charset="0"/>
+                              <a:latin typeface="Cambria Math"/>
                             </a:rPr>
                             <m:t>−</m:t>
                           </m:r>
@@ -6719,9 +5830,7 @@
                   <a:buNone/>
                 </a:pPr>
                 <a:r>
-                  <a:rPr lang="pt-BR" i="1" dirty="0">
-                    <a:latin typeface="Cambria Math"/>
-                  </a:rPr>
+                  <a:rPr lang="pt-BR" i="1" dirty="0"/>
                   <a:t>Sujeito a </a:t>
                 </a:r>
               </a:p>
@@ -7416,14 +6525,14 @@
             </p:nvSpPr>
             <p:spPr>
               <a:xfrm>
-                <a:off x="6095999" y="3105600"/>
+                <a:off x="6095999" y="2421012"/>
                 <a:ext cx="5341546" cy="2904408"/>
               </a:xfrm>
               <a:prstGeom prst="rect">
                 <a:avLst/>
               </a:prstGeom>
               <a:blipFill>
-                <a:blip r:embed="rId5"/>
+                <a:blip r:embed="rId6"/>
                 <a:stretch>
                   <a:fillRect/>
                 </a:stretch>
@@ -7454,6 +6563,13 @@
   <p:clrMapOvr>
     <a:masterClrMapping/>
   </p:clrMapOvr>
+  <p:timing>
+    <p:tnLst>
+      <p:par>
+        <p:cTn id="1" dur="indefinite" restart="never" nodeType="tmRoot"/>
+      </p:par>
+    </p:tnLst>
+  </p:timing>
 </p:sld>
 </file>
 
@@ -7482,36 +6598,43 @@
       </p:grpSpPr>
       <p:pic>
         <p:nvPicPr>
-          <p:cNvPr id="10" name="Imagem 9" descr="Uma imagem contendo Desenho técnico&#10;&#10;O conteúdo gerado por IA pode estar incorreto.">
+          <p:cNvPr id="6" name="Imagem 5" descr="Ícone&#10;&#10;O conteúdo gerado por IA pode estar incorreto.">
             <a:extLst>
               <a:ext uri="{FF2B5EF4-FFF2-40B4-BE49-F238E27FC236}">
-                <a16:creationId xmlns:a16="http://schemas.microsoft.com/office/drawing/2014/main" xmlns="" id="{B372BAE3-CB09-D6CB-A87A-3462222237C5}"/>
+                <a16:creationId xmlns:a16="http://schemas.microsoft.com/office/drawing/2014/main" xmlns="" id="{F0D49153-16C4-4CF2-90FB-50EBB0D3A60D}"/>
               </a:ext>
             </a:extLst>
           </p:cNvPr>
           <p:cNvPicPr>
-            <a:picLocks noGrp="1" noRot="1" noChangeAspect="1" noMove="1" noResize="1" noEditPoints="1" noAdjustHandles="1" noChangeArrowheads="1" noChangeShapeType="1" noCrop="1"/>
+            <a:picLocks noChangeAspect="1"/>
           </p:cNvPicPr>
           <p:nvPr/>
         </p:nvPicPr>
         <p:blipFill>
           <a:blip r:embed="rId2">
-            <a:alphaModFix amt="20000"/>
             <a:extLst>
+              <a:ext uri="{BEBA8EAE-BF5A-486C-A8C5-ECC9F3942E4B}">
+                <a14:imgProps xmlns:a14="http://schemas.microsoft.com/office/drawing/2010/main">
+                  <a14:imgLayer r:embed="rId3">
+                    <a14:imgEffect>
+                      <a14:artisticPhotocopy/>
+                    </a14:imgEffect>
+                  </a14:imgLayer>
+                </a14:imgProps>
+              </a:ext>
               <a:ext uri="{28A0092B-C50C-407E-A947-70E740481C1C}">
                 <a14:useLocalDpi xmlns:a14="http://schemas.microsoft.com/office/drawing/2010/main" val="0"/>
               </a:ext>
             </a:extLst>
           </a:blip>
-          <a:srcRect t="26080"/>
           <a:stretch>
             <a:fillRect/>
           </a:stretch>
         </p:blipFill>
         <p:spPr>
           <a:xfrm>
-            <a:off x="0" y="11128"/>
-            <a:ext cx="9262533" cy="6846872"/>
+            <a:off x="9697652" y="4436988"/>
+            <a:ext cx="2430765" cy="2251559"/>
           </a:xfrm>
           <a:prstGeom prst="rect">
             <a:avLst/>
@@ -7532,8 +6655,8 @@
         </p:nvSpPr>
         <p:spPr>
           <a:xfrm>
-            <a:off x="1000429" y="847992"/>
-            <a:ext cx="10191141" cy="580993"/>
+            <a:off x="543229" y="847992"/>
+            <a:ext cx="10191141" cy="611706"/>
           </a:xfrm>
           <a:prstGeom prst="rect">
             <a:avLst/>
@@ -7551,28 +6674,30 @@
               </a:lnSpc>
             </a:pPr>
             <a:r>
-              <a:rPr lang="pt-BR" sz="5230" b="1" dirty="0">
+              <a:rPr lang="pt-BR" sz="5400" dirty="0">
                 <a:solidFill>
                   <a:schemeClr val="tx2">
-                    <a:lumMod val="75000"/>
+                    <a:lumMod val="90000"/>
+                    <a:lumOff val="10000"/>
                   </a:schemeClr>
                 </a:solidFill>
-                <a:latin typeface="Hagrid Text Bold"/>
-                <a:ea typeface="Hagrid Text Bold"/>
-                <a:cs typeface="Hagrid Text Bold"/>
+                <a:latin typeface="Aharoni" panose="02010803020104030203" pitchFamily="2" charset="-79"/>
+                <a:ea typeface="+mj-ea"/>
+                <a:cs typeface="Aharoni" panose="02010803020104030203" pitchFamily="2" charset="-79"/>
                 <a:sym typeface="Hagrid Text Bold"/>
               </a:rPr>
               <a:t>Tabela Simplex inicial do Big-M</a:t>
             </a:r>
-            <a:endParaRPr lang="en-US" sz="5230" b="1" spc="-219" dirty="0">
+            <a:endParaRPr lang="en-US" sz="5400" dirty="0">
               <a:solidFill>
                 <a:schemeClr val="tx2">
-                  <a:lumMod val="75000"/>
+                  <a:lumMod val="90000"/>
+                  <a:lumOff val="10000"/>
                 </a:schemeClr>
               </a:solidFill>
-              <a:latin typeface="Hagrid Text Bold"/>
-              <a:ea typeface="Hagrid Text Bold"/>
-              <a:cs typeface="Hagrid Text Bold"/>
+              <a:latin typeface="Aharoni" panose="02010803020104030203" pitchFamily="2" charset="-79"/>
+              <a:ea typeface="+mj-ea"/>
+              <a:cs typeface="Aharoni" panose="02010803020104030203" pitchFamily="2" charset="-79"/>
               <a:sym typeface="Hagrid Text Bold"/>
             </a:endParaRPr>
           </a:p>
@@ -7593,7 +6718,7 @@
           <p:nvPr/>
         </p:nvPicPr>
         <p:blipFill>
-          <a:blip r:embed="rId3" cstate="print">
+          <a:blip r:embed="rId4" cstate="print">
             <a:extLst>
               <a:ext uri="{28A0092B-C50C-407E-A947-70E740481C1C}">
                 <a14:useLocalDpi xmlns:a14="http://schemas.microsoft.com/office/drawing/2010/main" val="0"/>
@@ -7614,8 +6739,8 @@
           </a:prstGeom>
         </p:spPr>
       </p:pic>
-      <mc:AlternateContent xmlns:mc="http://schemas.openxmlformats.org/markup-compatibility/2006">
-        <mc:Choice xmlns:a14="http://schemas.microsoft.com/office/drawing/2010/main" Requires="a14">
+      <mc:AlternateContent xmlns:mc="http://schemas.openxmlformats.org/markup-compatibility/2006" xmlns:a14="http://schemas.microsoft.com/office/drawing/2010/main">
+        <mc:Choice Requires="a14">
           <p:graphicFrame>
             <p:nvGraphicFramePr>
               <p:cNvPr id="4" name="Tabela 1">
@@ -7631,13 +6756,13 @@
               <p:nvPr>
                 <p:extLst>
                   <p:ext uri="{D42A27DB-BD31-4B8C-83A1-F6EECF244321}">
-                    <p14:modId xmlns:p14="http://schemas.microsoft.com/office/powerpoint/2010/main" val="2634190881"/>
+                    <p14:modId xmlns:p14="http://schemas.microsoft.com/office/powerpoint/2010/main" val="1363656837"/>
                   </p:ext>
                 </p:extLst>
               </p:nvPr>
             </p:nvGraphicFramePr>
             <p:xfrm>
-              <a:off x="1929481" y="1608388"/>
+              <a:off x="2006600" y="2265849"/>
               <a:ext cx="8178800" cy="3652352"/>
             </p:xfrm>
             <a:graphic>
@@ -7711,13 +6836,8 @@
                         <a:lstStyle/>
                         <a:p>
                           <a:r>
-                            <a:rPr lang="pt-BR" sz="3200" b="1" kern="1200" dirty="0">
-                              <a:solidFill>
-                                <a:schemeClr val="tx1"/>
-                              </a:solidFill>
+                            <a:rPr lang="pt-BR" dirty="0">
                               <a:latin typeface="+mn-lt"/>
-                              <a:ea typeface="+mn-ea"/>
-                              <a:cs typeface="+mn-cs"/>
                             </a:rPr>
                             <a:t>V.B</a:t>
                           </a:r>
@@ -7765,7 +6885,9 @@
                               </m:oMath>
                             </m:oMathPara>
                           </a14:m>
-                          <a:endParaRPr lang="pt-BR" dirty="0"/>
+                          <a:endParaRPr lang="pt-BR" dirty="0">
+                            <a:latin typeface="+mn-lt"/>
+                          </a:endParaRPr>
                         </a:p>
                       </a:txBody>
                       <a:tcPr/>
@@ -7810,7 +6932,9 @@
                               </m:oMath>
                             </m:oMathPara>
                           </a14:m>
-                          <a:endParaRPr lang="pt-BR" dirty="0"/>
+                          <a:endParaRPr lang="pt-BR" dirty="0">
+                            <a:latin typeface="+mn-lt"/>
+                          </a:endParaRPr>
                         </a:p>
                       </a:txBody>
                       <a:tcPr/>
@@ -7855,7 +6979,9 @@
                               </m:oMath>
                             </m:oMathPara>
                           </a14:m>
-                          <a:endParaRPr lang="pt-BR" dirty="0"/>
+                          <a:endParaRPr lang="pt-BR" dirty="0">
+                            <a:latin typeface="+mn-lt"/>
+                          </a:endParaRPr>
                         </a:p>
                       </a:txBody>
                       <a:tcPr/>
@@ -7900,7 +7026,9 @@
                               </m:oMath>
                             </m:oMathPara>
                           </a14:m>
-                          <a:endParaRPr lang="pt-BR" dirty="0"/>
+                          <a:endParaRPr lang="pt-BR" dirty="0">
+                            <a:latin typeface="+mn-lt"/>
+                          </a:endParaRPr>
                         </a:p>
                       </a:txBody>
                       <a:tcPr/>
@@ -7957,7 +7085,9 @@
                               </m:oMath>
                             </m:oMathPara>
                           </a14:m>
-                          <a:endParaRPr lang="pt-BR" dirty="0"/>
+                          <a:endParaRPr lang="pt-BR" dirty="0">
+                            <a:latin typeface="+mn-lt"/>
+                          </a:endParaRPr>
                         </a:p>
                       </a:txBody>
                       <a:tcPr/>
@@ -8014,7 +7144,9 @@
                               </m:oMath>
                             </m:oMathPara>
                           </a14:m>
-                          <a:endParaRPr lang="pt-BR" dirty="0"/>
+                          <a:endParaRPr lang="pt-BR" dirty="0">
+                            <a:latin typeface="+mn-lt"/>
+                          </a:endParaRPr>
                         </a:p>
                       </a:txBody>
                       <a:tcPr/>
@@ -8025,7 +7157,9 @@
                         <a:lstStyle/>
                         <a:p>
                           <a:r>
-                            <a:rPr lang="pt-BR" dirty="0"/>
+                            <a:rPr lang="pt-BR" dirty="0">
+                              <a:latin typeface="+mn-lt"/>
+                            </a:rPr>
                             <a:t>RHS</a:t>
                           </a:r>
                         </a:p>
@@ -8050,6 +7184,7 @@
                               <a:solidFill>
                                 <a:srgbClr val="FF0000"/>
                               </a:solidFill>
+                              <a:latin typeface="+mn-lt"/>
                             </a:rPr>
                             <a:t>-z</a:t>
                           </a:r>
@@ -8057,6 +7192,7 @@
                             <a:solidFill>
                               <a:srgbClr val="FF0000"/>
                             </a:solidFill>
+                            <a:latin typeface="+mn-lt"/>
                           </a:endParaRPr>
                         </a:p>
                       </a:txBody>
@@ -8073,6 +7209,7 @@
                               <a:solidFill>
                                 <a:srgbClr val="FF0000"/>
                               </a:solidFill>
+                              <a:latin typeface="+mn-lt"/>
                             </a:rPr>
                             <a:t>4</a:t>
                           </a:r>
@@ -8091,6 +7228,7 @@
                               <a:solidFill>
                                 <a:srgbClr val="FF0000"/>
                               </a:solidFill>
+                              <a:latin typeface="+mn-lt"/>
                             </a:rPr>
                             <a:t>1</a:t>
                           </a:r>
@@ -8109,6 +7247,7 @@
                               <a:solidFill>
                                 <a:srgbClr val="FF0000"/>
                               </a:solidFill>
+                              <a:latin typeface="+mn-lt"/>
                             </a:rPr>
                             <a:t>0</a:t>
                           </a:r>
@@ -8127,6 +7266,7 @@
                               <a:solidFill>
                                 <a:srgbClr val="FF0000"/>
                               </a:solidFill>
+                              <a:latin typeface="+mn-lt"/>
                             </a:rPr>
                             <a:t>0 </a:t>
                           </a:r>
@@ -8145,6 +7285,7 @@
                               <a:solidFill>
                                 <a:srgbClr val="FF0000"/>
                               </a:solidFill>
+                              <a:latin typeface="+mn-lt"/>
                             </a:rPr>
                             <a:t>M</a:t>
                           </a:r>
@@ -8163,6 +7304,7 @@
                               <a:solidFill>
                                 <a:srgbClr val="FF0000"/>
                               </a:solidFill>
+                              <a:latin typeface="+mn-lt"/>
                             </a:rPr>
                             <a:t>M</a:t>
                           </a:r>
@@ -8181,6 +7323,7 @@
                               <a:solidFill>
                                 <a:srgbClr val="FF0000"/>
                               </a:solidFill>
+                              <a:latin typeface="+mn-lt"/>
                             </a:rPr>
                             <a:t>0</a:t>
                           </a:r>
@@ -8247,7 +7390,9 @@
                               </m:oMath>
                             </m:oMathPara>
                           </a14:m>
-                          <a:endParaRPr lang="pt-BR" dirty="0"/>
+                          <a:endParaRPr lang="pt-BR" dirty="0">
+                            <a:latin typeface="+mn-lt"/>
+                          </a:endParaRPr>
                         </a:p>
                       </a:txBody>
                       <a:tcPr/>
@@ -8259,7 +7404,9 @@
                         <a:p>
                           <a:pPr algn="ctr"/>
                           <a:r>
-                            <a:rPr lang="pt-BR" dirty="0"/>
+                            <a:rPr lang="pt-BR" dirty="0">
+                              <a:latin typeface="+mn-lt"/>
+                            </a:rPr>
                             <a:t>3</a:t>
                           </a:r>
                         </a:p>
@@ -8273,7 +7420,9 @@
                         <a:p>
                           <a:pPr algn="ctr"/>
                           <a:r>
-                            <a:rPr lang="pt-BR" dirty="0"/>
+                            <a:rPr lang="pt-BR" dirty="0">
+                              <a:latin typeface="+mn-lt"/>
+                            </a:rPr>
                             <a:t>1</a:t>
                           </a:r>
                         </a:p>
@@ -8287,7 +7436,9 @@
                         <a:p>
                           <a:pPr algn="ctr"/>
                           <a:r>
-                            <a:rPr lang="pt-BR" dirty="0"/>
+                            <a:rPr lang="pt-BR" dirty="0">
+                              <a:latin typeface="+mn-lt"/>
+                            </a:rPr>
                             <a:t>0</a:t>
                           </a:r>
                         </a:p>
@@ -8305,6 +7456,7 @@
                               <a:solidFill>
                                 <a:srgbClr val="0070C0"/>
                               </a:solidFill>
+                              <a:latin typeface="+mn-lt"/>
                             </a:rPr>
                             <a:t>0</a:t>
                           </a:r>
@@ -8323,6 +7475,7 @@
                               <a:solidFill>
                                 <a:srgbClr val="0070C0"/>
                               </a:solidFill>
+                              <a:latin typeface="+mn-lt"/>
                             </a:rPr>
                             <a:t>1</a:t>
                           </a:r>
@@ -8341,6 +7494,7 @@
                               <a:solidFill>
                                 <a:srgbClr val="0070C0"/>
                               </a:solidFill>
+                              <a:latin typeface="+mn-lt"/>
                             </a:rPr>
                             <a:t>0</a:t>
                           </a:r>
@@ -8355,7 +7509,9 @@
                         <a:p>
                           <a:pPr algn="ctr"/>
                           <a:r>
-                            <a:rPr lang="pt-BR" dirty="0"/>
+                            <a:rPr lang="pt-BR" dirty="0">
+                              <a:latin typeface="+mn-lt"/>
+                            </a:rPr>
                             <a:t>3</a:t>
                           </a:r>
                         </a:p>
@@ -8421,7 +7577,9 @@
                               </m:oMath>
                             </m:oMathPara>
                           </a14:m>
-                          <a:endParaRPr lang="pt-BR" dirty="0"/>
+                          <a:endParaRPr lang="pt-BR" dirty="0">
+                            <a:latin typeface="+mn-lt"/>
+                          </a:endParaRPr>
                         </a:p>
                       </a:txBody>
                       <a:tcPr/>
@@ -8433,7 +7591,9 @@
                         <a:p>
                           <a:pPr algn="ctr"/>
                           <a:r>
-                            <a:rPr lang="pt-BR" dirty="0"/>
+                            <a:rPr lang="pt-BR" dirty="0">
+                              <a:latin typeface="+mn-lt"/>
+                            </a:rPr>
                             <a:t>4</a:t>
                           </a:r>
                         </a:p>
@@ -8447,7 +7607,9 @@
                         <a:p>
                           <a:pPr algn="ctr"/>
                           <a:r>
-                            <a:rPr lang="pt-BR" dirty="0"/>
+                            <a:rPr lang="pt-BR" dirty="0">
+                              <a:latin typeface="+mn-lt"/>
+                            </a:rPr>
                             <a:t>3</a:t>
                           </a:r>
                         </a:p>
@@ -8461,7 +7623,9 @@
                         <a:p>
                           <a:pPr algn="ctr"/>
                           <a:r>
-                            <a:rPr lang="pt-BR" dirty="0"/>
+                            <a:rPr lang="pt-BR" dirty="0">
+                              <a:latin typeface="+mn-lt"/>
+                            </a:rPr>
                             <a:t>-1</a:t>
                           </a:r>
                         </a:p>
@@ -8479,6 +7643,7 @@
                               <a:solidFill>
                                 <a:srgbClr val="0070C0"/>
                               </a:solidFill>
+                              <a:latin typeface="+mn-lt"/>
                             </a:rPr>
                             <a:t>0</a:t>
                           </a:r>
@@ -8497,6 +7662,7 @@
                               <a:solidFill>
                                 <a:srgbClr val="0070C0"/>
                               </a:solidFill>
+                              <a:latin typeface="+mn-lt"/>
                             </a:rPr>
                             <a:t>0</a:t>
                           </a:r>
@@ -8515,6 +7681,7 @@
                               <a:solidFill>
                                 <a:srgbClr val="0070C0"/>
                               </a:solidFill>
+                              <a:latin typeface="+mn-lt"/>
                             </a:rPr>
                             <a:t>1</a:t>
                           </a:r>
@@ -8529,7 +7696,9 @@
                         <a:p>
                           <a:pPr algn="ctr"/>
                           <a:r>
-                            <a:rPr lang="pt-BR" dirty="0"/>
+                            <a:rPr lang="pt-BR" dirty="0">
+                              <a:latin typeface="+mn-lt"/>
+                            </a:rPr>
                             <a:t>6</a:t>
                           </a:r>
                         </a:p>
@@ -8583,7 +7752,9 @@
                               </m:oMath>
                             </m:oMathPara>
                           </a14:m>
-                          <a:endParaRPr lang="pt-BR" dirty="0"/>
+                          <a:endParaRPr lang="pt-BR" dirty="0">
+                            <a:latin typeface="+mn-lt"/>
+                          </a:endParaRPr>
                         </a:p>
                       </a:txBody>
                       <a:tcPr/>
@@ -8595,7 +7766,9 @@
                         <a:p>
                           <a:pPr algn="ctr"/>
                           <a:r>
-                            <a:rPr lang="pt-BR" dirty="0"/>
+                            <a:rPr lang="pt-BR" dirty="0">
+                              <a:latin typeface="+mn-lt"/>
+                            </a:rPr>
                             <a:t>1</a:t>
                           </a:r>
                         </a:p>
@@ -8609,7 +7782,9 @@
                         <a:p>
                           <a:pPr algn="ctr"/>
                           <a:r>
-                            <a:rPr lang="pt-BR" dirty="0"/>
+                            <a:rPr lang="pt-BR" dirty="0">
+                              <a:latin typeface="+mn-lt"/>
+                            </a:rPr>
                             <a:t>2</a:t>
                           </a:r>
                         </a:p>
@@ -8623,7 +7798,9 @@
                         <a:p>
                           <a:pPr algn="ctr"/>
                           <a:r>
-                            <a:rPr lang="pt-BR" dirty="0"/>
+                            <a:rPr lang="pt-BR" dirty="0">
+                              <a:latin typeface="+mn-lt"/>
+                            </a:rPr>
                             <a:t>0</a:t>
                           </a:r>
                         </a:p>
@@ -8641,6 +7818,7 @@
                               <a:solidFill>
                                 <a:srgbClr val="0070C0"/>
                               </a:solidFill>
+                              <a:latin typeface="+mn-lt"/>
                             </a:rPr>
                             <a:t>1</a:t>
                           </a:r>
@@ -8659,6 +7837,7 @@
                               <a:solidFill>
                                 <a:srgbClr val="0070C0"/>
                               </a:solidFill>
+                              <a:latin typeface="+mn-lt"/>
                             </a:rPr>
                             <a:t>0</a:t>
                           </a:r>
@@ -8677,6 +7856,7 @@
                               <a:solidFill>
                                 <a:srgbClr val="0070C0"/>
                               </a:solidFill>
+                              <a:latin typeface="+mn-lt"/>
                             </a:rPr>
                             <a:t>0</a:t>
                           </a:r>
@@ -8691,7 +7871,9 @@
                         <a:p>
                           <a:pPr algn="ctr"/>
                           <a:r>
-                            <a:rPr lang="pt-BR" dirty="0"/>
+                            <a:rPr lang="pt-BR" dirty="0">
+                              <a:latin typeface="+mn-lt"/>
+                            </a:rPr>
                             <a:t>4</a:t>
                           </a:r>
                         </a:p>
@@ -8709,13 +7891,13 @@
             </a:graphic>
           </p:graphicFrame>
         </mc:Choice>
-        <mc:Fallback>
+        <mc:Fallback xmlns="">
           <p:graphicFrame>
             <p:nvGraphicFramePr>
               <p:cNvPr id="4" name="Tabela 1">
                 <a:extLst>
                   <a:ext uri="{FF2B5EF4-FFF2-40B4-BE49-F238E27FC236}">
-                    <a16:creationId xmlns:a16="http://schemas.microsoft.com/office/drawing/2014/main" xmlns:a14="http://schemas.microsoft.com/office/drawing/2010/main" xmlns="" id="{2D217515-1ED1-3CAD-19E2-FAE3F31349D0}"/>
+                    <a16:creationId xmlns:a16="http://schemas.microsoft.com/office/drawing/2014/main" id="{2D217515-1ED1-3CAD-19E2-FAE3F31349D0}"/>
                   </a:ext>
                 </a:extLst>
               </p:cNvPr>
@@ -8725,13 +7907,13 @@
               <p:nvPr>
                 <p:extLst>
                   <p:ext uri="{D42A27DB-BD31-4B8C-83A1-F6EECF244321}">
-                    <p14:modId xmlns:p14="http://schemas.microsoft.com/office/powerpoint/2010/main" val="2634190881"/>
+                    <p14:modId xmlns:p14="http://schemas.microsoft.com/office/powerpoint/2010/main" val="1363656837"/>
                   </p:ext>
                 </p:extLst>
               </p:nvPr>
             </p:nvGraphicFramePr>
             <p:xfrm>
-              <a:off x="1929481" y="1608388"/>
+              <a:off x="2006600" y="2265849"/>
               <a:ext cx="8178800" cy="3652352"/>
             </p:xfrm>
             <a:graphic>
@@ -8744,56 +7926,56 @@
                     <a:gridCol w="1022350">
                       <a:extLst>
                         <a:ext uri="{9D8B030D-6E8A-4147-A177-3AD203B41FA5}">
-                          <a16:colId xmlns:a16="http://schemas.microsoft.com/office/drawing/2014/main" xmlns:a14="http://schemas.microsoft.com/office/drawing/2010/main" xmlns="" val="194499480"/>
+                          <a16:colId xmlns:a16="http://schemas.microsoft.com/office/drawing/2014/main" val="194499480"/>
                         </a:ext>
                       </a:extLst>
                     </a:gridCol>
                     <a:gridCol w="1022350">
                       <a:extLst>
                         <a:ext uri="{9D8B030D-6E8A-4147-A177-3AD203B41FA5}">
-                          <a16:colId xmlns:a16="http://schemas.microsoft.com/office/drawing/2014/main" xmlns:a14="http://schemas.microsoft.com/office/drawing/2010/main" xmlns="" val="3239068335"/>
+                          <a16:colId xmlns:a16="http://schemas.microsoft.com/office/drawing/2014/main" val="3239068335"/>
                         </a:ext>
                       </a:extLst>
                     </a:gridCol>
                     <a:gridCol w="1022350">
                       <a:extLst>
                         <a:ext uri="{9D8B030D-6E8A-4147-A177-3AD203B41FA5}">
-                          <a16:colId xmlns:a16="http://schemas.microsoft.com/office/drawing/2014/main" xmlns:a14="http://schemas.microsoft.com/office/drawing/2010/main" xmlns="" val="3707295783"/>
+                          <a16:colId xmlns:a16="http://schemas.microsoft.com/office/drawing/2014/main" val="3707295783"/>
                         </a:ext>
                       </a:extLst>
                     </a:gridCol>
                     <a:gridCol w="1022350">
                       <a:extLst>
                         <a:ext uri="{9D8B030D-6E8A-4147-A177-3AD203B41FA5}">
-                          <a16:colId xmlns:a16="http://schemas.microsoft.com/office/drawing/2014/main" xmlns:a14="http://schemas.microsoft.com/office/drawing/2010/main" xmlns="" val="318886580"/>
+                          <a16:colId xmlns:a16="http://schemas.microsoft.com/office/drawing/2014/main" val="318886580"/>
                         </a:ext>
                       </a:extLst>
                     </a:gridCol>
                     <a:gridCol w="1022350">
                       <a:extLst>
                         <a:ext uri="{9D8B030D-6E8A-4147-A177-3AD203B41FA5}">
-                          <a16:colId xmlns:a16="http://schemas.microsoft.com/office/drawing/2014/main" xmlns:a14="http://schemas.microsoft.com/office/drawing/2010/main" xmlns="" val="4049606609"/>
+                          <a16:colId xmlns:a16="http://schemas.microsoft.com/office/drawing/2014/main" val="4049606609"/>
                         </a:ext>
                       </a:extLst>
                     </a:gridCol>
                     <a:gridCol w="1022350">
                       <a:extLst>
                         <a:ext uri="{9D8B030D-6E8A-4147-A177-3AD203B41FA5}">
-                          <a16:colId xmlns:a16="http://schemas.microsoft.com/office/drawing/2014/main" xmlns:a14="http://schemas.microsoft.com/office/drawing/2010/main" xmlns="" val="821043363"/>
+                          <a16:colId xmlns:a16="http://schemas.microsoft.com/office/drawing/2014/main" val="821043363"/>
                         </a:ext>
                       </a:extLst>
                     </a:gridCol>
                     <a:gridCol w="1022350">
                       <a:extLst>
                         <a:ext uri="{9D8B030D-6E8A-4147-A177-3AD203B41FA5}">
-                          <a16:colId xmlns:a16="http://schemas.microsoft.com/office/drawing/2014/main" xmlns:a14="http://schemas.microsoft.com/office/drawing/2010/main" xmlns="" val="1642525029"/>
+                          <a16:colId xmlns:a16="http://schemas.microsoft.com/office/drawing/2014/main" val="1642525029"/>
                         </a:ext>
                       </a:extLst>
                     </a:gridCol>
                     <a:gridCol w="1022350">
                       <a:extLst>
                         <a:ext uri="{9D8B030D-6E8A-4147-A177-3AD203B41FA5}">
-                          <a16:colId xmlns:a16="http://schemas.microsoft.com/office/drawing/2014/main" xmlns:a14="http://schemas.microsoft.com/office/drawing/2010/main" xmlns="" val="1236862271"/>
+                          <a16:colId xmlns:a16="http://schemas.microsoft.com/office/drawing/2014/main" val="1236862271"/>
                         </a:ext>
                       </a:extLst>
                     </a:gridCol>
@@ -8805,13 +7987,8 @@
                         <a:lstStyle/>
                         <a:p>
                           <a:r>
-                            <a:rPr lang="pt-BR" sz="3200" b="1" kern="1200" dirty="0">
-                              <a:solidFill>
-                                <a:schemeClr val="tx1"/>
-                              </a:solidFill>
+                            <a:rPr lang="pt-BR" dirty="0">
                               <a:latin typeface="+mn-lt"/>
-                              <a:ea typeface="+mn-ea"/>
-                              <a:cs typeface="+mn-cs"/>
                             </a:rPr>
                             <a:t>V.B</a:t>
                           </a:r>
@@ -8828,10 +8005,10 @@
                         </a:p>
                       </a:txBody>
                       <a:tcPr>
-                        <a:blipFill rotWithShape="1">
-                          <a:blip r:embed="rId4"/>
+                        <a:blipFill>
+                          <a:blip r:embed="rId5"/>
                           <a:stretch>
-                            <a:fillRect l="-101198" t="-11017" r="-602994" b="-407627"/>
+                            <a:fillRect l="-100595" t="-4202" r="-601190" b="-405882"/>
                           </a:stretch>
                         </a:blipFill>
                       </a:tcPr>
@@ -8845,10 +8022,10 @@
                         </a:p>
                       </a:txBody>
                       <a:tcPr>
-                        <a:blipFill rotWithShape="1">
-                          <a:blip r:embed="rId4"/>
+                        <a:blipFill>
+                          <a:blip r:embed="rId5"/>
                           <a:stretch>
-                            <a:fillRect l="-200000" t="-11017" r="-499405" b="-407627"/>
+                            <a:fillRect l="-201796" t="-4202" r="-504790" b="-405882"/>
                           </a:stretch>
                         </a:blipFill>
                       </a:tcPr>
@@ -8862,10 +8039,10 @@
                         </a:p>
                       </a:txBody>
                       <a:tcPr>
-                        <a:blipFill rotWithShape="1">
-                          <a:blip r:embed="rId4"/>
+                        <a:blipFill>
+                          <a:blip r:embed="rId5"/>
                           <a:stretch>
-                            <a:fillRect l="-300000" t="-11017" r="-399405" b="-407627"/>
+                            <a:fillRect l="-300000" t="-4202" r="-401786" b="-405882"/>
                           </a:stretch>
                         </a:blipFill>
                       </a:tcPr>
@@ -8879,10 +8056,10 @@
                         </a:p>
                       </a:txBody>
                       <a:tcPr>
-                        <a:blipFill rotWithShape="1">
-                          <a:blip r:embed="rId4"/>
+                        <a:blipFill>
+                          <a:blip r:embed="rId5"/>
                           <a:stretch>
-                            <a:fillRect l="-402395" t="-11017" r="-301796" b="-407627"/>
+                            <a:fillRect l="-400000" t="-4202" r="-301786" b="-405882"/>
                           </a:stretch>
                         </a:blipFill>
                       </a:tcPr>
@@ -8896,10 +8073,10 @@
                         </a:p>
                       </a:txBody>
                       <a:tcPr>
-                        <a:blipFill rotWithShape="1">
-                          <a:blip r:embed="rId4"/>
+                        <a:blipFill>
+                          <a:blip r:embed="rId5"/>
                           <a:stretch>
-                            <a:fillRect l="-499405" t="-11017" r="-200000" b="-407627"/>
+                            <a:fillRect l="-500000" t="-4202" r="-201786" b="-405882"/>
                           </a:stretch>
                         </a:blipFill>
                       </a:tcPr>
@@ -8913,10 +8090,10 @@
                         </a:p>
                       </a:txBody>
                       <a:tcPr>
-                        <a:blipFill rotWithShape="1">
-                          <a:blip r:embed="rId4"/>
+                        <a:blipFill>
+                          <a:blip r:embed="rId5"/>
                           <a:stretch>
-                            <a:fillRect l="-602994" t="-11017" r="-101198" b="-407627"/>
+                            <a:fillRect l="-603593" t="-4202" r="-102994" b="-405882"/>
                           </a:stretch>
                         </a:blipFill>
                       </a:tcPr>
@@ -8927,7 +8104,9 @@
                         <a:lstStyle/>
                         <a:p>
                           <a:r>
-                            <a:rPr lang="pt-BR" dirty="0"/>
+                            <a:rPr lang="pt-BR" dirty="0">
+                              <a:latin typeface="+mn-lt"/>
+                            </a:rPr>
                             <a:t>RHS</a:t>
                           </a:r>
                         </a:p>
@@ -8936,7 +8115,7 @@
                     </a:tc>
                     <a:extLst>
                       <a:ext uri="{0D108BD9-81ED-4DB2-BD59-A6C34878D82A}">
-                        <a16:rowId xmlns:a16="http://schemas.microsoft.com/office/drawing/2014/main" xmlns:a14="http://schemas.microsoft.com/office/drawing/2010/main" xmlns="" val="1803164676"/>
+                        <a16:rowId xmlns:a16="http://schemas.microsoft.com/office/drawing/2014/main" val="1803164676"/>
                       </a:ext>
                     </a:extLst>
                   </a:tr>
@@ -8952,6 +8131,7 @@
                               <a:solidFill>
                                 <a:srgbClr val="FF0000"/>
                               </a:solidFill>
+                              <a:latin typeface="+mn-lt"/>
                             </a:rPr>
                             <a:t>-z</a:t>
                           </a:r>
@@ -8959,6 +8139,7 @@
                             <a:solidFill>
                               <a:srgbClr val="FF0000"/>
                             </a:solidFill>
+                            <a:latin typeface="+mn-lt"/>
                           </a:endParaRPr>
                         </a:p>
                       </a:txBody>
@@ -8975,6 +8156,7 @@
                               <a:solidFill>
                                 <a:srgbClr val="FF0000"/>
                               </a:solidFill>
+                              <a:latin typeface="+mn-lt"/>
                             </a:rPr>
                             <a:t>4</a:t>
                           </a:r>
@@ -8993,6 +8175,7 @@
                               <a:solidFill>
                                 <a:srgbClr val="FF0000"/>
                               </a:solidFill>
+                              <a:latin typeface="+mn-lt"/>
                             </a:rPr>
                             <a:t>1</a:t>
                           </a:r>
@@ -9011,6 +8194,7 @@
                               <a:solidFill>
                                 <a:srgbClr val="FF0000"/>
                               </a:solidFill>
+                              <a:latin typeface="+mn-lt"/>
                             </a:rPr>
                             <a:t>0</a:t>
                           </a:r>
@@ -9029,6 +8213,7 @@
                               <a:solidFill>
                                 <a:srgbClr val="FF0000"/>
                               </a:solidFill>
+                              <a:latin typeface="+mn-lt"/>
                             </a:rPr>
                             <a:t>0 </a:t>
                           </a:r>
@@ -9047,6 +8232,7 @@
                               <a:solidFill>
                                 <a:srgbClr val="FF0000"/>
                               </a:solidFill>
+                              <a:latin typeface="+mn-lt"/>
                             </a:rPr>
                             <a:t>M</a:t>
                           </a:r>
@@ -9065,6 +8251,7 @@
                               <a:solidFill>
                                 <a:srgbClr val="FF0000"/>
                               </a:solidFill>
+                              <a:latin typeface="+mn-lt"/>
                             </a:rPr>
                             <a:t>M</a:t>
                           </a:r>
@@ -9083,6 +8270,7 @@
                               <a:solidFill>
                                 <a:srgbClr val="FF0000"/>
                               </a:solidFill>
+                              <a:latin typeface="+mn-lt"/>
                             </a:rPr>
                             <a:t>0</a:t>
                           </a:r>
@@ -9092,7 +8280,7 @@
                     </a:tc>
                     <a:extLst>
                       <a:ext uri="{0D108BD9-81ED-4DB2-BD59-A6C34878D82A}">
-                        <a16:rowId xmlns:a16="http://schemas.microsoft.com/office/drawing/2014/main" xmlns:a14="http://schemas.microsoft.com/office/drawing/2010/main" xmlns="" val="2503180970"/>
+                        <a16:rowId xmlns:a16="http://schemas.microsoft.com/office/drawing/2014/main" val="2503180970"/>
                       </a:ext>
                     </a:extLst>
                   </a:tr>
@@ -9106,10 +8294,10 @@
                         </a:p>
                       </a:txBody>
                       <a:tcPr>
-                        <a:blipFill rotWithShape="1">
-                          <a:blip r:embed="rId4"/>
+                        <a:blipFill>
+                          <a:blip r:embed="rId5"/>
                           <a:stretch>
-                            <a:fillRect l="-595" t="-210000" r="-698810" b="-200000"/>
+                            <a:fillRect l="-595" t="-203333" r="-701190" b="-202500"/>
                           </a:stretch>
                         </a:blipFill>
                       </a:tcPr>
@@ -9121,7 +8309,9 @@
                         <a:p>
                           <a:pPr algn="ctr"/>
                           <a:r>
-                            <a:rPr lang="pt-BR" dirty="0"/>
+                            <a:rPr lang="pt-BR" dirty="0">
+                              <a:latin typeface="+mn-lt"/>
+                            </a:rPr>
                             <a:t>3</a:t>
                           </a:r>
                         </a:p>
@@ -9135,7 +8325,9 @@
                         <a:p>
                           <a:pPr algn="ctr"/>
                           <a:r>
-                            <a:rPr lang="pt-BR" dirty="0"/>
+                            <a:rPr lang="pt-BR" dirty="0">
+                              <a:latin typeface="+mn-lt"/>
+                            </a:rPr>
                             <a:t>1</a:t>
                           </a:r>
                         </a:p>
@@ -9149,7 +8341,9 @@
                         <a:p>
                           <a:pPr algn="ctr"/>
                           <a:r>
-                            <a:rPr lang="pt-BR" dirty="0"/>
+                            <a:rPr lang="pt-BR" dirty="0">
+                              <a:latin typeface="+mn-lt"/>
+                            </a:rPr>
                             <a:t>0</a:t>
                           </a:r>
                         </a:p>
@@ -9167,6 +8361,7 @@
                               <a:solidFill>
                                 <a:srgbClr val="0070C0"/>
                               </a:solidFill>
+                              <a:latin typeface="+mn-lt"/>
                             </a:rPr>
                             <a:t>0</a:t>
                           </a:r>
@@ -9185,6 +8380,7 @@
                               <a:solidFill>
                                 <a:srgbClr val="0070C0"/>
                               </a:solidFill>
+                              <a:latin typeface="+mn-lt"/>
                             </a:rPr>
                             <a:t>1</a:t>
                           </a:r>
@@ -9203,6 +8399,7 @@
                               <a:solidFill>
                                 <a:srgbClr val="0070C0"/>
                               </a:solidFill>
+                              <a:latin typeface="+mn-lt"/>
                             </a:rPr>
                             <a:t>0</a:t>
                           </a:r>
@@ -9217,7 +8414,9 @@
                         <a:p>
                           <a:pPr algn="ctr"/>
                           <a:r>
-                            <a:rPr lang="pt-BR" dirty="0"/>
+                            <a:rPr lang="pt-BR" dirty="0">
+                              <a:latin typeface="+mn-lt"/>
+                            </a:rPr>
                             <a:t>3</a:t>
                           </a:r>
                         </a:p>
@@ -9226,7 +8425,7 @@
                     </a:tc>
                     <a:extLst>
                       <a:ext uri="{0D108BD9-81ED-4DB2-BD59-A6C34878D82A}">
-                        <a16:rowId xmlns:a16="http://schemas.microsoft.com/office/drawing/2014/main" xmlns:a14="http://schemas.microsoft.com/office/drawing/2010/main" xmlns="" val="100013666"/>
+                        <a16:rowId xmlns:a16="http://schemas.microsoft.com/office/drawing/2014/main" val="100013666"/>
                       </a:ext>
                     </a:extLst>
                   </a:tr>
@@ -9240,10 +8439,10 @@
                         </a:p>
                       </a:txBody>
                       <a:tcPr>
-                        <a:blipFill rotWithShape="1">
-                          <a:blip r:embed="rId4"/>
+                        <a:blipFill>
+                          <a:blip r:embed="rId5"/>
                           <a:stretch>
-                            <a:fillRect l="-595" t="-310000" r="-698810" b="-100000"/>
+                            <a:fillRect l="-595" t="-300826" r="-701190" b="-100826"/>
                           </a:stretch>
                         </a:blipFill>
                       </a:tcPr>
@@ -9255,7 +8454,9 @@
                         <a:p>
                           <a:pPr algn="ctr"/>
                           <a:r>
-                            <a:rPr lang="pt-BR" dirty="0"/>
+                            <a:rPr lang="pt-BR" dirty="0">
+                              <a:latin typeface="+mn-lt"/>
+                            </a:rPr>
                             <a:t>4</a:t>
                           </a:r>
                         </a:p>
@@ -9269,7 +8470,9 @@
                         <a:p>
                           <a:pPr algn="ctr"/>
                           <a:r>
-                            <a:rPr lang="pt-BR" dirty="0"/>
+                            <a:rPr lang="pt-BR" dirty="0">
+                              <a:latin typeface="+mn-lt"/>
+                            </a:rPr>
                             <a:t>3</a:t>
                           </a:r>
                         </a:p>
@@ -9283,7 +8486,9 @@
                         <a:p>
                           <a:pPr algn="ctr"/>
                           <a:r>
-                            <a:rPr lang="pt-BR" dirty="0"/>
+                            <a:rPr lang="pt-BR" dirty="0">
+                              <a:latin typeface="+mn-lt"/>
+                            </a:rPr>
                             <a:t>-1</a:t>
                           </a:r>
                         </a:p>
@@ -9301,6 +8506,7 @@
                               <a:solidFill>
                                 <a:srgbClr val="0070C0"/>
                               </a:solidFill>
+                              <a:latin typeface="+mn-lt"/>
                             </a:rPr>
                             <a:t>0</a:t>
                           </a:r>
@@ -9319,6 +8525,7 @@
                               <a:solidFill>
                                 <a:srgbClr val="0070C0"/>
                               </a:solidFill>
+                              <a:latin typeface="+mn-lt"/>
                             </a:rPr>
                             <a:t>0</a:t>
                           </a:r>
@@ -9337,6 +8544,7 @@
                               <a:solidFill>
                                 <a:srgbClr val="0070C0"/>
                               </a:solidFill>
+                              <a:latin typeface="+mn-lt"/>
                             </a:rPr>
                             <a:t>1</a:t>
                           </a:r>
@@ -9351,7 +8559,9 @@
                         <a:p>
                           <a:pPr algn="ctr"/>
                           <a:r>
-                            <a:rPr lang="pt-BR" dirty="0"/>
+                            <a:rPr lang="pt-BR" dirty="0">
+                              <a:latin typeface="+mn-lt"/>
+                            </a:rPr>
                             <a:t>6</a:t>
                           </a:r>
                         </a:p>
@@ -9360,7 +8570,7 @@
                     </a:tc>
                     <a:extLst>
                       <a:ext uri="{0D108BD9-81ED-4DB2-BD59-A6C34878D82A}">
-                        <a16:rowId xmlns:a16="http://schemas.microsoft.com/office/drawing/2014/main" xmlns:a14="http://schemas.microsoft.com/office/drawing/2010/main" xmlns="" val="3514658102"/>
+                        <a16:rowId xmlns:a16="http://schemas.microsoft.com/office/drawing/2014/main" val="3514658102"/>
                       </a:ext>
                     </a:extLst>
                   </a:tr>
@@ -9374,10 +8584,10 @@
                         </a:p>
                       </a:txBody>
                       <a:tcPr>
-                        <a:blipFill rotWithShape="1">
-                          <a:blip r:embed="rId4"/>
+                        <a:blipFill>
+                          <a:blip r:embed="rId5"/>
                           <a:stretch>
-                            <a:fillRect l="-595" t="-410000" r="-698810"/>
+                            <a:fillRect l="-595" t="-404167" r="-701190" b="-1667"/>
                           </a:stretch>
                         </a:blipFill>
                       </a:tcPr>
@@ -9389,7 +8599,9 @@
                         <a:p>
                           <a:pPr algn="ctr"/>
                           <a:r>
-                            <a:rPr lang="pt-BR" dirty="0"/>
+                            <a:rPr lang="pt-BR" dirty="0">
+                              <a:latin typeface="+mn-lt"/>
+                            </a:rPr>
                             <a:t>1</a:t>
                           </a:r>
                         </a:p>
@@ -9403,7 +8615,9 @@
                         <a:p>
                           <a:pPr algn="ctr"/>
                           <a:r>
-                            <a:rPr lang="pt-BR" dirty="0"/>
+                            <a:rPr lang="pt-BR" dirty="0">
+                              <a:latin typeface="+mn-lt"/>
+                            </a:rPr>
                             <a:t>2</a:t>
                           </a:r>
                         </a:p>
@@ -9417,7 +8631,9 @@
                         <a:p>
                           <a:pPr algn="ctr"/>
                           <a:r>
-                            <a:rPr lang="pt-BR" dirty="0"/>
+                            <a:rPr lang="pt-BR" dirty="0">
+                              <a:latin typeface="+mn-lt"/>
+                            </a:rPr>
                             <a:t>0</a:t>
                           </a:r>
                         </a:p>
@@ -9435,6 +8651,7 @@
                               <a:solidFill>
                                 <a:srgbClr val="0070C0"/>
                               </a:solidFill>
+                              <a:latin typeface="+mn-lt"/>
                             </a:rPr>
                             <a:t>1</a:t>
                           </a:r>
@@ -9453,6 +8670,7 @@
                               <a:solidFill>
                                 <a:srgbClr val="0070C0"/>
                               </a:solidFill>
+                              <a:latin typeface="+mn-lt"/>
                             </a:rPr>
                             <a:t>0</a:t>
                           </a:r>
@@ -9471,6 +8689,7 @@
                               <a:solidFill>
                                 <a:srgbClr val="0070C0"/>
                               </a:solidFill>
+                              <a:latin typeface="+mn-lt"/>
                             </a:rPr>
                             <a:t>0</a:t>
                           </a:r>
@@ -9485,7 +8704,9 @@
                         <a:p>
                           <a:pPr algn="ctr"/>
                           <a:r>
-                            <a:rPr lang="pt-BR" dirty="0"/>
+                            <a:rPr lang="pt-BR" dirty="0">
+                              <a:latin typeface="+mn-lt"/>
+                            </a:rPr>
                             <a:t>4</a:t>
                           </a:r>
                         </a:p>
@@ -9494,7 +8715,7 @@
                     </a:tc>
                     <a:extLst>
                       <a:ext uri="{0D108BD9-81ED-4DB2-BD59-A6C34878D82A}">
-                        <a16:rowId xmlns:a16="http://schemas.microsoft.com/office/drawing/2014/main" xmlns:a14="http://schemas.microsoft.com/office/drawing/2010/main" xmlns="" val="58197397"/>
+                        <a16:rowId xmlns:a16="http://schemas.microsoft.com/office/drawing/2014/main" val="58197397"/>
                       </a:ext>
                     </a:extLst>
                   </a:tr>
@@ -9504,36 +8725,6 @@
           </p:graphicFrame>
         </mc:Fallback>
       </mc:AlternateContent>
-      <p:sp>
-        <p:nvSpPr>
-          <p:cNvPr id="3" name="CaixaDeTexto 2"/>
-          <p:cNvSpPr txBox="1"/>
-          <p:nvPr/>
-        </p:nvSpPr>
-        <p:spPr>
-          <a:xfrm>
-            <a:off x="605928" y="5387248"/>
-            <a:ext cx="10499074" cy="1200329"/>
-          </a:xfrm>
-          <a:prstGeom prst="rect">
-            <a:avLst/>
-          </a:prstGeom>
-          <a:noFill/>
-        </p:spPr>
-        <p:txBody>
-          <a:bodyPr wrap="square" rtlCol="0">
-            <a:spAutoFit/>
-          </a:bodyPr>
-          <a:lstStyle/>
-          <a:p>
-            <a:r>
-              <a:rPr lang="pt-BR" b="1" dirty="0" smtClean="0"/>
-              <a:t>Observação: A tabela simplex inicial do Big-M precisa ser ajustada para que possamos executar o algoritmo simplex. Precisamos zerar os coeficientes das variáveis artificiais. Para isto basta usar operações de Gauss-Jordan adequada.</a:t>
-            </a:r>
-            <a:endParaRPr lang="pt-BR" b="1" dirty="0"/>
-          </a:p>
-        </p:txBody>
-      </p:sp>
     </p:spTree>
     <p:extLst>
       <p:ext uri="{BB962C8B-B14F-4D97-AF65-F5344CB8AC3E}">
@@ -9572,36 +8763,43 @@
       </p:grpSpPr>
       <p:pic>
         <p:nvPicPr>
-          <p:cNvPr id="10" name="Imagem 9" descr="Uma imagem contendo Desenho técnico&#10;&#10;O conteúdo gerado por IA pode estar incorreto.">
+          <p:cNvPr id="7" name="Imagem 6" descr="Ícone&#10;&#10;O conteúdo gerado por IA pode estar incorreto.">
             <a:extLst>
               <a:ext uri="{FF2B5EF4-FFF2-40B4-BE49-F238E27FC236}">
-                <a16:creationId xmlns:a16="http://schemas.microsoft.com/office/drawing/2014/main" xmlns="" id="{429E45F5-6830-BB1A-415B-80DAF75A1798}"/>
+                <a16:creationId xmlns:a16="http://schemas.microsoft.com/office/drawing/2014/main" xmlns="" id="{0B446F3B-12CE-44C7-89D8-A33B4841A4EB}"/>
               </a:ext>
             </a:extLst>
           </p:cNvPr>
           <p:cNvPicPr>
-            <a:picLocks noGrp="1" noRot="1" noChangeAspect="1" noMove="1" noResize="1" noEditPoints="1" noAdjustHandles="1" noChangeArrowheads="1" noChangeShapeType="1" noCrop="1"/>
+            <a:picLocks noChangeAspect="1"/>
           </p:cNvPicPr>
           <p:nvPr/>
         </p:nvPicPr>
         <p:blipFill>
           <a:blip r:embed="rId2">
-            <a:alphaModFix amt="20000"/>
             <a:extLst>
+              <a:ext uri="{BEBA8EAE-BF5A-486C-A8C5-ECC9F3942E4B}">
+                <a14:imgProps xmlns:a14="http://schemas.microsoft.com/office/drawing/2010/main">
+                  <a14:imgLayer r:embed="rId3">
+                    <a14:imgEffect>
+                      <a14:artisticPhotocopy/>
+                    </a14:imgEffect>
+                  </a14:imgLayer>
+                </a14:imgProps>
+              </a:ext>
               <a:ext uri="{28A0092B-C50C-407E-A947-70E740481C1C}">
                 <a14:useLocalDpi xmlns:a14="http://schemas.microsoft.com/office/drawing/2010/main" val="0"/>
               </a:ext>
             </a:extLst>
           </a:blip>
-          <a:srcRect t="26080"/>
           <a:stretch>
             <a:fillRect/>
           </a:stretch>
         </p:blipFill>
         <p:spPr>
           <a:xfrm>
-            <a:off x="0" y="11128"/>
-            <a:ext cx="9262533" cy="6846872"/>
+            <a:off x="9697652" y="4436988"/>
+            <a:ext cx="2430765" cy="2251559"/>
           </a:xfrm>
           <a:prstGeom prst="rect">
             <a:avLst/>
@@ -9623,7 +8821,7 @@
         <p:spPr>
           <a:xfrm>
             <a:off x="1000429" y="847992"/>
-            <a:ext cx="10191141" cy="580993"/>
+            <a:ext cx="10191141" cy="580031"/>
           </a:xfrm>
           <a:prstGeom prst="rect">
             <a:avLst/>
@@ -9635,34 +8833,51 @@
           </a:bodyPr>
           <a:lstStyle/>
           <a:p>
-            <a:pPr algn="ctr">
+            <a:pPr>
               <a:lnSpc>
                 <a:spcPts val="4184"/>
               </a:lnSpc>
             </a:pPr>
             <a:r>
-              <a:rPr lang="pt-BR" sz="5230" b="1" dirty="0">
+              <a:rPr lang="pt-BR" sz="5900" dirty="0">
                 <a:solidFill>
                   <a:schemeClr val="tx2">
-                    <a:lumMod val="75000"/>
+                    <a:lumMod val="90000"/>
+                    <a:lumOff val="10000"/>
                   </a:schemeClr>
                 </a:solidFill>
-                <a:latin typeface="Hagrid Text Bold"/>
-                <a:ea typeface="Hagrid Text Bold"/>
-                <a:cs typeface="Hagrid Text Bold"/>
+                <a:latin typeface="Aharoni" panose="02010803020104030203" pitchFamily="2" charset="-79"/>
+                <a:ea typeface="+mj-ea"/>
+                <a:cs typeface="Aharoni" panose="02010803020104030203" pitchFamily="2" charset="-79"/>
                 <a:sym typeface="Hagrid Text Bold"/>
               </a:rPr>
-              <a:t>Método das duas fases</a:t>
+              <a:t>Método </a:t>
             </a:r>
-            <a:endParaRPr lang="en-US" sz="5230" b="1" spc="-219" dirty="0">
+            <a:r>
+              <a:rPr lang="pt-BR" sz="5900" dirty="0" smtClean="0">
+                <a:solidFill>
+                  <a:schemeClr val="tx2">
+                    <a:lumMod val="90000"/>
+                    <a:lumOff val="10000"/>
+                  </a:schemeClr>
+                </a:solidFill>
+                <a:latin typeface="Aharoni" panose="02010803020104030203" pitchFamily="2" charset="-79"/>
+                <a:ea typeface="+mj-ea"/>
+                <a:cs typeface="Aharoni" panose="02010803020104030203" pitchFamily="2" charset="-79"/>
+                <a:sym typeface="Hagrid Text Bold"/>
+              </a:rPr>
+              <a:t>do Big-M</a:t>
+            </a:r>
+            <a:endParaRPr lang="en-US" sz="5900" dirty="0">
               <a:solidFill>
                 <a:schemeClr val="tx2">
-                  <a:lumMod val="75000"/>
+                  <a:lumMod val="90000"/>
+                  <a:lumOff val="10000"/>
                 </a:schemeClr>
               </a:solidFill>
-              <a:latin typeface="Hagrid Text Bold"/>
-              <a:ea typeface="Hagrid Text Bold"/>
-              <a:cs typeface="Hagrid Text Bold"/>
+              <a:latin typeface="Aharoni" panose="02010803020104030203" pitchFamily="2" charset="-79"/>
+              <a:ea typeface="+mj-ea"/>
+              <a:cs typeface="Aharoni" panose="02010803020104030203" pitchFamily="2" charset="-79"/>
               <a:sym typeface="Hagrid Text Bold"/>
             </a:endParaRPr>
           </a:p>
@@ -9683,7 +8898,7 @@
         <p:spPr>
           <a:xfrm>
             <a:off x="754454" y="1681280"/>
-            <a:ext cx="10683089" cy="4924425"/>
+            <a:ext cx="10683089" cy="1107996"/>
           </a:xfrm>
           <a:prstGeom prst="rect">
             <a:avLst/>
@@ -9696,55 +8911,26 @@
           <a:lstStyle/>
           <a:p>
             <a:r>
-              <a:rPr lang="pt-BR" sz="3200" b="1" i="1" dirty="0"/>
-              <a:t>Inicialização: </a:t>
+              <a:rPr lang="pt-BR" sz="2400" dirty="0" smtClean="0">
+                <a:sym typeface="Symbol"/>
+              </a:rPr>
+              <a:t>Esta tabela deverá ser organizada antes da aplicação do algoritmo simplex, assistam a </a:t>
             </a:r>
             <a:r>
-              <a:rPr lang="pt-BR" sz="3200" dirty="0"/>
-              <a:t>revisar as restrições do PPL original introduzindo as </a:t>
+              <a:rPr lang="pt-BR" sz="2400" dirty="0" err="1" smtClean="0">
+                <a:sym typeface="Symbol"/>
+              </a:rPr>
+              <a:t>videoaula</a:t>
             </a:r>
             <a:r>
-              <a:rPr lang="pt-BR" sz="3200" dirty="0" err="1"/>
-              <a:t>VAs</a:t>
-            </a:r>
-            <a:r>
-              <a:rPr lang="pt-BR" sz="3200" dirty="0"/>
-              <a:t> conforme necessário para obter uma SBV inicial para o PPL artificial.</a:t>
-            </a:r>
-          </a:p>
-          <a:p>
-            <a:endParaRPr lang="pt-BR" sz="3200" dirty="0"/>
-          </a:p>
-          <a:p>
-            <a:r>
-              <a:rPr lang="pt-BR" sz="3200" b="1" i="1" dirty="0"/>
-              <a:t>Fase I: </a:t>
-            </a:r>
-            <a:r>
-              <a:rPr lang="pt-BR" sz="3200" dirty="0"/>
-              <a:t>O objetivo dessa fase é encontra uma SBV para o PPL original. Para tanto,</a:t>
-            </a:r>
-          </a:p>
-          <a:p>
-            <a:pPr algn="ctr"/>
-            <a:r>
-              <a:rPr lang="pt-BR" sz="3200" b="1" dirty="0"/>
-              <a:t>Min z = </a:t>
-            </a:r>
-            <a:r>
-              <a:rPr lang="pt-BR" sz="3200" b="1" dirty="0">
+              <a:rPr lang="pt-BR" sz="2400" dirty="0" smtClean="0">
                 <a:sym typeface="Symbol"/>
               </a:rPr>
-              <a:t> variáveis artificiais.</a:t>
+              <a:t> prática da execução do método para entender como isto é feito.</a:t>
             </a:r>
-          </a:p>
-          <a:p>
-            <a:r>
-              <a:rPr lang="pt-BR" sz="3200" dirty="0">
-                <a:sym typeface="Symbol"/>
-              </a:rPr>
-              <a:t>A solução ótima obtida para esse problema com z = 0 será uma SBV para o PPL original.</a:t>
-            </a:r>
+            <a:endParaRPr lang="pt-BR" sz="2400" dirty="0">
+              <a:sym typeface="Symbol"/>
+            </a:endParaRPr>
           </a:p>
         </p:txBody>
       </p:sp>
@@ -9754,225 +8940,6 @@
             <a:extLst>
               <a:ext uri="{FF2B5EF4-FFF2-40B4-BE49-F238E27FC236}">
                 <a16:creationId xmlns:a16="http://schemas.microsoft.com/office/drawing/2014/main" xmlns="" id="{FC116158-B455-16BD-6229-935DC08A3098}"/>
-              </a:ext>
-            </a:extLst>
-          </p:cNvPr>
-          <p:cNvPicPr>
-            <a:picLocks noChangeAspect="1"/>
-          </p:cNvPicPr>
-          <p:nvPr/>
-        </p:nvPicPr>
-        <p:blipFill>
-          <a:blip r:embed="rId3" cstate="print">
-            <a:extLst>
-              <a:ext uri="{28A0092B-C50C-407E-A947-70E740481C1C}">
-                <a14:useLocalDpi xmlns:a14="http://schemas.microsoft.com/office/drawing/2010/main" val="0"/>
-              </a:ext>
-            </a:extLst>
-          </a:blip>
-          <a:stretch>
-            <a:fillRect/>
-          </a:stretch>
-        </p:blipFill>
-        <p:spPr>
-          <a:xfrm>
-            <a:off x="10913035" y="11128"/>
-            <a:ext cx="1270000" cy="1264823"/>
-          </a:xfrm>
-          <a:prstGeom prst="rect">
-            <a:avLst/>
-          </a:prstGeom>
-        </p:spPr>
-      </p:pic>
-    </p:spTree>
-    <p:extLst>
-      <p:ext uri="{BB962C8B-B14F-4D97-AF65-F5344CB8AC3E}">
-        <p14:creationId xmlns:p14="http://schemas.microsoft.com/office/powerpoint/2010/main" val="2356616145"/>
-      </p:ext>
-    </p:extLst>
-  </p:cSld>
-  <p:clrMapOvr>
-    <a:masterClrMapping/>
-  </p:clrMapOvr>
-</p:sld>
-</file>
-
-<file path=ppt/slides/slide13.xml><?xml version="1.0" encoding="utf-8"?>
-<p:sld xmlns:a="http://schemas.openxmlformats.org/drawingml/2006/main" xmlns:r="http://schemas.openxmlformats.org/officeDocument/2006/relationships" xmlns:p="http://schemas.openxmlformats.org/presentationml/2006/main">
-  <p:cSld>
-    <p:spTree>
-      <p:nvGrpSpPr>
-        <p:cNvPr id="1" name="">
-          <a:extLst>
-            <a:ext uri="{FF2B5EF4-FFF2-40B4-BE49-F238E27FC236}">
-              <a16:creationId xmlns:a16="http://schemas.microsoft.com/office/drawing/2014/main" xmlns="" id="{A3889EFC-8938-2979-C5D3-013C98C3711F}"/>
-            </a:ext>
-          </a:extLst>
-        </p:cNvPr>
-        <p:cNvGrpSpPr/>
-        <p:nvPr/>
-      </p:nvGrpSpPr>
-      <p:grpSpPr>
-        <a:xfrm>
-          <a:off x="0" y="0"/>
-          <a:ext cx="0" cy="0"/>
-          <a:chOff x="0" y="0"/>
-          <a:chExt cx="0" cy="0"/>
-        </a:xfrm>
-      </p:grpSpPr>
-      <p:pic>
-        <p:nvPicPr>
-          <p:cNvPr id="10" name="Imagem 9" descr="Uma imagem contendo Desenho técnico&#10;&#10;O conteúdo gerado por IA pode estar incorreto.">
-            <a:extLst>
-              <a:ext uri="{FF2B5EF4-FFF2-40B4-BE49-F238E27FC236}">
-                <a16:creationId xmlns:a16="http://schemas.microsoft.com/office/drawing/2014/main" xmlns="" id="{20E55894-111A-A77F-DD20-A4219FB3579F}"/>
-              </a:ext>
-            </a:extLst>
-          </p:cNvPr>
-          <p:cNvPicPr>
-            <a:picLocks noGrp="1" noRot="1" noChangeAspect="1" noMove="1" noResize="1" noEditPoints="1" noAdjustHandles="1" noChangeArrowheads="1" noChangeShapeType="1" noCrop="1"/>
-          </p:cNvPicPr>
-          <p:nvPr/>
-        </p:nvPicPr>
-        <p:blipFill>
-          <a:blip r:embed="rId3">
-            <a:alphaModFix amt="20000"/>
-            <a:extLst>
-              <a:ext uri="{28A0092B-C50C-407E-A947-70E740481C1C}">
-                <a14:useLocalDpi xmlns:a14="http://schemas.microsoft.com/office/drawing/2010/main" val="0"/>
-              </a:ext>
-            </a:extLst>
-          </a:blip>
-          <a:srcRect t="26080"/>
-          <a:stretch>
-            <a:fillRect/>
-          </a:stretch>
-        </p:blipFill>
-        <p:spPr>
-          <a:xfrm>
-            <a:off x="0" y="11128"/>
-            <a:ext cx="9262533" cy="6846872"/>
-          </a:xfrm>
-          <a:prstGeom prst="rect">
-            <a:avLst/>
-          </a:prstGeom>
-        </p:spPr>
-      </p:pic>
-      <p:sp>
-        <p:nvSpPr>
-          <p:cNvPr id="5" name="TextBox 5">
-            <a:extLst>
-              <a:ext uri="{FF2B5EF4-FFF2-40B4-BE49-F238E27FC236}">
-                <a16:creationId xmlns:a16="http://schemas.microsoft.com/office/drawing/2014/main" xmlns="" id="{FEBFB41E-3122-0973-6743-840FE9D20E36}"/>
-              </a:ext>
-            </a:extLst>
-          </p:cNvPr>
-          <p:cNvSpPr txBox="1"/>
-          <p:nvPr/>
-        </p:nvSpPr>
-        <p:spPr>
-          <a:xfrm>
-            <a:off x="1000429" y="847992"/>
-            <a:ext cx="10191141" cy="580993"/>
-          </a:xfrm>
-          <a:prstGeom prst="rect">
-            <a:avLst/>
-          </a:prstGeom>
-        </p:spPr>
-        <p:txBody>
-          <a:bodyPr lIns="0" tIns="0" rIns="0" bIns="0" rtlCol="0" anchor="t">
-            <a:spAutoFit/>
-          </a:bodyPr>
-          <a:lstStyle/>
-          <a:p>
-            <a:pPr algn="ctr">
-              <a:lnSpc>
-                <a:spcPts val="4184"/>
-              </a:lnSpc>
-            </a:pPr>
-            <a:r>
-              <a:rPr lang="pt-BR" sz="5230" b="1" dirty="0">
-                <a:solidFill>
-                  <a:schemeClr val="tx2">
-                    <a:lumMod val="75000"/>
-                  </a:schemeClr>
-                </a:solidFill>
-                <a:latin typeface="Hagrid Text Bold"/>
-                <a:ea typeface="Hagrid Text Bold"/>
-                <a:cs typeface="Hagrid Text Bold"/>
-                <a:sym typeface="Hagrid Text Bold"/>
-              </a:rPr>
-              <a:t>Método das duas fases</a:t>
-            </a:r>
-            <a:endParaRPr lang="en-US" sz="5230" b="1" spc="-219" dirty="0">
-              <a:solidFill>
-                <a:schemeClr val="tx2">
-                  <a:lumMod val="75000"/>
-                </a:schemeClr>
-              </a:solidFill>
-              <a:latin typeface="Hagrid Text Bold"/>
-              <a:ea typeface="Hagrid Text Bold"/>
-              <a:cs typeface="Hagrid Text Bold"/>
-              <a:sym typeface="Hagrid Text Bold"/>
-            </a:endParaRPr>
-          </a:p>
-        </p:txBody>
-      </p:sp>
-      <p:sp>
-        <p:nvSpPr>
-          <p:cNvPr id="6" name="TextBox 6">
-            <a:extLst>
-              <a:ext uri="{FF2B5EF4-FFF2-40B4-BE49-F238E27FC236}">
-                <a16:creationId xmlns:a16="http://schemas.microsoft.com/office/drawing/2014/main" xmlns="" id="{A87D3614-0271-7685-3F67-42033586158D}"/>
-              </a:ext>
-            </a:extLst>
-          </p:cNvPr>
-          <p:cNvSpPr txBox="1"/>
-          <p:nvPr/>
-        </p:nvSpPr>
-        <p:spPr>
-          <a:xfrm>
-            <a:off x="754454" y="1681280"/>
-            <a:ext cx="10683089" cy="4431983"/>
-          </a:xfrm>
-          <a:prstGeom prst="rect">
-            <a:avLst/>
-          </a:prstGeom>
-        </p:spPr>
-        <p:txBody>
-          <a:bodyPr wrap="square" lIns="0" tIns="0" rIns="0" bIns="0" rtlCol="0" anchor="t">
-            <a:spAutoFit/>
-          </a:bodyPr>
-          <a:lstStyle/>
-          <a:p>
-            <a:endParaRPr lang="pt-BR" sz="3200" dirty="0">
-              <a:sym typeface="Symbol"/>
-            </a:endParaRPr>
-          </a:p>
-          <a:p>
-            <a:pPr algn="just"/>
-            <a:r>
-              <a:rPr lang="pt-BR" sz="3200" b="1" i="1" dirty="0">
-                <a:sym typeface="Symbol"/>
-              </a:rPr>
-              <a:t>Fase II: </a:t>
-            </a:r>
-            <a:r>
-              <a:rPr lang="pt-BR" sz="3200" dirty="0">
-                <a:sym typeface="Symbol"/>
-              </a:rPr>
-              <a:t>O objetivo dessa fase é encontrar uma solução ótima para o PPL original. Visto que as variáveis artificiais não fazem parte do PPL original, estas podem ser eliminadas agora, desde que sejam VNB. Iniciando da SBV obtida no final da fase I, usar o método simplex para solucionar o PPL  original.</a:t>
-            </a:r>
-            <a:endParaRPr lang="pt-BR" sz="3200" dirty="0"/>
-          </a:p>
-        </p:txBody>
-      </p:sp>
-      <p:pic>
-        <p:nvPicPr>
-          <p:cNvPr id="12" name="Imagem 11" descr="Ícone&#10;&#10;O conteúdo gerado por IA pode estar incorreto.">
-            <a:extLst>
-              <a:ext uri="{FF2B5EF4-FFF2-40B4-BE49-F238E27FC236}">
-                <a16:creationId xmlns:a16="http://schemas.microsoft.com/office/drawing/2014/main" xmlns="" id="{74E06D03-2AE3-0B58-FA91-A32431DFD374}"/>
               </a:ext>
             </a:extLst>
           </p:cNvPr>
@@ -10006,7 +8973,7 @@
     </p:spTree>
     <p:extLst>
       <p:ext uri="{BB962C8B-B14F-4D97-AF65-F5344CB8AC3E}">
-        <p14:creationId xmlns:p14="http://schemas.microsoft.com/office/powerpoint/2010/main" val="2540054745"/>
+        <p14:creationId xmlns:p14="http://schemas.microsoft.com/office/powerpoint/2010/main" val="3392426254"/>
       </p:ext>
     </p:extLst>
   </p:cSld>
@@ -10016,7 +8983,7 @@
 </p:sld>
 </file>
 
-<file path=ppt/slides/slide14.xml><?xml version="1.0" encoding="utf-8"?>
+<file path=ppt/slides/slide2.xml><?xml version="1.0" encoding="utf-8"?>
 <p:sld xmlns:a="http://schemas.openxmlformats.org/drawingml/2006/main" xmlns:r="http://schemas.openxmlformats.org/officeDocument/2006/relationships" xmlns:p="http://schemas.openxmlformats.org/presentationml/2006/main">
   <p:cSld>
     <p:spTree>
@@ -10024,7 +8991,7 @@
         <p:cNvPr id="1" name="">
           <a:extLst>
             <a:ext uri="{FF2B5EF4-FFF2-40B4-BE49-F238E27FC236}">
-              <a16:creationId xmlns:a16="http://schemas.microsoft.com/office/drawing/2014/main" xmlns="" id="{046CE81E-89C4-7F37-4153-025505D4AA10}"/>
+              <a16:creationId xmlns:a16="http://schemas.microsoft.com/office/drawing/2014/main" xmlns="" id="{EF730E9B-DD70-0811-9AF2-452FF47A4BDF}"/>
             </a:ext>
           </a:extLst>
         </p:cNvPr>
@@ -10039,174 +9006,214 @@
           <a:chExt cx="0" cy="0"/>
         </a:xfrm>
       </p:grpSpPr>
+      <p:sp>
+        <p:nvSpPr>
+          <p:cNvPr id="2" name="Título 1">
+            <a:extLst>
+              <a:ext uri="{FF2B5EF4-FFF2-40B4-BE49-F238E27FC236}">
+                <a16:creationId xmlns:a16="http://schemas.microsoft.com/office/drawing/2014/main" xmlns="" id="{87036120-57C4-563E-BBA5-CA40EBA04573}"/>
+              </a:ext>
+            </a:extLst>
+          </p:cNvPr>
+          <p:cNvSpPr>
+            <a:spLocks noGrp="1"/>
+          </p:cNvSpPr>
+          <p:nvPr>
+            <p:ph type="ctrTitle"/>
+          </p:nvPr>
+        </p:nvSpPr>
+        <p:spPr>
+          <a:xfrm>
+            <a:off x="640080" y="320040"/>
+            <a:ext cx="9638453" cy="1097707"/>
+          </a:xfrm>
+        </p:spPr>
+        <p:txBody>
+          <a:bodyPr>
+            <a:normAutofit/>
+          </a:bodyPr>
+          <a:lstStyle/>
+          <a:p>
+            <a:pPr algn="l"/>
+            <a:r>
+              <a:rPr lang="pt-BR" sz="6600" dirty="0">
+                <a:solidFill>
+                  <a:schemeClr val="tx2">
+                    <a:lumMod val="90000"/>
+                    <a:lumOff val="10000"/>
+                  </a:schemeClr>
+                </a:solidFill>
+                <a:latin typeface="Aharoni" panose="02010803020104030203" pitchFamily="2" charset="-79"/>
+                <a:cs typeface="Aharoni" panose="02010803020104030203" pitchFamily="2" charset="-79"/>
+              </a:rPr>
+              <a:t>O problema da SBV inicial</a:t>
+            </a:r>
+          </a:p>
+        </p:txBody>
+      </p:sp>
+      <p:sp>
+        <p:nvSpPr>
+          <p:cNvPr id="3" name="Subtítulo 2">
+            <a:extLst>
+              <a:ext uri="{FF2B5EF4-FFF2-40B4-BE49-F238E27FC236}">
+                <a16:creationId xmlns:a16="http://schemas.microsoft.com/office/drawing/2014/main" xmlns="" id="{B5C82DD7-C983-C45C-A0FA-FCF85369CF6A}"/>
+              </a:ext>
+            </a:extLst>
+          </p:cNvPr>
+          <p:cNvSpPr>
+            <a:spLocks noGrp="1"/>
+          </p:cNvSpPr>
+          <p:nvPr>
+            <p:ph type="subTitle" idx="1"/>
+          </p:nvPr>
+        </p:nvSpPr>
+        <p:spPr>
+          <a:xfrm>
+            <a:off x="640080" y="1747319"/>
+            <a:ext cx="9057572" cy="4453328"/>
+          </a:xfrm>
+        </p:spPr>
+        <p:txBody>
+          <a:bodyPr>
+            <a:normAutofit/>
+          </a:bodyPr>
+          <a:lstStyle/>
+          <a:p>
+            <a:pPr marL="457200" indent="-457200" algn="just">
+              <a:buFont typeface="Arial" panose="020B0604020202020204" pitchFamily="34" charset="0"/>
+              <a:buChar char="•"/>
+            </a:pPr>
+            <a:r>
+              <a:rPr lang="pt-BR" sz="2400" dirty="0" err="1">
+                <a:ea typeface="Hagrid Text"/>
+                <a:cs typeface="Hagrid Text"/>
+                <a:sym typeface="Hagrid Text"/>
+              </a:rPr>
+              <a:t>PPLs</a:t>
+            </a:r>
+            <a:r>
+              <a:rPr lang="pt-BR" sz="2400" dirty="0">
+                <a:ea typeface="Hagrid Text"/>
+                <a:cs typeface="Hagrid Text"/>
+                <a:sym typeface="Hagrid Text"/>
+              </a:rPr>
+              <a:t> nos quais todas as restrições são (</a:t>
+            </a:r>
+            <a:r>
+              <a:rPr lang="pt-BR" sz="2400" dirty="0">
+                <a:ea typeface="Hagrid Text"/>
+                <a:cs typeface="Calibri" panose="020F0502020204030204" pitchFamily="34" charset="0"/>
+                <a:sym typeface="Hagrid Text"/>
+              </a:rPr>
+              <a:t>≤</a:t>
+            </a:r>
+            <a:r>
+              <a:rPr lang="pt-BR" sz="2400" dirty="0">
+                <a:ea typeface="Hagrid Text"/>
+                <a:cs typeface="Hagrid Text"/>
+                <a:sym typeface="Hagrid Text"/>
+              </a:rPr>
+              <a:t>) com lados direitos não negativos oferecem uma SBV inicial na qual todas as variáveis são de folga.</a:t>
+            </a:r>
+          </a:p>
+          <a:p>
+            <a:pPr marL="457200" indent="-457200" algn="just">
+              <a:buFont typeface="Arial" panose="020B0604020202020204" pitchFamily="34" charset="0"/>
+              <a:buChar char="•"/>
+            </a:pPr>
+            <a:endParaRPr lang="pt-BR" sz="2400" dirty="0">
+              <a:ea typeface="Hagrid Text"/>
+              <a:cs typeface="Hagrid Text"/>
+              <a:sym typeface="Hagrid Text"/>
+            </a:endParaRPr>
+          </a:p>
+          <a:p>
+            <a:pPr marL="457200" indent="-457200" algn="just">
+              <a:buFont typeface="Arial" panose="020B0604020202020204" pitchFamily="34" charset="0"/>
+              <a:buChar char="•"/>
+            </a:pPr>
+            <a:r>
+              <a:rPr lang="pt-BR" sz="2400" dirty="0">
+                <a:ea typeface="Hagrid Text"/>
+                <a:cs typeface="Hagrid Text"/>
+                <a:sym typeface="Hagrid Text"/>
+              </a:rPr>
+              <a:t>Isso não acontece com modelos que envolvem restrições (=) e/ou (</a:t>
+            </a:r>
+            <a:r>
+              <a:rPr lang="pt-BR" sz="2400" dirty="0">
+                <a:ea typeface="Hagrid Text"/>
+                <a:cs typeface="Calibri" panose="020F0502020204030204" pitchFamily="34" charset="0"/>
+                <a:sym typeface="Hagrid Text"/>
+              </a:rPr>
+              <a:t>≥</a:t>
+            </a:r>
+            <a:r>
+              <a:rPr lang="pt-BR" sz="2400" dirty="0">
+                <a:ea typeface="Hagrid Text"/>
+                <a:cs typeface="Hagrid Text"/>
+                <a:sym typeface="Hagrid Text"/>
+              </a:rPr>
+              <a:t>).</a:t>
+            </a:r>
+          </a:p>
+          <a:p>
+            <a:pPr algn="just"/>
+            <a:endParaRPr lang="pt-BR" dirty="0"/>
+          </a:p>
+        </p:txBody>
+      </p:sp>
       <p:pic>
         <p:nvPicPr>
-          <p:cNvPr id="10" name="Imagem 9" descr="Uma imagem contendo Desenho técnico&#10;&#10;O conteúdo gerado por IA pode estar incorreto.">
+          <p:cNvPr id="6" name="Imagem 5" descr="Ícone&#10;&#10;O conteúdo gerado por IA pode estar incorreto.">
             <a:extLst>
               <a:ext uri="{FF2B5EF4-FFF2-40B4-BE49-F238E27FC236}">
-                <a16:creationId xmlns:a16="http://schemas.microsoft.com/office/drawing/2014/main" xmlns="" id="{533CE42F-6C39-31D8-34E5-1C4479539EFF}"/>
+                <a16:creationId xmlns:a16="http://schemas.microsoft.com/office/drawing/2014/main" xmlns="" id="{45E21DF8-E032-64DE-70A1-883623A4A146}"/>
               </a:ext>
             </a:extLst>
           </p:cNvPr>
           <p:cNvPicPr>
-            <a:picLocks noGrp="1" noRot="1" noChangeAspect="1" noMove="1" noResize="1" noEditPoints="1" noAdjustHandles="1" noChangeArrowheads="1" noChangeShapeType="1" noCrop="1"/>
+            <a:picLocks noChangeAspect="1"/>
           </p:cNvPicPr>
           <p:nvPr/>
         </p:nvPicPr>
         <p:blipFill>
-          <a:blip r:embed="rId3">
-            <a:alphaModFix amt="20000"/>
+          <a:blip r:embed="rId2">
             <a:extLst>
+              <a:ext uri="{BEBA8EAE-BF5A-486C-A8C5-ECC9F3942E4B}">
+                <a14:imgProps xmlns:a14="http://schemas.microsoft.com/office/drawing/2010/main">
+                  <a14:imgLayer r:embed="rId3">
+                    <a14:imgEffect>
+                      <a14:artisticPhotocopy/>
+                    </a14:imgEffect>
+                  </a14:imgLayer>
+                </a14:imgProps>
+              </a:ext>
               <a:ext uri="{28A0092B-C50C-407E-A947-70E740481C1C}">
                 <a14:useLocalDpi xmlns:a14="http://schemas.microsoft.com/office/drawing/2010/main" val="0"/>
               </a:ext>
             </a:extLst>
           </a:blip>
-          <a:srcRect t="26080"/>
           <a:stretch>
             <a:fillRect/>
           </a:stretch>
         </p:blipFill>
         <p:spPr>
           <a:xfrm>
-            <a:off x="0" y="11128"/>
-            <a:ext cx="9262533" cy="6846872"/>
+            <a:off x="9697652" y="4436988"/>
+            <a:ext cx="2430765" cy="2251559"/>
           </a:xfrm>
           <a:prstGeom prst="rect">
             <a:avLst/>
           </a:prstGeom>
         </p:spPr>
       </p:pic>
-      <p:sp>
-        <p:nvSpPr>
-          <p:cNvPr id="5" name="TextBox 5">
+      <p:pic>
+        <p:nvPicPr>
+          <p:cNvPr id="7" name="Imagem 6" descr="Ícone&#10;&#10;O conteúdo gerado por IA pode estar incorreto.">
             <a:extLst>
               <a:ext uri="{FF2B5EF4-FFF2-40B4-BE49-F238E27FC236}">
-                <a16:creationId xmlns:a16="http://schemas.microsoft.com/office/drawing/2014/main" xmlns="" id="{D8E48D38-9C9B-187C-89DC-F8FC43D6C9F3}"/>
-              </a:ext>
-            </a:extLst>
-          </p:cNvPr>
-          <p:cNvSpPr txBox="1"/>
-          <p:nvPr/>
-        </p:nvSpPr>
-        <p:spPr>
-          <a:xfrm>
-            <a:off x="754454" y="847992"/>
-            <a:ext cx="10437117" cy="580993"/>
-          </a:xfrm>
-          <a:prstGeom prst="rect">
-            <a:avLst/>
-          </a:prstGeom>
-        </p:spPr>
-        <p:txBody>
-          <a:bodyPr wrap="square" lIns="0" tIns="0" rIns="0" bIns="0" rtlCol="0" anchor="t">
-            <a:spAutoFit/>
-          </a:bodyPr>
-          <a:lstStyle/>
-          <a:p>
-            <a:pPr algn="ctr">
-              <a:lnSpc>
-                <a:spcPts val="4184"/>
-              </a:lnSpc>
-            </a:pPr>
-            <a:r>
-              <a:rPr lang="pt-BR" sz="5230" b="1" dirty="0">
-                <a:solidFill>
-                  <a:schemeClr val="tx2">
-                    <a:lumMod val="75000"/>
-                  </a:schemeClr>
-                </a:solidFill>
-                <a:latin typeface="Hagrid Text Bold"/>
-                <a:ea typeface="Hagrid Text Bold"/>
-                <a:cs typeface="Hagrid Text Bold"/>
-                <a:sym typeface="Hagrid Text Bold"/>
-              </a:rPr>
-              <a:t>Método das duas fases: observação</a:t>
-            </a:r>
-            <a:endParaRPr lang="en-US" sz="5230" b="1" spc="-219" dirty="0">
-              <a:solidFill>
-                <a:schemeClr val="tx2">
-                  <a:lumMod val="75000"/>
-                </a:schemeClr>
-              </a:solidFill>
-              <a:latin typeface="Hagrid Text Bold"/>
-              <a:ea typeface="Hagrid Text Bold"/>
-              <a:cs typeface="Hagrid Text Bold"/>
-              <a:sym typeface="Hagrid Text Bold"/>
-            </a:endParaRPr>
-          </a:p>
-        </p:txBody>
-      </p:sp>
-      <p:sp>
-        <p:nvSpPr>
-          <p:cNvPr id="6" name="TextBox 6">
-            <a:extLst>
-              <a:ext uri="{FF2B5EF4-FFF2-40B4-BE49-F238E27FC236}">
-                <a16:creationId xmlns:a16="http://schemas.microsoft.com/office/drawing/2014/main" xmlns="" id="{9F23468E-FFC2-B0DA-2C7B-B07620A76A72}"/>
-              </a:ext>
-            </a:extLst>
-          </p:cNvPr>
-          <p:cNvSpPr txBox="1"/>
-          <p:nvPr/>
-        </p:nvSpPr>
-        <p:spPr>
-          <a:xfrm>
-            <a:off x="754454" y="1681280"/>
-            <a:ext cx="10683089" cy="3447098"/>
-          </a:xfrm>
-          <a:prstGeom prst="rect">
-            <a:avLst/>
-          </a:prstGeom>
-        </p:spPr>
-        <p:txBody>
-          <a:bodyPr wrap="square" lIns="0" tIns="0" rIns="0" bIns="0" rtlCol="0" anchor="t">
-            <a:spAutoFit/>
-          </a:bodyPr>
-          <a:lstStyle/>
-          <a:p>
-            <a:endParaRPr lang="pt-BR" sz="3200" dirty="0">
-              <a:sym typeface="Symbol"/>
-            </a:endParaRPr>
-          </a:p>
-          <a:p>
-            <a:r>
-              <a:rPr lang="pt-BR" sz="3200" dirty="0"/>
-              <a:t>A remoção das </a:t>
-            </a:r>
-            <a:r>
-              <a:rPr lang="pt-BR" sz="3200" dirty="0" err="1"/>
-              <a:t>VAs</a:t>
-            </a:r>
-            <a:r>
-              <a:rPr lang="pt-BR" sz="3200" dirty="0"/>
-              <a:t> e de suas colunas no final da fase I só pode ocorrer quando todas elas forem VNB. </a:t>
-            </a:r>
-          </a:p>
-          <a:p>
-            <a:endParaRPr lang="pt-BR" sz="3200" dirty="0"/>
-          </a:p>
-          <a:p>
-            <a:r>
-              <a:rPr lang="pt-BR" sz="3200" dirty="0"/>
-              <a:t>Se uma ou mais </a:t>
-            </a:r>
-            <a:r>
-              <a:rPr lang="pt-BR" sz="3200" dirty="0" err="1"/>
-              <a:t>VAs</a:t>
-            </a:r>
-            <a:r>
-              <a:rPr lang="pt-BR" sz="3200" dirty="0"/>
-              <a:t> forem VB (em nível zero) no final da fase I, então é preciso executar as seguintes etapas adicionais para removê-las antes do início da fase II. </a:t>
-            </a:r>
-          </a:p>
-        </p:txBody>
-      </p:sp>
-      <p:pic>
-        <p:nvPicPr>
-          <p:cNvPr id="12" name="Imagem 11" descr="Ícone&#10;&#10;O conteúdo gerado por IA pode estar incorreto.">
-            <a:extLst>
-              <a:ext uri="{FF2B5EF4-FFF2-40B4-BE49-F238E27FC236}">
-                <a16:creationId xmlns:a16="http://schemas.microsoft.com/office/drawing/2014/main" xmlns="" id="{74606C8F-A337-7C4A-2C4E-55AF258036C4}"/>
+                <a16:creationId xmlns:a16="http://schemas.microsoft.com/office/drawing/2014/main" xmlns="" id="{F5FDAB1B-EEB7-2115-990B-AFAF9C521E27}"/>
               </a:ext>
             </a:extLst>
           </p:cNvPr>
@@ -10240,17 +9247,24 @@
     </p:spTree>
     <p:extLst>
       <p:ext uri="{BB962C8B-B14F-4D97-AF65-F5344CB8AC3E}">
-        <p14:creationId xmlns:p14="http://schemas.microsoft.com/office/powerpoint/2010/main" val="1976601031"/>
+        <p14:creationId xmlns:p14="http://schemas.microsoft.com/office/powerpoint/2010/main" val="2717282668"/>
       </p:ext>
     </p:extLst>
   </p:cSld>
   <p:clrMapOvr>
     <a:masterClrMapping/>
   </p:clrMapOvr>
+  <p:timing>
+    <p:tnLst>
+      <p:par>
+        <p:cTn id="1" dur="indefinite" restart="never" nodeType="tmRoot"/>
+      </p:par>
+    </p:tnLst>
+  </p:timing>
 </p:sld>
 </file>
 
-<file path=ppt/slides/slide15.xml><?xml version="1.0" encoding="utf-8"?>
+<file path=ppt/slides/slide3.xml><?xml version="1.0" encoding="utf-8"?>
 <p:sld xmlns:a="http://schemas.openxmlformats.org/drawingml/2006/main" xmlns:r="http://schemas.openxmlformats.org/officeDocument/2006/relationships" xmlns:p="http://schemas.openxmlformats.org/presentationml/2006/main">
   <p:cSld>
     <p:spTree>
@@ -10258,7 +9272,7 @@
         <p:cNvPr id="1" name="">
           <a:extLst>
             <a:ext uri="{FF2B5EF4-FFF2-40B4-BE49-F238E27FC236}">
-              <a16:creationId xmlns:a16="http://schemas.microsoft.com/office/drawing/2014/main" xmlns="" id="{C3D7EA8B-8AFF-268F-3C00-540B4DFE4A1C}"/>
+              <a16:creationId xmlns:a16="http://schemas.microsoft.com/office/drawing/2014/main" xmlns="" id="{7B162E55-6F0D-9A20-0E05-B9E7E646A83C}"/>
             </a:ext>
           </a:extLst>
         </p:cNvPr>
@@ -10275,36 +9289,43 @@
       </p:grpSpPr>
       <p:pic>
         <p:nvPicPr>
-          <p:cNvPr id="10" name="Imagem 9" descr="Uma imagem contendo Desenho técnico&#10;&#10;O conteúdo gerado por IA pode estar incorreto.">
+          <p:cNvPr id="7" name="Imagem 6" descr="Ícone&#10;&#10;O conteúdo gerado por IA pode estar incorreto.">
             <a:extLst>
               <a:ext uri="{FF2B5EF4-FFF2-40B4-BE49-F238E27FC236}">
-                <a16:creationId xmlns:a16="http://schemas.microsoft.com/office/drawing/2014/main" xmlns="" id="{B8882CAD-1783-E8EC-E43D-823F3B94D179}"/>
+                <a16:creationId xmlns:a16="http://schemas.microsoft.com/office/drawing/2014/main" xmlns="" id="{C4AEAF26-BF10-4CF2-B42A-099F1590AF60}"/>
               </a:ext>
             </a:extLst>
           </p:cNvPr>
           <p:cNvPicPr>
-            <a:picLocks noGrp="1" noRot="1" noChangeAspect="1" noMove="1" noResize="1" noEditPoints="1" noAdjustHandles="1" noChangeArrowheads="1" noChangeShapeType="1" noCrop="1"/>
+            <a:picLocks noChangeAspect="1"/>
           </p:cNvPicPr>
           <p:nvPr/>
         </p:nvPicPr>
         <p:blipFill>
-          <a:blip r:embed="rId3">
-            <a:alphaModFix amt="20000"/>
+          <a:blip r:embed="rId2">
             <a:extLst>
+              <a:ext uri="{BEBA8EAE-BF5A-486C-A8C5-ECC9F3942E4B}">
+                <a14:imgProps xmlns:a14="http://schemas.microsoft.com/office/drawing/2010/main">
+                  <a14:imgLayer r:embed="rId3">
+                    <a14:imgEffect>
+                      <a14:artisticPhotocopy/>
+                    </a14:imgEffect>
+                  </a14:imgLayer>
+                </a14:imgProps>
+              </a:ext>
               <a:ext uri="{28A0092B-C50C-407E-A947-70E740481C1C}">
                 <a14:useLocalDpi xmlns:a14="http://schemas.microsoft.com/office/drawing/2010/main" val="0"/>
               </a:ext>
             </a:extLst>
           </a:blip>
-          <a:srcRect t="26080"/>
           <a:stretch>
             <a:fillRect/>
           </a:stretch>
         </p:blipFill>
         <p:spPr>
           <a:xfrm>
-            <a:off x="0" y="11128"/>
-            <a:ext cx="9262533" cy="6846872"/>
+            <a:off x="9697652" y="4436988"/>
+            <a:ext cx="2430765" cy="2251559"/>
           </a:xfrm>
           <a:prstGeom prst="rect">
             <a:avLst/>
@@ -10316,7 +9337,7 @@
           <p:cNvPr id="5" name="TextBox 5">
             <a:extLst>
               <a:ext uri="{FF2B5EF4-FFF2-40B4-BE49-F238E27FC236}">
-                <a16:creationId xmlns:a16="http://schemas.microsoft.com/office/drawing/2014/main" xmlns="" id="{79E06876-6363-FA5B-06FA-2627D4F2F32A}"/>
+                <a16:creationId xmlns:a16="http://schemas.microsoft.com/office/drawing/2014/main" xmlns="" id="{4B075216-C345-4FB3-9698-02C9810281E3}"/>
               </a:ext>
             </a:extLst>
           </p:cNvPr>
@@ -10325,8 +9346,68 @@
         </p:nvSpPr>
         <p:spPr>
           <a:xfrm>
-            <a:off x="754454" y="847992"/>
-            <a:ext cx="10437117" cy="580993"/>
+            <a:off x="721893" y="335037"/>
+            <a:ext cx="10191141" cy="1167018"/>
+          </a:xfrm>
+          <a:prstGeom prst="rect">
+            <a:avLst/>
+          </a:prstGeom>
+        </p:spPr>
+        <p:txBody>
+          <a:bodyPr vert="horz" lIns="91440" tIns="45720" rIns="91440" bIns="45720" rtlCol="0" anchor="b">
+            <a:normAutofit fontScale="97500"/>
+          </a:bodyPr>
+          <a:lstStyle>
+            <a:lvl1pPr>
+              <a:lnSpc>
+                <a:spcPct val="90000"/>
+              </a:lnSpc>
+              <a:spcBef>
+                <a:spcPct val="0"/>
+              </a:spcBef>
+              <a:buNone/>
+              <a:defRPr sz="6600">
+                <a:solidFill>
+                  <a:schemeClr val="tx2">
+                    <a:lumMod val="90000"/>
+                    <a:lumOff val="10000"/>
+                  </a:schemeClr>
+                </a:solidFill>
+                <a:latin typeface="Aharoni" panose="02010803020104030203" pitchFamily="2" charset="-79"/>
+                <a:ea typeface="+mj-ea"/>
+                <a:cs typeface="Aharoni" panose="02010803020104030203" pitchFamily="2" charset="-79"/>
+              </a:defRPr>
+            </a:lvl1pPr>
+          </a:lstStyle>
+          <a:p>
+            <a:r>
+              <a:rPr lang="pt-BR" sz="6000" dirty="0">
+                <a:sym typeface="Hagrid Text Bold"/>
+              </a:rPr>
+              <a:t>O problema da SBV inicial</a:t>
+            </a:r>
+            <a:endParaRPr lang="en-US" sz="6000" dirty="0">
+              <a:sym typeface="Hagrid Text Bold"/>
+            </a:endParaRPr>
+          </a:p>
+        </p:txBody>
+      </p:sp>
+      <p:sp>
+        <p:nvSpPr>
+          <p:cNvPr id="6" name="TextBox 6">
+            <a:extLst>
+              <a:ext uri="{FF2B5EF4-FFF2-40B4-BE49-F238E27FC236}">
+                <a16:creationId xmlns:a16="http://schemas.microsoft.com/office/drawing/2014/main" xmlns="" id="{FF6E22C4-3F07-0482-1222-38840905F00D}"/>
+              </a:ext>
+            </a:extLst>
+          </p:cNvPr>
+          <p:cNvSpPr txBox="1"/>
+          <p:nvPr/>
+        </p:nvSpPr>
+        <p:spPr>
+          <a:xfrm>
+            <a:off x="754454" y="2015010"/>
+            <a:ext cx="10683089" cy="1107996"/>
           </a:xfrm>
           <a:prstGeom prst="rect">
             <a:avLst/>
@@ -10338,106 +9419,62 @@
           </a:bodyPr>
           <a:lstStyle/>
           <a:p>
-            <a:pPr algn="ctr">
-              <a:lnSpc>
-                <a:spcPts val="4184"/>
-              </a:lnSpc>
-            </a:pPr>
+            <a:pPr algn="just"/>
             <a:r>
-              <a:rPr lang="pt-BR" sz="5230" b="1" dirty="0">
-                <a:solidFill>
-                  <a:schemeClr val="tx2">
-                    <a:lumMod val="75000"/>
-                  </a:schemeClr>
-                </a:solidFill>
-                <a:latin typeface="Hagrid Text Bold"/>
-                <a:ea typeface="Hagrid Text Bold"/>
-                <a:cs typeface="Hagrid Text Bold"/>
-                <a:sym typeface="Hagrid Text Bold"/>
+              <a:rPr lang="pt-BR" sz="2400" dirty="0">
+                <a:ea typeface="Hagrid Text"/>
+                <a:cs typeface="Hagrid Text"/>
+                <a:sym typeface="Hagrid Text"/>
               </a:rPr>
-              <a:t>Método das duas fases: observação</a:t>
-            </a:r>
-            <a:endParaRPr lang="en-US" sz="5230" b="1" spc="-219" dirty="0">
-              <a:solidFill>
-                <a:schemeClr val="tx2">
-                  <a:lumMod val="75000"/>
-                </a:schemeClr>
-              </a:solidFill>
-              <a:latin typeface="Hagrid Text Bold"/>
-              <a:ea typeface="Hagrid Text Bold"/>
-              <a:cs typeface="Hagrid Text Bold"/>
-              <a:sym typeface="Hagrid Text Bold"/>
-            </a:endParaRPr>
-          </a:p>
-        </p:txBody>
-      </p:sp>
-      <p:sp>
-        <p:nvSpPr>
-          <p:cNvPr id="6" name="TextBox 6">
-            <a:extLst>
-              <a:ext uri="{FF2B5EF4-FFF2-40B4-BE49-F238E27FC236}">
-                <a16:creationId xmlns:a16="http://schemas.microsoft.com/office/drawing/2014/main" xmlns="" id="{8CDC9C99-D895-5D36-B3BF-EDD659293FE3}"/>
-              </a:ext>
-            </a:extLst>
-          </p:cNvPr>
-          <p:cNvSpPr txBox="1"/>
-          <p:nvPr/>
-        </p:nvSpPr>
-        <p:spPr>
-          <a:xfrm>
-            <a:off x="754454" y="1978735"/>
-            <a:ext cx="10683089" cy="4308872"/>
-          </a:xfrm>
-          <a:prstGeom prst="rect">
-            <a:avLst/>
-          </a:prstGeom>
-        </p:spPr>
-        <p:txBody>
-          <a:bodyPr wrap="square" lIns="0" tIns="0" rIns="0" bIns="0" rtlCol="0" anchor="t">
-            <a:spAutoFit/>
-          </a:bodyPr>
-          <a:lstStyle/>
-          <a:p>
-            <a:r>
-              <a:rPr lang="pt-BR" sz="2800" b="1" dirty="0">
-                <a:sym typeface="Symbol"/>
-              </a:rPr>
-              <a:t>Etapa 1. </a:t>
+              <a:t>O procedimento para iniciar a resolução de </a:t>
             </a:r>
             <a:r>
-              <a:rPr lang="pt-BR" sz="2800" dirty="0">
-                <a:sym typeface="Symbol"/>
+              <a:rPr lang="pt-BR" sz="2400" dirty="0" err="1">
+                <a:ea typeface="Hagrid Text"/>
+                <a:cs typeface="Hagrid Text"/>
+                <a:sym typeface="Hagrid Text"/>
               </a:rPr>
-              <a:t>Selecione uma VA com coeficiente igual a zero para sair da SB e designe sua linha como linha pivô. A variável que entra pode ser qualquer VNB (não artificial) que tenha um coeficiente não zero (positivo ou negativo)  na linha pivô. Execute a iteração simplex associada. </a:t>
-            </a:r>
-            <a:endParaRPr lang="pt-BR" sz="2800" b="1" dirty="0">
-              <a:sym typeface="Symbol"/>
-            </a:endParaRPr>
-          </a:p>
-          <a:p>
-            <a:r>
-              <a:rPr lang="pt-BR" sz="2800" b="1" dirty="0">
-                <a:sym typeface="Symbol"/>
-              </a:rPr>
-              <a:t>Etapa 2. </a:t>
+              <a:t>PPLs</a:t>
             </a:r>
             <a:r>
-              <a:rPr lang="pt-BR" sz="2800" dirty="0">
-                <a:sym typeface="Symbol"/>
+              <a:rPr lang="pt-BR" sz="2400" dirty="0">
+                <a:ea typeface="Hagrid Text"/>
+                <a:cs typeface="Hagrid Text"/>
+                <a:sym typeface="Hagrid Text"/>
               </a:rPr>
-              <a:t>Remova da tabela a coluna da VA (que acabou de sair). Se todas as </a:t>
+              <a:t> com restrições (=) e/ou (</a:t>
             </a:r>
             <a:r>
-              <a:rPr lang="pt-BR" sz="2800" dirty="0" err="1">
-                <a:sym typeface="Symbol"/>
+              <a:rPr lang="pt-BR" sz="2400" dirty="0">
+                <a:ea typeface="Hagrid Text"/>
+                <a:cs typeface="Calibri" panose="020F0502020204030204" pitchFamily="34" charset="0"/>
+                <a:sym typeface="Hagrid Text"/>
               </a:rPr>
-              <a:t>VAs</a:t>
+              <a:t>≥</a:t>
             </a:r>
             <a:r>
-              <a:rPr lang="pt-BR" sz="2800" dirty="0">
-                <a:sym typeface="Symbol"/>
+              <a:rPr lang="pt-BR" sz="2400" dirty="0">
+                <a:ea typeface="Hagrid Text"/>
+                <a:cs typeface="Hagrid Text"/>
+                <a:sym typeface="Hagrid Text"/>
               </a:rPr>
-              <a:t> com coeficiente igual a zero tiverem sido removidas, passe para a fase II. Caso contrário, volte para a Etapa 1. </a:t>
+              <a:t>) é usar </a:t>
+            </a:r>
+            <a:r>
+              <a:rPr lang="pt-BR" sz="2400" b="1" dirty="0">
+                <a:ea typeface="Hagrid Text"/>
+                <a:cs typeface="Hagrid Text"/>
+                <a:sym typeface="Hagrid Text"/>
+              </a:rPr>
+              <a:t>variáveis artificiais (VA) </a:t>
+            </a:r>
+            <a:r>
+              <a:rPr lang="pt-BR" sz="2400" dirty="0">
+                <a:ea typeface="Hagrid Text"/>
+                <a:cs typeface="Hagrid Text"/>
+                <a:sym typeface="Hagrid Text"/>
+              </a:rPr>
+              <a:t>que desempenham o papel de folgas na 1ª iteração e então descartá-las legitimamente em iterações posteriores.</a:t>
             </a:r>
           </a:p>
         </p:txBody>
@@ -10447,7 +9484,7 @@
           <p:cNvPr id="12" name="Imagem 11" descr="Ícone&#10;&#10;O conteúdo gerado por IA pode estar incorreto.">
             <a:extLst>
               <a:ext uri="{FF2B5EF4-FFF2-40B4-BE49-F238E27FC236}">
-                <a16:creationId xmlns:a16="http://schemas.microsoft.com/office/drawing/2014/main" xmlns="" id="{167AD2A4-5E07-4AF8-9CD4-74E982C5D176}"/>
+                <a16:creationId xmlns:a16="http://schemas.microsoft.com/office/drawing/2014/main" xmlns="" id="{2E00AF05-E454-3F4B-3B14-520777C9B43F}"/>
               </a:ext>
             </a:extLst>
           </p:cNvPr>
@@ -10478,86 +9515,12 @@
           </a:prstGeom>
         </p:spPr>
       </p:pic>
-    </p:spTree>
-    <p:extLst>
-      <p:ext uri="{BB962C8B-B14F-4D97-AF65-F5344CB8AC3E}">
-        <p14:creationId xmlns:p14="http://schemas.microsoft.com/office/powerpoint/2010/main" val="1973092745"/>
-      </p:ext>
-    </p:extLst>
-  </p:cSld>
-  <p:clrMapOvr>
-    <a:masterClrMapping/>
-  </p:clrMapOvr>
-</p:sld>
-</file>
-
-<file path=ppt/slides/slide16.xml><?xml version="1.0" encoding="utf-8"?>
-<p:sld xmlns:a="http://schemas.openxmlformats.org/drawingml/2006/main" xmlns:r="http://schemas.openxmlformats.org/officeDocument/2006/relationships" xmlns:p="http://schemas.openxmlformats.org/presentationml/2006/main">
-  <p:cSld>
-    <p:spTree>
-      <p:nvGrpSpPr>
-        <p:cNvPr id="1" name="">
-          <a:extLst>
-            <a:ext uri="{FF2B5EF4-FFF2-40B4-BE49-F238E27FC236}">
-              <a16:creationId xmlns:a16="http://schemas.microsoft.com/office/drawing/2014/main" xmlns="" id="{AD1E4B53-17E2-D5BF-2BBB-C1AA12FDF35E}"/>
-            </a:ext>
-          </a:extLst>
-        </p:cNvPr>
-        <p:cNvGrpSpPr/>
-        <p:nvPr/>
-      </p:nvGrpSpPr>
-      <p:grpSpPr>
-        <a:xfrm>
-          <a:off x="0" y="0"/>
-          <a:ext cx="0" cy="0"/>
-          <a:chOff x="0" y="0"/>
-          <a:chExt cx="0" cy="0"/>
-        </a:xfrm>
-      </p:grpSpPr>
-      <p:pic>
-        <p:nvPicPr>
-          <p:cNvPr id="10" name="Imagem 9" descr="Uma imagem contendo Desenho técnico&#10;&#10;O conteúdo gerado por IA pode estar incorreto.">
+      <p:sp>
+        <p:nvSpPr>
+          <p:cNvPr id="8" name="TextBox 6">
             <a:extLst>
               <a:ext uri="{FF2B5EF4-FFF2-40B4-BE49-F238E27FC236}">
-                <a16:creationId xmlns:a16="http://schemas.microsoft.com/office/drawing/2014/main" xmlns="" id="{1A341B08-D023-CCC4-4D4A-CC00BAFC0184}"/>
-              </a:ext>
-            </a:extLst>
-          </p:cNvPr>
-          <p:cNvPicPr>
-            <a:picLocks noGrp="1" noRot="1" noChangeAspect="1" noMove="1" noResize="1" noEditPoints="1" noAdjustHandles="1" noChangeArrowheads="1" noChangeShapeType="1" noCrop="1"/>
-          </p:cNvPicPr>
-          <p:nvPr/>
-        </p:nvPicPr>
-        <p:blipFill>
-          <a:blip r:embed="rId2">
-            <a:alphaModFix amt="20000"/>
-            <a:extLst>
-              <a:ext uri="{28A0092B-C50C-407E-A947-70E740481C1C}">
-                <a14:useLocalDpi xmlns:a14="http://schemas.microsoft.com/office/drawing/2010/main" val="0"/>
-              </a:ext>
-            </a:extLst>
-          </a:blip>
-          <a:srcRect t="26080"/>
-          <a:stretch>
-            <a:fillRect/>
-          </a:stretch>
-        </p:blipFill>
-        <p:spPr>
-          <a:xfrm>
-            <a:off x="0" y="11128"/>
-            <a:ext cx="9262533" cy="6846872"/>
-          </a:xfrm>
-          <a:prstGeom prst="rect">
-            <a:avLst/>
-          </a:prstGeom>
-        </p:spPr>
-      </p:pic>
-      <p:sp>
-        <p:nvSpPr>
-          <p:cNvPr id="5" name="TextBox 5">
-            <a:extLst>
-              <a:ext uri="{FF2B5EF4-FFF2-40B4-BE49-F238E27FC236}">
-                <a16:creationId xmlns:a16="http://schemas.microsoft.com/office/drawing/2014/main" xmlns="" id="{215CA055-5CD2-7B40-F5E2-CE53C24162D7}"/>
+                <a16:creationId xmlns:a16="http://schemas.microsoft.com/office/drawing/2014/main" xmlns="" id="{20846665-8DF9-4BAF-BA5E-38EC96B5AA54}"/>
               </a:ext>
             </a:extLst>
           </p:cNvPr>
@@ -10566,68 +9529,8 @@
         </p:nvSpPr>
         <p:spPr>
           <a:xfrm>
-            <a:off x="1000429" y="847992"/>
-            <a:ext cx="10191141" cy="580993"/>
-          </a:xfrm>
-          <a:prstGeom prst="rect">
-            <a:avLst/>
-          </a:prstGeom>
-        </p:spPr>
-        <p:txBody>
-          <a:bodyPr lIns="0" tIns="0" rIns="0" bIns="0" rtlCol="0" anchor="t">
-            <a:spAutoFit/>
-          </a:bodyPr>
-          <a:lstStyle/>
-          <a:p>
-            <a:pPr algn="ctr">
-              <a:lnSpc>
-                <a:spcPts val="4184"/>
-              </a:lnSpc>
-            </a:pPr>
-            <a:r>
-              <a:rPr lang="pt-BR" sz="5230" b="1" dirty="0">
-                <a:solidFill>
-                  <a:schemeClr val="tx2">
-                    <a:lumMod val="75000"/>
-                  </a:schemeClr>
-                </a:solidFill>
-                <a:latin typeface="Hagrid Text Bold"/>
-                <a:ea typeface="Hagrid Text Bold"/>
-                <a:cs typeface="Hagrid Text Bold"/>
-                <a:sym typeface="Hagrid Text Bold"/>
-              </a:rPr>
-              <a:t>Exemplo: método das duas fases</a:t>
-            </a:r>
-            <a:endParaRPr lang="en-US" sz="5230" b="1" spc="-219" dirty="0">
-              <a:solidFill>
-                <a:schemeClr val="tx2">
-                  <a:lumMod val="75000"/>
-                </a:schemeClr>
-              </a:solidFill>
-              <a:latin typeface="Hagrid Text Bold"/>
-              <a:ea typeface="Hagrid Text Bold"/>
-              <a:cs typeface="Hagrid Text Bold"/>
-              <a:sym typeface="Hagrid Text Bold"/>
-            </a:endParaRPr>
-          </a:p>
-        </p:txBody>
-      </p:sp>
-      <p:sp>
-        <p:nvSpPr>
-          <p:cNvPr id="6" name="TextBox 6">
-            <a:extLst>
-              <a:ext uri="{FF2B5EF4-FFF2-40B4-BE49-F238E27FC236}">
-                <a16:creationId xmlns:a16="http://schemas.microsoft.com/office/drawing/2014/main" xmlns="" id="{D78F98D6-BF6B-F62D-F8EF-26C85EF6F500}"/>
-              </a:ext>
-            </a:extLst>
-          </p:cNvPr>
-          <p:cNvSpPr txBox="1"/>
-          <p:nvPr/>
-        </p:nvSpPr>
-        <p:spPr>
-          <a:xfrm>
-            <a:off x="754455" y="2366937"/>
-            <a:ext cx="5341546" cy="1477328"/>
+            <a:off x="754455" y="3635961"/>
+            <a:ext cx="10683088" cy="738664"/>
           </a:xfrm>
           <a:prstGeom prst="rect">
             <a:avLst/>
@@ -10639,3441 +9542,17 @@
           </a:bodyPr>
           <a:lstStyle/>
           <a:p>
+            <a:pPr algn="just"/>
             <a:r>
-              <a:rPr lang="pt-BR" sz="3200" b="1" dirty="0"/>
-              <a:t>Fase I</a:t>
+              <a:rPr lang="pt-BR" sz="2400" dirty="0">
+                <a:ea typeface="Hagrid Text"/>
+                <a:cs typeface="Hagrid Text"/>
+                <a:sym typeface="Hagrid Text"/>
+              </a:rPr>
+              <a:t>Há dois métodos para adaptar os </a:t>
             </a:r>
-          </a:p>
-          <a:p>
-            <a:endParaRPr lang="pt-BR" sz="3200" dirty="0"/>
-          </a:p>
-          <a:p>
-            <a:endParaRPr lang="pt-BR" sz="3200" dirty="0"/>
-          </a:p>
-        </p:txBody>
-      </p:sp>
-      <p:pic>
-        <p:nvPicPr>
-          <p:cNvPr id="12" name="Imagem 11" descr="Ícone&#10;&#10;O conteúdo gerado por IA pode estar incorreto.">
-            <a:extLst>
-              <a:ext uri="{FF2B5EF4-FFF2-40B4-BE49-F238E27FC236}">
-                <a16:creationId xmlns:a16="http://schemas.microsoft.com/office/drawing/2014/main" xmlns="" id="{1CDDDADF-8036-1C19-DE8E-2964C7A6AE78}"/>
-              </a:ext>
-            </a:extLst>
-          </p:cNvPr>
-          <p:cNvPicPr>
-            <a:picLocks noChangeAspect="1"/>
-          </p:cNvPicPr>
-          <p:nvPr/>
-        </p:nvPicPr>
-        <p:blipFill>
-          <a:blip r:embed="rId3" cstate="print">
-            <a:extLst>
-              <a:ext uri="{28A0092B-C50C-407E-A947-70E740481C1C}">
-                <a14:useLocalDpi xmlns:a14="http://schemas.microsoft.com/office/drawing/2010/main" val="0"/>
-              </a:ext>
-            </a:extLst>
-          </a:blip>
-          <a:stretch>
-            <a:fillRect/>
-          </a:stretch>
-        </p:blipFill>
-        <p:spPr>
-          <a:xfrm>
-            <a:off x="10913035" y="11128"/>
-            <a:ext cx="1270000" cy="1264823"/>
-          </a:xfrm>
-          <a:prstGeom prst="rect">
-            <a:avLst/>
-          </a:prstGeom>
-        </p:spPr>
-      </p:pic>
-      <mc:AlternateContent xmlns:mc="http://schemas.openxmlformats.org/markup-compatibility/2006" xmlns:a14="http://schemas.microsoft.com/office/drawing/2010/main">
-        <mc:Choice Requires="a14">
-          <p:sp>
-            <p:nvSpPr>
-              <p:cNvPr id="4" name="Espaço Reservado para Conteúdo 2">
-                <a:extLst>
-                  <a:ext uri="{FF2B5EF4-FFF2-40B4-BE49-F238E27FC236}">
-                    <a16:creationId xmlns:a16="http://schemas.microsoft.com/office/drawing/2014/main" xmlns="" id="{41D614E5-5473-7B5F-C7D6-580C2D9A59BB}"/>
-                  </a:ext>
-                </a:extLst>
-              </p:cNvPr>
-              <p:cNvSpPr txBox="1">
-                <a:spLocks/>
-              </p:cNvSpPr>
-              <p:nvPr/>
-            </p:nvSpPr>
-            <p:spPr>
-              <a:xfrm>
-                <a:off x="754455" y="3105601"/>
-                <a:ext cx="4040188" cy="3951288"/>
-              </a:xfrm>
-              <a:prstGeom prst="rect">
-                <a:avLst/>
-              </a:prstGeom>
-            </p:spPr>
-            <p:txBody>
-              <a:bodyPr>
-                <a:normAutofit/>
-              </a:bodyPr>
-              <a:lstStyle>
-                <a:lvl1pPr marL="228600" indent="-228600" algn="l" defTabSz="914400" rtl="0" eaLnBrk="1" latinLnBrk="0" hangingPunct="1">
-                  <a:lnSpc>
-                    <a:spcPct val="90000"/>
-                  </a:lnSpc>
-                  <a:spcBef>
-                    <a:spcPts val="1000"/>
-                  </a:spcBef>
-                  <a:buFont typeface="Arial" panose="020B0604020202020204" pitchFamily="34" charset="0"/>
-                  <a:buChar char="•"/>
-                  <a:defRPr sz="2800" kern="1200">
-                    <a:solidFill>
-                      <a:schemeClr val="tx1"/>
-                    </a:solidFill>
-                    <a:latin typeface="+mn-lt"/>
-                    <a:ea typeface="+mn-ea"/>
-                    <a:cs typeface="+mn-cs"/>
-                  </a:defRPr>
-                </a:lvl1pPr>
-                <a:lvl2pPr marL="685800" indent="-228600" algn="l" defTabSz="914400" rtl="0" eaLnBrk="1" latinLnBrk="0" hangingPunct="1">
-                  <a:lnSpc>
-                    <a:spcPct val="90000"/>
-                  </a:lnSpc>
-                  <a:spcBef>
-                    <a:spcPts val="500"/>
-                  </a:spcBef>
-                  <a:buFont typeface="Arial" panose="020B0604020202020204" pitchFamily="34" charset="0"/>
-                  <a:buChar char="•"/>
-                  <a:defRPr sz="2400" kern="1200">
-                    <a:solidFill>
-                      <a:schemeClr val="tx1"/>
-                    </a:solidFill>
-                    <a:latin typeface="+mn-lt"/>
-                    <a:ea typeface="+mn-ea"/>
-                    <a:cs typeface="+mn-cs"/>
-                  </a:defRPr>
-                </a:lvl2pPr>
-                <a:lvl3pPr marL="1143000" indent="-228600" algn="l" defTabSz="914400" rtl="0" eaLnBrk="1" latinLnBrk="0" hangingPunct="1">
-                  <a:lnSpc>
-                    <a:spcPct val="90000"/>
-                  </a:lnSpc>
-                  <a:spcBef>
-                    <a:spcPts val="500"/>
-                  </a:spcBef>
-                  <a:buFont typeface="Arial" panose="020B0604020202020204" pitchFamily="34" charset="0"/>
-                  <a:buChar char="•"/>
-                  <a:defRPr sz="2000" kern="1200">
-                    <a:solidFill>
-                      <a:schemeClr val="tx1"/>
-                    </a:solidFill>
-                    <a:latin typeface="+mn-lt"/>
-                    <a:ea typeface="+mn-ea"/>
-                    <a:cs typeface="+mn-cs"/>
-                  </a:defRPr>
-                </a:lvl3pPr>
-                <a:lvl4pPr marL="1600200" indent="-228600" algn="l" defTabSz="914400" rtl="0" eaLnBrk="1" latinLnBrk="0" hangingPunct="1">
-                  <a:lnSpc>
-                    <a:spcPct val="90000"/>
-                  </a:lnSpc>
-                  <a:spcBef>
-                    <a:spcPts val="500"/>
-                  </a:spcBef>
-                  <a:buFont typeface="Arial" panose="020B0604020202020204" pitchFamily="34" charset="0"/>
-                  <a:buChar char="•"/>
-                  <a:defRPr sz="1800" kern="1200">
-                    <a:solidFill>
-                      <a:schemeClr val="tx1"/>
-                    </a:solidFill>
-                    <a:latin typeface="+mn-lt"/>
-                    <a:ea typeface="+mn-ea"/>
-                    <a:cs typeface="+mn-cs"/>
-                  </a:defRPr>
-                </a:lvl4pPr>
-                <a:lvl5pPr marL="2057400" indent="-228600" algn="l" defTabSz="914400" rtl="0" eaLnBrk="1" latinLnBrk="0" hangingPunct="1">
-                  <a:lnSpc>
-                    <a:spcPct val="90000"/>
-                  </a:lnSpc>
-                  <a:spcBef>
-                    <a:spcPts val="500"/>
-                  </a:spcBef>
-                  <a:buFont typeface="Arial" panose="020B0604020202020204" pitchFamily="34" charset="0"/>
-                  <a:buChar char="•"/>
-                  <a:defRPr sz="1800" kern="1200">
-                    <a:solidFill>
-                      <a:schemeClr val="tx1"/>
-                    </a:solidFill>
-                    <a:latin typeface="+mn-lt"/>
-                    <a:ea typeface="+mn-ea"/>
-                    <a:cs typeface="+mn-cs"/>
-                  </a:defRPr>
-                </a:lvl5pPr>
-                <a:lvl6pPr marL="2514600" indent="-228600" algn="l" defTabSz="914400" rtl="0" eaLnBrk="1" latinLnBrk="0" hangingPunct="1">
-                  <a:lnSpc>
-                    <a:spcPct val="90000"/>
-                  </a:lnSpc>
-                  <a:spcBef>
-                    <a:spcPts val="500"/>
-                  </a:spcBef>
-                  <a:buFont typeface="Arial" panose="020B0604020202020204" pitchFamily="34" charset="0"/>
-                  <a:buChar char="•"/>
-                  <a:defRPr sz="1800" kern="1200">
-                    <a:solidFill>
-                      <a:schemeClr val="tx1"/>
-                    </a:solidFill>
-                    <a:latin typeface="+mn-lt"/>
-                    <a:ea typeface="+mn-ea"/>
-                    <a:cs typeface="+mn-cs"/>
-                  </a:defRPr>
-                </a:lvl6pPr>
-                <a:lvl7pPr marL="2971800" indent="-228600" algn="l" defTabSz="914400" rtl="0" eaLnBrk="1" latinLnBrk="0" hangingPunct="1">
-                  <a:lnSpc>
-                    <a:spcPct val="90000"/>
-                  </a:lnSpc>
-                  <a:spcBef>
-                    <a:spcPts val="500"/>
-                  </a:spcBef>
-                  <a:buFont typeface="Arial" panose="020B0604020202020204" pitchFamily="34" charset="0"/>
-                  <a:buChar char="•"/>
-                  <a:defRPr sz="1800" kern="1200">
-                    <a:solidFill>
-                      <a:schemeClr val="tx1"/>
-                    </a:solidFill>
-                    <a:latin typeface="+mn-lt"/>
-                    <a:ea typeface="+mn-ea"/>
-                    <a:cs typeface="+mn-cs"/>
-                  </a:defRPr>
-                </a:lvl7pPr>
-                <a:lvl8pPr marL="3429000" indent="-228600" algn="l" defTabSz="914400" rtl="0" eaLnBrk="1" latinLnBrk="0" hangingPunct="1">
-                  <a:lnSpc>
-                    <a:spcPct val="90000"/>
-                  </a:lnSpc>
-                  <a:spcBef>
-                    <a:spcPts val="500"/>
-                  </a:spcBef>
-                  <a:buFont typeface="Arial" panose="020B0604020202020204" pitchFamily="34" charset="0"/>
-                  <a:buChar char="•"/>
-                  <a:defRPr sz="1800" kern="1200">
-                    <a:solidFill>
-                      <a:schemeClr val="tx1"/>
-                    </a:solidFill>
-                    <a:latin typeface="+mn-lt"/>
-                    <a:ea typeface="+mn-ea"/>
-                    <a:cs typeface="+mn-cs"/>
-                  </a:defRPr>
-                </a:lvl8pPr>
-                <a:lvl9pPr marL="3886200" indent="-228600" algn="l" defTabSz="914400" rtl="0" eaLnBrk="1" latinLnBrk="0" hangingPunct="1">
-                  <a:lnSpc>
-                    <a:spcPct val="90000"/>
-                  </a:lnSpc>
-                  <a:spcBef>
-                    <a:spcPts val="500"/>
-                  </a:spcBef>
-                  <a:buFont typeface="Arial" panose="020B0604020202020204" pitchFamily="34" charset="0"/>
-                  <a:buChar char="•"/>
-                  <a:defRPr sz="1800" kern="1200">
-                    <a:solidFill>
-                      <a:schemeClr val="tx1"/>
-                    </a:solidFill>
-                    <a:latin typeface="+mn-lt"/>
-                    <a:ea typeface="+mn-ea"/>
-                    <a:cs typeface="+mn-cs"/>
-                  </a:defRPr>
-                </a:lvl9pPr>
-              </a:lstStyle>
-              <a:p>
-                <a:pPr marL="0" indent="0">
-                  <a:buFont typeface="Arial" panose="020B0604020202020204" pitchFamily="34" charset="0"/>
-                  <a:buNone/>
-                </a:pPr>
-                <a14:m>
-                  <m:oMathPara xmlns:m="http://schemas.openxmlformats.org/officeDocument/2006/math">
-                    <m:oMathParaPr>
-                      <m:jc m:val="centerGroup"/>
-                    </m:oMathParaPr>
-                    <m:oMath xmlns:m="http://schemas.openxmlformats.org/officeDocument/2006/math">
-                      <m:func>
-                        <m:funcPr>
-                          <m:ctrlPr>
-                            <a:rPr lang="pt-BR" i="1" smtClean="0">
-                              <a:latin typeface="Cambria Math"/>
-                            </a:rPr>
-                          </m:ctrlPr>
-                        </m:funcPr>
-                        <m:fName>
-                          <m:r>
-                            <m:rPr>
-                              <m:sty m:val="p"/>
-                            </m:rPr>
-                            <a:rPr lang="pt-BR">
-                              <a:latin typeface="Cambria Math"/>
-                            </a:rPr>
-                            <m:t>min</m:t>
-                          </m:r>
-                        </m:fName>
-                        <m:e>
-                          <m:r>
-                            <a:rPr lang="pt-BR" i="1">
-                              <a:latin typeface="Cambria Math"/>
-                            </a:rPr>
-                            <m:t>𝑧</m:t>
-                          </m:r>
-                          <m:r>
-                            <a:rPr lang="pt-BR" i="1">
-                              <a:latin typeface="Cambria Math"/>
-                            </a:rPr>
-                            <m:t>=</m:t>
-                          </m:r>
-                          <m:acc>
-                            <m:accPr>
-                              <m:chr m:val="̅"/>
-                              <m:ctrlPr>
-                                <a:rPr lang="pt-BR" i="1">
-                                  <a:latin typeface="Cambria Math"/>
-                                </a:rPr>
-                              </m:ctrlPr>
-                            </m:accPr>
-                            <m:e>
-                              <m:sSub>
-                                <m:sSubPr>
-                                  <m:ctrlPr>
-                                    <a:rPr lang="pt-BR" i="1">
-                                      <a:latin typeface="Cambria Math"/>
-                                    </a:rPr>
-                                  </m:ctrlPr>
-                                </m:sSubPr>
-                                <m:e>
-                                  <m:r>
-                                    <a:rPr lang="pt-BR" i="1">
-                                      <a:latin typeface="Cambria Math"/>
-                                    </a:rPr>
-                                    <m:t>𝑥</m:t>
-                                  </m:r>
-                                </m:e>
-                                <m:sub>
-                                  <m:r>
-                                    <a:rPr lang="pt-BR" i="1">
-                                      <a:latin typeface="Cambria Math"/>
-                                    </a:rPr>
-                                    <m:t>5</m:t>
-                                  </m:r>
-                                </m:sub>
-                              </m:sSub>
-                            </m:e>
-                          </m:acc>
-                          <m:r>
-                            <a:rPr lang="pt-BR" i="1">
-                              <a:latin typeface="Cambria Math"/>
-                            </a:rPr>
-                            <m:t>+</m:t>
-                          </m:r>
-                          <m:acc>
-                            <m:accPr>
-                              <m:chr m:val="̅"/>
-                              <m:ctrlPr>
-                                <a:rPr lang="pt-BR" i="1">
-                                  <a:latin typeface="Cambria Math"/>
-                                </a:rPr>
-                              </m:ctrlPr>
-                            </m:accPr>
-                            <m:e>
-                              <m:sSub>
-                                <m:sSubPr>
-                                  <m:ctrlPr>
-                                    <a:rPr lang="pt-BR" i="1">
-                                      <a:latin typeface="Cambria Math"/>
-                                    </a:rPr>
-                                  </m:ctrlPr>
-                                </m:sSubPr>
-                                <m:e>
-                                  <m:r>
-                                    <a:rPr lang="pt-BR" i="1">
-                                      <a:latin typeface="Cambria Math"/>
-                                    </a:rPr>
-                                    <m:t>𝑥</m:t>
-                                  </m:r>
-                                </m:e>
-                                <m:sub>
-                                  <m:r>
-                                    <a:rPr lang="pt-BR" i="1">
-                                      <a:latin typeface="Cambria Math"/>
-                                    </a:rPr>
-                                    <m:t>6</m:t>
-                                  </m:r>
-                                </m:sub>
-                              </m:sSub>
-                            </m:e>
-                          </m:acc>
-                        </m:e>
-                      </m:func>
-                    </m:oMath>
-                  </m:oMathPara>
-                </a14:m>
-                <a:endParaRPr lang="pt-BR" dirty="0"/>
-              </a:p>
-              <a:p>
-                <a:pPr marL="0" indent="0">
-                  <a:buFont typeface="Arial" panose="020B0604020202020204" pitchFamily="34" charset="0"/>
-                  <a:buNone/>
-                </a:pPr>
-                <a:r>
-                  <a:rPr lang="pt-BR" i="1" dirty="0">
-                    <a:latin typeface="Cambria Math"/>
-                  </a:rPr>
-                  <a:t>Sujeito a </a:t>
-                </a:r>
-              </a:p>
-              <a:p>
-                <a:pPr marL="0" indent="0">
-                  <a:buFont typeface="Arial" panose="020B0604020202020204" pitchFamily="34" charset="0"/>
-                  <a:buNone/>
-                </a:pPr>
-                <a14:m>
-                  <m:oMathPara xmlns:m="http://schemas.openxmlformats.org/officeDocument/2006/math">
-                    <m:oMathParaPr>
-                      <m:jc m:val="centerGroup"/>
-                    </m:oMathParaPr>
-                    <m:oMath xmlns:m="http://schemas.openxmlformats.org/officeDocument/2006/math">
-                      <m:r>
-                        <a:rPr lang="pt-BR" i="1">
-                          <a:latin typeface="Cambria Math"/>
-                        </a:rPr>
-                        <m:t>3</m:t>
-                      </m:r>
-                      <m:sSub>
-                        <m:sSubPr>
-                          <m:ctrlPr>
-                            <a:rPr lang="pt-BR" i="1">
-                              <a:latin typeface="Cambria Math"/>
-                            </a:rPr>
-                          </m:ctrlPr>
-                        </m:sSubPr>
-                        <m:e>
-                          <m:r>
-                            <a:rPr lang="pt-BR" i="1">
-                              <a:latin typeface="Cambria Math"/>
-                            </a:rPr>
-                            <m:t>𝑥</m:t>
-                          </m:r>
-                        </m:e>
-                        <m:sub>
-                          <m:r>
-                            <a:rPr lang="pt-BR" i="1">
-                              <a:latin typeface="Cambria Math"/>
-                            </a:rPr>
-                            <m:t>1</m:t>
-                          </m:r>
-                        </m:sub>
-                      </m:sSub>
-                      <m:r>
-                        <a:rPr lang="pt-BR" i="1">
-                          <a:latin typeface="Cambria Math"/>
-                        </a:rPr>
-                        <m:t>+</m:t>
-                      </m:r>
-                      <m:sSub>
-                        <m:sSubPr>
-                          <m:ctrlPr>
-                            <a:rPr lang="pt-BR" i="1">
-                              <a:latin typeface="Cambria Math"/>
-                            </a:rPr>
-                          </m:ctrlPr>
-                        </m:sSubPr>
-                        <m:e>
-                          <m:r>
-                            <a:rPr lang="pt-BR" i="1">
-                              <a:latin typeface="Cambria Math"/>
-                            </a:rPr>
-                            <m:t>𝑥</m:t>
-                          </m:r>
-                        </m:e>
-                        <m:sub>
-                          <m:r>
-                            <a:rPr lang="pt-BR" i="1">
-                              <a:latin typeface="Cambria Math"/>
-                            </a:rPr>
-                            <m:t>2</m:t>
-                          </m:r>
-                        </m:sub>
-                      </m:sSub>
-                      <m:r>
-                        <a:rPr lang="pt-BR" i="1">
-                          <a:latin typeface="Cambria Math"/>
-                        </a:rPr>
-                        <m:t>+</m:t>
-                      </m:r>
-                      <m:acc>
-                        <m:accPr>
-                          <m:chr m:val="̅"/>
-                          <m:ctrlPr>
-                            <a:rPr lang="pt-BR" i="1">
-                              <a:latin typeface="Cambria Math"/>
-                            </a:rPr>
-                          </m:ctrlPr>
-                        </m:accPr>
-                        <m:e>
-                          <m:sSub>
-                            <m:sSubPr>
-                              <m:ctrlPr>
-                                <a:rPr lang="pt-BR" i="1">
-                                  <a:latin typeface="Cambria Math"/>
-                                </a:rPr>
-                              </m:ctrlPr>
-                            </m:sSubPr>
-                            <m:e>
-                              <m:r>
-                                <a:rPr lang="pt-BR" i="1">
-                                  <a:latin typeface="Cambria Math"/>
-                                </a:rPr>
-                                <m:t>𝑥</m:t>
-                              </m:r>
-                            </m:e>
-                            <m:sub>
-                              <m:r>
-                                <a:rPr lang="pt-BR" i="1">
-                                  <a:latin typeface="Cambria Math"/>
-                                </a:rPr>
-                                <m:t>5</m:t>
-                              </m:r>
-                            </m:sub>
-                          </m:sSub>
-                        </m:e>
-                      </m:acc>
-                      <m:r>
-                        <a:rPr lang="pt-BR" i="1">
-                          <a:latin typeface="Cambria Math"/>
-                        </a:rPr>
-                        <m:t>=</m:t>
-                      </m:r>
-                      <m:r>
-                        <a:rPr lang="pt-BR" i="1">
-                          <a:latin typeface="Cambria Math"/>
-                        </a:rPr>
-                        <m:t>3</m:t>
-                      </m:r>
-                    </m:oMath>
-                  </m:oMathPara>
-                </a14:m>
-                <a:endParaRPr lang="pt-BR" dirty="0"/>
-              </a:p>
-              <a:p>
-                <a:pPr marL="0" indent="0">
-                  <a:buFont typeface="Arial" panose="020B0604020202020204" pitchFamily="34" charset="0"/>
-                  <a:buNone/>
-                </a:pPr>
-                <a14:m>
-                  <m:oMathPara xmlns:m="http://schemas.openxmlformats.org/officeDocument/2006/math">
-                    <m:oMathParaPr>
-                      <m:jc m:val="centerGroup"/>
-                    </m:oMathParaPr>
-                    <m:oMath xmlns:m="http://schemas.openxmlformats.org/officeDocument/2006/math">
-                      <m:r>
-                        <a:rPr lang="pt-BR" i="1">
-                          <a:latin typeface="Cambria Math"/>
-                        </a:rPr>
-                        <m:t>4</m:t>
-                      </m:r>
-                      <m:sSub>
-                        <m:sSubPr>
-                          <m:ctrlPr>
-                            <a:rPr lang="pt-BR" i="1">
-                              <a:latin typeface="Cambria Math"/>
-                            </a:rPr>
-                          </m:ctrlPr>
-                        </m:sSubPr>
-                        <m:e>
-                          <m:r>
-                            <a:rPr lang="pt-BR" i="1">
-                              <a:latin typeface="Cambria Math"/>
-                            </a:rPr>
-                            <m:t>𝑥</m:t>
-                          </m:r>
-                        </m:e>
-                        <m:sub>
-                          <m:r>
-                            <a:rPr lang="pt-BR" i="1">
-                              <a:latin typeface="Cambria Math"/>
-                            </a:rPr>
-                            <m:t>1</m:t>
-                          </m:r>
-                        </m:sub>
-                      </m:sSub>
-                      <m:r>
-                        <a:rPr lang="pt-BR" i="1">
-                          <a:latin typeface="Cambria Math"/>
-                        </a:rPr>
-                        <m:t>+</m:t>
-                      </m:r>
-                      <m:r>
-                        <a:rPr lang="pt-BR" i="1">
-                          <a:latin typeface="Cambria Math"/>
-                        </a:rPr>
-                        <m:t>3</m:t>
-                      </m:r>
-                      <m:sSub>
-                        <m:sSubPr>
-                          <m:ctrlPr>
-                            <a:rPr lang="pt-BR" i="1">
-                              <a:latin typeface="Cambria Math"/>
-                            </a:rPr>
-                          </m:ctrlPr>
-                        </m:sSubPr>
-                        <m:e>
-                          <m:r>
-                            <a:rPr lang="pt-BR" i="1">
-                              <a:latin typeface="Cambria Math"/>
-                            </a:rPr>
-                            <m:t>𝑥</m:t>
-                          </m:r>
-                        </m:e>
-                        <m:sub>
-                          <m:r>
-                            <a:rPr lang="pt-BR" i="1">
-                              <a:latin typeface="Cambria Math"/>
-                            </a:rPr>
-                            <m:t>2</m:t>
-                          </m:r>
-                        </m:sub>
-                      </m:sSub>
-                      <m:r>
-                        <a:rPr lang="pt-BR" i="1">
-                          <a:latin typeface="Cambria Math"/>
-                        </a:rPr>
-                        <m:t>−</m:t>
-                      </m:r>
-                      <m:sSub>
-                        <m:sSubPr>
-                          <m:ctrlPr>
-                            <a:rPr lang="pt-BR" i="1">
-                              <a:latin typeface="Cambria Math"/>
-                            </a:rPr>
-                          </m:ctrlPr>
-                        </m:sSubPr>
-                        <m:e>
-                          <m:r>
-                            <a:rPr lang="pt-BR" i="1">
-                              <a:latin typeface="Cambria Math"/>
-                            </a:rPr>
-                            <m:t>𝑥</m:t>
-                          </m:r>
-                        </m:e>
-                        <m:sub>
-                          <m:r>
-                            <a:rPr lang="pt-BR" i="1">
-                              <a:latin typeface="Cambria Math"/>
-                            </a:rPr>
-                            <m:t>3</m:t>
-                          </m:r>
-                        </m:sub>
-                      </m:sSub>
-                      <m:r>
-                        <a:rPr lang="pt-BR" i="1">
-                          <a:latin typeface="Cambria Math"/>
-                        </a:rPr>
-                        <m:t>+</m:t>
-                      </m:r>
-                      <m:acc>
-                        <m:accPr>
-                          <m:chr m:val="̅"/>
-                          <m:ctrlPr>
-                            <a:rPr lang="pt-BR" i="1">
-                              <a:latin typeface="Cambria Math"/>
-                            </a:rPr>
-                          </m:ctrlPr>
-                        </m:accPr>
-                        <m:e>
-                          <m:sSub>
-                            <m:sSubPr>
-                              <m:ctrlPr>
-                                <a:rPr lang="pt-BR" i="1">
-                                  <a:latin typeface="Cambria Math"/>
-                                </a:rPr>
-                              </m:ctrlPr>
-                            </m:sSubPr>
-                            <m:e>
-                              <m:r>
-                                <a:rPr lang="pt-BR" i="1">
-                                  <a:latin typeface="Cambria Math"/>
-                                </a:rPr>
-                                <m:t>𝑥</m:t>
-                              </m:r>
-                            </m:e>
-                            <m:sub>
-                              <m:r>
-                                <a:rPr lang="pt-BR" i="1">
-                                  <a:latin typeface="Cambria Math"/>
-                                </a:rPr>
-                                <m:t>6</m:t>
-                              </m:r>
-                            </m:sub>
-                          </m:sSub>
-                        </m:e>
-                      </m:acc>
-                      <m:r>
-                        <a:rPr lang="pt-BR" i="1">
-                          <a:latin typeface="Cambria Math"/>
-                        </a:rPr>
-                        <m:t>=</m:t>
-                      </m:r>
-                      <m:r>
-                        <a:rPr lang="pt-BR" i="1">
-                          <a:latin typeface="Cambria Math"/>
-                          <a:ea typeface="Cambria Math"/>
-                        </a:rPr>
-                        <m:t>6</m:t>
-                      </m:r>
-                    </m:oMath>
-                  </m:oMathPara>
-                </a14:m>
-                <a:endParaRPr lang="pt-BR" dirty="0">
-                  <a:ea typeface="Cambria Math"/>
-                </a:endParaRPr>
-              </a:p>
-              <a:p>
-                <a:pPr marL="0" indent="0">
-                  <a:buFont typeface="Arial" panose="020B0604020202020204" pitchFamily="34" charset="0"/>
-                  <a:buNone/>
-                </a:pPr>
-                <a14:m>
-                  <m:oMathPara xmlns:m="http://schemas.openxmlformats.org/officeDocument/2006/math">
-                    <m:oMathParaPr>
-                      <m:jc m:val="centerGroup"/>
-                    </m:oMathParaPr>
-                    <m:oMath xmlns:m="http://schemas.openxmlformats.org/officeDocument/2006/math">
-                      <m:sSub>
-                        <m:sSubPr>
-                          <m:ctrlPr>
-                            <a:rPr lang="pt-BR" i="1">
-                              <a:latin typeface="Cambria Math"/>
-                            </a:rPr>
-                          </m:ctrlPr>
-                        </m:sSubPr>
-                        <m:e>
-                          <m:r>
-                            <a:rPr lang="pt-BR" i="1">
-                              <a:latin typeface="Cambria Math"/>
-                            </a:rPr>
-                            <m:t>𝑥</m:t>
-                          </m:r>
-                        </m:e>
-                        <m:sub>
-                          <m:r>
-                            <a:rPr lang="pt-BR" i="1">
-                              <a:latin typeface="Cambria Math"/>
-                            </a:rPr>
-                            <m:t>1</m:t>
-                          </m:r>
-                        </m:sub>
-                      </m:sSub>
-                      <m:r>
-                        <a:rPr lang="pt-BR" i="1">
-                          <a:latin typeface="Cambria Math"/>
-                        </a:rPr>
-                        <m:t>+</m:t>
-                      </m:r>
-                      <m:r>
-                        <a:rPr lang="pt-BR" i="1">
-                          <a:latin typeface="Cambria Math"/>
-                        </a:rPr>
-                        <m:t>2</m:t>
-                      </m:r>
-                      <m:sSub>
-                        <m:sSubPr>
-                          <m:ctrlPr>
-                            <a:rPr lang="pt-BR" i="1">
-                              <a:latin typeface="Cambria Math"/>
-                            </a:rPr>
-                          </m:ctrlPr>
-                        </m:sSubPr>
-                        <m:e>
-                          <m:r>
-                            <a:rPr lang="pt-BR" i="1">
-                              <a:latin typeface="Cambria Math"/>
-                            </a:rPr>
-                            <m:t>𝑥</m:t>
-                          </m:r>
-                        </m:e>
-                        <m:sub>
-                          <m:r>
-                            <a:rPr lang="pt-BR" i="1">
-                              <a:latin typeface="Cambria Math"/>
-                            </a:rPr>
-                            <m:t>2</m:t>
-                          </m:r>
-                        </m:sub>
-                      </m:sSub>
-                      <m:r>
-                        <a:rPr lang="pt-BR" i="1">
-                          <a:latin typeface="Cambria Math"/>
-                        </a:rPr>
-                        <m:t>+</m:t>
-                      </m:r>
-                      <m:sSub>
-                        <m:sSubPr>
-                          <m:ctrlPr>
-                            <a:rPr lang="pt-BR" i="1">
-                              <a:latin typeface="Cambria Math"/>
-                            </a:rPr>
-                          </m:ctrlPr>
-                        </m:sSubPr>
-                        <m:e>
-                          <m:r>
-                            <a:rPr lang="pt-BR" i="1">
-                              <a:latin typeface="Cambria Math"/>
-                            </a:rPr>
-                            <m:t>𝑥</m:t>
-                          </m:r>
-                        </m:e>
-                        <m:sub>
-                          <m:r>
-                            <a:rPr lang="pt-BR" i="1">
-                              <a:latin typeface="Cambria Math"/>
-                            </a:rPr>
-                            <m:t>4</m:t>
-                          </m:r>
-                        </m:sub>
-                      </m:sSub>
-                      <m:r>
-                        <a:rPr lang="pt-BR" i="1">
-                          <a:latin typeface="Cambria Math"/>
-                        </a:rPr>
-                        <m:t>=</m:t>
-                      </m:r>
-                      <m:r>
-                        <a:rPr lang="pt-BR" i="1">
-                          <a:latin typeface="Cambria Math"/>
-                          <a:ea typeface="Cambria Math"/>
-                        </a:rPr>
-                        <m:t>4</m:t>
-                      </m:r>
-                    </m:oMath>
-                  </m:oMathPara>
-                </a14:m>
-                <a:endParaRPr lang="pt-BR" dirty="0">
-                  <a:ea typeface="Cambria Math"/>
-                </a:endParaRPr>
-              </a:p>
-              <a:p>
-                <a:pPr marL="0" indent="0">
-                  <a:buFont typeface="Arial" panose="020B0604020202020204" pitchFamily="34" charset="0"/>
-                  <a:buNone/>
-                </a:pPr>
-                <a14:m>
-                  <m:oMathPara xmlns:m="http://schemas.openxmlformats.org/officeDocument/2006/math">
-                    <m:oMathParaPr>
-                      <m:jc m:val="centerGroup"/>
-                    </m:oMathParaPr>
-                    <m:oMath xmlns:m="http://schemas.openxmlformats.org/officeDocument/2006/math">
-                      <m:sSub>
-                        <m:sSubPr>
-                          <m:ctrlPr>
-                            <a:rPr lang="pt-BR" i="1">
-                              <a:latin typeface="Cambria Math"/>
-                            </a:rPr>
-                          </m:ctrlPr>
-                        </m:sSubPr>
-                        <m:e>
-                          <m:r>
-                            <a:rPr lang="pt-BR" i="1">
-                              <a:latin typeface="Cambria Math"/>
-                            </a:rPr>
-                            <m:t>𝑥</m:t>
-                          </m:r>
-                        </m:e>
-                        <m:sub>
-                          <m:r>
-                            <a:rPr lang="pt-BR" i="1">
-                              <a:latin typeface="Cambria Math"/>
-                            </a:rPr>
-                            <m:t>1</m:t>
-                          </m:r>
-                        </m:sub>
-                      </m:sSub>
-                      <m:r>
-                        <a:rPr lang="pt-BR" i="1">
-                          <a:latin typeface="Cambria Math"/>
-                        </a:rPr>
-                        <m:t>,</m:t>
-                      </m:r>
-                      <m:sSub>
-                        <m:sSubPr>
-                          <m:ctrlPr>
-                            <a:rPr lang="pt-BR" i="1">
-                              <a:latin typeface="Cambria Math"/>
-                            </a:rPr>
-                          </m:ctrlPr>
-                        </m:sSubPr>
-                        <m:e>
-                          <m:r>
-                            <a:rPr lang="pt-BR" i="1">
-                              <a:latin typeface="Cambria Math"/>
-                            </a:rPr>
-                            <m:t>𝑥</m:t>
-                          </m:r>
-                        </m:e>
-                        <m:sub>
-                          <m:r>
-                            <a:rPr lang="pt-BR" i="1">
-                              <a:latin typeface="Cambria Math"/>
-                            </a:rPr>
-                            <m:t>2</m:t>
-                          </m:r>
-                        </m:sub>
-                      </m:sSub>
-                      <m:r>
-                        <a:rPr lang="pt-BR" i="1">
-                          <a:latin typeface="Cambria Math"/>
-                        </a:rPr>
-                        <m:t>,</m:t>
-                      </m:r>
-                      <m:sSub>
-                        <m:sSubPr>
-                          <m:ctrlPr>
-                            <a:rPr lang="pt-BR" i="1">
-                              <a:latin typeface="Cambria Math"/>
-                            </a:rPr>
-                          </m:ctrlPr>
-                        </m:sSubPr>
-                        <m:e>
-                          <m:r>
-                            <a:rPr lang="pt-BR" i="1">
-                              <a:latin typeface="Cambria Math"/>
-                            </a:rPr>
-                            <m:t>𝑥</m:t>
-                          </m:r>
-                        </m:e>
-                        <m:sub>
-                          <m:r>
-                            <a:rPr lang="pt-BR" i="1">
-                              <a:latin typeface="Cambria Math"/>
-                            </a:rPr>
-                            <m:t>3</m:t>
-                          </m:r>
-                        </m:sub>
-                      </m:sSub>
-                      <m:r>
-                        <a:rPr lang="pt-BR" i="1">
-                          <a:latin typeface="Cambria Math"/>
-                        </a:rPr>
-                        <m:t>,</m:t>
-                      </m:r>
-                      <m:sSub>
-                        <m:sSubPr>
-                          <m:ctrlPr>
-                            <a:rPr lang="pt-BR" i="1">
-                              <a:latin typeface="Cambria Math"/>
-                            </a:rPr>
-                          </m:ctrlPr>
-                        </m:sSubPr>
-                        <m:e>
-                          <m:r>
-                            <a:rPr lang="pt-BR" i="1">
-                              <a:latin typeface="Cambria Math"/>
-                            </a:rPr>
-                            <m:t>𝑥</m:t>
-                          </m:r>
-                        </m:e>
-                        <m:sub>
-                          <m:r>
-                            <a:rPr lang="pt-BR" i="1">
-                              <a:latin typeface="Cambria Math"/>
-                            </a:rPr>
-                            <m:t>4</m:t>
-                          </m:r>
-                        </m:sub>
-                      </m:sSub>
-                      <m:r>
-                        <a:rPr lang="pt-BR" i="1">
-                          <a:latin typeface="Cambria Math"/>
-                        </a:rPr>
-                        <m:t>,</m:t>
-                      </m:r>
-                      <m:acc>
-                        <m:accPr>
-                          <m:chr m:val="̅"/>
-                          <m:ctrlPr>
-                            <a:rPr lang="pt-BR" i="1">
-                              <a:latin typeface="Cambria Math"/>
-                            </a:rPr>
-                          </m:ctrlPr>
-                        </m:accPr>
-                        <m:e>
-                          <m:sSub>
-                            <m:sSubPr>
-                              <m:ctrlPr>
-                                <a:rPr lang="pt-BR" i="1">
-                                  <a:latin typeface="Cambria Math"/>
-                                </a:rPr>
-                              </m:ctrlPr>
-                            </m:sSubPr>
-                            <m:e>
-                              <m:r>
-                                <a:rPr lang="pt-BR" i="1">
-                                  <a:latin typeface="Cambria Math"/>
-                                </a:rPr>
-                                <m:t>𝑥</m:t>
-                              </m:r>
-                            </m:e>
-                            <m:sub>
-                              <m:r>
-                                <a:rPr lang="pt-BR" i="1">
-                                  <a:latin typeface="Cambria Math"/>
-                                </a:rPr>
-                                <m:t>5</m:t>
-                              </m:r>
-                            </m:sub>
-                          </m:sSub>
-                        </m:e>
-                      </m:acc>
-                      <m:r>
-                        <a:rPr lang="pt-BR" i="1">
-                          <a:latin typeface="Cambria Math"/>
-                        </a:rPr>
-                        <m:t>,</m:t>
-                      </m:r>
-                      <m:acc>
-                        <m:accPr>
-                          <m:chr m:val="̅"/>
-                          <m:ctrlPr>
-                            <a:rPr lang="pt-BR" i="1">
-                              <a:latin typeface="Cambria Math"/>
-                            </a:rPr>
-                          </m:ctrlPr>
-                        </m:accPr>
-                        <m:e>
-                          <m:sSub>
-                            <m:sSubPr>
-                              <m:ctrlPr>
-                                <a:rPr lang="pt-BR" i="1">
-                                  <a:latin typeface="Cambria Math"/>
-                                </a:rPr>
-                              </m:ctrlPr>
-                            </m:sSubPr>
-                            <m:e>
-                              <m:r>
-                                <a:rPr lang="pt-BR" i="1">
-                                  <a:latin typeface="Cambria Math"/>
-                                </a:rPr>
-                                <m:t>𝑥</m:t>
-                              </m:r>
-                            </m:e>
-                            <m:sub>
-                              <m:r>
-                                <a:rPr lang="pt-BR" i="1">
-                                  <a:latin typeface="Cambria Math"/>
-                                </a:rPr>
-                                <m:t>6</m:t>
-                              </m:r>
-                            </m:sub>
-                          </m:sSub>
-                        </m:e>
-                      </m:acc>
-                      <m:r>
-                        <a:rPr lang="pt-BR" i="1">
-                          <a:latin typeface="Cambria Math"/>
-                          <a:ea typeface="Cambria Math"/>
-                        </a:rPr>
-                        <m:t>≥</m:t>
-                      </m:r>
-                      <m:r>
-                        <a:rPr lang="pt-BR" i="1">
-                          <a:latin typeface="Cambria Math"/>
-                          <a:ea typeface="Cambria Math"/>
-                        </a:rPr>
-                        <m:t>0</m:t>
-                      </m:r>
-                    </m:oMath>
-                  </m:oMathPara>
-                </a14:m>
-                <a:endParaRPr lang="pt-BR" dirty="0"/>
-              </a:p>
-              <a:p>
-                <a:pPr marL="0" indent="0">
-                  <a:buFont typeface="Arial" panose="020B0604020202020204" pitchFamily="34" charset="0"/>
-                  <a:buNone/>
-                </a:pPr>
-                <a:endParaRPr lang="pt-BR" dirty="0"/>
-              </a:p>
-            </p:txBody>
-          </p:sp>
-        </mc:Choice>
-        <mc:Fallback xmlns="">
-          <p:sp>
-            <p:nvSpPr>
-              <p:cNvPr id="4" name="Espaço Reservado para Conteúdo 2">
-                <a:extLst>
-                  <a:ext uri="{FF2B5EF4-FFF2-40B4-BE49-F238E27FC236}">
-                    <a16:creationId xmlns:a16="http://schemas.microsoft.com/office/drawing/2014/main" id="{41D614E5-5473-7B5F-C7D6-580C2D9A59BB}"/>
-                  </a:ext>
-                </a:extLst>
-              </p:cNvPr>
-              <p:cNvSpPr txBox="1">
-                <a:spLocks noRot="1" noChangeAspect="1" noMove="1" noResize="1" noEditPoints="1" noAdjustHandles="1" noChangeArrowheads="1" noChangeShapeType="1" noTextEdit="1"/>
-              </p:cNvSpPr>
-              <p:nvPr/>
-            </p:nvSpPr>
-            <p:spPr>
-              <a:xfrm>
-                <a:off x="754455" y="3105601"/>
-                <a:ext cx="4040188" cy="3951288"/>
-              </a:xfrm>
-              <a:prstGeom prst="rect">
-                <a:avLst/>
-              </a:prstGeom>
-              <a:blipFill>
-                <a:blip r:embed="rId4"/>
-                <a:stretch>
-                  <a:fillRect l="-3167"/>
-                </a:stretch>
-              </a:blipFill>
-            </p:spPr>
-            <p:txBody>
-              <a:bodyPr/>
-              <a:lstStyle/>
-              <a:p>
-                <a:r>
-                  <a:rPr lang="pt-BR">
-                    <a:noFill/>
-                  </a:rPr>
-                  <a:t> </a:t>
-                </a:r>
-              </a:p>
-            </p:txBody>
-          </p:sp>
-        </mc:Fallback>
-      </mc:AlternateContent>
-    </p:spTree>
-    <p:extLst>
-      <p:ext uri="{BB962C8B-B14F-4D97-AF65-F5344CB8AC3E}">
-        <p14:creationId xmlns:p14="http://schemas.microsoft.com/office/powerpoint/2010/main" val="1161616990"/>
-      </p:ext>
-    </p:extLst>
-  </p:cSld>
-  <p:clrMapOvr>
-    <a:masterClrMapping/>
-  </p:clrMapOvr>
-</p:sld>
-</file>
-
-<file path=ppt/slides/slide17.xml><?xml version="1.0" encoding="utf-8"?>
-<p:sld xmlns:a="http://schemas.openxmlformats.org/drawingml/2006/main" xmlns:r="http://schemas.openxmlformats.org/officeDocument/2006/relationships" xmlns:p="http://schemas.openxmlformats.org/presentationml/2006/main">
-  <p:cSld>
-    <p:spTree>
-      <p:nvGrpSpPr>
-        <p:cNvPr id="1" name="">
-          <a:extLst>
-            <a:ext uri="{FF2B5EF4-FFF2-40B4-BE49-F238E27FC236}">
-              <a16:creationId xmlns:a16="http://schemas.microsoft.com/office/drawing/2014/main" xmlns="" id="{5AF0E140-A055-4A76-B82C-7CCAB8C392CF}"/>
-            </a:ext>
-          </a:extLst>
-        </p:cNvPr>
-        <p:cNvGrpSpPr/>
-        <p:nvPr/>
-      </p:nvGrpSpPr>
-      <p:grpSpPr>
-        <a:xfrm>
-          <a:off x="0" y="0"/>
-          <a:ext cx="0" cy="0"/>
-          <a:chOff x="0" y="0"/>
-          <a:chExt cx="0" cy="0"/>
-        </a:xfrm>
-      </p:grpSpPr>
-      <p:pic>
-        <p:nvPicPr>
-          <p:cNvPr id="10" name="Imagem 9" descr="Uma imagem contendo Desenho técnico&#10;&#10;O conteúdo gerado por IA pode estar incorreto.">
-            <a:extLst>
-              <a:ext uri="{FF2B5EF4-FFF2-40B4-BE49-F238E27FC236}">
-                <a16:creationId xmlns:a16="http://schemas.microsoft.com/office/drawing/2014/main" xmlns="" id="{B0D607B9-C3D2-EEF4-91D9-3E8D43E642E6}"/>
-              </a:ext>
-            </a:extLst>
-          </p:cNvPr>
-          <p:cNvPicPr>
-            <a:picLocks noGrp="1" noRot="1" noChangeAspect="1" noMove="1" noResize="1" noEditPoints="1" noAdjustHandles="1" noChangeArrowheads="1" noChangeShapeType="1" noCrop="1"/>
-          </p:cNvPicPr>
-          <p:nvPr/>
-        </p:nvPicPr>
-        <p:blipFill>
-          <a:blip r:embed="rId2">
-            <a:alphaModFix amt="20000"/>
-            <a:extLst>
-              <a:ext uri="{28A0092B-C50C-407E-A947-70E740481C1C}">
-                <a14:useLocalDpi xmlns:a14="http://schemas.microsoft.com/office/drawing/2010/main" val="0"/>
-              </a:ext>
-            </a:extLst>
-          </a:blip>
-          <a:srcRect t="26080"/>
-          <a:stretch>
-            <a:fillRect/>
-          </a:stretch>
-        </p:blipFill>
-        <p:spPr>
-          <a:xfrm>
-            <a:off x="0" y="11128"/>
-            <a:ext cx="9262533" cy="6846872"/>
-          </a:xfrm>
-          <a:prstGeom prst="rect">
-            <a:avLst/>
-          </a:prstGeom>
-        </p:spPr>
-      </p:pic>
-      <p:sp>
-        <p:nvSpPr>
-          <p:cNvPr id="5" name="TextBox 5">
-            <a:extLst>
-              <a:ext uri="{FF2B5EF4-FFF2-40B4-BE49-F238E27FC236}">
-                <a16:creationId xmlns:a16="http://schemas.microsoft.com/office/drawing/2014/main" xmlns="" id="{E9531345-870A-8508-DEF4-FB9CEB52D2F8}"/>
-              </a:ext>
-            </a:extLst>
-          </p:cNvPr>
-          <p:cNvSpPr txBox="1"/>
-          <p:nvPr/>
-        </p:nvSpPr>
-        <p:spPr>
-          <a:xfrm>
-            <a:off x="1000429" y="847992"/>
-            <a:ext cx="10191141" cy="580993"/>
-          </a:xfrm>
-          <a:prstGeom prst="rect">
-            <a:avLst/>
-          </a:prstGeom>
-        </p:spPr>
-        <p:txBody>
-          <a:bodyPr lIns="0" tIns="0" rIns="0" bIns="0" rtlCol="0" anchor="t">
-            <a:spAutoFit/>
-          </a:bodyPr>
-          <a:lstStyle/>
-          <a:p>
-            <a:pPr algn="ctr">
-              <a:lnSpc>
-                <a:spcPts val="4184"/>
-              </a:lnSpc>
-            </a:pPr>
             <a:r>
-              <a:rPr lang="pt-BR" sz="5230" b="1" dirty="0">
-                <a:solidFill>
-                  <a:schemeClr val="tx2">
-                    <a:lumMod val="75000"/>
-                  </a:schemeClr>
-                </a:solidFill>
-                <a:latin typeface="Hagrid Text Bold"/>
-                <a:ea typeface="Hagrid Text Bold"/>
-                <a:cs typeface="Hagrid Text Bold"/>
-                <a:sym typeface="Hagrid Text Bold"/>
-              </a:rPr>
-              <a:t>Exemplo: método das duas fases</a:t>
-            </a:r>
-            <a:endParaRPr lang="en-US" sz="5230" b="1" spc="-219" dirty="0">
-              <a:solidFill>
-                <a:schemeClr val="tx2">
-                  <a:lumMod val="75000"/>
-                </a:schemeClr>
-              </a:solidFill>
-              <a:latin typeface="Hagrid Text Bold"/>
-              <a:ea typeface="Hagrid Text Bold"/>
-              <a:cs typeface="Hagrid Text Bold"/>
-              <a:sym typeface="Hagrid Text Bold"/>
-            </a:endParaRPr>
-          </a:p>
-        </p:txBody>
-      </p:sp>
-      <p:sp>
-        <p:nvSpPr>
-          <p:cNvPr id="6" name="TextBox 6">
-            <a:extLst>
-              <a:ext uri="{FF2B5EF4-FFF2-40B4-BE49-F238E27FC236}">
-                <a16:creationId xmlns:a16="http://schemas.microsoft.com/office/drawing/2014/main" xmlns="" id="{655A35A7-3578-AB11-8E66-4D9A44A36D5E}"/>
-              </a:ext>
-            </a:extLst>
-          </p:cNvPr>
-          <p:cNvSpPr txBox="1"/>
-          <p:nvPr/>
-        </p:nvSpPr>
-        <p:spPr>
-          <a:xfrm>
-            <a:off x="754455" y="1798516"/>
-            <a:ext cx="5341546" cy="1477328"/>
-          </a:xfrm>
-          <a:prstGeom prst="rect">
-            <a:avLst/>
-          </a:prstGeom>
-        </p:spPr>
-        <p:txBody>
-          <a:bodyPr wrap="square" lIns="0" tIns="0" rIns="0" bIns="0" rtlCol="0" anchor="t">
-            <a:spAutoFit/>
-          </a:bodyPr>
-          <a:lstStyle/>
-          <a:p>
-            <a:r>
-              <a:rPr lang="pt-BR" sz="3200" b="1" dirty="0"/>
-              <a:t>Fase I</a:t>
-            </a:r>
-          </a:p>
-          <a:p>
-            <a:endParaRPr lang="pt-BR" sz="3200" dirty="0"/>
-          </a:p>
-          <a:p>
-            <a:endParaRPr lang="pt-BR" sz="3200" dirty="0"/>
-          </a:p>
-        </p:txBody>
-      </p:sp>
-      <p:pic>
-        <p:nvPicPr>
-          <p:cNvPr id="12" name="Imagem 11" descr="Ícone&#10;&#10;O conteúdo gerado por IA pode estar incorreto.">
-            <a:extLst>
-              <a:ext uri="{FF2B5EF4-FFF2-40B4-BE49-F238E27FC236}">
-                <a16:creationId xmlns:a16="http://schemas.microsoft.com/office/drawing/2014/main" xmlns="" id="{3328CD2B-B3D1-F3C1-9468-C3B88FD1B4A2}"/>
-              </a:ext>
-            </a:extLst>
-          </p:cNvPr>
-          <p:cNvPicPr>
-            <a:picLocks noChangeAspect="1"/>
-          </p:cNvPicPr>
-          <p:nvPr/>
-        </p:nvPicPr>
-        <p:blipFill>
-          <a:blip r:embed="rId3" cstate="print">
-            <a:extLst>
-              <a:ext uri="{28A0092B-C50C-407E-A947-70E740481C1C}">
-                <a14:useLocalDpi xmlns:a14="http://schemas.microsoft.com/office/drawing/2010/main" val="0"/>
-              </a:ext>
-            </a:extLst>
-          </a:blip>
-          <a:stretch>
-            <a:fillRect/>
-          </a:stretch>
-        </p:blipFill>
-        <p:spPr>
-          <a:xfrm>
-            <a:off x="10913035" y="11128"/>
-            <a:ext cx="1270000" cy="1264823"/>
-          </a:xfrm>
-          <a:prstGeom prst="rect">
-            <a:avLst/>
-          </a:prstGeom>
-        </p:spPr>
-      </p:pic>
-      <mc:AlternateContent xmlns:mc="http://schemas.openxmlformats.org/markup-compatibility/2006" xmlns:a14="http://schemas.microsoft.com/office/drawing/2010/main">
-        <mc:Choice Requires="a14">
-          <p:sp>
-            <p:nvSpPr>
-              <p:cNvPr id="4" name="Espaço Reservado para Conteúdo 2">
-                <a:extLst>
-                  <a:ext uri="{FF2B5EF4-FFF2-40B4-BE49-F238E27FC236}">
-                    <a16:creationId xmlns:a16="http://schemas.microsoft.com/office/drawing/2014/main" xmlns="" id="{A4689797-B0A2-837F-5561-865DC8EFF115}"/>
-                  </a:ext>
-                </a:extLst>
-              </p:cNvPr>
-              <p:cNvSpPr txBox="1">
-                <a:spLocks/>
-              </p:cNvSpPr>
-              <p:nvPr/>
-            </p:nvSpPr>
-            <p:spPr>
-              <a:xfrm>
-                <a:off x="754455" y="2537180"/>
-                <a:ext cx="4040188" cy="3951288"/>
-              </a:xfrm>
-              <a:prstGeom prst="rect">
-                <a:avLst/>
-              </a:prstGeom>
-            </p:spPr>
-            <p:txBody>
-              <a:bodyPr>
-                <a:normAutofit/>
-              </a:bodyPr>
-              <a:lstStyle>
-                <a:lvl1pPr marL="228600" indent="-228600" algn="l" defTabSz="914400" rtl="0" eaLnBrk="1" latinLnBrk="0" hangingPunct="1">
-                  <a:lnSpc>
-                    <a:spcPct val="90000"/>
-                  </a:lnSpc>
-                  <a:spcBef>
-                    <a:spcPts val="1000"/>
-                  </a:spcBef>
-                  <a:buFont typeface="Arial" panose="020B0604020202020204" pitchFamily="34" charset="0"/>
-                  <a:buChar char="•"/>
-                  <a:defRPr sz="2800" kern="1200">
-                    <a:solidFill>
-                      <a:schemeClr val="tx1"/>
-                    </a:solidFill>
-                    <a:latin typeface="+mn-lt"/>
-                    <a:ea typeface="+mn-ea"/>
-                    <a:cs typeface="+mn-cs"/>
-                  </a:defRPr>
-                </a:lvl1pPr>
-                <a:lvl2pPr marL="685800" indent="-228600" algn="l" defTabSz="914400" rtl="0" eaLnBrk="1" latinLnBrk="0" hangingPunct="1">
-                  <a:lnSpc>
-                    <a:spcPct val="90000"/>
-                  </a:lnSpc>
-                  <a:spcBef>
-                    <a:spcPts val="500"/>
-                  </a:spcBef>
-                  <a:buFont typeface="Arial" panose="020B0604020202020204" pitchFamily="34" charset="0"/>
-                  <a:buChar char="•"/>
-                  <a:defRPr sz="2400" kern="1200">
-                    <a:solidFill>
-                      <a:schemeClr val="tx1"/>
-                    </a:solidFill>
-                    <a:latin typeface="+mn-lt"/>
-                    <a:ea typeface="+mn-ea"/>
-                    <a:cs typeface="+mn-cs"/>
-                  </a:defRPr>
-                </a:lvl2pPr>
-                <a:lvl3pPr marL="1143000" indent="-228600" algn="l" defTabSz="914400" rtl="0" eaLnBrk="1" latinLnBrk="0" hangingPunct="1">
-                  <a:lnSpc>
-                    <a:spcPct val="90000"/>
-                  </a:lnSpc>
-                  <a:spcBef>
-                    <a:spcPts val="500"/>
-                  </a:spcBef>
-                  <a:buFont typeface="Arial" panose="020B0604020202020204" pitchFamily="34" charset="0"/>
-                  <a:buChar char="•"/>
-                  <a:defRPr sz="2000" kern="1200">
-                    <a:solidFill>
-                      <a:schemeClr val="tx1"/>
-                    </a:solidFill>
-                    <a:latin typeface="+mn-lt"/>
-                    <a:ea typeface="+mn-ea"/>
-                    <a:cs typeface="+mn-cs"/>
-                  </a:defRPr>
-                </a:lvl3pPr>
-                <a:lvl4pPr marL="1600200" indent="-228600" algn="l" defTabSz="914400" rtl="0" eaLnBrk="1" latinLnBrk="0" hangingPunct="1">
-                  <a:lnSpc>
-                    <a:spcPct val="90000"/>
-                  </a:lnSpc>
-                  <a:spcBef>
-                    <a:spcPts val="500"/>
-                  </a:spcBef>
-                  <a:buFont typeface="Arial" panose="020B0604020202020204" pitchFamily="34" charset="0"/>
-                  <a:buChar char="•"/>
-                  <a:defRPr sz="1800" kern="1200">
-                    <a:solidFill>
-                      <a:schemeClr val="tx1"/>
-                    </a:solidFill>
-                    <a:latin typeface="+mn-lt"/>
-                    <a:ea typeface="+mn-ea"/>
-                    <a:cs typeface="+mn-cs"/>
-                  </a:defRPr>
-                </a:lvl4pPr>
-                <a:lvl5pPr marL="2057400" indent="-228600" algn="l" defTabSz="914400" rtl="0" eaLnBrk="1" latinLnBrk="0" hangingPunct="1">
-                  <a:lnSpc>
-                    <a:spcPct val="90000"/>
-                  </a:lnSpc>
-                  <a:spcBef>
-                    <a:spcPts val="500"/>
-                  </a:spcBef>
-                  <a:buFont typeface="Arial" panose="020B0604020202020204" pitchFamily="34" charset="0"/>
-                  <a:buChar char="•"/>
-                  <a:defRPr sz="1800" kern="1200">
-                    <a:solidFill>
-                      <a:schemeClr val="tx1"/>
-                    </a:solidFill>
-                    <a:latin typeface="+mn-lt"/>
-                    <a:ea typeface="+mn-ea"/>
-                    <a:cs typeface="+mn-cs"/>
-                  </a:defRPr>
-                </a:lvl5pPr>
-                <a:lvl6pPr marL="2514600" indent="-228600" algn="l" defTabSz="914400" rtl="0" eaLnBrk="1" latinLnBrk="0" hangingPunct="1">
-                  <a:lnSpc>
-                    <a:spcPct val="90000"/>
-                  </a:lnSpc>
-                  <a:spcBef>
-                    <a:spcPts val="500"/>
-                  </a:spcBef>
-                  <a:buFont typeface="Arial" panose="020B0604020202020204" pitchFamily="34" charset="0"/>
-                  <a:buChar char="•"/>
-                  <a:defRPr sz="1800" kern="1200">
-                    <a:solidFill>
-                      <a:schemeClr val="tx1"/>
-                    </a:solidFill>
-                    <a:latin typeface="+mn-lt"/>
-                    <a:ea typeface="+mn-ea"/>
-                    <a:cs typeface="+mn-cs"/>
-                  </a:defRPr>
-                </a:lvl6pPr>
-                <a:lvl7pPr marL="2971800" indent="-228600" algn="l" defTabSz="914400" rtl="0" eaLnBrk="1" latinLnBrk="0" hangingPunct="1">
-                  <a:lnSpc>
-                    <a:spcPct val="90000"/>
-                  </a:lnSpc>
-                  <a:spcBef>
-                    <a:spcPts val="500"/>
-                  </a:spcBef>
-                  <a:buFont typeface="Arial" panose="020B0604020202020204" pitchFamily="34" charset="0"/>
-                  <a:buChar char="•"/>
-                  <a:defRPr sz="1800" kern="1200">
-                    <a:solidFill>
-                      <a:schemeClr val="tx1"/>
-                    </a:solidFill>
-                    <a:latin typeface="+mn-lt"/>
-                    <a:ea typeface="+mn-ea"/>
-                    <a:cs typeface="+mn-cs"/>
-                  </a:defRPr>
-                </a:lvl7pPr>
-                <a:lvl8pPr marL="3429000" indent="-228600" algn="l" defTabSz="914400" rtl="0" eaLnBrk="1" latinLnBrk="0" hangingPunct="1">
-                  <a:lnSpc>
-                    <a:spcPct val="90000"/>
-                  </a:lnSpc>
-                  <a:spcBef>
-                    <a:spcPts val="500"/>
-                  </a:spcBef>
-                  <a:buFont typeface="Arial" panose="020B0604020202020204" pitchFamily="34" charset="0"/>
-                  <a:buChar char="•"/>
-                  <a:defRPr sz="1800" kern="1200">
-                    <a:solidFill>
-                      <a:schemeClr val="tx1"/>
-                    </a:solidFill>
-                    <a:latin typeface="+mn-lt"/>
-                    <a:ea typeface="+mn-ea"/>
-                    <a:cs typeface="+mn-cs"/>
-                  </a:defRPr>
-                </a:lvl8pPr>
-                <a:lvl9pPr marL="3886200" indent="-228600" algn="l" defTabSz="914400" rtl="0" eaLnBrk="1" latinLnBrk="0" hangingPunct="1">
-                  <a:lnSpc>
-                    <a:spcPct val="90000"/>
-                  </a:lnSpc>
-                  <a:spcBef>
-                    <a:spcPts val="500"/>
-                  </a:spcBef>
-                  <a:buFont typeface="Arial" panose="020B0604020202020204" pitchFamily="34" charset="0"/>
-                  <a:buChar char="•"/>
-                  <a:defRPr sz="1800" kern="1200">
-                    <a:solidFill>
-                      <a:schemeClr val="tx1"/>
-                    </a:solidFill>
-                    <a:latin typeface="+mn-lt"/>
-                    <a:ea typeface="+mn-ea"/>
-                    <a:cs typeface="+mn-cs"/>
-                  </a:defRPr>
-                </a:lvl9pPr>
-              </a:lstStyle>
-              <a:p>
-                <a:pPr marL="0" indent="0" algn="ctr">
-                  <a:buFont typeface="Arial" panose="020B0604020202020204" pitchFamily="34" charset="0"/>
-                  <a:buNone/>
-                </a:pPr>
-                <a14:m>
-                  <m:oMathPara xmlns:m="http://schemas.openxmlformats.org/officeDocument/2006/math">
-                    <m:oMathParaPr>
-                      <m:jc m:val="centerGroup"/>
-                    </m:oMathParaPr>
-                    <m:oMath xmlns:m="http://schemas.openxmlformats.org/officeDocument/2006/math">
-                      <m:func>
-                        <m:funcPr>
-                          <m:ctrlPr>
-                            <a:rPr lang="pt-BR" i="1" smtClean="0">
-                              <a:latin typeface="Cambria Math"/>
-                            </a:rPr>
-                          </m:ctrlPr>
-                        </m:funcPr>
-                        <m:fName>
-                          <m:r>
-                            <m:rPr>
-                              <m:sty m:val="p"/>
-                            </m:rPr>
-                            <a:rPr lang="pt-BR">
-                              <a:latin typeface="Cambria Math"/>
-                            </a:rPr>
-                            <m:t>min</m:t>
-                          </m:r>
-                        </m:fName>
-                        <m:e>
-                          <m:r>
-                            <a:rPr lang="pt-BR" i="1">
-                              <a:latin typeface="Cambria Math"/>
-                            </a:rPr>
-                            <m:t>𝑧</m:t>
-                          </m:r>
-                          <m:r>
-                            <a:rPr lang="pt-BR" i="1">
-                              <a:latin typeface="Cambria Math"/>
-                            </a:rPr>
-                            <m:t>=</m:t>
-                          </m:r>
-                          <m:acc>
-                            <m:accPr>
-                              <m:chr m:val="̅"/>
-                              <m:ctrlPr>
-                                <a:rPr lang="pt-BR" i="1">
-                                  <a:latin typeface="Cambria Math"/>
-                                </a:rPr>
-                              </m:ctrlPr>
-                            </m:accPr>
-                            <m:e>
-                              <m:sSub>
-                                <m:sSubPr>
-                                  <m:ctrlPr>
-                                    <a:rPr lang="pt-BR" i="1">
-                                      <a:latin typeface="Cambria Math"/>
-                                    </a:rPr>
-                                  </m:ctrlPr>
-                                </m:sSubPr>
-                                <m:e>
-                                  <m:r>
-                                    <a:rPr lang="pt-BR" i="1">
-                                      <a:latin typeface="Cambria Math"/>
-                                    </a:rPr>
-                                    <m:t>𝑥</m:t>
-                                  </m:r>
-                                </m:e>
-                                <m:sub>
-                                  <m:r>
-                                    <a:rPr lang="pt-BR" i="1">
-                                      <a:latin typeface="Cambria Math"/>
-                                    </a:rPr>
-                                    <m:t>5</m:t>
-                                  </m:r>
-                                </m:sub>
-                              </m:sSub>
-                            </m:e>
-                          </m:acc>
-                          <m:r>
-                            <a:rPr lang="pt-BR" i="1">
-                              <a:latin typeface="Cambria Math"/>
-                            </a:rPr>
-                            <m:t>+</m:t>
-                          </m:r>
-                          <m:acc>
-                            <m:accPr>
-                              <m:chr m:val="̅"/>
-                              <m:ctrlPr>
-                                <a:rPr lang="pt-BR" i="1">
-                                  <a:latin typeface="Cambria Math"/>
-                                </a:rPr>
-                              </m:ctrlPr>
-                            </m:accPr>
-                            <m:e>
-                              <m:sSub>
-                                <m:sSubPr>
-                                  <m:ctrlPr>
-                                    <a:rPr lang="pt-BR" i="1">
-                                      <a:latin typeface="Cambria Math"/>
-                                    </a:rPr>
-                                  </m:ctrlPr>
-                                </m:sSubPr>
-                                <m:e>
-                                  <m:r>
-                                    <a:rPr lang="pt-BR" i="1">
-                                      <a:latin typeface="Cambria Math"/>
-                                    </a:rPr>
-                                    <m:t>𝑥</m:t>
-                                  </m:r>
-                                </m:e>
-                                <m:sub>
-                                  <m:r>
-                                    <a:rPr lang="pt-BR" i="1">
-                                      <a:latin typeface="Cambria Math"/>
-                                    </a:rPr>
-                                    <m:t>6</m:t>
-                                  </m:r>
-                                </m:sub>
-                              </m:sSub>
-                            </m:e>
-                          </m:acc>
-                        </m:e>
-                      </m:func>
-                    </m:oMath>
-                  </m:oMathPara>
-                </a14:m>
-                <a:endParaRPr lang="pt-BR" dirty="0"/>
-              </a:p>
-              <a:p>
-                <a:pPr marL="0" indent="0" algn="ctr">
-                  <a:buFont typeface="Arial" panose="020B0604020202020204" pitchFamily="34" charset="0"/>
-                  <a:buNone/>
-                </a:pPr>
-                <a:r>
-                  <a:rPr lang="pt-BR" i="1" dirty="0">
-                    <a:latin typeface="Cambria Math"/>
-                  </a:rPr>
-                  <a:t>Sujeito a </a:t>
-                </a:r>
-              </a:p>
-              <a:p>
-                <a:pPr marL="0" indent="0" algn="ctr">
-                  <a:buFont typeface="Arial" panose="020B0604020202020204" pitchFamily="34" charset="0"/>
-                  <a:buNone/>
-                </a:pPr>
-                <a14:m>
-                  <m:oMathPara xmlns:m="http://schemas.openxmlformats.org/officeDocument/2006/math">
-                    <m:oMathParaPr>
-                      <m:jc m:val="centerGroup"/>
-                    </m:oMathParaPr>
-                    <m:oMath xmlns:m="http://schemas.openxmlformats.org/officeDocument/2006/math">
-                      <m:r>
-                        <a:rPr lang="pt-BR" i="1">
-                          <a:latin typeface="Cambria Math"/>
-                        </a:rPr>
-                        <m:t>3</m:t>
-                      </m:r>
-                      <m:sSub>
-                        <m:sSubPr>
-                          <m:ctrlPr>
-                            <a:rPr lang="pt-BR" i="1">
-                              <a:latin typeface="Cambria Math"/>
-                            </a:rPr>
-                          </m:ctrlPr>
-                        </m:sSubPr>
-                        <m:e>
-                          <m:r>
-                            <a:rPr lang="pt-BR" i="1">
-                              <a:latin typeface="Cambria Math"/>
-                            </a:rPr>
-                            <m:t>𝑥</m:t>
-                          </m:r>
-                        </m:e>
-                        <m:sub>
-                          <m:r>
-                            <a:rPr lang="pt-BR" i="1">
-                              <a:latin typeface="Cambria Math"/>
-                            </a:rPr>
-                            <m:t>1</m:t>
-                          </m:r>
-                        </m:sub>
-                      </m:sSub>
-                      <m:r>
-                        <a:rPr lang="pt-BR" i="1">
-                          <a:latin typeface="Cambria Math"/>
-                        </a:rPr>
-                        <m:t>+</m:t>
-                      </m:r>
-                      <m:sSub>
-                        <m:sSubPr>
-                          <m:ctrlPr>
-                            <a:rPr lang="pt-BR" i="1">
-                              <a:latin typeface="Cambria Math"/>
-                            </a:rPr>
-                          </m:ctrlPr>
-                        </m:sSubPr>
-                        <m:e>
-                          <m:r>
-                            <a:rPr lang="pt-BR" i="1">
-                              <a:latin typeface="Cambria Math"/>
-                            </a:rPr>
-                            <m:t>𝑥</m:t>
-                          </m:r>
-                        </m:e>
-                        <m:sub>
-                          <m:r>
-                            <a:rPr lang="pt-BR" i="1">
-                              <a:latin typeface="Cambria Math"/>
-                            </a:rPr>
-                            <m:t>2</m:t>
-                          </m:r>
-                        </m:sub>
-                      </m:sSub>
-                      <m:r>
-                        <a:rPr lang="pt-BR" i="1">
-                          <a:latin typeface="Cambria Math"/>
-                        </a:rPr>
-                        <m:t>+</m:t>
-                      </m:r>
-                      <m:acc>
-                        <m:accPr>
-                          <m:chr m:val="̅"/>
-                          <m:ctrlPr>
-                            <a:rPr lang="pt-BR" i="1">
-                              <a:latin typeface="Cambria Math"/>
-                            </a:rPr>
-                          </m:ctrlPr>
-                        </m:accPr>
-                        <m:e>
-                          <m:sSub>
-                            <m:sSubPr>
-                              <m:ctrlPr>
-                                <a:rPr lang="pt-BR" i="1">
-                                  <a:latin typeface="Cambria Math"/>
-                                </a:rPr>
-                              </m:ctrlPr>
-                            </m:sSubPr>
-                            <m:e>
-                              <m:r>
-                                <a:rPr lang="pt-BR" i="1">
-                                  <a:latin typeface="Cambria Math"/>
-                                </a:rPr>
-                                <m:t>𝑥</m:t>
-                              </m:r>
-                            </m:e>
-                            <m:sub>
-                              <m:r>
-                                <a:rPr lang="pt-BR" i="1">
-                                  <a:latin typeface="Cambria Math"/>
-                                </a:rPr>
-                                <m:t>5</m:t>
-                              </m:r>
-                            </m:sub>
-                          </m:sSub>
-                        </m:e>
-                      </m:acc>
-                      <m:r>
-                        <a:rPr lang="pt-BR" i="1">
-                          <a:latin typeface="Cambria Math"/>
-                        </a:rPr>
-                        <m:t>=</m:t>
-                      </m:r>
-                      <m:r>
-                        <a:rPr lang="pt-BR" i="1">
-                          <a:latin typeface="Cambria Math"/>
-                        </a:rPr>
-                        <m:t>3</m:t>
-                      </m:r>
-                    </m:oMath>
-                  </m:oMathPara>
-                </a14:m>
-                <a:endParaRPr lang="pt-BR" dirty="0"/>
-              </a:p>
-              <a:p>
-                <a:pPr marL="0" indent="0" algn="ctr">
-                  <a:buFont typeface="Arial" panose="020B0604020202020204" pitchFamily="34" charset="0"/>
-                  <a:buNone/>
-                </a:pPr>
-                <a14:m>
-                  <m:oMathPara xmlns:m="http://schemas.openxmlformats.org/officeDocument/2006/math">
-                    <m:oMathParaPr>
-                      <m:jc m:val="centerGroup"/>
-                    </m:oMathParaPr>
-                    <m:oMath xmlns:m="http://schemas.openxmlformats.org/officeDocument/2006/math">
-                      <m:r>
-                        <a:rPr lang="pt-BR" i="1">
-                          <a:latin typeface="Cambria Math"/>
-                        </a:rPr>
-                        <m:t>4</m:t>
-                      </m:r>
-                      <m:sSub>
-                        <m:sSubPr>
-                          <m:ctrlPr>
-                            <a:rPr lang="pt-BR" i="1">
-                              <a:latin typeface="Cambria Math"/>
-                            </a:rPr>
-                          </m:ctrlPr>
-                        </m:sSubPr>
-                        <m:e>
-                          <m:r>
-                            <a:rPr lang="pt-BR" i="1">
-                              <a:latin typeface="Cambria Math"/>
-                            </a:rPr>
-                            <m:t>𝑥</m:t>
-                          </m:r>
-                        </m:e>
-                        <m:sub>
-                          <m:r>
-                            <a:rPr lang="pt-BR" i="1">
-                              <a:latin typeface="Cambria Math"/>
-                            </a:rPr>
-                            <m:t>1</m:t>
-                          </m:r>
-                        </m:sub>
-                      </m:sSub>
-                      <m:r>
-                        <a:rPr lang="pt-BR" i="1">
-                          <a:latin typeface="Cambria Math"/>
-                        </a:rPr>
-                        <m:t>+</m:t>
-                      </m:r>
-                      <m:r>
-                        <a:rPr lang="pt-BR" i="1">
-                          <a:latin typeface="Cambria Math"/>
-                        </a:rPr>
-                        <m:t>3</m:t>
-                      </m:r>
-                      <m:sSub>
-                        <m:sSubPr>
-                          <m:ctrlPr>
-                            <a:rPr lang="pt-BR" i="1">
-                              <a:latin typeface="Cambria Math"/>
-                            </a:rPr>
-                          </m:ctrlPr>
-                        </m:sSubPr>
-                        <m:e>
-                          <m:r>
-                            <a:rPr lang="pt-BR" i="1">
-                              <a:latin typeface="Cambria Math"/>
-                            </a:rPr>
-                            <m:t>𝑥</m:t>
-                          </m:r>
-                        </m:e>
-                        <m:sub>
-                          <m:r>
-                            <a:rPr lang="pt-BR" i="1">
-                              <a:latin typeface="Cambria Math"/>
-                            </a:rPr>
-                            <m:t>2</m:t>
-                          </m:r>
-                        </m:sub>
-                      </m:sSub>
-                      <m:r>
-                        <a:rPr lang="pt-BR" i="1">
-                          <a:latin typeface="Cambria Math"/>
-                        </a:rPr>
-                        <m:t>−</m:t>
-                      </m:r>
-                      <m:sSub>
-                        <m:sSubPr>
-                          <m:ctrlPr>
-                            <a:rPr lang="pt-BR" i="1">
-                              <a:latin typeface="Cambria Math"/>
-                            </a:rPr>
-                          </m:ctrlPr>
-                        </m:sSubPr>
-                        <m:e>
-                          <m:r>
-                            <a:rPr lang="pt-BR" i="1">
-                              <a:latin typeface="Cambria Math"/>
-                            </a:rPr>
-                            <m:t>𝑥</m:t>
-                          </m:r>
-                        </m:e>
-                        <m:sub>
-                          <m:r>
-                            <a:rPr lang="pt-BR" i="1">
-                              <a:latin typeface="Cambria Math"/>
-                            </a:rPr>
-                            <m:t>3</m:t>
-                          </m:r>
-                        </m:sub>
-                      </m:sSub>
-                      <m:r>
-                        <a:rPr lang="pt-BR" i="1">
-                          <a:latin typeface="Cambria Math"/>
-                        </a:rPr>
-                        <m:t>+</m:t>
-                      </m:r>
-                      <m:acc>
-                        <m:accPr>
-                          <m:chr m:val="̅"/>
-                          <m:ctrlPr>
-                            <a:rPr lang="pt-BR" i="1">
-                              <a:latin typeface="Cambria Math"/>
-                            </a:rPr>
-                          </m:ctrlPr>
-                        </m:accPr>
-                        <m:e>
-                          <m:sSub>
-                            <m:sSubPr>
-                              <m:ctrlPr>
-                                <a:rPr lang="pt-BR" i="1">
-                                  <a:latin typeface="Cambria Math"/>
-                                </a:rPr>
-                              </m:ctrlPr>
-                            </m:sSubPr>
-                            <m:e>
-                              <m:r>
-                                <a:rPr lang="pt-BR" i="1">
-                                  <a:latin typeface="Cambria Math"/>
-                                </a:rPr>
-                                <m:t>𝑥</m:t>
-                              </m:r>
-                            </m:e>
-                            <m:sub>
-                              <m:r>
-                                <a:rPr lang="pt-BR" i="1">
-                                  <a:latin typeface="Cambria Math"/>
-                                </a:rPr>
-                                <m:t>6</m:t>
-                              </m:r>
-                            </m:sub>
-                          </m:sSub>
-                        </m:e>
-                      </m:acc>
-                      <m:r>
-                        <a:rPr lang="pt-BR" i="1">
-                          <a:latin typeface="Cambria Math"/>
-                        </a:rPr>
-                        <m:t>=</m:t>
-                      </m:r>
-                      <m:r>
-                        <a:rPr lang="pt-BR" i="1">
-                          <a:latin typeface="Cambria Math"/>
-                          <a:ea typeface="Cambria Math"/>
-                        </a:rPr>
-                        <m:t>6</m:t>
-                      </m:r>
-                    </m:oMath>
-                  </m:oMathPara>
-                </a14:m>
-                <a:endParaRPr lang="pt-BR" dirty="0">
-                  <a:ea typeface="Cambria Math"/>
-                </a:endParaRPr>
-              </a:p>
-              <a:p>
-                <a:pPr marL="0" indent="0" algn="ctr">
-                  <a:buFont typeface="Arial" panose="020B0604020202020204" pitchFamily="34" charset="0"/>
-                  <a:buNone/>
-                </a:pPr>
-                <a14:m>
-                  <m:oMathPara xmlns:m="http://schemas.openxmlformats.org/officeDocument/2006/math">
-                    <m:oMathParaPr>
-                      <m:jc m:val="centerGroup"/>
-                    </m:oMathParaPr>
-                    <m:oMath xmlns:m="http://schemas.openxmlformats.org/officeDocument/2006/math">
-                      <m:sSub>
-                        <m:sSubPr>
-                          <m:ctrlPr>
-                            <a:rPr lang="pt-BR" i="1">
-                              <a:latin typeface="Cambria Math"/>
-                            </a:rPr>
-                          </m:ctrlPr>
-                        </m:sSubPr>
-                        <m:e>
-                          <m:r>
-                            <a:rPr lang="pt-BR" i="1">
-                              <a:latin typeface="Cambria Math"/>
-                            </a:rPr>
-                            <m:t>𝑥</m:t>
-                          </m:r>
-                        </m:e>
-                        <m:sub>
-                          <m:r>
-                            <a:rPr lang="pt-BR" i="1">
-                              <a:latin typeface="Cambria Math"/>
-                            </a:rPr>
-                            <m:t>1</m:t>
-                          </m:r>
-                        </m:sub>
-                      </m:sSub>
-                      <m:r>
-                        <a:rPr lang="pt-BR" i="1">
-                          <a:latin typeface="Cambria Math"/>
-                        </a:rPr>
-                        <m:t>+</m:t>
-                      </m:r>
-                      <m:r>
-                        <a:rPr lang="pt-BR" i="1">
-                          <a:latin typeface="Cambria Math"/>
-                        </a:rPr>
-                        <m:t>2</m:t>
-                      </m:r>
-                      <m:sSub>
-                        <m:sSubPr>
-                          <m:ctrlPr>
-                            <a:rPr lang="pt-BR" i="1">
-                              <a:latin typeface="Cambria Math"/>
-                            </a:rPr>
-                          </m:ctrlPr>
-                        </m:sSubPr>
-                        <m:e>
-                          <m:r>
-                            <a:rPr lang="pt-BR" i="1">
-                              <a:latin typeface="Cambria Math"/>
-                            </a:rPr>
-                            <m:t>𝑥</m:t>
-                          </m:r>
-                        </m:e>
-                        <m:sub>
-                          <m:r>
-                            <a:rPr lang="pt-BR" i="1">
-                              <a:latin typeface="Cambria Math"/>
-                            </a:rPr>
-                            <m:t>2</m:t>
-                          </m:r>
-                        </m:sub>
-                      </m:sSub>
-                      <m:r>
-                        <a:rPr lang="pt-BR" i="1">
-                          <a:latin typeface="Cambria Math"/>
-                        </a:rPr>
-                        <m:t>+</m:t>
-                      </m:r>
-                      <m:sSub>
-                        <m:sSubPr>
-                          <m:ctrlPr>
-                            <a:rPr lang="pt-BR" i="1">
-                              <a:latin typeface="Cambria Math"/>
-                            </a:rPr>
-                          </m:ctrlPr>
-                        </m:sSubPr>
-                        <m:e>
-                          <m:r>
-                            <a:rPr lang="pt-BR" i="1">
-                              <a:latin typeface="Cambria Math"/>
-                            </a:rPr>
-                            <m:t>𝑥</m:t>
-                          </m:r>
-                        </m:e>
-                        <m:sub>
-                          <m:r>
-                            <a:rPr lang="pt-BR" i="1">
-                              <a:latin typeface="Cambria Math"/>
-                            </a:rPr>
-                            <m:t>4</m:t>
-                          </m:r>
-                        </m:sub>
-                      </m:sSub>
-                      <m:r>
-                        <a:rPr lang="pt-BR" i="1">
-                          <a:latin typeface="Cambria Math"/>
-                        </a:rPr>
-                        <m:t>=</m:t>
-                      </m:r>
-                      <m:r>
-                        <a:rPr lang="pt-BR" i="1">
-                          <a:latin typeface="Cambria Math"/>
-                          <a:ea typeface="Cambria Math"/>
-                        </a:rPr>
-                        <m:t>4</m:t>
-                      </m:r>
-                    </m:oMath>
-                  </m:oMathPara>
-                </a14:m>
-                <a:endParaRPr lang="pt-BR" dirty="0">
-                  <a:ea typeface="Cambria Math"/>
-                </a:endParaRPr>
-              </a:p>
-              <a:p>
-                <a:pPr marL="0" indent="0" algn="ctr">
-                  <a:buFont typeface="Arial" panose="020B0604020202020204" pitchFamily="34" charset="0"/>
-                  <a:buNone/>
-                </a:pPr>
-                <a14:m>
-                  <m:oMathPara xmlns:m="http://schemas.openxmlformats.org/officeDocument/2006/math">
-                    <m:oMathParaPr>
-                      <m:jc m:val="centerGroup"/>
-                    </m:oMathParaPr>
-                    <m:oMath xmlns:m="http://schemas.openxmlformats.org/officeDocument/2006/math">
-                      <m:sSub>
-                        <m:sSubPr>
-                          <m:ctrlPr>
-                            <a:rPr lang="pt-BR" i="1">
-                              <a:latin typeface="Cambria Math"/>
-                            </a:rPr>
-                          </m:ctrlPr>
-                        </m:sSubPr>
-                        <m:e>
-                          <m:r>
-                            <a:rPr lang="pt-BR" i="1">
-                              <a:latin typeface="Cambria Math"/>
-                            </a:rPr>
-                            <m:t>𝑥</m:t>
-                          </m:r>
-                        </m:e>
-                        <m:sub>
-                          <m:r>
-                            <a:rPr lang="pt-BR" i="1">
-                              <a:latin typeface="Cambria Math"/>
-                            </a:rPr>
-                            <m:t>1</m:t>
-                          </m:r>
-                        </m:sub>
-                      </m:sSub>
-                      <m:r>
-                        <a:rPr lang="pt-BR" i="1">
-                          <a:latin typeface="Cambria Math"/>
-                        </a:rPr>
-                        <m:t>,</m:t>
-                      </m:r>
-                      <m:sSub>
-                        <m:sSubPr>
-                          <m:ctrlPr>
-                            <a:rPr lang="pt-BR" i="1">
-                              <a:latin typeface="Cambria Math"/>
-                            </a:rPr>
-                          </m:ctrlPr>
-                        </m:sSubPr>
-                        <m:e>
-                          <m:r>
-                            <a:rPr lang="pt-BR" i="1">
-                              <a:latin typeface="Cambria Math"/>
-                            </a:rPr>
-                            <m:t>𝑥</m:t>
-                          </m:r>
-                        </m:e>
-                        <m:sub>
-                          <m:r>
-                            <a:rPr lang="pt-BR" i="1">
-                              <a:latin typeface="Cambria Math"/>
-                            </a:rPr>
-                            <m:t>2</m:t>
-                          </m:r>
-                        </m:sub>
-                      </m:sSub>
-                      <m:r>
-                        <a:rPr lang="pt-BR" i="1">
-                          <a:latin typeface="Cambria Math"/>
-                        </a:rPr>
-                        <m:t>,</m:t>
-                      </m:r>
-                      <m:sSub>
-                        <m:sSubPr>
-                          <m:ctrlPr>
-                            <a:rPr lang="pt-BR" i="1">
-                              <a:latin typeface="Cambria Math"/>
-                            </a:rPr>
-                          </m:ctrlPr>
-                        </m:sSubPr>
-                        <m:e>
-                          <m:r>
-                            <a:rPr lang="pt-BR" i="1">
-                              <a:latin typeface="Cambria Math"/>
-                            </a:rPr>
-                            <m:t>𝑥</m:t>
-                          </m:r>
-                        </m:e>
-                        <m:sub>
-                          <m:r>
-                            <a:rPr lang="pt-BR" i="1">
-                              <a:latin typeface="Cambria Math"/>
-                            </a:rPr>
-                            <m:t>3</m:t>
-                          </m:r>
-                        </m:sub>
-                      </m:sSub>
-                      <m:r>
-                        <a:rPr lang="pt-BR" i="1">
-                          <a:latin typeface="Cambria Math"/>
-                        </a:rPr>
-                        <m:t>,</m:t>
-                      </m:r>
-                      <m:sSub>
-                        <m:sSubPr>
-                          <m:ctrlPr>
-                            <a:rPr lang="pt-BR" i="1">
-                              <a:latin typeface="Cambria Math"/>
-                            </a:rPr>
-                          </m:ctrlPr>
-                        </m:sSubPr>
-                        <m:e>
-                          <m:r>
-                            <a:rPr lang="pt-BR" i="1">
-                              <a:latin typeface="Cambria Math"/>
-                            </a:rPr>
-                            <m:t>𝑥</m:t>
-                          </m:r>
-                        </m:e>
-                        <m:sub>
-                          <m:r>
-                            <a:rPr lang="pt-BR" i="1">
-                              <a:latin typeface="Cambria Math"/>
-                            </a:rPr>
-                            <m:t>4</m:t>
-                          </m:r>
-                        </m:sub>
-                      </m:sSub>
-                      <m:r>
-                        <a:rPr lang="pt-BR" i="1">
-                          <a:latin typeface="Cambria Math"/>
-                        </a:rPr>
-                        <m:t>,</m:t>
-                      </m:r>
-                      <m:acc>
-                        <m:accPr>
-                          <m:chr m:val="̅"/>
-                          <m:ctrlPr>
-                            <a:rPr lang="pt-BR" i="1">
-                              <a:latin typeface="Cambria Math"/>
-                            </a:rPr>
-                          </m:ctrlPr>
-                        </m:accPr>
-                        <m:e>
-                          <m:sSub>
-                            <m:sSubPr>
-                              <m:ctrlPr>
-                                <a:rPr lang="pt-BR" i="1">
-                                  <a:latin typeface="Cambria Math"/>
-                                </a:rPr>
-                              </m:ctrlPr>
-                            </m:sSubPr>
-                            <m:e>
-                              <m:r>
-                                <a:rPr lang="pt-BR" i="1">
-                                  <a:latin typeface="Cambria Math"/>
-                                </a:rPr>
-                                <m:t>𝑥</m:t>
-                              </m:r>
-                            </m:e>
-                            <m:sub>
-                              <m:r>
-                                <a:rPr lang="pt-BR" i="1">
-                                  <a:latin typeface="Cambria Math"/>
-                                </a:rPr>
-                                <m:t>5</m:t>
-                              </m:r>
-                            </m:sub>
-                          </m:sSub>
-                        </m:e>
-                      </m:acc>
-                      <m:r>
-                        <a:rPr lang="pt-BR" i="1">
-                          <a:latin typeface="Cambria Math"/>
-                        </a:rPr>
-                        <m:t>,</m:t>
-                      </m:r>
-                      <m:acc>
-                        <m:accPr>
-                          <m:chr m:val="̅"/>
-                          <m:ctrlPr>
-                            <a:rPr lang="pt-BR" i="1">
-                              <a:latin typeface="Cambria Math"/>
-                            </a:rPr>
-                          </m:ctrlPr>
-                        </m:accPr>
-                        <m:e>
-                          <m:sSub>
-                            <m:sSubPr>
-                              <m:ctrlPr>
-                                <a:rPr lang="pt-BR" i="1">
-                                  <a:latin typeface="Cambria Math"/>
-                                </a:rPr>
-                              </m:ctrlPr>
-                            </m:sSubPr>
-                            <m:e>
-                              <m:r>
-                                <a:rPr lang="pt-BR" i="1">
-                                  <a:latin typeface="Cambria Math"/>
-                                </a:rPr>
-                                <m:t>𝑥</m:t>
-                              </m:r>
-                            </m:e>
-                            <m:sub>
-                              <m:r>
-                                <a:rPr lang="pt-BR" i="1">
-                                  <a:latin typeface="Cambria Math"/>
-                                </a:rPr>
-                                <m:t>6</m:t>
-                              </m:r>
-                            </m:sub>
-                          </m:sSub>
-                        </m:e>
-                      </m:acc>
-                      <m:r>
-                        <a:rPr lang="pt-BR" i="1">
-                          <a:latin typeface="Cambria Math"/>
-                          <a:ea typeface="Cambria Math"/>
-                        </a:rPr>
-                        <m:t>≥</m:t>
-                      </m:r>
-                      <m:r>
-                        <a:rPr lang="pt-BR" i="1">
-                          <a:latin typeface="Cambria Math"/>
-                          <a:ea typeface="Cambria Math"/>
-                        </a:rPr>
-                        <m:t>0</m:t>
-                      </m:r>
-                    </m:oMath>
-                  </m:oMathPara>
-                </a14:m>
-                <a:endParaRPr lang="pt-BR" dirty="0"/>
-              </a:p>
-              <a:p>
-                <a:pPr marL="0" indent="0">
-                  <a:buFont typeface="Arial" panose="020B0604020202020204" pitchFamily="34" charset="0"/>
-                  <a:buNone/>
-                </a:pPr>
-                <a:endParaRPr lang="pt-BR" dirty="0"/>
-              </a:p>
-            </p:txBody>
-          </p:sp>
-        </mc:Choice>
-        <mc:Fallback xmlns="">
-          <p:sp>
-            <p:nvSpPr>
-              <p:cNvPr id="4" name="Espaço Reservado para Conteúdo 2">
-                <a:extLst>
-                  <a:ext uri="{FF2B5EF4-FFF2-40B4-BE49-F238E27FC236}">
-                    <a16:creationId xmlns:a16="http://schemas.microsoft.com/office/drawing/2014/main" id="{A4689797-B0A2-837F-5561-865DC8EFF115}"/>
-                  </a:ext>
-                </a:extLst>
-              </p:cNvPr>
-              <p:cNvSpPr txBox="1">
-                <a:spLocks noRot="1" noChangeAspect="1" noMove="1" noResize="1" noEditPoints="1" noAdjustHandles="1" noChangeArrowheads="1" noChangeShapeType="1" noTextEdit="1"/>
-              </p:cNvSpPr>
-              <p:nvPr/>
-            </p:nvSpPr>
-            <p:spPr>
-              <a:xfrm>
-                <a:off x="754455" y="2537180"/>
-                <a:ext cx="4040188" cy="3951288"/>
-              </a:xfrm>
-              <a:prstGeom prst="rect">
-                <a:avLst/>
-              </a:prstGeom>
-              <a:blipFill>
-                <a:blip r:embed="rId4"/>
-                <a:stretch>
-                  <a:fillRect/>
-                </a:stretch>
-              </a:blipFill>
-            </p:spPr>
-            <p:txBody>
-              <a:bodyPr/>
-              <a:lstStyle/>
-              <a:p>
-                <a:r>
-                  <a:rPr lang="pt-BR">
-                    <a:noFill/>
-                  </a:rPr>
-                  <a:t> </a:t>
-                </a:r>
-              </a:p>
-            </p:txBody>
-          </p:sp>
-        </mc:Fallback>
-      </mc:AlternateContent>
-      <p:sp>
-        <p:nvSpPr>
-          <p:cNvPr id="2" name="TextBox 6">
-            <a:extLst>
-              <a:ext uri="{FF2B5EF4-FFF2-40B4-BE49-F238E27FC236}">
-                <a16:creationId xmlns:a16="http://schemas.microsoft.com/office/drawing/2014/main" xmlns="" id="{0E36A709-18CC-D2B6-4660-1D928E13114D}"/>
-              </a:ext>
-            </a:extLst>
-          </p:cNvPr>
-          <p:cNvSpPr txBox="1"/>
-          <p:nvPr/>
-        </p:nvSpPr>
-        <p:spPr>
-          <a:xfrm>
-            <a:off x="6095999" y="1798516"/>
-            <a:ext cx="5341546" cy="1477328"/>
-          </a:xfrm>
-          <a:prstGeom prst="rect">
-            <a:avLst/>
-          </a:prstGeom>
-        </p:spPr>
-        <p:txBody>
-          <a:bodyPr wrap="square" lIns="0" tIns="0" rIns="0" bIns="0" rtlCol="0" anchor="t">
-            <a:spAutoFit/>
-          </a:bodyPr>
-          <a:lstStyle/>
-          <a:p>
-            <a:r>
-              <a:rPr lang="pt-BR" sz="3200" b="1" dirty="0"/>
-              <a:t>Fase II</a:t>
-            </a:r>
-          </a:p>
-          <a:p>
-            <a:endParaRPr lang="pt-BR" sz="3200" dirty="0"/>
-          </a:p>
-          <a:p>
-            <a:endParaRPr lang="pt-BR" sz="3200" dirty="0"/>
-          </a:p>
-        </p:txBody>
-      </p:sp>
-      <mc:AlternateContent xmlns:mc="http://schemas.openxmlformats.org/markup-compatibility/2006" xmlns:a14="http://schemas.microsoft.com/office/drawing/2010/main">
-        <mc:Choice Requires="a14">
-          <p:sp>
-            <p:nvSpPr>
-              <p:cNvPr id="3" name="Espaço Reservado para Conteúdo 3">
-                <a:extLst>
-                  <a:ext uri="{FF2B5EF4-FFF2-40B4-BE49-F238E27FC236}">
-                    <a16:creationId xmlns:a16="http://schemas.microsoft.com/office/drawing/2014/main" xmlns="" id="{B3B82331-5D06-F8E9-20BA-760A0A86340B}"/>
-                  </a:ext>
-                </a:extLst>
-              </p:cNvPr>
-              <p:cNvSpPr txBox="1">
-                <a:spLocks/>
-              </p:cNvSpPr>
-              <p:nvPr/>
-            </p:nvSpPr>
-            <p:spPr>
-              <a:xfrm>
-                <a:off x="6095999" y="2537180"/>
-                <a:ext cx="4041775" cy="3951288"/>
-              </a:xfrm>
-              <a:prstGeom prst="rect">
-                <a:avLst/>
-              </a:prstGeom>
-            </p:spPr>
-            <p:txBody>
-              <a:bodyPr>
-                <a:normAutofit/>
-              </a:bodyPr>
-              <a:lstStyle>
-                <a:lvl1pPr marL="228600" indent="-228600" algn="l" defTabSz="914400" rtl="0" eaLnBrk="1" latinLnBrk="0" hangingPunct="1">
-                  <a:lnSpc>
-                    <a:spcPct val="90000"/>
-                  </a:lnSpc>
-                  <a:spcBef>
-                    <a:spcPts val="1000"/>
-                  </a:spcBef>
-                  <a:buFont typeface="Arial" panose="020B0604020202020204" pitchFamily="34" charset="0"/>
-                  <a:buChar char="•"/>
-                  <a:defRPr sz="2800" kern="1200">
-                    <a:solidFill>
-                      <a:schemeClr val="tx1"/>
-                    </a:solidFill>
-                    <a:latin typeface="+mn-lt"/>
-                    <a:ea typeface="+mn-ea"/>
-                    <a:cs typeface="+mn-cs"/>
-                  </a:defRPr>
-                </a:lvl1pPr>
-                <a:lvl2pPr marL="685800" indent="-228600" algn="l" defTabSz="914400" rtl="0" eaLnBrk="1" latinLnBrk="0" hangingPunct="1">
-                  <a:lnSpc>
-                    <a:spcPct val="90000"/>
-                  </a:lnSpc>
-                  <a:spcBef>
-                    <a:spcPts val="500"/>
-                  </a:spcBef>
-                  <a:buFont typeface="Arial" panose="020B0604020202020204" pitchFamily="34" charset="0"/>
-                  <a:buChar char="•"/>
-                  <a:defRPr sz="2400" kern="1200">
-                    <a:solidFill>
-                      <a:schemeClr val="tx1"/>
-                    </a:solidFill>
-                    <a:latin typeface="+mn-lt"/>
-                    <a:ea typeface="+mn-ea"/>
-                    <a:cs typeface="+mn-cs"/>
-                  </a:defRPr>
-                </a:lvl2pPr>
-                <a:lvl3pPr marL="1143000" indent="-228600" algn="l" defTabSz="914400" rtl="0" eaLnBrk="1" latinLnBrk="0" hangingPunct="1">
-                  <a:lnSpc>
-                    <a:spcPct val="90000"/>
-                  </a:lnSpc>
-                  <a:spcBef>
-                    <a:spcPts val="500"/>
-                  </a:spcBef>
-                  <a:buFont typeface="Arial" panose="020B0604020202020204" pitchFamily="34" charset="0"/>
-                  <a:buChar char="•"/>
-                  <a:defRPr sz="2000" kern="1200">
-                    <a:solidFill>
-                      <a:schemeClr val="tx1"/>
-                    </a:solidFill>
-                    <a:latin typeface="+mn-lt"/>
-                    <a:ea typeface="+mn-ea"/>
-                    <a:cs typeface="+mn-cs"/>
-                  </a:defRPr>
-                </a:lvl3pPr>
-                <a:lvl4pPr marL="1600200" indent="-228600" algn="l" defTabSz="914400" rtl="0" eaLnBrk="1" latinLnBrk="0" hangingPunct="1">
-                  <a:lnSpc>
-                    <a:spcPct val="90000"/>
-                  </a:lnSpc>
-                  <a:spcBef>
-                    <a:spcPts val="500"/>
-                  </a:spcBef>
-                  <a:buFont typeface="Arial" panose="020B0604020202020204" pitchFamily="34" charset="0"/>
-                  <a:buChar char="•"/>
-                  <a:defRPr sz="1800" kern="1200">
-                    <a:solidFill>
-                      <a:schemeClr val="tx1"/>
-                    </a:solidFill>
-                    <a:latin typeface="+mn-lt"/>
-                    <a:ea typeface="+mn-ea"/>
-                    <a:cs typeface="+mn-cs"/>
-                  </a:defRPr>
-                </a:lvl4pPr>
-                <a:lvl5pPr marL="2057400" indent="-228600" algn="l" defTabSz="914400" rtl="0" eaLnBrk="1" latinLnBrk="0" hangingPunct="1">
-                  <a:lnSpc>
-                    <a:spcPct val="90000"/>
-                  </a:lnSpc>
-                  <a:spcBef>
-                    <a:spcPts val="500"/>
-                  </a:spcBef>
-                  <a:buFont typeface="Arial" panose="020B0604020202020204" pitchFamily="34" charset="0"/>
-                  <a:buChar char="•"/>
-                  <a:defRPr sz="1800" kern="1200">
-                    <a:solidFill>
-                      <a:schemeClr val="tx1"/>
-                    </a:solidFill>
-                    <a:latin typeface="+mn-lt"/>
-                    <a:ea typeface="+mn-ea"/>
-                    <a:cs typeface="+mn-cs"/>
-                  </a:defRPr>
-                </a:lvl5pPr>
-                <a:lvl6pPr marL="2514600" indent="-228600" algn="l" defTabSz="914400" rtl="0" eaLnBrk="1" latinLnBrk="0" hangingPunct="1">
-                  <a:lnSpc>
-                    <a:spcPct val="90000"/>
-                  </a:lnSpc>
-                  <a:spcBef>
-                    <a:spcPts val="500"/>
-                  </a:spcBef>
-                  <a:buFont typeface="Arial" panose="020B0604020202020204" pitchFamily="34" charset="0"/>
-                  <a:buChar char="•"/>
-                  <a:defRPr sz="1800" kern="1200">
-                    <a:solidFill>
-                      <a:schemeClr val="tx1"/>
-                    </a:solidFill>
-                    <a:latin typeface="+mn-lt"/>
-                    <a:ea typeface="+mn-ea"/>
-                    <a:cs typeface="+mn-cs"/>
-                  </a:defRPr>
-                </a:lvl6pPr>
-                <a:lvl7pPr marL="2971800" indent="-228600" algn="l" defTabSz="914400" rtl="0" eaLnBrk="1" latinLnBrk="0" hangingPunct="1">
-                  <a:lnSpc>
-                    <a:spcPct val="90000"/>
-                  </a:lnSpc>
-                  <a:spcBef>
-                    <a:spcPts val="500"/>
-                  </a:spcBef>
-                  <a:buFont typeface="Arial" panose="020B0604020202020204" pitchFamily="34" charset="0"/>
-                  <a:buChar char="•"/>
-                  <a:defRPr sz="1800" kern="1200">
-                    <a:solidFill>
-                      <a:schemeClr val="tx1"/>
-                    </a:solidFill>
-                    <a:latin typeface="+mn-lt"/>
-                    <a:ea typeface="+mn-ea"/>
-                    <a:cs typeface="+mn-cs"/>
-                  </a:defRPr>
-                </a:lvl7pPr>
-                <a:lvl8pPr marL="3429000" indent="-228600" algn="l" defTabSz="914400" rtl="0" eaLnBrk="1" latinLnBrk="0" hangingPunct="1">
-                  <a:lnSpc>
-                    <a:spcPct val="90000"/>
-                  </a:lnSpc>
-                  <a:spcBef>
-                    <a:spcPts val="500"/>
-                  </a:spcBef>
-                  <a:buFont typeface="Arial" panose="020B0604020202020204" pitchFamily="34" charset="0"/>
-                  <a:buChar char="•"/>
-                  <a:defRPr sz="1800" kern="1200">
-                    <a:solidFill>
-                      <a:schemeClr val="tx1"/>
-                    </a:solidFill>
-                    <a:latin typeface="+mn-lt"/>
-                    <a:ea typeface="+mn-ea"/>
-                    <a:cs typeface="+mn-cs"/>
-                  </a:defRPr>
-                </a:lvl8pPr>
-                <a:lvl9pPr marL="3886200" indent="-228600" algn="l" defTabSz="914400" rtl="0" eaLnBrk="1" latinLnBrk="0" hangingPunct="1">
-                  <a:lnSpc>
-                    <a:spcPct val="90000"/>
-                  </a:lnSpc>
-                  <a:spcBef>
-                    <a:spcPts val="500"/>
-                  </a:spcBef>
-                  <a:buFont typeface="Arial" panose="020B0604020202020204" pitchFamily="34" charset="0"/>
-                  <a:buChar char="•"/>
-                  <a:defRPr sz="1800" kern="1200">
-                    <a:solidFill>
-                      <a:schemeClr val="tx1"/>
-                    </a:solidFill>
-                    <a:latin typeface="+mn-lt"/>
-                    <a:ea typeface="+mn-ea"/>
-                    <a:cs typeface="+mn-cs"/>
-                  </a:defRPr>
-                </a:lvl9pPr>
-              </a:lstStyle>
-              <a:p>
-                <a:pPr marL="0" indent="0">
-                  <a:buFont typeface="Arial" panose="020B0604020202020204" pitchFamily="34" charset="0"/>
-                  <a:buNone/>
-                </a:pPr>
-                <a14:m>
-                  <m:oMathPara xmlns:m="http://schemas.openxmlformats.org/officeDocument/2006/math">
-                    <m:oMathParaPr>
-                      <m:jc m:val="centerGroup"/>
-                    </m:oMathParaPr>
-                    <m:oMath xmlns:m="http://schemas.openxmlformats.org/officeDocument/2006/math">
-                      <m:func>
-                        <m:funcPr>
-                          <m:ctrlPr>
-                            <a:rPr lang="pt-BR" i="1" smtClean="0">
-                              <a:latin typeface="Cambria Math"/>
-                            </a:rPr>
-                          </m:ctrlPr>
-                        </m:funcPr>
-                        <m:fName>
-                          <m:r>
-                            <m:rPr>
-                              <m:sty m:val="p"/>
-                            </m:rPr>
-                            <a:rPr lang="pt-BR">
-                              <a:latin typeface="Cambria Math"/>
-                            </a:rPr>
-                            <m:t>min</m:t>
-                          </m:r>
-                        </m:fName>
-                        <m:e>
-                          <m:r>
-                            <a:rPr lang="pt-BR" i="1">
-                              <a:latin typeface="Cambria Math"/>
-                            </a:rPr>
-                            <m:t>𝑧</m:t>
-                          </m:r>
-                          <m:r>
-                            <a:rPr lang="pt-BR" i="1">
-                              <a:latin typeface="Cambria Math"/>
-                            </a:rPr>
-                            <m:t>=</m:t>
-                          </m:r>
-                          <m:r>
-                            <a:rPr lang="pt-BR" i="1">
-                              <a:latin typeface="Cambria Math"/>
-                            </a:rPr>
-                            <m:t>4</m:t>
-                          </m:r>
-                          <m:sSub>
-                            <m:sSubPr>
-                              <m:ctrlPr>
-                                <a:rPr lang="pt-BR" i="1">
-                                  <a:latin typeface="Cambria Math"/>
-                                </a:rPr>
-                              </m:ctrlPr>
-                            </m:sSubPr>
-                            <m:e>
-                              <m:r>
-                                <a:rPr lang="pt-BR" i="1">
-                                  <a:latin typeface="Cambria Math"/>
-                                </a:rPr>
-                                <m:t>𝑥</m:t>
-                              </m:r>
-                            </m:e>
-                            <m:sub>
-                              <m:r>
-                                <a:rPr lang="pt-BR" i="1">
-                                  <a:latin typeface="Cambria Math"/>
-                                </a:rPr>
-                                <m:t>1</m:t>
-                              </m:r>
-                            </m:sub>
-                          </m:sSub>
-                          <m:r>
-                            <a:rPr lang="pt-BR" i="1">
-                              <a:latin typeface="Cambria Math"/>
-                            </a:rPr>
-                            <m:t>+</m:t>
-                          </m:r>
-                          <m:sSub>
-                            <m:sSubPr>
-                              <m:ctrlPr>
-                                <a:rPr lang="pt-BR" i="1">
-                                  <a:latin typeface="Cambria Math"/>
-                                </a:rPr>
-                              </m:ctrlPr>
-                            </m:sSubPr>
-                            <m:e>
-                              <m:r>
-                                <a:rPr lang="pt-BR" i="1">
-                                  <a:latin typeface="Cambria Math"/>
-                                </a:rPr>
-                                <m:t>𝑥</m:t>
-                              </m:r>
-                            </m:e>
-                            <m:sub>
-                              <m:r>
-                                <a:rPr lang="pt-BR" i="1">
-                                  <a:latin typeface="Cambria Math"/>
-                                </a:rPr>
-                                <m:t>2</m:t>
-                              </m:r>
-                            </m:sub>
-                          </m:sSub>
-                        </m:e>
-                      </m:func>
-                    </m:oMath>
-                  </m:oMathPara>
-                </a14:m>
-                <a:endParaRPr lang="pt-BR" dirty="0"/>
-              </a:p>
-              <a:p>
-                <a:pPr marL="0" indent="0" algn="ctr">
-                  <a:buFont typeface="Arial" panose="020B0604020202020204" pitchFamily="34" charset="0"/>
-                  <a:buNone/>
-                </a:pPr>
-                <a:r>
-                  <a:rPr lang="pt-BR" i="1" dirty="0">
-                    <a:latin typeface="Cambria Math"/>
-                  </a:rPr>
-                  <a:t>Sujeito a </a:t>
-                </a:r>
-              </a:p>
-              <a:p>
-                <a:pPr marL="0" indent="0">
-                  <a:buFont typeface="Arial" panose="020B0604020202020204" pitchFamily="34" charset="0"/>
-                  <a:buNone/>
-                </a:pPr>
-                <a14:m>
-                  <m:oMathPara xmlns:m="http://schemas.openxmlformats.org/officeDocument/2006/math">
-                    <m:oMathParaPr>
-                      <m:jc m:val="centerGroup"/>
-                    </m:oMathParaPr>
-                    <m:oMath xmlns:m="http://schemas.openxmlformats.org/officeDocument/2006/math">
-                      <m:sSub>
-                        <m:sSubPr>
-                          <m:ctrlPr>
-                            <a:rPr lang="pt-BR" i="1">
-                              <a:latin typeface="Cambria Math"/>
-                            </a:rPr>
-                          </m:ctrlPr>
-                        </m:sSubPr>
-                        <m:e>
-                          <m:r>
-                            <a:rPr lang="pt-BR" i="1">
-                              <a:latin typeface="Cambria Math"/>
-                            </a:rPr>
-                            <m:t>𝑥</m:t>
-                          </m:r>
-                        </m:e>
-                        <m:sub>
-                          <m:r>
-                            <a:rPr lang="pt-BR" i="1">
-                              <a:latin typeface="Cambria Math"/>
-                            </a:rPr>
-                            <m:t>1</m:t>
-                          </m:r>
-                        </m:sub>
-                      </m:sSub>
-                      <m:r>
-                        <a:rPr lang="pt-BR" i="1">
-                          <a:latin typeface="Cambria Math"/>
-                        </a:rPr>
-                        <m:t>+</m:t>
-                      </m:r>
-                      <m:sSub>
-                        <m:sSubPr>
-                          <m:ctrlPr>
-                            <a:rPr lang="pt-BR" i="1">
-                              <a:latin typeface="Cambria Math"/>
-                            </a:rPr>
-                          </m:ctrlPr>
-                        </m:sSubPr>
-                        <m:e>
-                          <m:f>
-                            <m:fPr>
-                              <m:ctrlPr>
-                                <a:rPr lang="pt-BR" i="1">
-                                  <a:latin typeface="Cambria Math"/>
-                                </a:rPr>
-                              </m:ctrlPr>
-                            </m:fPr>
-                            <m:num>
-                              <m:r>
-                                <a:rPr lang="pt-BR" i="1">
-                                  <a:latin typeface="Cambria Math"/>
-                                </a:rPr>
-                                <m:t>1</m:t>
-                              </m:r>
-                            </m:num>
-                            <m:den>
-                              <m:r>
-                                <a:rPr lang="pt-BR" i="1">
-                                  <a:latin typeface="Cambria Math"/>
-                                </a:rPr>
-                                <m:t>5</m:t>
-                              </m:r>
-                            </m:den>
-                          </m:f>
-                          <m:r>
-                            <a:rPr lang="pt-BR" i="1">
-                              <a:latin typeface="Cambria Math"/>
-                            </a:rPr>
-                            <m:t>𝑥</m:t>
-                          </m:r>
-                        </m:e>
-                        <m:sub>
-                          <m:r>
-                            <a:rPr lang="pt-BR" i="1">
-                              <a:latin typeface="Cambria Math"/>
-                            </a:rPr>
-                            <m:t>3</m:t>
-                          </m:r>
-                        </m:sub>
-                      </m:sSub>
-                      <m:r>
-                        <a:rPr lang="pt-BR" i="1">
-                          <a:latin typeface="Cambria Math"/>
-                        </a:rPr>
-                        <m:t>=</m:t>
-                      </m:r>
-                      <m:f>
-                        <m:fPr>
-                          <m:ctrlPr>
-                            <a:rPr lang="pt-BR" i="1">
-                              <a:latin typeface="Cambria Math"/>
-                            </a:rPr>
-                          </m:ctrlPr>
-                        </m:fPr>
-                        <m:num>
-                          <m:r>
-                            <a:rPr lang="pt-BR" i="1">
-                              <a:latin typeface="Cambria Math"/>
-                            </a:rPr>
-                            <m:t>3</m:t>
-                          </m:r>
-                        </m:num>
-                        <m:den>
-                          <m:r>
-                            <a:rPr lang="pt-BR" i="1">
-                              <a:latin typeface="Cambria Math"/>
-                            </a:rPr>
-                            <m:t>5</m:t>
-                          </m:r>
-                        </m:den>
-                      </m:f>
-                    </m:oMath>
-                  </m:oMathPara>
-                </a14:m>
-                <a:endParaRPr lang="pt-BR" dirty="0"/>
-              </a:p>
-              <a:p>
-                <a:pPr marL="0" indent="0">
-                  <a:buFont typeface="Arial" panose="020B0604020202020204" pitchFamily="34" charset="0"/>
-                  <a:buNone/>
-                </a:pPr>
-                <a14:m>
-                  <m:oMathPara xmlns:m="http://schemas.openxmlformats.org/officeDocument/2006/math">
-                    <m:oMathParaPr>
-                      <m:jc m:val="centerGroup"/>
-                    </m:oMathParaPr>
-                    <m:oMath xmlns:m="http://schemas.openxmlformats.org/officeDocument/2006/math">
-                      <m:sSub>
-                        <m:sSubPr>
-                          <m:ctrlPr>
-                            <a:rPr lang="pt-BR" i="1">
-                              <a:latin typeface="Cambria Math"/>
-                            </a:rPr>
-                          </m:ctrlPr>
-                        </m:sSubPr>
-                        <m:e>
-                          <m:r>
-                            <a:rPr lang="pt-BR" i="1">
-                              <a:latin typeface="Cambria Math"/>
-                            </a:rPr>
-                            <m:t>𝑥</m:t>
-                          </m:r>
-                        </m:e>
-                        <m:sub>
-                          <m:r>
-                            <a:rPr lang="pt-BR" i="1">
-                              <a:latin typeface="Cambria Math"/>
-                            </a:rPr>
-                            <m:t>2</m:t>
-                          </m:r>
-                        </m:sub>
-                      </m:sSub>
-                      <m:r>
-                        <a:rPr lang="pt-BR" i="1">
-                          <a:latin typeface="Cambria Math"/>
-                        </a:rPr>
-                        <m:t>−</m:t>
-                      </m:r>
-                      <m:sSub>
-                        <m:sSubPr>
-                          <m:ctrlPr>
-                            <a:rPr lang="pt-BR" i="1">
-                              <a:latin typeface="Cambria Math"/>
-                            </a:rPr>
-                          </m:ctrlPr>
-                        </m:sSubPr>
-                        <m:e>
-                          <m:f>
-                            <m:fPr>
-                              <m:ctrlPr>
-                                <a:rPr lang="pt-BR" i="1">
-                                  <a:latin typeface="Cambria Math"/>
-                                </a:rPr>
-                              </m:ctrlPr>
-                            </m:fPr>
-                            <m:num>
-                              <m:r>
-                                <a:rPr lang="pt-BR" i="1">
-                                  <a:latin typeface="Cambria Math"/>
-                                </a:rPr>
-                                <m:t>3</m:t>
-                              </m:r>
-                            </m:num>
-                            <m:den>
-                              <m:r>
-                                <a:rPr lang="pt-BR" i="1">
-                                  <a:latin typeface="Cambria Math"/>
-                                </a:rPr>
-                                <m:t>5</m:t>
-                              </m:r>
-                            </m:den>
-                          </m:f>
-                          <m:r>
-                            <a:rPr lang="pt-BR" i="1">
-                              <a:latin typeface="Cambria Math"/>
-                            </a:rPr>
-                            <m:t>𝑥</m:t>
-                          </m:r>
-                        </m:e>
-                        <m:sub>
-                          <m:r>
-                            <a:rPr lang="pt-BR" i="1">
-                              <a:latin typeface="Cambria Math"/>
-                            </a:rPr>
-                            <m:t>3</m:t>
-                          </m:r>
-                        </m:sub>
-                      </m:sSub>
-                      <m:r>
-                        <a:rPr lang="pt-BR" i="1">
-                          <a:latin typeface="Cambria Math"/>
-                        </a:rPr>
-                        <m:t>=</m:t>
-                      </m:r>
-                      <m:f>
-                        <m:fPr>
-                          <m:ctrlPr>
-                            <a:rPr lang="pt-BR" i="1">
-                              <a:latin typeface="Cambria Math"/>
-                            </a:rPr>
-                          </m:ctrlPr>
-                        </m:fPr>
-                        <m:num>
-                          <m:r>
-                            <a:rPr lang="pt-BR" i="1">
-                              <a:latin typeface="Cambria Math"/>
-                            </a:rPr>
-                            <m:t>6</m:t>
-                          </m:r>
-                        </m:num>
-                        <m:den>
-                          <m:r>
-                            <a:rPr lang="pt-BR" i="1">
-                              <a:latin typeface="Cambria Math"/>
-                            </a:rPr>
-                            <m:t>5</m:t>
-                          </m:r>
-                        </m:den>
-                      </m:f>
-                    </m:oMath>
-                  </m:oMathPara>
-                </a14:m>
-                <a:endParaRPr lang="pt-BR" dirty="0">
-                  <a:ea typeface="Cambria Math"/>
-                </a:endParaRPr>
-              </a:p>
-              <a:p>
-                <a:pPr marL="0" indent="0">
-                  <a:buFont typeface="Arial" panose="020B0604020202020204" pitchFamily="34" charset="0"/>
-                  <a:buNone/>
-                </a:pPr>
-                <a14:m>
-                  <m:oMathPara xmlns:m="http://schemas.openxmlformats.org/officeDocument/2006/math">
-                    <m:oMathParaPr>
-                      <m:jc m:val="centerGroup"/>
-                    </m:oMathParaPr>
-                    <m:oMath xmlns:m="http://schemas.openxmlformats.org/officeDocument/2006/math">
-                      <m:sSub>
-                        <m:sSubPr>
-                          <m:ctrlPr>
-                            <a:rPr lang="pt-BR" i="1">
-                              <a:latin typeface="Cambria Math"/>
-                            </a:rPr>
-                          </m:ctrlPr>
-                        </m:sSubPr>
-                        <m:e>
-                          <m:r>
-                            <a:rPr lang="pt-BR" i="1">
-                              <a:latin typeface="Cambria Math"/>
-                            </a:rPr>
-                            <m:t>𝑥</m:t>
-                          </m:r>
-                        </m:e>
-                        <m:sub>
-                          <m:r>
-                            <a:rPr lang="pt-BR" i="1">
-                              <a:latin typeface="Cambria Math"/>
-                            </a:rPr>
-                            <m:t>3</m:t>
-                          </m:r>
-                        </m:sub>
-                      </m:sSub>
-                      <m:r>
-                        <a:rPr lang="pt-BR" i="1">
-                          <a:latin typeface="Cambria Math"/>
-                        </a:rPr>
-                        <m:t>+</m:t>
-                      </m:r>
-                      <m:sSub>
-                        <m:sSubPr>
-                          <m:ctrlPr>
-                            <a:rPr lang="pt-BR" i="1">
-                              <a:latin typeface="Cambria Math"/>
-                            </a:rPr>
-                          </m:ctrlPr>
-                        </m:sSubPr>
-                        <m:e>
-                          <m:r>
-                            <a:rPr lang="pt-BR" i="1">
-                              <a:latin typeface="Cambria Math"/>
-                            </a:rPr>
-                            <m:t>𝑥</m:t>
-                          </m:r>
-                        </m:e>
-                        <m:sub>
-                          <m:r>
-                            <a:rPr lang="pt-BR" i="1">
-                              <a:latin typeface="Cambria Math"/>
-                            </a:rPr>
-                            <m:t>4</m:t>
-                          </m:r>
-                        </m:sub>
-                      </m:sSub>
-                      <m:r>
-                        <a:rPr lang="pt-BR" i="1">
-                          <a:latin typeface="Cambria Math"/>
-                        </a:rPr>
-                        <m:t>=</m:t>
-                      </m:r>
-                      <m:r>
-                        <a:rPr lang="pt-BR" i="1">
-                          <a:latin typeface="Cambria Math"/>
-                        </a:rPr>
-                        <m:t>1</m:t>
-                      </m:r>
-                    </m:oMath>
-                  </m:oMathPara>
-                </a14:m>
-                <a:endParaRPr lang="pt-BR" dirty="0">
-                  <a:ea typeface="Cambria Math"/>
-                </a:endParaRPr>
-              </a:p>
-              <a:p>
-                <a:pPr marL="0" indent="0">
-                  <a:buFont typeface="Arial" panose="020B0604020202020204" pitchFamily="34" charset="0"/>
-                  <a:buNone/>
-                </a:pPr>
-                <a14:m>
-                  <m:oMathPara xmlns:m="http://schemas.openxmlformats.org/officeDocument/2006/math">
-                    <m:oMathParaPr>
-                      <m:jc m:val="centerGroup"/>
-                    </m:oMathParaPr>
-                    <m:oMath xmlns:m="http://schemas.openxmlformats.org/officeDocument/2006/math">
-                      <m:sSub>
-                        <m:sSubPr>
-                          <m:ctrlPr>
-                            <a:rPr lang="pt-BR" i="1">
-                              <a:latin typeface="Cambria Math"/>
-                            </a:rPr>
-                          </m:ctrlPr>
-                        </m:sSubPr>
-                        <m:e>
-                          <m:r>
-                            <a:rPr lang="pt-BR" i="1">
-                              <a:latin typeface="Cambria Math"/>
-                            </a:rPr>
-                            <m:t>𝑥</m:t>
-                          </m:r>
-                        </m:e>
-                        <m:sub>
-                          <m:r>
-                            <a:rPr lang="pt-BR" i="1">
-                              <a:latin typeface="Cambria Math"/>
-                            </a:rPr>
-                            <m:t>1</m:t>
-                          </m:r>
-                        </m:sub>
-                      </m:sSub>
-                      <m:r>
-                        <a:rPr lang="pt-BR" i="1">
-                          <a:latin typeface="Cambria Math"/>
-                        </a:rPr>
-                        <m:t>,</m:t>
-                      </m:r>
-                      <m:sSub>
-                        <m:sSubPr>
-                          <m:ctrlPr>
-                            <a:rPr lang="pt-BR" i="1">
-                              <a:latin typeface="Cambria Math"/>
-                            </a:rPr>
-                          </m:ctrlPr>
-                        </m:sSubPr>
-                        <m:e>
-                          <m:r>
-                            <a:rPr lang="pt-BR" i="1">
-                              <a:latin typeface="Cambria Math"/>
-                            </a:rPr>
-                            <m:t>𝑥</m:t>
-                          </m:r>
-                        </m:e>
-                        <m:sub>
-                          <m:r>
-                            <a:rPr lang="pt-BR" i="1">
-                              <a:latin typeface="Cambria Math"/>
-                            </a:rPr>
-                            <m:t>2</m:t>
-                          </m:r>
-                        </m:sub>
-                      </m:sSub>
-                      <m:r>
-                        <a:rPr lang="pt-BR" i="1">
-                          <a:latin typeface="Cambria Math"/>
-                        </a:rPr>
-                        <m:t>,</m:t>
-                      </m:r>
-                      <m:sSub>
-                        <m:sSubPr>
-                          <m:ctrlPr>
-                            <a:rPr lang="pt-BR" i="1">
-                              <a:latin typeface="Cambria Math"/>
-                            </a:rPr>
-                          </m:ctrlPr>
-                        </m:sSubPr>
-                        <m:e>
-                          <m:r>
-                            <a:rPr lang="pt-BR" i="1">
-                              <a:latin typeface="Cambria Math"/>
-                            </a:rPr>
-                            <m:t>𝑥</m:t>
-                          </m:r>
-                        </m:e>
-                        <m:sub>
-                          <m:r>
-                            <a:rPr lang="pt-BR" i="1">
-                              <a:latin typeface="Cambria Math"/>
-                            </a:rPr>
-                            <m:t>3</m:t>
-                          </m:r>
-                        </m:sub>
-                      </m:sSub>
-                      <m:r>
-                        <a:rPr lang="pt-BR" i="1">
-                          <a:latin typeface="Cambria Math"/>
-                        </a:rPr>
-                        <m:t>,</m:t>
-                      </m:r>
-                      <m:sSub>
-                        <m:sSubPr>
-                          <m:ctrlPr>
-                            <a:rPr lang="pt-BR" i="1">
-                              <a:latin typeface="Cambria Math"/>
-                            </a:rPr>
-                          </m:ctrlPr>
-                        </m:sSubPr>
-                        <m:e>
-                          <m:r>
-                            <a:rPr lang="pt-BR" i="1">
-                              <a:latin typeface="Cambria Math"/>
-                            </a:rPr>
-                            <m:t>𝑥</m:t>
-                          </m:r>
-                        </m:e>
-                        <m:sub>
-                          <m:r>
-                            <a:rPr lang="pt-BR" i="1">
-                              <a:latin typeface="Cambria Math"/>
-                            </a:rPr>
-                            <m:t>4</m:t>
-                          </m:r>
-                        </m:sub>
-                      </m:sSub>
-                      <m:r>
-                        <a:rPr lang="pt-BR" i="1">
-                          <a:latin typeface="Cambria Math"/>
-                          <a:ea typeface="Cambria Math"/>
-                        </a:rPr>
-                        <m:t>≥</m:t>
-                      </m:r>
-                      <m:r>
-                        <a:rPr lang="pt-BR" i="1">
-                          <a:latin typeface="Cambria Math"/>
-                          <a:ea typeface="Cambria Math"/>
-                        </a:rPr>
-                        <m:t>0</m:t>
-                      </m:r>
-                    </m:oMath>
-                  </m:oMathPara>
-                </a14:m>
-                <a:endParaRPr lang="pt-BR" dirty="0"/>
-              </a:p>
-              <a:p>
-                <a:endParaRPr lang="pt-BR" dirty="0"/>
-              </a:p>
-            </p:txBody>
-          </p:sp>
-        </mc:Choice>
-        <mc:Fallback xmlns="">
-          <p:sp>
-            <p:nvSpPr>
-              <p:cNvPr id="3" name="Espaço Reservado para Conteúdo 3">
-                <a:extLst>
-                  <a:ext uri="{FF2B5EF4-FFF2-40B4-BE49-F238E27FC236}">
-                    <a16:creationId xmlns:a16="http://schemas.microsoft.com/office/drawing/2014/main" id="{B3B82331-5D06-F8E9-20BA-760A0A86340B}"/>
-                  </a:ext>
-                </a:extLst>
-              </p:cNvPr>
-              <p:cNvSpPr txBox="1">
-                <a:spLocks noRot="1" noChangeAspect="1" noMove="1" noResize="1" noEditPoints="1" noAdjustHandles="1" noChangeArrowheads="1" noChangeShapeType="1" noTextEdit="1"/>
-              </p:cNvSpPr>
-              <p:nvPr/>
-            </p:nvSpPr>
-            <p:spPr>
-              <a:xfrm>
-                <a:off x="6095999" y="2537180"/>
-                <a:ext cx="4041775" cy="3951288"/>
-              </a:xfrm>
-              <a:prstGeom prst="rect">
-                <a:avLst/>
-              </a:prstGeom>
-              <a:blipFill>
-                <a:blip r:embed="rId5"/>
-                <a:stretch>
-                  <a:fillRect/>
-                </a:stretch>
-              </a:blipFill>
-            </p:spPr>
-            <p:txBody>
-              <a:bodyPr/>
-              <a:lstStyle/>
-              <a:p>
-                <a:r>
-                  <a:rPr lang="pt-BR">
-                    <a:noFill/>
-                  </a:rPr>
-                  <a:t> </a:t>
-                </a:r>
-              </a:p>
-            </p:txBody>
-          </p:sp>
-        </mc:Fallback>
-      </mc:AlternateContent>
-    </p:spTree>
-    <p:extLst>
-      <p:ext uri="{BB962C8B-B14F-4D97-AF65-F5344CB8AC3E}">
-        <p14:creationId xmlns:p14="http://schemas.microsoft.com/office/powerpoint/2010/main" val="2919734156"/>
-      </p:ext>
-    </p:extLst>
-  </p:cSld>
-  <p:clrMapOvr>
-    <a:masterClrMapping/>
-  </p:clrMapOvr>
-</p:sld>
-</file>
-
-<file path=ppt/slides/slide2.xml><?xml version="1.0" encoding="utf-8"?>
-<p:sld xmlns:a="http://schemas.openxmlformats.org/drawingml/2006/main" xmlns:r="http://schemas.openxmlformats.org/officeDocument/2006/relationships" xmlns:p="http://schemas.openxmlformats.org/presentationml/2006/main">
-  <p:cSld>
-    <p:spTree>
-      <p:nvGrpSpPr>
-        <p:cNvPr id="1" name="">
-          <a:extLst>
-            <a:ext uri="{FF2B5EF4-FFF2-40B4-BE49-F238E27FC236}">
-              <a16:creationId xmlns:a16="http://schemas.microsoft.com/office/drawing/2014/main" xmlns="" id="{42C38FC0-70CE-8DEE-6418-B74155ECA39D}"/>
-            </a:ext>
-          </a:extLst>
-        </p:cNvPr>
-        <p:cNvGrpSpPr/>
-        <p:nvPr/>
-      </p:nvGrpSpPr>
-      <p:grpSpPr>
-        <a:xfrm>
-          <a:off x="0" y="0"/>
-          <a:ext cx="0" cy="0"/>
-          <a:chOff x="0" y="0"/>
-          <a:chExt cx="0" cy="0"/>
-        </a:xfrm>
-      </p:grpSpPr>
-      <p:pic>
-        <p:nvPicPr>
-          <p:cNvPr id="10" name="Imagem 9" descr="Uma imagem contendo Desenho técnico&#10;&#10;O conteúdo gerado por IA pode estar incorreto.">
-            <a:extLst>
-              <a:ext uri="{FF2B5EF4-FFF2-40B4-BE49-F238E27FC236}">
-                <a16:creationId xmlns:a16="http://schemas.microsoft.com/office/drawing/2014/main" xmlns="" id="{C81D0A23-83F4-88EC-272D-0208AC03835F}"/>
-              </a:ext>
-            </a:extLst>
-          </p:cNvPr>
-          <p:cNvPicPr>
-            <a:picLocks noGrp="1" noRot="1" noChangeAspect="1" noMove="1" noResize="1" noEditPoints="1" noAdjustHandles="1" noChangeArrowheads="1" noChangeShapeType="1" noCrop="1"/>
-          </p:cNvPicPr>
-          <p:nvPr/>
-        </p:nvPicPr>
-        <p:blipFill>
-          <a:blip r:embed="rId2">
-            <a:alphaModFix amt="20000"/>
-            <a:extLst>
-              <a:ext uri="{28A0092B-C50C-407E-A947-70E740481C1C}">
-                <a14:useLocalDpi xmlns:a14="http://schemas.microsoft.com/office/drawing/2010/main" val="0"/>
-              </a:ext>
-            </a:extLst>
-          </a:blip>
-          <a:srcRect t="26080"/>
-          <a:stretch>
-            <a:fillRect/>
-          </a:stretch>
-        </p:blipFill>
-        <p:spPr>
-          <a:xfrm>
-            <a:off x="0" y="11128"/>
-            <a:ext cx="9262533" cy="6846872"/>
-          </a:xfrm>
-          <a:prstGeom prst="rect">
-            <a:avLst/>
-          </a:prstGeom>
-        </p:spPr>
-      </p:pic>
-      <p:sp>
-        <p:nvSpPr>
-          <p:cNvPr id="5" name="TextBox 5">
-            <a:extLst>
-              <a:ext uri="{FF2B5EF4-FFF2-40B4-BE49-F238E27FC236}">
-                <a16:creationId xmlns:a16="http://schemas.microsoft.com/office/drawing/2014/main" xmlns="" id="{065B48BF-ACFD-0ED2-63E9-41F0E8528360}"/>
-              </a:ext>
-            </a:extLst>
-          </p:cNvPr>
-          <p:cNvSpPr txBox="1"/>
-          <p:nvPr/>
-        </p:nvSpPr>
-        <p:spPr>
-          <a:xfrm>
-            <a:off x="1000429" y="847992"/>
-            <a:ext cx="10191141" cy="580993"/>
-          </a:xfrm>
-          <a:prstGeom prst="rect">
-            <a:avLst/>
-          </a:prstGeom>
-        </p:spPr>
-        <p:txBody>
-          <a:bodyPr lIns="0" tIns="0" rIns="0" bIns="0" rtlCol="0" anchor="t">
-            <a:spAutoFit/>
-          </a:bodyPr>
-          <a:lstStyle/>
-          <a:p>
-            <a:pPr algn="ctr">
-              <a:lnSpc>
-                <a:spcPts val="4184"/>
-              </a:lnSpc>
-            </a:pPr>
-            <a:r>
-              <a:rPr lang="pt-BR" sz="5230" b="1" dirty="0">
-                <a:solidFill>
-                  <a:schemeClr val="tx2">
-                    <a:lumMod val="75000"/>
-                  </a:schemeClr>
-                </a:solidFill>
-                <a:latin typeface="Hagrid Text Bold"/>
-                <a:ea typeface="Hagrid Text Bold"/>
-                <a:cs typeface="Hagrid Text Bold"/>
-                <a:sym typeface="Hagrid Text Bold"/>
-              </a:rPr>
-              <a:t>O problema da SBV inicial</a:t>
-            </a:r>
-            <a:endParaRPr lang="en-US" sz="5230" b="1" spc="-219" dirty="0">
-              <a:solidFill>
-                <a:schemeClr val="tx2">
-                  <a:lumMod val="75000"/>
-                </a:schemeClr>
-              </a:solidFill>
-              <a:latin typeface="Hagrid Text Bold"/>
-              <a:ea typeface="Hagrid Text Bold"/>
-              <a:cs typeface="Hagrid Text Bold"/>
-              <a:sym typeface="Hagrid Text Bold"/>
-            </a:endParaRPr>
-          </a:p>
-        </p:txBody>
-      </p:sp>
-      <p:sp>
-        <p:nvSpPr>
-          <p:cNvPr id="6" name="TextBox 6">
-            <a:extLst>
-              <a:ext uri="{FF2B5EF4-FFF2-40B4-BE49-F238E27FC236}">
-                <a16:creationId xmlns:a16="http://schemas.microsoft.com/office/drawing/2014/main" xmlns="" id="{65E6C220-6360-CBD2-1DA8-ECC999380D85}"/>
-              </a:ext>
-            </a:extLst>
-          </p:cNvPr>
-          <p:cNvSpPr txBox="1"/>
-          <p:nvPr/>
-        </p:nvSpPr>
-        <p:spPr>
-          <a:xfrm>
-            <a:off x="754454" y="2015010"/>
-            <a:ext cx="10683089" cy="2954655"/>
-          </a:xfrm>
-          <a:prstGeom prst="rect">
-            <a:avLst/>
-          </a:prstGeom>
-        </p:spPr>
-        <p:txBody>
-          <a:bodyPr wrap="square" lIns="0" tIns="0" rIns="0" bIns="0" rtlCol="0" anchor="t">
-            <a:spAutoFit/>
-          </a:bodyPr>
-          <a:lstStyle/>
-          <a:p>
-            <a:pPr marL="457200" indent="-457200" algn="just">
-              <a:buFont typeface="Arial" panose="020B0604020202020204" pitchFamily="34" charset="0"/>
-              <a:buChar char="•"/>
-            </a:pPr>
-            <a:r>
-              <a:rPr lang="pt-BR" sz="3200" dirty="0" err="1">
-                <a:latin typeface="Hagrid Text"/>
+              <a:rPr lang="pt-BR" sz="2400" dirty="0" err="1">
                 <a:ea typeface="Hagrid Text"/>
                 <a:cs typeface="Hagrid Text"/>
                 <a:sym typeface="Hagrid Text"/>
@@ -14081,374 +9560,7 @@
               <a:t>PPLs</a:t>
             </a:r>
             <a:r>
-              <a:rPr lang="pt-BR" sz="3200" dirty="0">
-                <a:latin typeface="Hagrid Text"/>
-                <a:ea typeface="Hagrid Text"/>
-                <a:cs typeface="Hagrid Text"/>
-                <a:sym typeface="Hagrid Text"/>
-              </a:rPr>
-              <a:t> nos quais todas as restrições são (</a:t>
-            </a:r>
-            <a:r>
-              <a:rPr lang="pt-BR" sz="3200" dirty="0">
-                <a:latin typeface="Calibri" panose="020F0502020204030204" pitchFamily="34" charset="0"/>
-                <a:ea typeface="Hagrid Text"/>
-                <a:cs typeface="Calibri" panose="020F0502020204030204" pitchFamily="34" charset="0"/>
-                <a:sym typeface="Hagrid Text"/>
-              </a:rPr>
-              <a:t>≤</a:t>
-            </a:r>
-            <a:r>
-              <a:rPr lang="pt-BR" sz="3200" dirty="0">
-                <a:latin typeface="Hagrid Text"/>
-                <a:ea typeface="Hagrid Text"/>
-                <a:cs typeface="Hagrid Text"/>
-                <a:sym typeface="Hagrid Text"/>
-              </a:rPr>
-              <a:t>) com lados direitos não negativos oferecem uma SBV inicial na qual todas as variáveis são de folga.</a:t>
-            </a:r>
-          </a:p>
-          <a:p>
-            <a:pPr marL="457200" indent="-457200" algn="just">
-              <a:buFont typeface="Arial" panose="020B0604020202020204" pitchFamily="34" charset="0"/>
-              <a:buChar char="•"/>
-            </a:pPr>
-            <a:endParaRPr lang="pt-BR" sz="3200" dirty="0">
-              <a:latin typeface="Hagrid Text"/>
-              <a:ea typeface="Hagrid Text"/>
-              <a:cs typeface="Hagrid Text"/>
-              <a:sym typeface="Hagrid Text"/>
-            </a:endParaRPr>
-          </a:p>
-          <a:p>
-            <a:pPr marL="457200" indent="-457200" algn="just">
-              <a:buFont typeface="Arial" panose="020B0604020202020204" pitchFamily="34" charset="0"/>
-              <a:buChar char="•"/>
-            </a:pPr>
-            <a:r>
-              <a:rPr lang="pt-BR" sz="3200" dirty="0">
-                <a:latin typeface="Hagrid Text"/>
-                <a:ea typeface="Hagrid Text"/>
-                <a:cs typeface="Hagrid Text"/>
-                <a:sym typeface="Hagrid Text"/>
-              </a:rPr>
-              <a:t>Isso não acontece com modelos que envolvem restrições (=) e/ou (</a:t>
-            </a:r>
-            <a:r>
-              <a:rPr lang="pt-BR" sz="3200" dirty="0">
-                <a:latin typeface="Calibri" panose="020F0502020204030204" pitchFamily="34" charset="0"/>
-                <a:ea typeface="Hagrid Text"/>
-                <a:cs typeface="Calibri" panose="020F0502020204030204" pitchFamily="34" charset="0"/>
-                <a:sym typeface="Hagrid Text"/>
-              </a:rPr>
-              <a:t>≥</a:t>
-            </a:r>
-            <a:r>
-              <a:rPr lang="pt-BR" sz="3200" dirty="0">
-                <a:latin typeface="Hagrid Text"/>
-                <a:ea typeface="Hagrid Text"/>
-                <a:cs typeface="Hagrid Text"/>
-                <a:sym typeface="Hagrid Text"/>
-              </a:rPr>
-              <a:t>).</a:t>
-            </a:r>
-          </a:p>
-        </p:txBody>
-      </p:sp>
-      <p:pic>
-        <p:nvPicPr>
-          <p:cNvPr id="12" name="Imagem 11" descr="Ícone&#10;&#10;O conteúdo gerado por IA pode estar incorreto.">
-            <a:extLst>
-              <a:ext uri="{FF2B5EF4-FFF2-40B4-BE49-F238E27FC236}">
-                <a16:creationId xmlns:a16="http://schemas.microsoft.com/office/drawing/2014/main" xmlns="" id="{BDEDD33D-95F8-DF6D-6773-A650D683128D}"/>
-              </a:ext>
-            </a:extLst>
-          </p:cNvPr>
-          <p:cNvPicPr>
-            <a:picLocks noChangeAspect="1"/>
-          </p:cNvPicPr>
-          <p:nvPr/>
-        </p:nvPicPr>
-        <p:blipFill>
-          <a:blip r:embed="rId3" cstate="print">
-            <a:extLst>
-              <a:ext uri="{28A0092B-C50C-407E-A947-70E740481C1C}">
-                <a14:useLocalDpi xmlns:a14="http://schemas.microsoft.com/office/drawing/2010/main" val="0"/>
-              </a:ext>
-            </a:extLst>
-          </a:blip>
-          <a:stretch>
-            <a:fillRect/>
-          </a:stretch>
-        </p:blipFill>
-        <p:spPr>
-          <a:xfrm>
-            <a:off x="10913035" y="11128"/>
-            <a:ext cx="1270000" cy="1264823"/>
-          </a:xfrm>
-          <a:prstGeom prst="rect">
-            <a:avLst/>
-          </a:prstGeom>
-        </p:spPr>
-      </p:pic>
-    </p:spTree>
-    <p:extLst>
-      <p:ext uri="{BB962C8B-B14F-4D97-AF65-F5344CB8AC3E}">
-        <p14:creationId xmlns:p14="http://schemas.microsoft.com/office/powerpoint/2010/main" val="1127859694"/>
-      </p:ext>
-    </p:extLst>
-  </p:cSld>
-  <p:clrMapOvr>
-    <a:masterClrMapping/>
-  </p:clrMapOvr>
-</p:sld>
-</file>
-
-<file path=ppt/slides/slide3.xml><?xml version="1.0" encoding="utf-8"?>
-<p:sld xmlns:a="http://schemas.openxmlformats.org/drawingml/2006/main" xmlns:r="http://schemas.openxmlformats.org/officeDocument/2006/relationships" xmlns:p="http://schemas.openxmlformats.org/presentationml/2006/main">
-  <p:cSld>
-    <p:spTree>
-      <p:nvGrpSpPr>
-        <p:cNvPr id="1" name="">
-          <a:extLst>
-            <a:ext uri="{FF2B5EF4-FFF2-40B4-BE49-F238E27FC236}">
-              <a16:creationId xmlns:a16="http://schemas.microsoft.com/office/drawing/2014/main" xmlns="" id="{7B162E55-6F0D-9A20-0E05-B9E7E646A83C}"/>
-            </a:ext>
-          </a:extLst>
-        </p:cNvPr>
-        <p:cNvGrpSpPr/>
-        <p:nvPr/>
-      </p:nvGrpSpPr>
-      <p:grpSpPr>
-        <a:xfrm>
-          <a:off x="0" y="0"/>
-          <a:ext cx="0" cy="0"/>
-          <a:chOff x="0" y="0"/>
-          <a:chExt cx="0" cy="0"/>
-        </a:xfrm>
-      </p:grpSpPr>
-      <p:pic>
-        <p:nvPicPr>
-          <p:cNvPr id="10" name="Imagem 9" descr="Uma imagem contendo Desenho técnico&#10;&#10;O conteúdo gerado por IA pode estar incorreto.">
-            <a:extLst>
-              <a:ext uri="{FF2B5EF4-FFF2-40B4-BE49-F238E27FC236}">
-                <a16:creationId xmlns:a16="http://schemas.microsoft.com/office/drawing/2014/main" xmlns="" id="{81597430-2F84-8F25-1FF5-4159C7BDF871}"/>
-              </a:ext>
-            </a:extLst>
-          </p:cNvPr>
-          <p:cNvPicPr>
-            <a:picLocks noGrp="1" noRot="1" noChangeAspect="1" noMove="1" noResize="1" noEditPoints="1" noAdjustHandles="1" noChangeArrowheads="1" noChangeShapeType="1" noCrop="1"/>
-          </p:cNvPicPr>
-          <p:nvPr/>
-        </p:nvPicPr>
-        <p:blipFill>
-          <a:blip r:embed="rId2">
-            <a:alphaModFix amt="20000"/>
-            <a:extLst>
-              <a:ext uri="{28A0092B-C50C-407E-A947-70E740481C1C}">
-                <a14:useLocalDpi xmlns:a14="http://schemas.microsoft.com/office/drawing/2010/main" val="0"/>
-              </a:ext>
-            </a:extLst>
-          </a:blip>
-          <a:srcRect t="26080"/>
-          <a:stretch>
-            <a:fillRect/>
-          </a:stretch>
-        </p:blipFill>
-        <p:spPr>
-          <a:xfrm>
-            <a:off x="0" y="11128"/>
-            <a:ext cx="9262533" cy="6846872"/>
-          </a:xfrm>
-          <a:prstGeom prst="rect">
-            <a:avLst/>
-          </a:prstGeom>
-        </p:spPr>
-      </p:pic>
-      <p:sp>
-        <p:nvSpPr>
-          <p:cNvPr id="5" name="TextBox 5">
-            <a:extLst>
-              <a:ext uri="{FF2B5EF4-FFF2-40B4-BE49-F238E27FC236}">
-                <a16:creationId xmlns:a16="http://schemas.microsoft.com/office/drawing/2014/main" xmlns="" id="{4B075216-C345-4FB3-9698-02C9810281E3}"/>
-              </a:ext>
-            </a:extLst>
-          </p:cNvPr>
-          <p:cNvSpPr txBox="1"/>
-          <p:nvPr/>
-        </p:nvSpPr>
-        <p:spPr>
-          <a:xfrm>
-            <a:off x="1000429" y="847992"/>
-            <a:ext cx="10191141" cy="580993"/>
-          </a:xfrm>
-          <a:prstGeom prst="rect">
-            <a:avLst/>
-          </a:prstGeom>
-        </p:spPr>
-        <p:txBody>
-          <a:bodyPr lIns="0" tIns="0" rIns="0" bIns="0" rtlCol="0" anchor="t">
-            <a:spAutoFit/>
-          </a:bodyPr>
-          <a:lstStyle/>
-          <a:p>
-            <a:pPr algn="ctr">
-              <a:lnSpc>
-                <a:spcPts val="4184"/>
-              </a:lnSpc>
-            </a:pPr>
-            <a:r>
-              <a:rPr lang="pt-BR" sz="5230" b="1" dirty="0">
-                <a:solidFill>
-                  <a:schemeClr val="tx2">
-                    <a:lumMod val="75000"/>
-                  </a:schemeClr>
-                </a:solidFill>
-                <a:latin typeface="Hagrid Text Bold"/>
-                <a:ea typeface="Hagrid Text Bold"/>
-                <a:cs typeface="Hagrid Text Bold"/>
-                <a:sym typeface="Hagrid Text Bold"/>
-              </a:rPr>
-              <a:t>O problema da SBV inicial</a:t>
-            </a:r>
-            <a:endParaRPr lang="en-US" sz="5230" b="1" spc="-219" dirty="0">
-              <a:solidFill>
-                <a:schemeClr val="tx2">
-                  <a:lumMod val="75000"/>
-                </a:schemeClr>
-              </a:solidFill>
-              <a:latin typeface="Hagrid Text Bold"/>
-              <a:ea typeface="Hagrid Text Bold"/>
-              <a:cs typeface="Hagrid Text Bold"/>
-              <a:sym typeface="Hagrid Text Bold"/>
-            </a:endParaRPr>
-          </a:p>
-        </p:txBody>
-      </p:sp>
-      <p:sp>
-        <p:nvSpPr>
-          <p:cNvPr id="6" name="TextBox 6">
-            <a:extLst>
-              <a:ext uri="{FF2B5EF4-FFF2-40B4-BE49-F238E27FC236}">
-                <a16:creationId xmlns:a16="http://schemas.microsoft.com/office/drawing/2014/main" xmlns="" id="{FF6E22C4-3F07-0482-1222-38840905F00D}"/>
-              </a:ext>
-            </a:extLst>
-          </p:cNvPr>
-          <p:cNvSpPr txBox="1"/>
-          <p:nvPr/>
-        </p:nvSpPr>
-        <p:spPr>
-          <a:xfrm>
-            <a:off x="754454" y="2015010"/>
-            <a:ext cx="10683089" cy="3447098"/>
-          </a:xfrm>
-          <a:prstGeom prst="rect">
-            <a:avLst/>
-          </a:prstGeom>
-        </p:spPr>
-        <p:txBody>
-          <a:bodyPr wrap="square" lIns="0" tIns="0" rIns="0" bIns="0" rtlCol="0" anchor="t">
-            <a:spAutoFit/>
-          </a:bodyPr>
-          <a:lstStyle/>
-          <a:p>
-            <a:pPr algn="just"/>
-            <a:r>
-              <a:rPr lang="pt-BR" sz="3200" dirty="0">
-                <a:latin typeface="Hagrid Text"/>
-                <a:ea typeface="Hagrid Text"/>
-                <a:cs typeface="Hagrid Text"/>
-                <a:sym typeface="Hagrid Text"/>
-              </a:rPr>
-              <a:t>O procedimento para iniciar a resolução de </a:t>
-            </a:r>
-            <a:r>
-              <a:rPr lang="pt-BR" sz="3200" dirty="0" err="1">
-                <a:latin typeface="Hagrid Text"/>
-                <a:ea typeface="Hagrid Text"/>
-                <a:cs typeface="Hagrid Text"/>
-                <a:sym typeface="Hagrid Text"/>
-              </a:rPr>
-              <a:t>PPLs</a:t>
-            </a:r>
-            <a:r>
-              <a:rPr lang="pt-BR" sz="3200" dirty="0">
-                <a:latin typeface="Hagrid Text"/>
-                <a:ea typeface="Hagrid Text"/>
-                <a:cs typeface="Hagrid Text"/>
-                <a:sym typeface="Hagrid Text"/>
-              </a:rPr>
-              <a:t> com restrições (=) e/ou (</a:t>
-            </a:r>
-            <a:r>
-              <a:rPr lang="pt-BR" sz="3200" dirty="0">
-                <a:latin typeface="Calibri" panose="020F0502020204030204" pitchFamily="34" charset="0"/>
-                <a:ea typeface="Hagrid Text"/>
-                <a:cs typeface="Calibri" panose="020F0502020204030204" pitchFamily="34" charset="0"/>
-                <a:sym typeface="Hagrid Text"/>
-              </a:rPr>
-              <a:t>≥</a:t>
-            </a:r>
-            <a:r>
-              <a:rPr lang="pt-BR" sz="3200" dirty="0">
-                <a:latin typeface="Hagrid Text"/>
-                <a:ea typeface="Hagrid Text"/>
-                <a:cs typeface="Hagrid Text"/>
-                <a:sym typeface="Hagrid Text"/>
-              </a:rPr>
-              <a:t>) é usar </a:t>
-            </a:r>
-            <a:r>
-              <a:rPr lang="pt-BR" sz="3200" b="1" dirty="0">
-                <a:latin typeface="Hagrid Text"/>
-                <a:ea typeface="Hagrid Text"/>
-                <a:cs typeface="Hagrid Text"/>
-                <a:sym typeface="Hagrid Text"/>
-              </a:rPr>
-              <a:t>variáveis artificiais (VA) </a:t>
-            </a:r>
-            <a:r>
-              <a:rPr lang="pt-BR" sz="3200" dirty="0">
-                <a:latin typeface="Hagrid Text"/>
-                <a:ea typeface="Hagrid Text"/>
-                <a:cs typeface="Hagrid Text"/>
-                <a:sym typeface="Hagrid Text"/>
-              </a:rPr>
-              <a:t>que desempenham o papel de folgas na 1ª iteração e então descartá-las legitimamente em iterações posteriores.</a:t>
-            </a:r>
-          </a:p>
-          <a:p>
-            <a:pPr algn="just"/>
-            <a:endParaRPr lang="pt-BR" sz="3200" dirty="0">
-              <a:latin typeface="Hagrid Text"/>
-              <a:ea typeface="Hagrid Text"/>
-              <a:cs typeface="Hagrid Text"/>
-              <a:sym typeface="Hagrid Text"/>
-            </a:endParaRPr>
-          </a:p>
-          <a:p>
-            <a:pPr algn="just"/>
-            <a:r>
-              <a:rPr lang="pt-BR" sz="3200" dirty="0">
-                <a:latin typeface="Hagrid Text"/>
-                <a:ea typeface="Hagrid Text"/>
-                <a:cs typeface="Hagrid Text"/>
-                <a:sym typeface="Hagrid Text"/>
-              </a:rPr>
-              <a:t>Há dois métodos para adaptar os </a:t>
-            </a:r>
-            <a:r>
-              <a:rPr lang="pt-BR" sz="3200" dirty="0" err="1">
-                <a:latin typeface="Hagrid Text"/>
-                <a:ea typeface="Hagrid Text"/>
-                <a:cs typeface="Hagrid Text"/>
-                <a:sym typeface="Hagrid Text"/>
-              </a:rPr>
-              <a:t>PPLs</a:t>
-            </a:r>
-            <a:r>
-              <a:rPr lang="pt-BR" sz="3200" dirty="0">
-                <a:latin typeface="Hagrid Text"/>
+              <a:rPr lang="pt-BR" sz="2400" dirty="0">
                 <a:ea typeface="Hagrid Text"/>
                 <a:cs typeface="Hagrid Text"/>
                 <a:sym typeface="Hagrid Text"/>
@@ -14456,8 +9568,7 @@
               <a:t> fora do formato padrão: </a:t>
             </a:r>
             <a:r>
-              <a:rPr lang="pt-BR" sz="3200" b="1" dirty="0">
-                <a:latin typeface="Hagrid Text"/>
+              <a:rPr lang="pt-BR" sz="2400" b="1" dirty="0">
                 <a:ea typeface="Hagrid Text"/>
                 <a:cs typeface="Hagrid Text"/>
                 <a:sym typeface="Hagrid Text"/>
@@ -14465,8 +9576,7 @@
               <a:t>o método do Big-M</a:t>
             </a:r>
             <a:r>
-              <a:rPr lang="pt-BR" sz="3200" dirty="0">
-                <a:latin typeface="Hagrid Text"/>
+              <a:rPr lang="pt-BR" sz="2400" dirty="0">
                 <a:ea typeface="Hagrid Text"/>
                 <a:cs typeface="Hagrid Text"/>
                 <a:sym typeface="Hagrid Text"/>
@@ -14474,8 +9584,7 @@
               <a:t> e o </a:t>
             </a:r>
             <a:r>
-              <a:rPr lang="pt-BR" sz="3200" b="1" dirty="0">
-                <a:latin typeface="Hagrid Text"/>
+              <a:rPr lang="pt-BR" sz="2400" b="1" dirty="0">
                 <a:ea typeface="Hagrid Text"/>
                 <a:cs typeface="Hagrid Text"/>
                 <a:sym typeface="Hagrid Text"/>
@@ -14483,8 +9592,7 @@
               <a:t>método das duas fases</a:t>
             </a:r>
             <a:r>
-              <a:rPr lang="pt-BR" sz="3200" dirty="0">
-                <a:latin typeface="Hagrid Text"/>
+              <a:rPr lang="pt-BR" sz="2400" dirty="0">
                 <a:ea typeface="Hagrid Text"/>
                 <a:cs typeface="Hagrid Text"/>
                 <a:sym typeface="Hagrid Text"/>
@@ -14494,42 +9602,6 @@
           </a:p>
         </p:txBody>
       </p:sp>
-      <p:pic>
-        <p:nvPicPr>
-          <p:cNvPr id="12" name="Imagem 11" descr="Ícone&#10;&#10;O conteúdo gerado por IA pode estar incorreto.">
-            <a:extLst>
-              <a:ext uri="{FF2B5EF4-FFF2-40B4-BE49-F238E27FC236}">
-                <a16:creationId xmlns:a16="http://schemas.microsoft.com/office/drawing/2014/main" xmlns="" id="{2E00AF05-E454-3F4B-3B14-520777C9B43F}"/>
-              </a:ext>
-            </a:extLst>
-          </p:cNvPr>
-          <p:cNvPicPr>
-            <a:picLocks noChangeAspect="1"/>
-          </p:cNvPicPr>
-          <p:nvPr/>
-        </p:nvPicPr>
-        <p:blipFill>
-          <a:blip r:embed="rId3" cstate="print">
-            <a:extLst>
-              <a:ext uri="{28A0092B-C50C-407E-A947-70E740481C1C}">
-                <a14:useLocalDpi xmlns:a14="http://schemas.microsoft.com/office/drawing/2010/main" val="0"/>
-              </a:ext>
-            </a:extLst>
-          </a:blip>
-          <a:stretch>
-            <a:fillRect/>
-          </a:stretch>
-        </p:blipFill>
-        <p:spPr>
-          <a:xfrm>
-            <a:off x="10913035" y="11128"/>
-            <a:ext cx="1270000" cy="1264823"/>
-          </a:xfrm>
-          <a:prstGeom prst="rect">
-            <a:avLst/>
-          </a:prstGeom>
-        </p:spPr>
-      </p:pic>
     </p:spTree>
     <p:extLst>
       <p:ext uri="{BB962C8B-B14F-4D97-AF65-F5344CB8AC3E}">
@@ -14540,6 +9612,13 @@
   <p:clrMapOvr>
     <a:masterClrMapping/>
   </p:clrMapOvr>
+  <p:timing>
+    <p:tnLst>
+      <p:par>
+        <p:cTn id="1" dur="indefinite" restart="never" nodeType="tmRoot"/>
+      </p:par>
+    </p:tnLst>
+  </p:timing>
 </p:sld>
 </file>
 
@@ -14566,44 +9645,6 @@
           <a:chExt cx="0" cy="0"/>
         </a:xfrm>
       </p:grpSpPr>
-      <p:pic>
-        <p:nvPicPr>
-          <p:cNvPr id="10" name="Imagem 9" descr="Uma imagem contendo Desenho técnico&#10;&#10;O conteúdo gerado por IA pode estar incorreto.">
-            <a:extLst>
-              <a:ext uri="{FF2B5EF4-FFF2-40B4-BE49-F238E27FC236}">
-                <a16:creationId xmlns:a16="http://schemas.microsoft.com/office/drawing/2014/main" xmlns="" id="{06E32DC1-0FF5-F56C-781C-03CCCE59AD9C}"/>
-              </a:ext>
-            </a:extLst>
-          </p:cNvPr>
-          <p:cNvPicPr>
-            <a:picLocks noGrp="1" noRot="1" noChangeAspect="1" noMove="1" noResize="1" noEditPoints="1" noAdjustHandles="1" noChangeArrowheads="1" noChangeShapeType="1" noCrop="1"/>
-          </p:cNvPicPr>
-          <p:nvPr/>
-        </p:nvPicPr>
-        <p:blipFill>
-          <a:blip r:embed="rId2">
-            <a:alphaModFix amt="20000"/>
-            <a:extLst>
-              <a:ext uri="{28A0092B-C50C-407E-A947-70E740481C1C}">
-                <a14:useLocalDpi xmlns:a14="http://schemas.microsoft.com/office/drawing/2010/main" val="0"/>
-              </a:ext>
-            </a:extLst>
-          </a:blip>
-          <a:srcRect t="26080"/>
-          <a:stretch>
-            <a:fillRect/>
-          </a:stretch>
-        </p:blipFill>
-        <p:spPr>
-          <a:xfrm>
-            <a:off x="0" y="11128"/>
-            <a:ext cx="9262533" cy="6846872"/>
-          </a:xfrm>
-          <a:prstGeom prst="rect">
-            <a:avLst/>
-          </a:prstGeom>
-        </p:spPr>
-      </p:pic>
       <p:sp>
         <p:nvSpPr>
           <p:cNvPr id="5" name="TextBox 5">
@@ -14618,8 +9659,8 @@
         </p:nvSpPr>
         <p:spPr>
           <a:xfrm>
-            <a:off x="1000429" y="847992"/>
-            <a:ext cx="10191141" cy="580993"/>
+            <a:off x="754454" y="847992"/>
+            <a:ext cx="10191141" cy="630942"/>
           </a:xfrm>
           <a:prstGeom prst="rect">
             <a:avLst/>
@@ -14631,34 +9672,36 @@
           </a:bodyPr>
           <a:lstStyle/>
           <a:p>
-            <a:pPr algn="ctr">
+            <a:pPr>
               <a:lnSpc>
                 <a:spcPts val="4184"/>
               </a:lnSpc>
             </a:pPr>
             <a:r>
-              <a:rPr lang="pt-BR" sz="5230" b="1" dirty="0">
+              <a:rPr lang="pt-BR" sz="5900" dirty="0">
                 <a:solidFill>
                   <a:schemeClr val="tx2">
-                    <a:lumMod val="75000"/>
+                    <a:lumMod val="90000"/>
+                    <a:lumOff val="10000"/>
                   </a:schemeClr>
                 </a:solidFill>
-                <a:latin typeface="Hagrid Text Bold"/>
-                <a:ea typeface="Hagrid Text Bold"/>
-                <a:cs typeface="Hagrid Text Bold"/>
+                <a:latin typeface="Aharoni" panose="02010803020104030203" pitchFamily="2" charset="-79"/>
+                <a:ea typeface="+mj-ea"/>
+                <a:cs typeface="Aharoni" panose="02010803020104030203" pitchFamily="2" charset="-79"/>
                 <a:sym typeface="Hagrid Text Bold"/>
               </a:rPr>
               <a:t>Método do Big-M</a:t>
             </a:r>
-            <a:endParaRPr lang="en-US" sz="5230" b="1" spc="-219" dirty="0">
+            <a:endParaRPr lang="en-US" sz="5900" dirty="0">
               <a:solidFill>
                 <a:schemeClr val="tx2">
-                  <a:lumMod val="75000"/>
+                  <a:lumMod val="90000"/>
+                  <a:lumOff val="10000"/>
                 </a:schemeClr>
               </a:solidFill>
-              <a:latin typeface="Hagrid Text Bold"/>
-              <a:ea typeface="Hagrid Text Bold"/>
-              <a:cs typeface="Hagrid Text Bold"/>
+              <a:latin typeface="Aharoni" panose="02010803020104030203" pitchFamily="2" charset="-79"/>
+              <a:ea typeface="+mj-ea"/>
+              <a:cs typeface="Aharoni" panose="02010803020104030203" pitchFamily="2" charset="-79"/>
               <a:sym typeface="Hagrid Text Bold"/>
             </a:endParaRPr>
           </a:p>
@@ -14679,7 +9722,7 @@
         <p:spPr>
           <a:xfrm>
             <a:off x="754454" y="2015010"/>
-            <a:ext cx="10683089" cy="3447098"/>
+            <a:ext cx="10683089" cy="1846659"/>
           </a:xfrm>
           <a:prstGeom prst="rect">
             <a:avLst/>
@@ -14693,18 +9736,18 @@
           <a:p>
             <a:pPr algn="just"/>
             <a:r>
-              <a:rPr lang="pt-BR" sz="3200" dirty="0"/>
+              <a:rPr lang="pt-BR" sz="2400" dirty="0"/>
               <a:t>O método do Big-M começa com um PPL na forma de equações.</a:t>
             </a:r>
           </a:p>
           <a:p>
             <a:pPr algn="just"/>
-            <a:endParaRPr lang="pt-BR" sz="3200" dirty="0"/>
+            <a:endParaRPr lang="pt-BR" sz="2400" dirty="0"/>
           </a:p>
           <a:p>
             <a:pPr algn="just"/>
             <a:r>
-              <a:rPr lang="pt-BR" sz="3200" dirty="0"/>
+              <a:rPr lang="pt-BR" sz="2400" dirty="0"/>
               <a:t>Se a equação i não tiver uma folga (ou uma variável que puder desempenhar o papel de uma folga), uma variável artificial é adicionada para formar uma solução inicial semelhante a SB na qual todas as variáveis são de folga. </a:t>
             </a:r>
           </a:p>
@@ -14725,7 +9768,7 @@
           <p:nvPr/>
         </p:nvPicPr>
         <p:blipFill>
-          <a:blip r:embed="rId3" cstate="print">
+          <a:blip r:embed="rId2" cstate="print">
             <a:extLst>
               <a:ext uri="{28A0092B-C50C-407E-A947-70E740481C1C}">
                 <a14:useLocalDpi xmlns:a14="http://schemas.microsoft.com/office/drawing/2010/main" val="0"/>
@@ -14746,6 +9789,51 @@
           </a:prstGeom>
         </p:spPr>
       </p:pic>
+      <p:pic>
+        <p:nvPicPr>
+          <p:cNvPr id="7" name="Imagem 6" descr="Ícone&#10;&#10;O conteúdo gerado por IA pode estar incorreto.">
+            <a:extLst>
+              <a:ext uri="{FF2B5EF4-FFF2-40B4-BE49-F238E27FC236}">
+                <a16:creationId xmlns:a16="http://schemas.microsoft.com/office/drawing/2014/main" xmlns="" id="{F9098C8A-9DC1-4821-BEDD-B767087B88F0}"/>
+              </a:ext>
+            </a:extLst>
+          </p:cNvPr>
+          <p:cNvPicPr>
+            <a:picLocks noChangeAspect="1"/>
+          </p:cNvPicPr>
+          <p:nvPr/>
+        </p:nvPicPr>
+        <p:blipFill>
+          <a:blip r:embed="rId3">
+            <a:extLst>
+              <a:ext uri="{BEBA8EAE-BF5A-486C-A8C5-ECC9F3942E4B}">
+                <a14:imgProps xmlns:a14="http://schemas.microsoft.com/office/drawing/2010/main">
+                  <a14:imgLayer r:embed="rId4">
+                    <a14:imgEffect>
+                      <a14:artisticPhotocopy/>
+                    </a14:imgEffect>
+                  </a14:imgLayer>
+                </a14:imgProps>
+              </a:ext>
+              <a:ext uri="{28A0092B-C50C-407E-A947-70E740481C1C}">
+                <a14:useLocalDpi xmlns:a14="http://schemas.microsoft.com/office/drawing/2010/main" val="0"/>
+              </a:ext>
+            </a:extLst>
+          </a:blip>
+          <a:stretch>
+            <a:fillRect/>
+          </a:stretch>
+        </p:blipFill>
+        <p:spPr>
+          <a:xfrm>
+            <a:off x="9697652" y="4436988"/>
+            <a:ext cx="2430765" cy="2251559"/>
+          </a:xfrm>
+          <a:prstGeom prst="rect">
+            <a:avLst/>
+          </a:prstGeom>
+        </p:spPr>
+      </p:pic>
     </p:spTree>
     <p:extLst>
       <p:ext uri="{BB962C8B-B14F-4D97-AF65-F5344CB8AC3E}">
@@ -14756,6 +9844,13 @@
   <p:clrMapOvr>
     <a:masterClrMapping/>
   </p:clrMapOvr>
+  <p:timing>
+    <p:tnLst>
+      <p:par>
+        <p:cTn id="1" dur="indefinite" restart="never" nodeType="tmRoot"/>
+      </p:par>
+    </p:tnLst>
+  </p:timing>
 </p:sld>
 </file>
 
@@ -14784,36 +9879,43 @@
       </p:grpSpPr>
       <p:pic>
         <p:nvPicPr>
-          <p:cNvPr id="10" name="Imagem 9" descr="Uma imagem contendo Desenho técnico&#10;&#10;O conteúdo gerado por IA pode estar incorreto.">
+          <p:cNvPr id="7" name="Imagem 6" descr="Ícone&#10;&#10;O conteúdo gerado por IA pode estar incorreto.">
             <a:extLst>
               <a:ext uri="{FF2B5EF4-FFF2-40B4-BE49-F238E27FC236}">
-                <a16:creationId xmlns:a16="http://schemas.microsoft.com/office/drawing/2014/main" xmlns="" id="{5D48B8FD-F644-C643-A197-41DA485EC023}"/>
+                <a16:creationId xmlns:a16="http://schemas.microsoft.com/office/drawing/2014/main" xmlns="" id="{F3CDB305-2FAC-4576-A092-AD5F393849BF}"/>
               </a:ext>
             </a:extLst>
           </p:cNvPr>
           <p:cNvPicPr>
-            <a:picLocks noGrp="1" noRot="1" noChangeAspect="1" noMove="1" noResize="1" noEditPoints="1" noAdjustHandles="1" noChangeArrowheads="1" noChangeShapeType="1" noCrop="1"/>
+            <a:picLocks noChangeAspect="1"/>
           </p:cNvPicPr>
           <p:nvPr/>
         </p:nvPicPr>
         <p:blipFill>
           <a:blip r:embed="rId2">
-            <a:alphaModFix amt="20000"/>
             <a:extLst>
+              <a:ext uri="{BEBA8EAE-BF5A-486C-A8C5-ECC9F3942E4B}">
+                <a14:imgProps xmlns:a14="http://schemas.microsoft.com/office/drawing/2010/main">
+                  <a14:imgLayer r:embed="rId3">
+                    <a14:imgEffect>
+                      <a14:artisticPhotocopy/>
+                    </a14:imgEffect>
+                  </a14:imgLayer>
+                </a14:imgProps>
+              </a:ext>
               <a:ext uri="{28A0092B-C50C-407E-A947-70E740481C1C}">
                 <a14:useLocalDpi xmlns:a14="http://schemas.microsoft.com/office/drawing/2010/main" val="0"/>
               </a:ext>
             </a:extLst>
           </a:blip>
-          <a:srcRect t="26080"/>
           <a:stretch>
             <a:fillRect/>
           </a:stretch>
         </p:blipFill>
         <p:spPr>
           <a:xfrm>
-            <a:off x="0" y="11128"/>
-            <a:ext cx="9262533" cy="6846872"/>
+            <a:off x="9697652" y="4436988"/>
+            <a:ext cx="2430765" cy="2251559"/>
           </a:xfrm>
           <a:prstGeom prst="rect">
             <a:avLst/>
@@ -14835,7 +9937,7 @@
         <p:spPr>
           <a:xfrm>
             <a:off x="1000429" y="847992"/>
-            <a:ext cx="10191141" cy="580993"/>
+            <a:ext cx="10191141" cy="630942"/>
           </a:xfrm>
           <a:prstGeom prst="rect">
             <a:avLst/>
@@ -14847,34 +9949,36 @@
           </a:bodyPr>
           <a:lstStyle/>
           <a:p>
-            <a:pPr algn="ctr">
+            <a:pPr>
               <a:lnSpc>
                 <a:spcPts val="4184"/>
               </a:lnSpc>
             </a:pPr>
             <a:r>
-              <a:rPr lang="pt-BR" sz="5230" b="1" dirty="0">
+              <a:rPr lang="pt-BR" sz="5900" dirty="0">
                 <a:solidFill>
                   <a:schemeClr val="tx2">
-                    <a:lumMod val="75000"/>
+                    <a:lumMod val="90000"/>
+                    <a:lumOff val="10000"/>
                   </a:schemeClr>
                 </a:solidFill>
-                <a:latin typeface="Hagrid Text Bold"/>
-                <a:ea typeface="Hagrid Text Bold"/>
-                <a:cs typeface="Hagrid Text Bold"/>
+                <a:latin typeface="Aharoni" panose="02010803020104030203" pitchFamily="2" charset="-79"/>
+                <a:ea typeface="+mj-ea"/>
+                <a:cs typeface="Aharoni" panose="02010803020104030203" pitchFamily="2" charset="-79"/>
                 <a:sym typeface="Hagrid Text Bold"/>
               </a:rPr>
               <a:t>Método do Big-M</a:t>
             </a:r>
-            <a:endParaRPr lang="en-US" sz="5230" b="1" spc="-219" dirty="0">
+            <a:endParaRPr lang="en-US" sz="5900" dirty="0">
               <a:solidFill>
                 <a:schemeClr val="tx2">
-                  <a:lumMod val="75000"/>
+                  <a:lumMod val="90000"/>
+                  <a:lumOff val="10000"/>
                 </a:schemeClr>
               </a:solidFill>
-              <a:latin typeface="Hagrid Text Bold"/>
-              <a:ea typeface="Hagrid Text Bold"/>
-              <a:cs typeface="Hagrid Text Bold"/>
+              <a:latin typeface="Aharoni" panose="02010803020104030203" pitchFamily="2" charset="-79"/>
+              <a:ea typeface="+mj-ea"/>
+              <a:cs typeface="Aharoni" panose="02010803020104030203" pitchFamily="2" charset="-79"/>
               <a:sym typeface="Hagrid Text Bold"/>
             </a:endParaRPr>
           </a:p>
@@ -14894,8 +9998,8 @@
         </p:nvSpPr>
         <p:spPr>
           <a:xfrm>
-            <a:off x="754454" y="1681280"/>
-            <a:ext cx="10683089" cy="4924425"/>
+            <a:off x="754455" y="1681280"/>
+            <a:ext cx="10191142" cy="1477328"/>
           </a:xfrm>
           <a:prstGeom prst="rect">
             <a:avLst/>
@@ -14909,20 +10013,13 @@
           <a:p>
             <a:pPr algn="just"/>
             <a:r>
-              <a:rPr lang="pt-BR" sz="3200" dirty="0"/>
+              <a:rPr lang="pt-BR" sz="2400" dirty="0"/>
               <a:t>Como as variáveis artificiais não são parte do modelo original recebem punições muito altas na função objetivo, o que a certa altura as força a ter valor igual a zero na solução ótima.</a:t>
             </a:r>
           </a:p>
           <a:p>
             <a:pPr algn="just"/>
-            <a:endParaRPr lang="pt-BR" sz="3200" dirty="0"/>
-          </a:p>
-          <a:p>
-            <a:pPr algn="just"/>
-            <a:r>
-              <a:rPr lang="pt-BR" sz="3200" b="1" dirty="0"/>
-              <a:t>Se o PPL original não tiver nenhuma solução viável, então tanto o método do Big M como o método das duas fases levam a uma solução final que tem pelo menos uma variável artificial maior que zero. Caso contrário, todas elas serão iguais a zero.</a:t>
-            </a:r>
+            <a:endParaRPr lang="pt-BR" sz="2400" dirty="0"/>
           </a:p>
         </p:txBody>
       </p:sp>
@@ -14941,7 +10038,7 @@
           <p:nvPr/>
         </p:nvPicPr>
         <p:blipFill>
-          <a:blip r:embed="rId3" cstate="print">
+          <a:blip r:embed="rId4" cstate="print">
             <a:extLst>
               <a:ext uri="{28A0092B-C50C-407E-A947-70E740481C1C}">
                 <a14:useLocalDpi xmlns:a14="http://schemas.microsoft.com/office/drawing/2010/main" val="0"/>
@@ -14962,6 +10059,45 @@
           </a:prstGeom>
         </p:spPr>
       </p:pic>
+      <p:sp>
+        <p:nvSpPr>
+          <p:cNvPr id="8" name="TextBox 6">
+            <a:extLst>
+              <a:ext uri="{FF2B5EF4-FFF2-40B4-BE49-F238E27FC236}">
+                <a16:creationId xmlns:a16="http://schemas.microsoft.com/office/drawing/2014/main" xmlns="" id="{EFD33779-F348-41CD-B30F-3130A40CF5A9}"/>
+              </a:ext>
+            </a:extLst>
+          </p:cNvPr>
+          <p:cNvSpPr txBox="1"/>
+          <p:nvPr/>
+        </p:nvSpPr>
+        <p:spPr>
+          <a:xfrm>
+            <a:off x="721891" y="3429000"/>
+            <a:ext cx="10223705" cy="1846659"/>
+          </a:xfrm>
+          <a:prstGeom prst="rect">
+            <a:avLst/>
+          </a:prstGeom>
+        </p:spPr>
+        <p:txBody>
+          <a:bodyPr wrap="square" lIns="0" tIns="0" rIns="0" bIns="0" rtlCol="0" anchor="t">
+            <a:spAutoFit/>
+          </a:bodyPr>
+          <a:lstStyle/>
+          <a:p>
+            <a:pPr algn="just"/>
+            <a:r>
+              <a:rPr lang="pt-BR" sz="2400" b="1" dirty="0"/>
+              <a:t>Se o PPL original não tiver nenhuma solução viável, então tanto o método do Big M como o método das duas fases levam a uma solução final que tem pelo menos uma variável artificial maior que zero. Caso contrário, todas elas serão iguais a zero.</a:t>
+            </a:r>
+          </a:p>
+          <a:p>
+            <a:pPr algn="just"/>
+            <a:endParaRPr lang="pt-BR" sz="2400" dirty="0"/>
+          </a:p>
+        </p:txBody>
+      </p:sp>
     </p:spTree>
     <p:extLst>
       <p:ext uri="{BB962C8B-B14F-4D97-AF65-F5344CB8AC3E}">
@@ -14972,6 +10108,13 @@
   <p:clrMapOvr>
     <a:masterClrMapping/>
   </p:clrMapOvr>
+  <p:timing>
+    <p:tnLst>
+      <p:par>
+        <p:cTn id="1" dur="indefinite" restart="never" nodeType="tmRoot"/>
+      </p:par>
+    </p:tnLst>
+  </p:timing>
 </p:sld>
 </file>
 
@@ -14998,44 +10141,6 @@
           <a:chExt cx="0" cy="0"/>
         </a:xfrm>
       </p:grpSpPr>
-      <p:pic>
-        <p:nvPicPr>
-          <p:cNvPr id="10" name="Imagem 9" descr="Uma imagem contendo Desenho técnico&#10;&#10;O conteúdo gerado por IA pode estar incorreto.">
-            <a:extLst>
-              <a:ext uri="{FF2B5EF4-FFF2-40B4-BE49-F238E27FC236}">
-                <a16:creationId xmlns:a16="http://schemas.microsoft.com/office/drawing/2014/main" xmlns="" id="{9B6F061F-8FAB-08CC-32AA-E4B04BDFA700}"/>
-              </a:ext>
-            </a:extLst>
-          </p:cNvPr>
-          <p:cNvPicPr>
-            <a:picLocks noGrp="1" noRot="1" noChangeAspect="1" noMove="1" noResize="1" noEditPoints="1" noAdjustHandles="1" noChangeArrowheads="1" noChangeShapeType="1" noCrop="1"/>
-          </p:cNvPicPr>
-          <p:nvPr/>
-        </p:nvPicPr>
-        <p:blipFill>
-          <a:blip r:embed="rId2">
-            <a:alphaModFix amt="20000"/>
-            <a:extLst>
-              <a:ext uri="{28A0092B-C50C-407E-A947-70E740481C1C}">
-                <a14:useLocalDpi xmlns:a14="http://schemas.microsoft.com/office/drawing/2010/main" val="0"/>
-              </a:ext>
-            </a:extLst>
-          </a:blip>
-          <a:srcRect t="26080"/>
-          <a:stretch>
-            <a:fillRect/>
-          </a:stretch>
-        </p:blipFill>
-        <p:spPr>
-          <a:xfrm>
-            <a:off x="0" y="11128"/>
-            <a:ext cx="9262533" cy="6846872"/>
-          </a:xfrm>
-          <a:prstGeom prst="rect">
-            <a:avLst/>
-          </a:prstGeom>
-        </p:spPr>
-      </p:pic>
       <p:sp>
         <p:nvSpPr>
           <p:cNvPr id="5" name="TextBox 5">
@@ -15051,7 +10156,7 @@
         <p:spPr>
           <a:xfrm>
             <a:off x="1000429" y="847992"/>
-            <a:ext cx="10191141" cy="1119602"/>
+            <a:ext cx="10191141" cy="1169551"/>
           </a:xfrm>
           <a:prstGeom prst="rect">
             <a:avLst/>
@@ -15063,34 +10168,36 @@
           </a:bodyPr>
           <a:lstStyle/>
           <a:p>
-            <a:pPr algn="ctr">
+            <a:pPr>
               <a:lnSpc>
                 <a:spcPts val="4184"/>
               </a:lnSpc>
             </a:pPr>
             <a:r>
-              <a:rPr lang="pt-BR" sz="5230" b="1" dirty="0">
+              <a:rPr lang="pt-BR" sz="5900" dirty="0">
                 <a:solidFill>
                   <a:schemeClr val="tx2">
-                    <a:lumMod val="75000"/>
+                    <a:lumMod val="90000"/>
+                    <a:lumOff val="10000"/>
                   </a:schemeClr>
                 </a:solidFill>
-                <a:latin typeface="Hagrid Text Bold"/>
-                <a:ea typeface="Hagrid Text Bold"/>
-                <a:cs typeface="Hagrid Text Bold"/>
+                <a:latin typeface="Aharoni" panose="02010803020104030203" pitchFamily="2" charset="-79"/>
+                <a:ea typeface="+mj-ea"/>
+                <a:cs typeface="Aharoni" panose="02010803020104030203" pitchFamily="2" charset="-79"/>
                 <a:sym typeface="Hagrid Text Bold"/>
               </a:rPr>
               <a:t>Método do Big-M: Regra de penalização das VA</a:t>
             </a:r>
-            <a:endParaRPr lang="en-US" sz="5230" b="1" spc="-219" dirty="0">
+            <a:endParaRPr lang="en-US" sz="5900" dirty="0">
               <a:solidFill>
                 <a:schemeClr val="tx2">
-                  <a:lumMod val="75000"/>
+                  <a:lumMod val="90000"/>
+                  <a:lumOff val="10000"/>
                 </a:schemeClr>
               </a:solidFill>
-              <a:latin typeface="Hagrid Text Bold"/>
-              <a:ea typeface="Hagrid Text Bold"/>
-              <a:cs typeface="Hagrid Text Bold"/>
+              <a:latin typeface="Aharoni" panose="02010803020104030203" pitchFamily="2" charset="-79"/>
+              <a:ea typeface="+mj-ea"/>
+              <a:cs typeface="Aharoni" panose="02010803020104030203" pitchFamily="2" charset="-79"/>
               <a:sym typeface="Hagrid Text Bold"/>
             </a:endParaRPr>
           </a:p>
@@ -15110,8 +10217,8 @@
         </p:nvSpPr>
         <p:spPr>
           <a:xfrm>
-            <a:off x="754454" y="2366937"/>
-            <a:ext cx="10683089" cy="2708434"/>
+            <a:off x="754454" y="2214537"/>
+            <a:ext cx="10683089" cy="2339102"/>
           </a:xfrm>
           <a:prstGeom prst="rect">
             <a:avLst/>
@@ -15124,7 +10231,7 @@
           <a:lstStyle/>
           <a:p>
             <a:r>
-              <a:rPr lang="pt-BR" sz="3200" dirty="0"/>
+              <a:rPr lang="pt-BR" sz="2400" dirty="0"/>
               <a:t>Dado M um valor positivo suficientemente alto, o coeficiente da função objetivo de uma VA representa uma punição adequada se:</a:t>
             </a:r>
           </a:p>
@@ -15134,19 +10241,34 @@
           <a:p>
             <a:r>
               <a:rPr lang="pt-BR" sz="2400" dirty="0"/>
-              <a:t>Coeficiente na função 	-M, em problemas  de </a:t>
+              <a:t>Coeficiente na </a:t>
             </a:r>
             <a:r>
               <a:rPr lang="pt-BR" sz="2400" dirty="0" smtClean="0"/>
-              <a:t>maximização</a:t>
+              <a:t>função -M</a:t>
+            </a:r>
+            <a:r>
+              <a:rPr lang="pt-BR" sz="2400" dirty="0"/>
+              <a:t>, em problemas  de maximização</a:t>
             </a:r>
           </a:p>
           <a:p>
             <a:r>
               <a:rPr lang="pt-BR" sz="2400" dirty="0" smtClean="0"/>
-              <a:t>       objetivo da VA = 	 M, em problemas  de minimização</a:t>
+              <a:t>objetivo </a:t>
             </a:r>
-            <a:endParaRPr lang="pt-BR" sz="2400" dirty="0"/>
+            <a:r>
+              <a:rPr lang="pt-BR" sz="2400" dirty="0"/>
+              <a:t>da VA = 	 </a:t>
+            </a:r>
+            <a:r>
+              <a:rPr lang="pt-BR" sz="2400" dirty="0" smtClean="0"/>
+              <a:t>  M</a:t>
+            </a:r>
+            <a:r>
+              <a:rPr lang="pt-BR" sz="2400" dirty="0"/>
+              <a:t>, em problemas  de minimização</a:t>
+            </a:r>
           </a:p>
         </p:txBody>
       </p:sp>
@@ -15165,7 +10287,7 @@
           <p:nvPr/>
         </p:nvPicPr>
         <p:blipFill>
-          <a:blip r:embed="rId3" cstate="print">
+          <a:blip r:embed="rId2" cstate="print">
             <a:extLst>
               <a:ext uri="{28A0092B-C50C-407E-A947-70E740481C1C}">
                 <a14:useLocalDpi xmlns:a14="http://schemas.microsoft.com/office/drawing/2010/main" val="0"/>
@@ -15200,7 +10322,7 @@
         </p:nvSpPr>
         <p:spPr>
           <a:xfrm>
-            <a:off x="5006478" y="4253752"/>
+            <a:off x="4489446" y="3829359"/>
             <a:ext cx="292100" cy="770071"/>
           </a:xfrm>
           <a:prstGeom prst="leftBrace">
@@ -15230,6 +10352,51 @@
           </a:p>
         </p:txBody>
       </p:sp>
+      <p:pic>
+        <p:nvPicPr>
+          <p:cNvPr id="7" name="Imagem 6" descr="Ícone&#10;&#10;O conteúdo gerado por IA pode estar incorreto.">
+            <a:extLst>
+              <a:ext uri="{FF2B5EF4-FFF2-40B4-BE49-F238E27FC236}">
+                <a16:creationId xmlns:a16="http://schemas.microsoft.com/office/drawing/2014/main" xmlns="" id="{56C8A23F-C247-4D6F-8171-18CFEC8ADEB6}"/>
+              </a:ext>
+            </a:extLst>
+          </p:cNvPr>
+          <p:cNvPicPr>
+            <a:picLocks noChangeAspect="1"/>
+          </p:cNvPicPr>
+          <p:nvPr/>
+        </p:nvPicPr>
+        <p:blipFill>
+          <a:blip r:embed="rId3">
+            <a:extLst>
+              <a:ext uri="{BEBA8EAE-BF5A-486C-A8C5-ECC9F3942E4B}">
+                <a14:imgProps xmlns:a14="http://schemas.microsoft.com/office/drawing/2010/main">
+                  <a14:imgLayer r:embed="rId4">
+                    <a14:imgEffect>
+                      <a14:artisticPhotocopy/>
+                    </a14:imgEffect>
+                  </a14:imgLayer>
+                </a14:imgProps>
+              </a:ext>
+              <a:ext uri="{28A0092B-C50C-407E-A947-70E740481C1C}">
+                <a14:useLocalDpi xmlns:a14="http://schemas.microsoft.com/office/drawing/2010/main" val="0"/>
+              </a:ext>
+            </a:extLst>
+          </a:blip>
+          <a:stretch>
+            <a:fillRect/>
+          </a:stretch>
+        </p:blipFill>
+        <p:spPr>
+          <a:xfrm>
+            <a:off x="9697652" y="4436988"/>
+            <a:ext cx="2430765" cy="2251559"/>
+          </a:xfrm>
+          <a:prstGeom prst="rect">
+            <a:avLst/>
+          </a:prstGeom>
+        </p:spPr>
+      </p:pic>
     </p:spTree>
     <p:extLst>
       <p:ext uri="{BB962C8B-B14F-4D97-AF65-F5344CB8AC3E}">
@@ -15240,6 +10407,13 @@
   <p:clrMapOvr>
     <a:masterClrMapping/>
   </p:clrMapOvr>
+  <p:timing>
+    <p:tnLst>
+      <p:par>
+        <p:cTn id="1" dur="indefinite" restart="never" nodeType="tmRoot"/>
+      </p:par>
+    </p:tnLst>
+  </p:timing>
 </p:sld>
 </file>
 
@@ -15266,44 +10440,6 @@
           <a:chExt cx="0" cy="0"/>
         </a:xfrm>
       </p:grpSpPr>
-      <p:pic>
-        <p:nvPicPr>
-          <p:cNvPr id="10" name="Imagem 9" descr="Uma imagem contendo Desenho técnico&#10;&#10;O conteúdo gerado por IA pode estar incorreto.">
-            <a:extLst>
-              <a:ext uri="{FF2B5EF4-FFF2-40B4-BE49-F238E27FC236}">
-                <a16:creationId xmlns:a16="http://schemas.microsoft.com/office/drawing/2014/main" xmlns="" id="{4E9C87E1-B231-20BA-6E37-D28C02254278}"/>
-              </a:ext>
-            </a:extLst>
-          </p:cNvPr>
-          <p:cNvPicPr>
-            <a:picLocks noGrp="1" noRot="1" noChangeAspect="1" noMove="1" noResize="1" noEditPoints="1" noAdjustHandles="1" noChangeArrowheads="1" noChangeShapeType="1" noCrop="1"/>
-          </p:cNvPicPr>
-          <p:nvPr/>
-        </p:nvPicPr>
-        <p:blipFill>
-          <a:blip r:embed="rId2">
-            <a:alphaModFix amt="20000"/>
-            <a:extLst>
-              <a:ext uri="{28A0092B-C50C-407E-A947-70E740481C1C}">
-                <a14:useLocalDpi xmlns:a14="http://schemas.microsoft.com/office/drawing/2010/main" val="0"/>
-              </a:ext>
-            </a:extLst>
-          </a:blip>
-          <a:srcRect t="26080"/>
-          <a:stretch>
-            <a:fillRect/>
-          </a:stretch>
-        </p:blipFill>
-        <p:spPr>
-          <a:xfrm>
-            <a:off x="0" y="11128"/>
-            <a:ext cx="9262533" cy="6846872"/>
-          </a:xfrm>
-          <a:prstGeom prst="rect">
-            <a:avLst/>
-          </a:prstGeom>
-        </p:spPr>
-      </p:pic>
       <p:sp>
         <p:nvSpPr>
           <p:cNvPr id="5" name="TextBox 5">
@@ -15319,7 +10455,7 @@
         <p:spPr>
           <a:xfrm>
             <a:off x="1000429" y="847992"/>
-            <a:ext cx="10191141" cy="580993"/>
+            <a:ext cx="10191141" cy="630942"/>
           </a:xfrm>
           <a:prstGeom prst="rect">
             <a:avLst/>
@@ -15331,34 +10467,36 @@
           </a:bodyPr>
           <a:lstStyle/>
           <a:p>
-            <a:pPr algn="ctr">
+            <a:pPr>
               <a:lnSpc>
                 <a:spcPts val="4184"/>
               </a:lnSpc>
             </a:pPr>
             <a:r>
-              <a:rPr lang="pt-BR" sz="5230" b="1" dirty="0">
+              <a:rPr lang="pt-BR" sz="5900" dirty="0">
                 <a:solidFill>
                   <a:schemeClr val="tx2">
-                    <a:lumMod val="75000"/>
+                    <a:lumMod val="90000"/>
+                    <a:lumOff val="10000"/>
                   </a:schemeClr>
                 </a:solidFill>
-                <a:latin typeface="Hagrid Text Bold"/>
-                <a:ea typeface="Hagrid Text Bold"/>
-                <a:cs typeface="Hagrid Text Bold"/>
+                <a:latin typeface="Aharoni" panose="02010803020104030203" pitchFamily="2" charset="-79"/>
+                <a:ea typeface="+mj-ea"/>
+                <a:cs typeface="Aharoni" panose="02010803020104030203" pitchFamily="2" charset="-79"/>
                 <a:sym typeface="Hagrid Text Bold"/>
               </a:rPr>
               <a:t>Exemplo</a:t>
             </a:r>
-            <a:endParaRPr lang="en-US" sz="5230" b="1" spc="-219" dirty="0">
+            <a:endParaRPr lang="en-US" sz="5900" dirty="0">
               <a:solidFill>
                 <a:schemeClr val="tx2">
-                  <a:lumMod val="75000"/>
+                  <a:lumMod val="90000"/>
+                  <a:lumOff val="10000"/>
                 </a:schemeClr>
               </a:solidFill>
-              <a:latin typeface="Hagrid Text Bold"/>
-              <a:ea typeface="Hagrid Text Bold"/>
-              <a:cs typeface="Hagrid Text Bold"/>
+              <a:latin typeface="Aharoni" panose="02010803020104030203" pitchFamily="2" charset="-79"/>
+              <a:ea typeface="+mj-ea"/>
+              <a:cs typeface="Aharoni" panose="02010803020104030203" pitchFamily="2" charset="-79"/>
               <a:sym typeface="Hagrid Text Bold"/>
             </a:endParaRPr>
           </a:p>
@@ -15392,15 +10530,37 @@
           <a:lstStyle/>
           <a:p>
             <a:r>
-              <a:rPr lang="pt-BR" sz="3200" b="1" dirty="0"/>
+              <a:rPr lang="pt-BR" sz="3200" dirty="0">
+                <a:solidFill>
+                  <a:schemeClr val="tx2">
+                    <a:lumMod val="90000"/>
+                    <a:lumOff val="10000"/>
+                  </a:schemeClr>
+                </a:solidFill>
+                <a:latin typeface="Aharoni" panose="02010803020104030203" pitchFamily="2" charset="-79"/>
+                <a:ea typeface="+mj-ea"/>
+                <a:cs typeface="Aharoni" panose="02010803020104030203" pitchFamily="2" charset="-79"/>
+              </a:rPr>
               <a:t>PPL original:</a:t>
             </a:r>
           </a:p>
           <a:p>
-            <a:endParaRPr lang="pt-BR" sz="3200" dirty="0"/>
-          </a:p>
-          <a:p>
-            <a:endParaRPr lang="pt-BR" sz="3200" dirty="0"/>
+            <a:endParaRPr lang="pt-BR" sz="3200" dirty="0">
+              <a:solidFill>
+                <a:schemeClr val="tx2">
+                  <a:lumMod val="90000"/>
+                  <a:lumOff val="10000"/>
+                </a:schemeClr>
+              </a:solidFill>
+              <a:latin typeface="Aharoni" panose="02010803020104030203" pitchFamily="2" charset="-79"/>
+              <a:ea typeface="+mj-ea"/>
+              <a:cs typeface="Aharoni" panose="02010803020104030203" pitchFamily="2" charset="-79"/>
+            </a:endParaRPr>
+          </a:p>
+          <a:p>
+            <a:endParaRPr lang="pt-BR" sz="3200" dirty="0">
+              <a:latin typeface="Aptos corpo"/>
+            </a:endParaRPr>
           </a:p>
         </p:txBody>
       </p:sp>
@@ -15419,7 +10579,7 @@
           <p:nvPr/>
         </p:nvPicPr>
         <p:blipFill>
-          <a:blip r:embed="rId3" cstate="print">
+          <a:blip r:embed="rId2" cstate="print">
             <a:extLst>
               <a:ext uri="{28A0092B-C50C-407E-A947-70E740481C1C}">
                 <a14:useLocalDpi xmlns:a14="http://schemas.microsoft.com/office/drawing/2010/main" val="0"/>
@@ -15749,9 +10909,7 @@
                   <a:buNone/>
                 </a:pPr>
                 <a:r>
-                  <a:rPr lang="pt-BR" i="1" dirty="0">
-                    <a:latin typeface="Cambria Math"/>
-                  </a:rPr>
+                  <a:rPr lang="pt-BR" i="1" dirty="0"/>
                   <a:t>Sujeito a </a:t>
                 </a:r>
               </a:p>
@@ -16152,7 +11310,7 @@
                 <a:avLst/>
               </a:prstGeom>
               <a:blipFill>
-                <a:blip r:embed="rId4"/>
+                <a:blip r:embed="rId3"/>
                 <a:stretch>
                   <a:fillRect/>
                 </a:stretch>
@@ -16173,6 +11331,51 @@
           </p:sp>
         </mc:Fallback>
       </mc:AlternateContent>
+      <p:pic>
+        <p:nvPicPr>
+          <p:cNvPr id="7" name="Imagem 6" descr="Ícone&#10;&#10;O conteúdo gerado por IA pode estar incorreto.">
+            <a:extLst>
+              <a:ext uri="{FF2B5EF4-FFF2-40B4-BE49-F238E27FC236}">
+                <a16:creationId xmlns:a16="http://schemas.microsoft.com/office/drawing/2014/main" xmlns="" id="{7302A537-AE0E-44D4-9AFA-D18346308897}"/>
+              </a:ext>
+            </a:extLst>
+          </p:cNvPr>
+          <p:cNvPicPr>
+            <a:picLocks noChangeAspect="1"/>
+          </p:cNvPicPr>
+          <p:nvPr/>
+        </p:nvPicPr>
+        <p:blipFill>
+          <a:blip r:embed="rId4">
+            <a:extLst>
+              <a:ext uri="{BEBA8EAE-BF5A-486C-A8C5-ECC9F3942E4B}">
+                <a14:imgProps xmlns:a14="http://schemas.microsoft.com/office/drawing/2010/main">
+                  <a14:imgLayer r:embed="rId5">
+                    <a14:imgEffect>
+                      <a14:artisticPhotocopy/>
+                    </a14:imgEffect>
+                  </a14:imgLayer>
+                </a14:imgProps>
+              </a:ext>
+              <a:ext uri="{28A0092B-C50C-407E-A947-70E740481C1C}">
+                <a14:useLocalDpi xmlns:a14="http://schemas.microsoft.com/office/drawing/2010/main" val="0"/>
+              </a:ext>
+            </a:extLst>
+          </a:blip>
+          <a:stretch>
+            <a:fillRect/>
+          </a:stretch>
+        </p:blipFill>
+        <p:spPr>
+          <a:xfrm>
+            <a:off x="9697652" y="4436988"/>
+            <a:ext cx="2430765" cy="2251559"/>
+          </a:xfrm>
+          <a:prstGeom prst="rect">
+            <a:avLst/>
+          </a:prstGeom>
+        </p:spPr>
+      </p:pic>
     </p:spTree>
     <p:extLst>
       <p:ext uri="{BB962C8B-B14F-4D97-AF65-F5344CB8AC3E}">
@@ -16183,6 +11386,13 @@
   <p:clrMapOvr>
     <a:masterClrMapping/>
   </p:clrMapOvr>
+  <p:timing>
+    <p:tnLst>
+      <p:par>
+        <p:cTn id="1" dur="indefinite" restart="never" nodeType="tmRoot"/>
+      </p:par>
+    </p:tnLst>
+  </p:timing>
 </p:sld>
 </file>
 
@@ -16209,44 +11419,6 @@
           <a:chExt cx="0" cy="0"/>
         </a:xfrm>
       </p:grpSpPr>
-      <p:pic>
-        <p:nvPicPr>
-          <p:cNvPr id="10" name="Imagem 9" descr="Uma imagem contendo Desenho técnico&#10;&#10;O conteúdo gerado por IA pode estar incorreto.">
-            <a:extLst>
-              <a:ext uri="{FF2B5EF4-FFF2-40B4-BE49-F238E27FC236}">
-                <a16:creationId xmlns:a16="http://schemas.microsoft.com/office/drawing/2014/main" xmlns="" id="{F3CC6188-6BBC-3A56-7C54-A8A5B44A8562}"/>
-              </a:ext>
-            </a:extLst>
-          </p:cNvPr>
-          <p:cNvPicPr>
-            <a:picLocks noGrp="1" noRot="1" noChangeAspect="1" noMove="1" noResize="1" noEditPoints="1" noAdjustHandles="1" noChangeArrowheads="1" noChangeShapeType="1" noCrop="1"/>
-          </p:cNvPicPr>
-          <p:nvPr/>
-        </p:nvPicPr>
-        <p:blipFill>
-          <a:blip r:embed="rId2">
-            <a:alphaModFix amt="20000"/>
-            <a:extLst>
-              <a:ext uri="{28A0092B-C50C-407E-A947-70E740481C1C}">
-                <a14:useLocalDpi xmlns:a14="http://schemas.microsoft.com/office/drawing/2010/main" val="0"/>
-              </a:ext>
-            </a:extLst>
-          </a:blip>
-          <a:srcRect t="26080"/>
-          <a:stretch>
-            <a:fillRect/>
-          </a:stretch>
-        </p:blipFill>
-        <p:spPr>
-          <a:xfrm>
-            <a:off x="0" y="11128"/>
-            <a:ext cx="9262533" cy="6846872"/>
-          </a:xfrm>
-          <a:prstGeom prst="rect">
-            <a:avLst/>
-          </a:prstGeom>
-        </p:spPr>
-      </p:pic>
       <p:sp>
         <p:nvSpPr>
           <p:cNvPr id="5" name="TextBox 5">
@@ -16262,7 +11434,7 @@
         <p:spPr>
           <a:xfrm>
             <a:off x="1000429" y="847992"/>
-            <a:ext cx="10191141" cy="580993"/>
+            <a:ext cx="10191141" cy="630942"/>
           </a:xfrm>
           <a:prstGeom prst="rect">
             <a:avLst/>
@@ -16274,34 +11446,36 @@
           </a:bodyPr>
           <a:lstStyle/>
           <a:p>
-            <a:pPr algn="ctr">
+            <a:pPr>
               <a:lnSpc>
                 <a:spcPts val="4184"/>
               </a:lnSpc>
             </a:pPr>
             <a:r>
-              <a:rPr lang="pt-BR" sz="5230" b="1" dirty="0">
+              <a:rPr lang="pt-BR" sz="5900" dirty="0">
                 <a:solidFill>
                   <a:schemeClr val="tx2">
-                    <a:lumMod val="75000"/>
+                    <a:lumMod val="90000"/>
+                    <a:lumOff val="10000"/>
                   </a:schemeClr>
                 </a:solidFill>
-                <a:latin typeface="Hagrid Text Bold"/>
-                <a:ea typeface="Hagrid Text Bold"/>
-                <a:cs typeface="Hagrid Text Bold"/>
+                <a:latin typeface="Aharoni" panose="02010803020104030203" pitchFamily="2" charset="-79"/>
+                <a:ea typeface="+mj-ea"/>
+                <a:cs typeface="Aharoni" panose="02010803020104030203" pitchFamily="2" charset="-79"/>
                 <a:sym typeface="Hagrid Text Bold"/>
               </a:rPr>
               <a:t>Exemplo</a:t>
             </a:r>
-            <a:endParaRPr lang="en-US" sz="5230" b="1" spc="-219" dirty="0">
+            <a:endParaRPr lang="en-US" sz="5900" dirty="0">
               <a:solidFill>
                 <a:schemeClr val="tx2">
-                  <a:lumMod val="75000"/>
+                  <a:lumMod val="90000"/>
+                  <a:lumOff val="10000"/>
                 </a:schemeClr>
               </a:solidFill>
-              <a:latin typeface="Hagrid Text Bold"/>
-              <a:ea typeface="Hagrid Text Bold"/>
-              <a:cs typeface="Hagrid Text Bold"/>
+              <a:latin typeface="Aharoni" panose="02010803020104030203" pitchFamily="2" charset="-79"/>
+              <a:ea typeface="+mj-ea"/>
+              <a:cs typeface="Aharoni" panose="02010803020104030203" pitchFamily="2" charset="-79"/>
               <a:sym typeface="Hagrid Text Bold"/>
             </a:endParaRPr>
           </a:p>
@@ -16335,12 +11509,32 @@
           <a:lstStyle/>
           <a:p>
             <a:r>
-              <a:rPr lang="pt-BR" sz="3200" b="1" dirty="0"/>
+              <a:rPr lang="pt-BR" sz="3200" dirty="0">
+                <a:solidFill>
+                  <a:schemeClr val="tx2">
+                    <a:lumMod val="90000"/>
+                    <a:lumOff val="10000"/>
+                  </a:schemeClr>
+                </a:solidFill>
+                <a:latin typeface="Aharoni" panose="02010803020104030203" pitchFamily="2" charset="-79"/>
+                <a:ea typeface="+mj-ea"/>
+                <a:cs typeface="Aharoni" panose="02010803020104030203" pitchFamily="2" charset="-79"/>
+              </a:rPr>
               <a:t>PPL original:</a:t>
             </a:r>
           </a:p>
           <a:p>
-            <a:endParaRPr lang="pt-BR" sz="3200" dirty="0"/>
+            <a:endParaRPr lang="pt-BR" sz="3200" dirty="0">
+              <a:solidFill>
+                <a:schemeClr val="tx2">
+                  <a:lumMod val="90000"/>
+                  <a:lumOff val="10000"/>
+                </a:schemeClr>
+              </a:solidFill>
+              <a:latin typeface="Aharoni" panose="02010803020104030203" pitchFamily="2" charset="-79"/>
+              <a:ea typeface="+mj-ea"/>
+              <a:cs typeface="Aharoni" panose="02010803020104030203" pitchFamily="2" charset="-79"/>
+            </a:endParaRPr>
           </a:p>
           <a:p>
             <a:endParaRPr lang="pt-BR" sz="3200" dirty="0"/>
@@ -16362,7 +11556,7 @@
           <p:nvPr/>
         </p:nvPicPr>
         <p:blipFill>
-          <a:blip r:embed="rId3" cstate="print">
+          <a:blip r:embed="rId2" cstate="print">
             <a:extLst>
               <a:ext uri="{28A0092B-C50C-407E-A947-70E740481C1C}">
                 <a14:useLocalDpi xmlns:a14="http://schemas.microsoft.com/office/drawing/2010/main" val="0"/>
@@ -16692,9 +11886,7 @@
                   <a:buNone/>
                 </a:pPr>
                 <a:r>
-                  <a:rPr lang="pt-BR" i="1" dirty="0">
-                    <a:latin typeface="Cambria Math"/>
-                  </a:rPr>
+                  <a:rPr lang="pt-BR" i="1" dirty="0"/>
                   <a:t>Sujeito a </a:t>
                 </a:r>
               </a:p>
@@ -17095,7 +12287,7 @@
                 <a:avLst/>
               </a:prstGeom>
               <a:blipFill>
-                <a:blip r:embed="rId4"/>
+                <a:blip r:embed="rId3"/>
                 <a:stretch>
                   <a:fillRect/>
                 </a:stretch>
@@ -17130,8 +12322,8 @@
         </p:nvSpPr>
         <p:spPr>
           <a:xfrm>
-            <a:off x="5607586" y="2366937"/>
-            <a:ext cx="5829959" cy="1477328"/>
+            <a:off x="6095999" y="2366937"/>
+            <a:ext cx="5341546" cy="1477328"/>
           </a:xfrm>
           <a:prstGeom prst="rect">
             <a:avLst/>
@@ -17144,17 +12336,57 @@
           <a:lstStyle/>
           <a:p>
             <a:r>
-              <a:rPr lang="pt-BR" sz="3200" b="1" dirty="0"/>
+              <a:rPr lang="pt-BR" sz="3200" dirty="0">
+                <a:solidFill>
+                  <a:schemeClr val="tx2">
+                    <a:lumMod val="90000"/>
+                    <a:lumOff val="10000"/>
+                  </a:schemeClr>
+                </a:solidFill>
+                <a:latin typeface="Aharoni" panose="02010803020104030203" pitchFamily="2" charset="-79"/>
+                <a:ea typeface="+mj-ea"/>
+                <a:cs typeface="Aharoni" panose="02010803020104030203" pitchFamily="2" charset="-79"/>
+              </a:rPr>
               <a:t>PPL </a:t>
             </a:r>
             <a:r>
-              <a:rPr lang="pt-BR" sz="3200" b="1" dirty="0" smtClean="0"/>
+              <a:rPr lang="pt-BR" sz="3200" dirty="0" smtClean="0">
+                <a:solidFill>
+                  <a:schemeClr val="tx2">
+                    <a:lumMod val="90000"/>
+                    <a:lumOff val="10000"/>
+                  </a:schemeClr>
+                </a:solidFill>
+                <a:latin typeface="Aharoni" panose="02010803020104030203" pitchFamily="2" charset="-79"/>
+                <a:ea typeface="+mj-ea"/>
+                <a:cs typeface="Aharoni" panose="02010803020104030203" pitchFamily="2" charset="-79"/>
+              </a:rPr>
               <a:t>aumentado/ampliado:</a:t>
             </a:r>
-            <a:endParaRPr lang="pt-BR" sz="3200" b="1" dirty="0"/>
-          </a:p>
-          <a:p>
-            <a:endParaRPr lang="pt-BR" sz="3200" dirty="0"/>
+            <a:endParaRPr lang="pt-BR" sz="3200" dirty="0">
+              <a:solidFill>
+                <a:schemeClr val="tx2">
+                  <a:lumMod val="90000"/>
+                  <a:lumOff val="10000"/>
+                </a:schemeClr>
+              </a:solidFill>
+              <a:latin typeface="Aharoni" panose="02010803020104030203" pitchFamily="2" charset="-79"/>
+              <a:ea typeface="+mj-ea"/>
+              <a:cs typeface="Aharoni" panose="02010803020104030203" pitchFamily="2" charset="-79"/>
+            </a:endParaRPr>
+          </a:p>
+          <a:p>
+            <a:endParaRPr lang="pt-BR" sz="3200" dirty="0">
+              <a:solidFill>
+                <a:schemeClr val="tx2">
+                  <a:lumMod val="90000"/>
+                  <a:lumOff val="10000"/>
+                </a:schemeClr>
+              </a:solidFill>
+              <a:latin typeface="Aharoni" panose="02010803020104030203" pitchFamily="2" charset="-79"/>
+              <a:ea typeface="+mj-ea"/>
+              <a:cs typeface="Aharoni" panose="02010803020104030203" pitchFamily="2" charset="-79"/>
+            </a:endParaRPr>
           </a:p>
           <a:p>
             <a:endParaRPr lang="pt-BR" sz="3200" dirty="0"/>
@@ -17470,9 +12702,7 @@
                   <a:buNone/>
                 </a:pPr>
                 <a:r>
-                  <a:rPr lang="pt-BR" i="1" dirty="0">
-                    <a:latin typeface="Cambria Math"/>
-                  </a:rPr>
+                  <a:rPr lang="pt-BR" i="1" dirty="0"/>
                   <a:t>Sujeito a </a:t>
                 </a:r>
               </a:p>
@@ -18002,7 +13232,7 @@
                 <a:avLst/>
               </a:prstGeom>
               <a:blipFill>
-                <a:blip r:embed="rId5"/>
+                <a:blip r:embed="rId4"/>
                 <a:stretch>
                   <a:fillRect/>
                 </a:stretch>
@@ -18023,6 +13253,51 @@
           </p:sp>
         </mc:Fallback>
       </mc:AlternateContent>
+      <p:pic>
+        <p:nvPicPr>
+          <p:cNvPr id="9" name="Imagem 8" descr="Ícone&#10;&#10;O conteúdo gerado por IA pode estar incorreto.">
+            <a:extLst>
+              <a:ext uri="{FF2B5EF4-FFF2-40B4-BE49-F238E27FC236}">
+                <a16:creationId xmlns:a16="http://schemas.microsoft.com/office/drawing/2014/main" xmlns="" id="{373DC2B4-73F8-474C-BC99-9752243003C0}"/>
+              </a:ext>
+            </a:extLst>
+          </p:cNvPr>
+          <p:cNvPicPr>
+            <a:picLocks noChangeAspect="1"/>
+          </p:cNvPicPr>
+          <p:nvPr/>
+        </p:nvPicPr>
+        <p:blipFill>
+          <a:blip r:embed="rId5">
+            <a:extLst>
+              <a:ext uri="{BEBA8EAE-BF5A-486C-A8C5-ECC9F3942E4B}">
+                <a14:imgProps xmlns:a14="http://schemas.microsoft.com/office/drawing/2010/main">
+                  <a14:imgLayer r:embed="rId6">
+                    <a14:imgEffect>
+                      <a14:artisticPhotocopy/>
+                    </a14:imgEffect>
+                  </a14:imgLayer>
+                </a14:imgProps>
+              </a:ext>
+              <a:ext uri="{28A0092B-C50C-407E-A947-70E740481C1C}">
+                <a14:useLocalDpi xmlns:a14="http://schemas.microsoft.com/office/drawing/2010/main" val="0"/>
+              </a:ext>
+            </a:extLst>
+          </a:blip>
+          <a:stretch>
+            <a:fillRect/>
+          </a:stretch>
+        </p:blipFill>
+        <p:spPr>
+          <a:xfrm>
+            <a:off x="9697652" y="4436988"/>
+            <a:ext cx="2430765" cy="2251559"/>
+          </a:xfrm>
+          <a:prstGeom prst="rect">
+            <a:avLst/>
+          </a:prstGeom>
+        </p:spPr>
+      </p:pic>
     </p:spTree>
     <p:extLst>
       <p:ext uri="{BB962C8B-B14F-4D97-AF65-F5344CB8AC3E}">
@@ -18033,6 +13308,13 @@
   <p:clrMapOvr>
     <a:masterClrMapping/>
   </p:clrMapOvr>
+  <p:timing>
+    <p:tnLst>
+      <p:par>
+        <p:cTn id="1" dur="indefinite" restart="never" nodeType="tmRoot"/>
+      </p:par>
+    </p:tnLst>
+  </p:timing>
 </p:sld>
 </file>
 
@@ -18061,36 +13343,43 @@
       </p:grpSpPr>
       <p:pic>
         <p:nvPicPr>
-          <p:cNvPr id="10" name="Imagem 9" descr="Uma imagem contendo Desenho técnico&#10;&#10;O conteúdo gerado por IA pode estar incorreto.">
+          <p:cNvPr id="9" name="Imagem 8" descr="Ícone&#10;&#10;O conteúdo gerado por IA pode estar incorreto.">
             <a:extLst>
               <a:ext uri="{FF2B5EF4-FFF2-40B4-BE49-F238E27FC236}">
-                <a16:creationId xmlns:a16="http://schemas.microsoft.com/office/drawing/2014/main" xmlns="" id="{360AB20D-964B-D1F8-254B-3971F7A08659}"/>
+                <a16:creationId xmlns:a16="http://schemas.microsoft.com/office/drawing/2014/main" xmlns="" id="{B3CDD830-F569-4A74-BA89-B5A481085953}"/>
               </a:ext>
             </a:extLst>
           </p:cNvPr>
           <p:cNvPicPr>
-            <a:picLocks noGrp="1" noRot="1" noChangeAspect="1" noMove="1" noResize="1" noEditPoints="1" noAdjustHandles="1" noChangeArrowheads="1" noChangeShapeType="1" noCrop="1"/>
+            <a:picLocks noChangeAspect="1"/>
           </p:cNvPicPr>
           <p:nvPr/>
         </p:nvPicPr>
         <p:blipFill>
           <a:blip r:embed="rId2">
-            <a:alphaModFix amt="20000"/>
             <a:extLst>
+              <a:ext uri="{BEBA8EAE-BF5A-486C-A8C5-ECC9F3942E4B}">
+                <a14:imgProps xmlns:a14="http://schemas.microsoft.com/office/drawing/2010/main">
+                  <a14:imgLayer r:embed="rId3">
+                    <a14:imgEffect>
+                      <a14:artisticPhotocopy/>
+                    </a14:imgEffect>
+                  </a14:imgLayer>
+                </a14:imgProps>
+              </a:ext>
               <a:ext uri="{28A0092B-C50C-407E-A947-70E740481C1C}">
                 <a14:useLocalDpi xmlns:a14="http://schemas.microsoft.com/office/drawing/2010/main" val="0"/>
               </a:ext>
             </a:extLst>
           </a:blip>
-          <a:srcRect t="26080"/>
           <a:stretch>
             <a:fillRect/>
           </a:stretch>
         </p:blipFill>
         <p:spPr>
           <a:xfrm>
-            <a:off x="0" y="11128"/>
-            <a:ext cx="9262533" cy="6846872"/>
+            <a:off x="9697652" y="4436988"/>
+            <a:ext cx="2430765" cy="2251559"/>
           </a:xfrm>
           <a:prstGeom prst="rect">
             <a:avLst/>
@@ -18112,7 +13401,7 @@
         <p:spPr>
           <a:xfrm>
             <a:off x="1000429" y="847992"/>
-            <a:ext cx="10191141" cy="580993"/>
+            <a:ext cx="10191141" cy="630942"/>
           </a:xfrm>
           <a:prstGeom prst="rect">
             <a:avLst/>
@@ -18124,34 +13413,36 @@
           </a:bodyPr>
           <a:lstStyle/>
           <a:p>
-            <a:pPr algn="ctr">
+            <a:pPr>
               <a:lnSpc>
                 <a:spcPts val="4184"/>
               </a:lnSpc>
             </a:pPr>
             <a:r>
-              <a:rPr lang="pt-BR" sz="5230" b="1" dirty="0">
+              <a:rPr lang="pt-BR" sz="5400" dirty="0">
                 <a:solidFill>
                   <a:schemeClr val="tx2">
-                    <a:lumMod val="75000"/>
+                    <a:lumMod val="90000"/>
+                    <a:lumOff val="10000"/>
                   </a:schemeClr>
                 </a:solidFill>
-                <a:latin typeface="Hagrid Text Bold"/>
-                <a:ea typeface="Hagrid Text Bold"/>
-                <a:cs typeface="Hagrid Text Bold"/>
+                <a:latin typeface="Aharoni" panose="02010803020104030203" pitchFamily="2" charset="-79"/>
+                <a:ea typeface="+mj-ea"/>
+                <a:cs typeface="Aharoni" panose="02010803020104030203" pitchFamily="2" charset="-79"/>
                 <a:sym typeface="Hagrid Text Bold"/>
               </a:rPr>
               <a:t>Exemplo</a:t>
             </a:r>
-            <a:endParaRPr lang="en-US" sz="5230" b="1" spc="-219" dirty="0">
+            <a:endParaRPr lang="en-US" sz="5400" dirty="0">
               <a:solidFill>
                 <a:schemeClr val="tx2">
-                  <a:lumMod val="75000"/>
+                  <a:lumMod val="90000"/>
+                  <a:lumOff val="10000"/>
                 </a:schemeClr>
               </a:solidFill>
-              <a:latin typeface="Hagrid Text Bold"/>
-              <a:ea typeface="Hagrid Text Bold"/>
-              <a:cs typeface="Hagrid Text Bold"/>
+              <a:latin typeface="Aharoni" panose="02010803020104030203" pitchFamily="2" charset="-79"/>
+              <a:ea typeface="+mj-ea"/>
+              <a:cs typeface="Aharoni" panose="02010803020104030203" pitchFamily="2" charset="-79"/>
               <a:sym typeface="Hagrid Text Bold"/>
             </a:endParaRPr>
           </a:p>
@@ -18171,7 +13462,7 @@
         </p:nvSpPr>
         <p:spPr>
           <a:xfrm>
-            <a:off x="754455" y="2366937"/>
+            <a:off x="754455" y="1428985"/>
             <a:ext cx="5341546" cy="1477328"/>
           </a:xfrm>
           <a:prstGeom prst="rect">
@@ -18185,12 +13476,32 @@
           <a:lstStyle/>
           <a:p>
             <a:r>
-              <a:rPr lang="pt-BR" sz="3200" b="1" dirty="0"/>
+              <a:rPr lang="pt-BR" sz="3200" dirty="0">
+                <a:solidFill>
+                  <a:schemeClr val="tx2">
+                    <a:lumMod val="90000"/>
+                    <a:lumOff val="10000"/>
+                  </a:schemeClr>
+                </a:solidFill>
+                <a:latin typeface="Aharoni" panose="02010803020104030203" pitchFamily="2" charset="-79"/>
+                <a:ea typeface="+mj-ea"/>
+                <a:cs typeface="Aharoni" panose="02010803020104030203" pitchFamily="2" charset="-79"/>
+              </a:rPr>
               <a:t>PPL aumentado:</a:t>
             </a:r>
           </a:p>
           <a:p>
-            <a:endParaRPr lang="pt-BR" sz="3200" dirty="0"/>
+            <a:endParaRPr lang="pt-BR" sz="3200" dirty="0">
+              <a:solidFill>
+                <a:schemeClr val="tx2">
+                  <a:lumMod val="90000"/>
+                  <a:lumOff val="10000"/>
+                </a:schemeClr>
+              </a:solidFill>
+              <a:latin typeface="Aharoni" panose="02010803020104030203" pitchFamily="2" charset="-79"/>
+              <a:ea typeface="+mj-ea"/>
+              <a:cs typeface="Aharoni" panose="02010803020104030203" pitchFamily="2" charset="-79"/>
+            </a:endParaRPr>
           </a:p>
           <a:p>
             <a:endParaRPr lang="pt-BR" sz="3200" dirty="0"/>
@@ -18212,7 +13523,7 @@
           <p:nvPr/>
         </p:nvPicPr>
         <p:blipFill>
-          <a:blip r:embed="rId3" cstate="print">
+          <a:blip r:embed="rId4" cstate="print">
             <a:extLst>
               <a:ext uri="{28A0092B-C50C-407E-A947-70E740481C1C}">
                 <a14:useLocalDpi xmlns:a14="http://schemas.microsoft.com/office/drawing/2010/main" val="0"/>
@@ -18247,29 +13558,50 @@
         </p:nvSpPr>
         <p:spPr>
           <a:xfrm>
-            <a:off x="6095999" y="2366937"/>
-            <a:ext cx="5341546" cy="1477328"/>
+            <a:off x="6096000" y="1457936"/>
+            <a:ext cx="5341546" cy="1892826"/>
           </a:xfrm>
           <a:prstGeom prst="rect">
             <a:avLst/>
           </a:prstGeom>
         </p:spPr>
         <p:txBody>
-          <a:bodyPr wrap="square" lIns="0" tIns="0" rIns="0" bIns="0" rtlCol="0" anchor="t">
+          <a:bodyPr lIns="0" tIns="0" rIns="0" bIns="0" rtlCol="0" anchor="t">
             <a:spAutoFit/>
           </a:bodyPr>
-          <a:lstStyle/>
-          <a:p>
+          <a:lstStyle>
+            <a:defPPr>
+              <a:defRPr lang="pt-BR"/>
+            </a:defPPr>
+            <a:lvl1pPr algn="ctr">
+              <a:lnSpc>
+                <a:spcPts val="4184"/>
+              </a:lnSpc>
+              <a:defRPr sz="5900">
+                <a:solidFill>
+                  <a:schemeClr val="tx2">
+                    <a:lumMod val="90000"/>
+                    <a:lumOff val="10000"/>
+                  </a:schemeClr>
+                </a:solidFill>
+                <a:latin typeface="Aharoni" panose="02010803020104030203" pitchFamily="2" charset="-79"/>
+                <a:ea typeface="+mj-ea"/>
+                <a:cs typeface="Aharoni" panose="02010803020104030203" pitchFamily="2" charset="-79"/>
+              </a:defRPr>
+            </a:lvl1pPr>
+          </a:lstStyle>
+          <a:p>
+            <a:pPr algn="l"/>
             <a:r>
-              <a:rPr lang="pt-BR" sz="3200" b="1" dirty="0"/>
+              <a:rPr lang="pt-BR" sz="3200" dirty="0"/>
               <a:t>PPL artificial:</a:t>
             </a:r>
           </a:p>
           <a:p>
-            <a:endParaRPr lang="pt-BR" sz="3200" dirty="0"/>
-          </a:p>
-          <a:p>
-            <a:endParaRPr lang="pt-BR" sz="3200" dirty="0"/>
+            <a:endParaRPr lang="pt-BR" dirty="0"/>
+          </a:p>
+          <a:p>
+            <a:endParaRPr lang="pt-BR" dirty="0"/>
           </a:p>
         </p:txBody>
       </p:sp>
@@ -18291,7 +13623,7 @@
             </p:nvSpPr>
             <p:spPr>
               <a:xfrm>
-                <a:off x="754455" y="3105601"/>
+                <a:off x="754455" y="2167649"/>
                 <a:ext cx="4041775" cy="2983799"/>
               </a:xfrm>
               <a:prstGeom prst="rect">
@@ -18582,9 +13914,7 @@
                   <a:buNone/>
                 </a:pPr>
                 <a:r>
-                  <a:rPr lang="pt-BR" i="1" dirty="0">
-                    <a:latin typeface="Cambria Math"/>
-                  </a:rPr>
+                  <a:rPr lang="pt-BR" i="1" dirty="0"/>
                   <a:t>Sujeito a </a:t>
                 </a:r>
               </a:p>
@@ -19107,14 +14437,14 @@
             </p:nvSpPr>
             <p:spPr>
               <a:xfrm>
-                <a:off x="754455" y="3105601"/>
+                <a:off x="754455" y="2167649"/>
                 <a:ext cx="4041775" cy="2983799"/>
               </a:xfrm>
               <a:prstGeom prst="rect">
                 <a:avLst/>
               </a:prstGeom>
               <a:blipFill>
-                <a:blip r:embed="rId4"/>
+                <a:blip r:embed="rId5"/>
                 <a:stretch>
                   <a:fillRect/>
                 </a:stretch>
@@ -19153,7 +14483,7 @@
             </p:nvSpPr>
             <p:spPr>
               <a:xfrm>
-                <a:off x="6095999" y="3330013"/>
+                <a:off x="6096000" y="2421012"/>
                 <a:ext cx="5203758" cy="2904408"/>
               </a:xfrm>
               <a:prstGeom prst="rect">
@@ -19544,9 +14874,7 @@
                   <a:buNone/>
                 </a:pPr>
                 <a:r>
-                  <a:rPr lang="pt-BR" i="1" dirty="0">
-                    <a:latin typeface="Cambria Math"/>
-                  </a:rPr>
+                  <a:rPr lang="pt-BR" i="1" dirty="0"/>
                   <a:t>Sujeito a </a:t>
                 </a:r>
               </a:p>
@@ -20241,14 +15569,14 @@
             </p:nvSpPr>
             <p:spPr>
               <a:xfrm>
-                <a:off x="6095999" y="3330013"/>
+                <a:off x="6096000" y="2421012"/>
                 <a:ext cx="5203758" cy="2904408"/>
               </a:xfrm>
               <a:prstGeom prst="rect">
                 <a:avLst/>
               </a:prstGeom>
               <a:blipFill>
-                <a:blip r:embed="rId5"/>
+                <a:blip r:embed="rId6"/>
                 <a:stretch>
                   <a:fillRect/>
                 </a:stretch>
@@ -20279,6 +15607,13 @@
   <p:clrMapOvr>
     <a:masterClrMapping/>
   </p:clrMapOvr>
+  <p:timing>
+    <p:tnLst>
+      <p:par>
+        <p:cTn id="1" dur="indefinite" restart="never" nodeType="tmRoot"/>
+      </p:par>
+    </p:tnLst>
+  </p:timing>
 </p:sld>
 </file>
 
